--- a/downloads/presentations/modules/lesson-12-communicating-model-results-and-uncertainty.pptx
+++ b/downloads/presentations/modules/lesson-12-communicating-model-results-and-uncertainty.pptx
@@ -24,9 +24,11 @@
     <p:sldId id="272" r:id="rId18"/>
     <p:sldId id="273" r:id="rId19"/>
     <p:sldId id="274" r:id="rId20"/>
+    <p:sldId id="275" r:id="rId21"/>
+    <p:sldId id="276" r:id="rId22"/>
   </p:sldIdLst>
   <p:notesMasterIdLst>
-    <p:notesMasterId r:id="rId21"/>
+    <p:notesMasterId r:id="rId23"/>
   </p:notesMasterIdLst>
   <p:sldSz cx="12192000" cy="6858000"/>
   <p:notesSz cx="6858000" cy="12192000"/>
@@ -609,8 +611,10 @@
           <a:p>
             <a:r>
               <a:rPr lang="en-US" dirty="0"/>
-              <a:t>Application to AI-Supported Workflows
-Generative AI can help draft summaries of model findings, but the draft must be checked by analysts who understand the model. Predictive analytics, outbreak forecasts, risk stratification tools, and geospatial models all require communication practices that preserve uncertainty. RAG systems used for briefings should cite source reports and validation evidence.</a:t>
+              <a:t>Technical and Operational Deep Dive
+Model communication begins with the decision context. The same model output may be communicated differently to a technical team, health officer, program manager, community partner, or public audience. Technical users may need details about metrics and data limitations, while executives may need decision implications, confidence, and recommended actions.
+Uncertainty should be explained visually and verbally. Trend lines, ranges, maps, and risk categories can help, but they can also imply precision that the model does not have. Labels should avoid unsupported certainty. Words such as likely, possible, estimated, preliminary, and subject to change can be helpful when used consistently.
+Subgroup findings require special care. If model performance differs by age, race, ethnicity, language, geography, disability, housing status, or data source, communications should avoid presenting aggregate performance as universal. Decision-makers need to know whether a model is less reliable for some populations.</a:t>
             </a:r>
             <a:endParaRPr lang="en-US" dirty="0"/>
           </a:p>
@@ -698,10 +702,9 @@
           <a:p>
             <a:r>
               <a:rPr lang="en-US" dirty="0"/>
-              <a:t>Reflection Questions
-Who needs to understand this model result?
-What decision will the result support?
-What uncertainty or limitation could change the decision?</a:t>
+              <a:t>Risks, Failure Modes, and Guardrails
+A major failure mode is false precision. A model may produce a number such as 82.4 percent risk, but the data and validation may not support that level of exactness. A guardrail is to use appropriate rounding, risk categories, and uncertainty statements.
+Another failure mode is hiding limitations to make results look more actionable. This can erode trust if the model later performs poorly. A guardrail is to include a standard limitations section in model briefs and require review before results are shared outside the technical team.</a:t>
             </a:r>
             <a:endParaRPr lang="en-US" dirty="0"/>
           </a:p>
@@ -789,9 +792,8 @@
           <a:p>
             <a:r>
               <a:rPr lang="en-US" dirty="0"/>
-              <a:t>Reflection Questions
-Are there subgroup performance concerns?
-What wording would prevent overclaiming?</a:t>
+              <a:t>Application to AI-Supported Workflows
+Generative AI can help draft summaries of model findings, but the draft must be checked by analysts who understand the model. Predictive analytics, outbreak forecasts, risk stratification tools, and geospatial models all require communication practices that preserve uncertainty. RAG systems used for briefings should cite source reports and validation evidence.</a:t>
             </a:r>
             <a:endParaRPr lang="en-US" dirty="0"/>
           </a:p>
@@ -879,8 +881,10 @@
           <a:p>
             <a:r>
               <a:rPr lang="en-US" dirty="0"/>
-              <a:t>Practical Exercise
-Create a one-page model communication brief. Include the decision question, model result, uncertainty, validation status, limitations, subgroup considerations, recommended use, prohibited use, and next review date.</a:t>
+              <a:t>Reflection Questions
+Who needs to understand this model result?
+What decision will the result support?
+What uncertainty or limitation could change the decision?</a:t>
             </a:r>
             <a:endParaRPr lang="en-US" dirty="0"/>
           </a:p>
@@ -968,10 +972,9 @@
           <a:p>
             <a:r>
               <a:rPr lang="en-US" dirty="0"/>
-              <a:t>Expected Artifact or Evidence
-Model communication brief
-Plain-language uncertainty statement
-Subgroup caveat if relevant</a:t>
+              <a:t>Reflection Questions
+Are there subgroup performance concerns?
+What wording would prevent overclaiming?</a:t>
             </a:r>
             <a:endParaRPr lang="en-US" dirty="0"/>
           </a:p>
@@ -1059,8 +1062,8 @@
           <a:p>
             <a:r>
               <a:rPr lang="en-US" dirty="0"/>
-              <a:t>Expected Artifact or Evidence
-Review sign-off note</a:t>
+              <a:t>Practical Exercise
+Create a one-page model communication brief. Include the decision question, model result, uncertainty, validation status, limitations, subgroup considerations, recommended use, prohibited use, and next review date.</a:t>
             </a:r>
             <a:endParaRPr lang="en-US" dirty="0"/>
           </a:p>
@@ -1148,11 +1151,10 @@
           <a:p>
             <a:r>
               <a:rPr lang="en-US" dirty="0"/>
-              <a:t>Expected Assignment
+              <a:t>Expected Artifact or Evidence
 Model communication brief
 Plain-language uncertainty statement
-Subgroup caveat if relevant
-Review sign-off note</a:t>
+Subgroup caveat if relevant</a:t>
             </a:r>
             <a:endParaRPr lang="en-US" dirty="0"/>
           </a:p>
@@ -1240,12 +1242,8 @@
           <a:p>
             <a:r>
               <a:rPr lang="en-US" dirty="0"/>
-              <a:t>Knowledge Check
-1. What is the best reason to communicate uncertainty with model results?
-2. What is the best reason to assign an accountability owner?
-3. When should an AI-supported workflow be escalated for review?
-4. Which practice best supports public accountability?
-5. What should happen when data sources, policy, vendor configuration, or workflow use changes?</a:t>
+              <a:t>Expected Artifact or Evidence
+Review sign-off note</a:t>
             </a:r>
             <a:endParaRPr lang="en-US" dirty="0"/>
           </a:p>
@@ -1333,12 +1331,11 @@
           <a:p>
             <a:r>
               <a:rPr lang="en-US" dirty="0"/>
-              <a:t>References and Resources
-CDC Public Health Data Strategy and Data Modernization resources: https://www.cdc.gov/public-health-data-strategy/php/about/index.html
-NIST Artificial Intelligence Risk Management Framework and NIST Generative AI Profile: https://www.nist.gov/publications/artificial-intelligence-risk-management-framework-generative-artificial-intelligence
-WHO Ethics and Governance of Artificial Intelligence for Health guidance: https://www.who.int/publications/i/item/9789240029200
-OWASP Top 10 for Large Language Model Applications: https://owasp.org/www-project-top-10-for-large-language-model-applications/
-ONC health IT, interoperability, and information blocking resources: https://www.healthit.gov/</a:t>
+              <a:t>Expected Assignment
+Model communication brief
+Plain-language uncertainty statement
+Subgroup caveat if relevant
+Review sign-off note</a:t>
             </a:r>
             <a:endParaRPr lang="en-US" dirty="0"/>
           </a:p>
@@ -1426,8 +1423,12 @@
           <a:p>
             <a:r>
               <a:rPr lang="en-US" dirty="0"/>
-              <a:t>References and Resources
-Agency policies for privacy, public records, cybersecurity, procurement, civil rights, accessibility, language access, and emergency communications</a:t>
+              <a:t>Knowledge Check
+1. What is the best reason to communicate uncertainty with model results?
+2. What is the best reason to assign an accountability owner?
+3. When should an AI-supported workflow be escalated for review?
+4. Which practice best supports public accountability?
+5. What should happen when data sources, policy, vendor configuration, or workflow use changes?</a:t>
             </a:r>
             <a:endParaRPr lang="en-US" dirty="0"/>
           </a:p>
@@ -1561,6 +1562,188 @@
 </p:notes>
 </file>
 
+<file path=ppt/notesSlides/notesSlide20.xml><?xml version="1.0" encoding="utf-8"?>
+<p:notes xmlns:a="http://schemas.openxmlformats.org/drawingml/2006/main" xmlns:r="http://schemas.openxmlformats.org/officeDocument/2006/relationships" xmlns:p="http://schemas.openxmlformats.org/presentationml/2006/main">
+  <p:cSld>
+    <p:spTree>
+      <p:nvGrpSpPr>
+        <p:cNvPr id="1" name=""/>
+        <p:cNvGrpSpPr/>
+        <p:nvPr/>
+      </p:nvGrpSpPr>
+      <p:grpSpPr>
+        <a:xfrm>
+          <a:off x="0" y="0"/>
+          <a:ext cx="0" cy="0"/>
+          <a:chOff x="0" y="0"/>
+          <a:chExt cx="0" cy="0"/>
+        </a:xfrm>
+      </p:grpSpPr>
+      <p:sp>
+        <p:nvSpPr>
+          <p:cNvPr id="2" name="Slide Image Placeholder 1"/>
+          <p:cNvSpPr>
+            <a:spLocks noGrp="1" noRot="1" noChangeAspect="1"/>
+          </p:cNvSpPr>
+          <p:nvPr>
+            <p:ph type="sldImg"/>
+          </p:nvPr>
+        </p:nvSpPr>
+        <p:spPr/>
+      </p:sp>
+      <p:sp>
+        <p:nvSpPr>
+          <p:cNvPr id="3" name="Notes Placeholder 2"/>
+          <p:cNvSpPr>
+            <a:spLocks noGrp="1"/>
+          </p:cNvSpPr>
+          <p:nvPr>
+            <p:ph type="body" idx="1"/>
+          </p:nvPr>
+        </p:nvSpPr>
+        <p:spPr/>
+        <p:txBody>
+          <a:bodyPr/>
+          <a:lstStyle/>
+          <a:p>
+            <a:r>
+              <a:rPr lang="en-US" dirty="0"/>
+              <a:t>References and Resources
+CDC Public Health Data Strategy and Data Modernization resources: https://www.cdc.gov/public-health-data-strategy/php/about/index.html
+NIST Artificial Intelligence Risk Management Framework and NIST Generative AI Profile: https://www.nist.gov/publications/artificial-intelligence-risk-management-framework-generative-artificial-intelligence
+WHO Ethics and Governance of Artificial Intelligence for Health guidance: https://www.who.int/publications/i/item/9789240029200
+OWASP Top 10 for Large Language Model Applications: https://owasp.org/www-project-top-10-for-large-language-model-applications/
+ONC health IT, interoperability, and information blocking resources: https://www.healthit.gov/</a:t>
+            </a:r>
+            <a:endParaRPr lang="en-US" dirty="0"/>
+          </a:p>
+        </p:txBody>
+      </p:sp>
+      <p:sp>
+        <p:nvSpPr>
+          <p:cNvPr id="4" name="Slide Number Placeholder 3"/>
+          <p:cNvSpPr>
+            <a:spLocks noGrp="1"/>
+          </p:cNvSpPr>
+          <p:nvPr>
+            <p:ph type="sldNum" sz="quarter" idx="10"/>
+          </p:nvPr>
+        </p:nvSpPr>
+        <p:spPr/>
+        <p:txBody>
+          <a:bodyPr/>
+          <a:lstStyle/>
+          <a:p>
+            <a:fld id="{F7021451-1387-4CA6-816F-3879F97B5CBC}" type="slidenum">
+              <a:rPr lang="en-US"/>
+              <a:t>20</a:t>
+            </a:fld>
+            <a:endParaRPr lang="en-US"/>
+          </a:p>
+        </p:txBody>
+      </p:sp>
+    </p:spTree>
+    <p:extLst>
+      <p:ext uri="{BB962C8B-B14F-4D97-AF65-F5344CB8AC3E}">
+        <p14:creationId xmlns:p14="http://schemas.microsoft.com/office/powerpoint/2010/main" val="1024086991"/>
+      </p:ext>
+    </p:extLst>
+  </p:cSld>
+  <p:clrMapOvr>
+    <a:masterClrMapping/>
+  </p:clrMapOvr>
+</p:notes>
+</file>
+
+<file path=ppt/notesSlides/notesSlide21.xml><?xml version="1.0" encoding="utf-8"?>
+<p:notes xmlns:a="http://schemas.openxmlformats.org/drawingml/2006/main" xmlns:r="http://schemas.openxmlformats.org/officeDocument/2006/relationships" xmlns:p="http://schemas.openxmlformats.org/presentationml/2006/main">
+  <p:cSld>
+    <p:spTree>
+      <p:nvGrpSpPr>
+        <p:cNvPr id="1" name=""/>
+        <p:cNvGrpSpPr/>
+        <p:nvPr/>
+      </p:nvGrpSpPr>
+      <p:grpSpPr>
+        <a:xfrm>
+          <a:off x="0" y="0"/>
+          <a:ext cx="0" cy="0"/>
+          <a:chOff x="0" y="0"/>
+          <a:chExt cx="0" cy="0"/>
+        </a:xfrm>
+      </p:grpSpPr>
+      <p:sp>
+        <p:nvSpPr>
+          <p:cNvPr id="2" name="Slide Image Placeholder 1"/>
+          <p:cNvSpPr>
+            <a:spLocks noGrp="1" noRot="1" noChangeAspect="1"/>
+          </p:cNvSpPr>
+          <p:nvPr>
+            <p:ph type="sldImg"/>
+          </p:nvPr>
+        </p:nvSpPr>
+        <p:spPr/>
+      </p:sp>
+      <p:sp>
+        <p:nvSpPr>
+          <p:cNvPr id="3" name="Notes Placeholder 2"/>
+          <p:cNvSpPr>
+            <a:spLocks noGrp="1"/>
+          </p:cNvSpPr>
+          <p:nvPr>
+            <p:ph type="body" idx="1"/>
+          </p:nvPr>
+        </p:nvSpPr>
+        <p:spPr/>
+        <p:txBody>
+          <a:bodyPr/>
+          <a:lstStyle/>
+          <a:p>
+            <a:r>
+              <a:rPr lang="en-US" dirty="0"/>
+              <a:t>References and Resources
+Agency policies for privacy, public records, cybersecurity, procurement, civil rights, accessibility, language access, and emergency communications</a:t>
+            </a:r>
+            <a:endParaRPr lang="en-US" dirty="0"/>
+          </a:p>
+        </p:txBody>
+      </p:sp>
+      <p:sp>
+        <p:nvSpPr>
+          <p:cNvPr id="4" name="Slide Number Placeholder 3"/>
+          <p:cNvSpPr>
+            <a:spLocks noGrp="1"/>
+          </p:cNvSpPr>
+          <p:nvPr>
+            <p:ph type="sldNum" sz="quarter" idx="10"/>
+          </p:nvPr>
+        </p:nvSpPr>
+        <p:spPr/>
+        <p:txBody>
+          <a:bodyPr/>
+          <a:lstStyle/>
+          <a:p>
+            <a:fld id="{F7021451-1387-4CA6-816F-3879F97B5CBC}" type="slidenum">
+              <a:rPr lang="en-US"/>
+              <a:t>21</a:t>
+            </a:fld>
+            <a:endParaRPr lang="en-US"/>
+          </a:p>
+        </p:txBody>
+      </p:sp>
+    </p:spTree>
+    <p:extLst>
+      <p:ext uri="{BB962C8B-B14F-4D97-AF65-F5344CB8AC3E}">
+        <p14:creationId xmlns:p14="http://schemas.microsoft.com/office/powerpoint/2010/main" val="1024086991"/>
+      </p:ext>
+    </p:extLst>
+  </p:cSld>
+  <p:clrMapOvr>
+    <a:masterClrMapping/>
+  </p:clrMapOvr>
+</p:notes>
+</file>
+
 <file path=ppt/notesSlides/notesSlide3.xml><?xml version="1.0" encoding="utf-8"?>
 <p:notes xmlns:a="http://schemas.openxmlformats.org/drawingml/2006/main" xmlns:r="http://schemas.openxmlformats.org/officeDocument/2006/relationships" xmlns:p="http://schemas.openxmlformats.org/presentationml/2006/main">
   <p:cSld>
@@ -1607,12 +1790,11 @@
           <a:p>
             <a:r>
               <a:rPr lang="en-US" dirty="0"/>
-              <a:t>Learning Objectives
-Explain model results in plain language for nontechnical audiences.
-Distinguish uncertainty, variability, error, bias, and data limitations.
-Identify when model results should include confidence intervals, prediction intervals, caveats, or subgroup findings.
-Avoid overclaiming, causal overreach, and false precision in AI communications.
-Create a model communication brief for a public health decision-maker.</a:t>
+              <a:t>Related Playbook Plays
+Play 11: Build and Deploy AI Solutions - This lesson informs Play 11 by helping learners connect the lesson topic to build and deploy ai solutions work in the AI Playbook.
+Play 1: Vision &amp; Guardrails - This lesson informs Play 1 by helping learners connect the lesson topic to vision &amp; guardrails work in the AI Playbook sequence.
+Play 7: Prioritize Use Cases - This lesson informs Play 7 by helping learners connect the lesson topic to prioritize use cases work in the AI Playbook sequence.
+Play 2: Readiness Assessment - This lesson informs Play 2 by helping learners connect the lesson topic to readiness assessment work in the AI Playbook sequence.</a:t>
             </a:r>
             <a:endParaRPr lang="en-US" dirty="0"/>
           </a:p>
@@ -1700,9 +1882,13 @@
           <a:p>
             <a:r>
               <a:rPr lang="en-US" dirty="0"/>
-              <a:t>Module Overview
-Public health staff often need to communicate AI or model results to leaders, partners, the public, or operational teams. This module teaches learners how to explain model outputs, uncertainty, limitations, and appropriate use without overstating precision or creating false confidence.
-The module focuses on practical communication. Learners translate metrics, confidence, caveats, and validation findings into language that supports responsible decisions. The goal is to ensure that model results inform judgment rather than replace it.</a:t>
+              <a:t>Related Toolkit Resources
+Tool 3: Equity Impact Assessment Checklist (Checklist) - Use this tool to complete or strengthen the practical exercise for the module using fictional, de-identified, or generalized.
+Tool 4: AI Policy Landscape Scan (Worksheet) - Use AI Policy Landscape Scan to translate this lesson into a documented public health AI planning, governance, implementation,.
+Tool 5: AI Environmental and Resource Impact Review (Checklist) - Use AI Environmental and Resource Impact Review to translate this lesson into a documented public health AI planning,.
+Tool 6: Human-Centered AI Decision Rule Checklist (Checklist) - Use Human-Centered AI Decision Rule Checklist to translate this lesson into a documented public health AI planning, governance,.
+Tool 8: AI Project Charter (Planning) - Use AI Project Charter to translate this lesson into a documented public health AI planning, governance, implementation, or.
+Tool 9: Data Quality Assessment Checklist (Checklist) - Use this tool to complete or strengthen the practical exercise for the module using fictional, de-identified, or generalized.</a:t>
             </a:r>
             <a:endParaRPr lang="en-US" dirty="0"/>
           </a:p>
@@ -1790,12 +1976,12 @@
           <a:p>
             <a:r>
               <a:rPr lang="en-US" dirty="0"/>
-              <a:t>Definitions
-Uncertainty: The degree to which an estimate, prediction, or conclusion may be imprecise or incomplete.
-Prediction interval: A range that estimates where a future observation may fall.
-Confidence interval: A range that expresses uncertainty around an estimated parameter.
-Calibration: How closely predicted probabilities match observed outcomes.
-Caveat: A clear statement of limitation, condition, or caution.</a:t>
+              <a:t>Learning Objectives
+Explain model results in plain language for nontechnical audiences.
+Distinguish uncertainty, variability, error, bias, and data limitations.
+Identify when model results should include confidence intervals, prediction intervals, caveats, or subgroup findings.
+Avoid overclaiming, causal overreach, and false precision in AI communications.
+Create a model communication brief for a public health decision-maker.</a:t>
             </a:r>
             <a:endParaRPr lang="en-US" dirty="0"/>
           </a:p>
@@ -1883,9 +2069,9 @@
           <a:p>
             <a:r>
               <a:rPr lang="en-US" dirty="0"/>
-              <a:t>Why This Topic Matters for Public Health AI
-Model outputs can influence urgent decisions. A forecast may affect staffing, a risk score may affect outreach, and a hotspot map may affect deployment of field teams. If uncertainty is not explained clearly, decision-makers may treat estimates as facts or ignore important limitations.
-Public health communication must balance clarity and caution. Too much technical detail can obscure the message, but too little detail can hide uncertainty. A strong communication product explains what the model suggests, what it does not show, how reliable it is, and what human judgment or additional evidence is needed.</a:t>
+              <a:t>Module Overview
+Public health staff often need to communicate AI or model results to leaders, partners, the public, or operational teams. This module teaches learners how to explain model outputs, uncertainty, limitations, and appropriate use without overstating precision or creating false confidence.
+The module focuses on practical communication. Learners translate metrics, confidence, caveats, and validation findings into language that supports responsible decisions. The goal is to ensure that model results inform judgment rather than replace it.</a:t>
             </a:r>
             <a:endParaRPr lang="en-US" dirty="0"/>
           </a:p>
@@ -1973,9 +2159,12 @@
           <a:p>
             <a:r>
               <a:rPr lang="en-US" dirty="0"/>
-              <a:t>Public Health Example
-An epidemiology team uses a time-series model to forecast emergency department visits for respiratory illness. The forecast shows a possible increase over the next two weeks, but the prediction interval is wide because reporting patterns changed after a holiday. A strong communication brief would state that visits may rise, explain the uncertainty, identify possible reasons for reduced confidence, and recommend preparedness actions that are proportional to the evidence.
-The brief should not say that the model proves an outbreak is occurring. It should present the forecast as one input into surveillance judgment, alongside laboratory data, provider reports, syndromic trends, and field intelligence.</a:t>
+              <a:t>Definitions
+Uncertainty: The degree to which an estimate, prediction, or conclusion may be imprecise or incomplete.
+Prediction interval: A range that estimates where a future observation may fall.
+Confidence interval: A range that expresses uncertainty around an estimated parameter.
+Calibration: How closely predicted probabilities match observed outcomes.
+Caveat: A clear statement of limitation, condition, or caution.</a:t>
             </a:r>
             <a:endParaRPr lang="en-US" dirty="0"/>
           </a:p>
@@ -2063,10 +2252,9 @@
           <a:p>
             <a:r>
               <a:rPr lang="en-US" dirty="0"/>
-              <a:t>Technical and Operational Deep Dive
-Model communication begins with the decision context. The same model output may be communicated differently to a technical team, health officer, program manager, community partner, or public audience. Technical users may need details about metrics and data limitations, while executives may need decision implications, confidence, and recommended actions.
-Uncertainty should be explained visually and verbally. Trend lines, ranges, maps, and risk categories can help, but they can also imply precision that the model does not have. Labels should avoid unsupported certainty. Words such as likely, possible, estimated, preliminary, and subject to change can be helpful when used consistently.
-Subgroup findings require special care. If model performance differs by age, race, ethnicity, language, geography, disability, housing status, or data source, communications should avoid presenting aggregate performance as universal. Decision-makers need to know whether a model is less reliable for some populations.</a:t>
+              <a:t>Why This Topic Matters for Public Health AI
+Model outputs can influence urgent decisions. A forecast may affect staffing, a risk score may affect outreach, and a hotspot map may affect deployment of field teams. If uncertainty is not explained clearly, decision-makers may treat estimates as facts or ignore important limitations.
+Public health communication must balance clarity and caution. Too much technical detail can obscure the message, but too little detail can hide uncertainty. A strong communication product explains what the model suggests, what it does not show, how reliable it is, and what human judgment or additional evidence is needed.</a:t>
             </a:r>
             <a:endParaRPr lang="en-US" dirty="0"/>
           </a:p>
@@ -2154,9 +2342,9 @@
           <a:p>
             <a:r>
               <a:rPr lang="en-US" dirty="0"/>
-              <a:t>Risks, Failure Modes, and Guardrails
-A major failure mode is false precision. A model may produce a number such as 82.4 percent risk, but the data and validation may not support that level of exactness. A guardrail is to use appropriate rounding, risk categories, and uncertainty statements.
-Another failure mode is hiding limitations to make results look more actionable. This can erode trust if the model later performs poorly. A guardrail is to include a standard limitations section in model briefs and require review before results are shared outside the technical team.</a:t>
+              <a:t>Public Health Example
+An epidemiology team uses a time-series model to forecast emergency department visits for respiratory illness. The forecast shows a possible increase over the next two weeks, but the prediction interval is wide because reporting patterns changed after a holiday. A strong communication brief would state that visits may rise, explain the uncertainty, identify possible reasons for reduced confidence, and recommend preparedness actions that are proportional to the evidence.
+The brief should not say that the model proves an outbreak is occurring. It should present the forecast as one input into surveillance judgment, alongside laboratory data, provider reports, syndromic trends, and field intelligence.</a:t>
             </a:r>
             <a:endParaRPr lang="en-US" dirty="0"/>
           </a:p>
@@ -2779,7 +2967,32 @@
       </p:sp>
       <p:sp>
         <p:nvSpPr>
-          <p:cNvPr id="3" name="Text 1"/>
+          <p:cNvPr id="3" name="Shape 1"/>
+          <p:cNvSpPr/>
+          <p:nvPr/>
+        </p:nvSpPr>
+        <p:spPr>
+          <a:xfrm>
+            <a:off x="0" y="164592"/>
+            <a:ext cx="146304" cy="6693408"/>
+          </a:xfrm>
+          <a:prstGeom prst="rect">
+            <a:avLst/>
+          </a:prstGeom>
+          <a:solidFill>
+            <a:srgbClr val="2F8A28"/>
+          </a:solidFill>
+          <a:ln w="12700">
+            <a:solidFill>
+              <a:srgbClr val="2F8A28"/>
+            </a:solidFill>
+            <a:prstDash val="solid"/>
+          </a:ln>
+        </p:spPr>
+      </p:sp>
+      <p:sp>
+        <p:nvSpPr>
+          <p:cNvPr id="4" name="Text 2"/>
           <p:cNvSpPr/>
           <p:nvPr/>
         </p:nvSpPr>
@@ -2818,7 +3031,7 @@
       </p:sp>
       <p:sp>
         <p:nvSpPr>
-          <p:cNvPr id="4" name="Text 2"/>
+          <p:cNvPr id="5" name="Text 3"/>
           <p:cNvSpPr/>
           <p:nvPr/>
         </p:nvSpPr>
@@ -2857,7 +3070,7 @@
       </p:sp>
       <p:sp>
         <p:nvSpPr>
-          <p:cNvPr id="5" name="Text 3"/>
+          <p:cNvPr id="6" name="Text 4"/>
           <p:cNvSpPr/>
           <p:nvPr/>
         </p:nvSpPr>
@@ -2896,13 +3109,77 @@
       </p:sp>
       <p:sp>
         <p:nvSpPr>
-          <p:cNvPr id="6" name="Text 4"/>
+          <p:cNvPr id="7" name="Shape 5"/>
           <p:cNvSpPr/>
           <p:nvPr/>
         </p:nvSpPr>
         <p:spPr>
           <a:xfrm>
             <a:off x="640080" y="658368"/>
+            <a:ext cx="420624" cy="420624"/>
+          </a:xfrm>
+          <a:prstGeom prst="ellipse">
+            <a:avLst/>
+          </a:prstGeom>
+          <a:solidFill>
+            <a:srgbClr val="0068B7"/>
+          </a:solidFill>
+          <a:ln w="12700">
+            <a:solidFill>
+              <a:srgbClr val="0068B7"/>
+            </a:solidFill>
+            <a:prstDash val="solid"/>
+          </a:ln>
+        </p:spPr>
+      </p:sp>
+      <p:sp>
+        <p:nvSpPr>
+          <p:cNvPr id="8" name="Text 6"/>
+          <p:cNvSpPr/>
+          <p:nvPr/>
+        </p:nvSpPr>
+        <p:spPr>
+          <a:xfrm>
+            <a:off x="640080" y="731520"/>
+            <a:ext cx="420624" cy="164592"/>
+          </a:xfrm>
+          <a:prstGeom prst="rect">
+            <a:avLst/>
+          </a:prstGeom>
+          <a:noFill/>
+          <a:ln/>
+        </p:spPr>
+        <p:txBody>
+          <a:bodyPr wrap="square" lIns="0" tIns="0" rIns="0" bIns="0" rtlCol="0" anchor="ctr"/>
+          <a:lstStyle/>
+          <a:p>
+            <a:pPr algn="ctr" indent="0" marL="0">
+              <a:buNone/>
+            </a:pPr>
+            <a:r>
+              <a:rPr lang="en-US" sz="1100" b="1" dirty="0">
+                <a:solidFill>
+                  <a:srgbClr val="FFFFFF"/>
+                </a:solidFill>
+                <a:latin typeface="Aptos" pitchFamily="34" charset="0"/>
+                <a:ea typeface="Aptos" pitchFamily="34" charset="-122"/>
+                <a:cs typeface="Aptos" pitchFamily="34" charset="-120"/>
+              </a:rPr>
+              <a:t>6</a:t>
+            </a:r>
+            <a:endParaRPr lang="en-US" sz="1100" dirty="0"/>
+          </a:p>
+        </p:txBody>
+      </p:sp>
+      <p:sp>
+        <p:nvSpPr>
+          <p:cNvPr id="9" name="Text 7"/>
+          <p:cNvSpPr/>
+          <p:nvPr/>
+        </p:nvSpPr>
+        <p:spPr>
+          <a:xfrm>
+            <a:off x="640080" y="621792"/>
             <a:ext cx="10881360" cy="566928"/>
           </a:xfrm>
           <a:prstGeom prst="rect">
@@ -2929,7 +3206,7 @@
                 <a:ea typeface="Aptos Display" pitchFamily="34" charset="-122"/>
                 <a:cs typeface="Aptos Display" pitchFamily="34" charset="-120"/>
               </a:rPr>
-              <a:t>Application to AI-Supported Workflows</a:t>
+              <a:t>Technical and Operational Deep Dive</a:t>
             </a:r>
             <a:endParaRPr lang="en-US" sz="2700" dirty="0"/>
           </a:p>
@@ -2937,32 +3214,178 @@
       </p:sp>
       <p:sp>
         <p:nvSpPr>
-          <p:cNvPr id="7" name="Text 5"/>
-          <p:cNvSpPr/>
-          <p:nvPr/>
-        </p:nvSpPr>
-        <p:spPr>
-          <a:xfrm>
-            <a:off x="822960" y="1325880"/>
-            <a:ext cx="10378440" cy="4800600"/>
-          </a:xfrm>
-          <a:prstGeom prst="rect">
-            <a:avLst/>
-          </a:prstGeom>
-          <a:noFill/>
-          <a:ln/>
-        </p:spPr>
-        <p:txBody>
-          <a:bodyPr wrap="square" lIns="1016" tIns="1016" rIns="1016" bIns="1016" rtlCol="0" anchor="t">
+          <p:cNvPr id="10" name="Text 8"/>
+          <p:cNvSpPr/>
+          <p:nvPr/>
+        </p:nvSpPr>
+        <p:spPr>
+          <a:xfrm>
+            <a:off x="868680" y="1417320"/>
+            <a:ext cx="6675120" cy="4434840"/>
+          </a:xfrm>
+          <a:prstGeom prst="rect">
+            <a:avLst/>
+          </a:prstGeom>
+          <a:noFill/>
+          <a:ln/>
+        </p:spPr>
+        <p:txBody>
+          <a:bodyPr wrap="square" lIns="635" tIns="635" rIns="635" bIns="635" rtlCol="0" anchor="t">
             <a:normAutofit/>
           </a:bodyPr>
           <a:lstStyle/>
           <a:p>
+            <a:r>
+              <a:rPr lang="en-US" sz="1700" dirty="0">
+                <a:solidFill>
+                  <a:srgbClr val="17364A"/>
+                </a:solidFill>
+                <a:latin typeface="Aptos" pitchFamily="34" charset="0"/>
+                <a:ea typeface="Aptos" pitchFamily="34" charset="-122"/>
+                <a:cs typeface="Aptos" pitchFamily="34" charset="-120"/>
+              </a:rPr>
+              <a:t>Model communication begins with the decision context.</a:t>
+            </a:r>
+            <a:endParaRPr lang="en-US" sz="1700" dirty="0"/>
+          </a:p>
+          <a:p>
+            <a:r>
+              <a:rPr lang="en-US" sz="1700" dirty="0">
+                <a:solidFill>
+                  <a:srgbClr val="17364A"/>
+                </a:solidFill>
+                <a:latin typeface="Aptos" pitchFamily="34" charset="0"/>
+                <a:ea typeface="Aptos" pitchFamily="34" charset="-122"/>
+                <a:cs typeface="Aptos" pitchFamily="34" charset="-120"/>
+              </a:rPr>
+              <a:t>The same model output may be communicated differently to a technical team, health officer, program manager, community.</a:t>
+            </a:r>
+            <a:endParaRPr lang="en-US" sz="1700" dirty="0"/>
+          </a:p>
+          <a:p>
+            <a:r>
+              <a:rPr lang="en-US" sz="1700" dirty="0">
+                <a:solidFill>
+                  <a:srgbClr val="17364A"/>
+                </a:solidFill>
+                <a:latin typeface="Aptos" pitchFamily="34" charset="0"/>
+                <a:ea typeface="Aptos" pitchFamily="34" charset="-122"/>
+                <a:cs typeface="Aptos" pitchFamily="34" charset="-120"/>
+              </a:rPr>
+              <a:t>Technical users may need details about metrics and data limitations, while executives may need decision implications,.</a:t>
+            </a:r>
+            <a:endParaRPr lang="en-US" sz="1700" dirty="0"/>
+          </a:p>
+          <a:p>
+            <a:r>
+              <a:rPr lang="en-US" sz="1700" dirty="0">
+                <a:solidFill>
+                  <a:srgbClr val="17364A"/>
+                </a:solidFill>
+                <a:latin typeface="Aptos" pitchFamily="34" charset="0"/>
+                <a:ea typeface="Aptos" pitchFamily="34" charset="-122"/>
+                <a:cs typeface="Aptos" pitchFamily="34" charset="-120"/>
+              </a:rPr>
+              <a:t>Uncertainty should be explained visually and verbally.</a:t>
+            </a:r>
+            <a:endParaRPr lang="en-US" sz="1700" dirty="0"/>
+          </a:p>
+        </p:txBody>
+      </p:sp>
+      <p:sp>
+        <p:nvSpPr>
+          <p:cNvPr id="11" name="Shape 9"/>
+          <p:cNvSpPr/>
+          <p:nvPr/>
+        </p:nvSpPr>
+        <p:spPr>
+          <a:xfrm>
+            <a:off x="7909560" y="1417320"/>
+            <a:ext cx="3154680" cy="1828800"/>
+          </a:xfrm>
+          <a:prstGeom prst="roundRect">
+            <a:avLst>
+              <a:gd name="adj" fmla="val 6000"/>
+            </a:avLst>
+          </a:prstGeom>
+          <a:solidFill>
+            <a:srgbClr val="EEF8ED"/>
+          </a:solidFill>
+          <a:ln w="12700">
+            <a:solidFill>
+              <a:srgbClr val="B9D7E6"/>
+            </a:solidFill>
+            <a:prstDash val="solid"/>
+          </a:ln>
+        </p:spPr>
+      </p:sp>
+      <p:sp>
+        <p:nvSpPr>
+          <p:cNvPr id="12" name="Text 10"/>
+          <p:cNvSpPr/>
+          <p:nvPr/>
+        </p:nvSpPr>
+        <p:spPr>
+          <a:xfrm>
+            <a:off x="8074152" y="1563624"/>
+            <a:ext cx="2825496" cy="201168"/>
+          </a:xfrm>
+          <a:prstGeom prst="rect">
+            <a:avLst/>
+          </a:prstGeom>
+          <a:noFill/>
+          <a:ln/>
+        </p:spPr>
+        <p:txBody>
+          <a:bodyPr wrap="square" lIns="0" tIns="0" rIns="0" bIns="0" rtlCol="0" anchor="ctr"/>
+          <a:lstStyle/>
+          <a:p>
             <a:pPr indent="0" marL="0">
               <a:buNone/>
             </a:pPr>
             <a:r>
-              <a:rPr lang="en-US" sz="1420" dirty="0">
+              <a:rPr lang="en-US" sz="950" b="1" dirty="0">
+                <a:solidFill>
+                  <a:srgbClr val="0068B7"/>
+                </a:solidFill>
+                <a:latin typeface="Aptos" pitchFamily="34" charset="0"/>
+                <a:ea typeface="Aptos" pitchFamily="34" charset="-122"/>
+                <a:cs typeface="Aptos" pitchFamily="34" charset="-120"/>
+              </a:rPr>
+              <a:t>Key idea</a:t>
+            </a:r>
+            <a:endParaRPr lang="en-US" sz="950" dirty="0"/>
+          </a:p>
+        </p:txBody>
+      </p:sp>
+      <p:sp>
+        <p:nvSpPr>
+          <p:cNvPr id="13" name="Text 11"/>
+          <p:cNvSpPr/>
+          <p:nvPr/>
+        </p:nvSpPr>
+        <p:spPr>
+          <a:xfrm>
+            <a:off x="8074152" y="1856232"/>
+            <a:ext cx="2825496" cy="1261872"/>
+          </a:xfrm>
+          <a:prstGeom prst="rect">
+            <a:avLst/>
+          </a:prstGeom>
+          <a:noFill/>
+          <a:ln/>
+        </p:spPr>
+        <p:txBody>
+          <a:bodyPr wrap="square" lIns="0" tIns="0" rIns="0" bIns="0" rtlCol="0" anchor="t">
+            <a:normAutofit/>
+          </a:bodyPr>
+          <a:lstStyle/>
+          <a:p>
+            <a:pPr indent="0" marL="0">
+              <a:buNone/>
+            </a:pPr>
+            <a:r>
+              <a:rPr lang="en-US" sz="1250" dirty="0">
                 <a:solidFill>
                   <a:srgbClr val="17364A"/>
                 </a:solidFill>
@@ -2970,9 +3393,116 @@
                 <a:ea typeface="Aptos" pitchFamily="34" charset="-122"/>
                 <a:cs typeface="Aptos" pitchFamily="34" charset="-120"/>
               </a:rPr>
-              <a:t>Generative AI can help draft summaries of model findings, but the draft must be checked by analysts who understand the model. Predictive analytics, outbreak forecasts, risk stratification tools, and geospatial models all require communication practices that preserve uncertainty. RAG systems used for briefings should cite source reports and validation evidence.</a:t>
-            </a:r>
-            <a:endParaRPr lang="en-US" sz="1420" dirty="0"/>
+              <a:t>Model communication begins with the decision context.</a:t>
+            </a:r>
+            <a:endParaRPr lang="en-US" sz="1250" dirty="0"/>
+          </a:p>
+        </p:txBody>
+      </p:sp>
+      <p:sp>
+        <p:nvSpPr>
+          <p:cNvPr id="14" name="Shape 12"/>
+          <p:cNvSpPr/>
+          <p:nvPr/>
+        </p:nvSpPr>
+        <p:spPr>
+          <a:xfrm>
+            <a:off x="7909560" y="3520440"/>
+            <a:ext cx="3154680" cy="1737360"/>
+          </a:xfrm>
+          <a:prstGeom prst="roundRect">
+            <a:avLst>
+              <a:gd name="adj" fmla="val 6316"/>
+            </a:avLst>
+          </a:prstGeom>
+          <a:solidFill>
+            <a:srgbClr val="EAF6F8"/>
+          </a:solidFill>
+          <a:ln w="12700">
+            <a:solidFill>
+              <a:srgbClr val="B9D7E6"/>
+            </a:solidFill>
+            <a:prstDash val="solid"/>
+          </a:ln>
+        </p:spPr>
+      </p:sp>
+      <p:sp>
+        <p:nvSpPr>
+          <p:cNvPr id="15" name="Text 13"/>
+          <p:cNvSpPr/>
+          <p:nvPr/>
+        </p:nvSpPr>
+        <p:spPr>
+          <a:xfrm>
+            <a:off x="8074152" y="3666744"/>
+            <a:ext cx="2825496" cy="201168"/>
+          </a:xfrm>
+          <a:prstGeom prst="rect">
+            <a:avLst/>
+          </a:prstGeom>
+          <a:noFill/>
+          <a:ln/>
+        </p:spPr>
+        <p:txBody>
+          <a:bodyPr wrap="square" lIns="0" tIns="0" rIns="0" bIns="0" rtlCol="0" anchor="ctr"/>
+          <a:lstStyle/>
+          <a:p>
+            <a:pPr indent="0" marL="0">
+              <a:buNone/>
+            </a:pPr>
+            <a:r>
+              <a:rPr lang="en-US" sz="950" b="1" dirty="0">
+                <a:solidFill>
+                  <a:srgbClr val="0068B7"/>
+                </a:solidFill>
+                <a:latin typeface="Aptos" pitchFamily="34" charset="0"/>
+                <a:ea typeface="Aptos" pitchFamily="34" charset="-122"/>
+                <a:cs typeface="Aptos" pitchFamily="34" charset="-120"/>
+              </a:rPr>
+              <a:t>Use this for</a:t>
+            </a:r>
+            <a:endParaRPr lang="en-US" sz="950" dirty="0"/>
+          </a:p>
+        </p:txBody>
+      </p:sp>
+      <p:sp>
+        <p:nvSpPr>
+          <p:cNvPr id="16" name="Text 14"/>
+          <p:cNvSpPr/>
+          <p:nvPr/>
+        </p:nvSpPr>
+        <p:spPr>
+          <a:xfrm>
+            <a:off x="8074152" y="3959352"/>
+            <a:ext cx="2825496" cy="1170432"/>
+          </a:xfrm>
+          <a:prstGeom prst="rect">
+            <a:avLst/>
+          </a:prstGeom>
+          <a:noFill/>
+          <a:ln/>
+        </p:spPr>
+        <p:txBody>
+          <a:bodyPr wrap="square" lIns="0" tIns="0" rIns="0" bIns="0" rtlCol="0" anchor="t">
+            <a:normAutofit/>
+          </a:bodyPr>
+          <a:lstStyle/>
+          <a:p>
+            <a:pPr indent="0" marL="0">
+              <a:buNone/>
+            </a:pPr>
+            <a:r>
+              <a:rPr lang="en-US" sz="1250" dirty="0">
+                <a:solidFill>
+                  <a:srgbClr val="17364A"/>
+                </a:solidFill>
+                <a:latin typeface="Aptos" pitchFamily="34" charset="0"/>
+                <a:ea typeface="Aptos" pitchFamily="34" charset="-122"/>
+                <a:cs typeface="Aptos" pitchFamily="34" charset="-120"/>
+              </a:rPr>
+              <a:t>Connect the concept to public health decisions, safeguards, documentation, or implementation work.</a:t>
+            </a:r>
+            <a:endParaRPr lang="en-US" sz="1250" dirty="0"/>
           </a:p>
         </p:txBody>
       </p:sp>
@@ -3035,7 +3565,32 @@
       </p:sp>
       <p:sp>
         <p:nvSpPr>
-          <p:cNvPr id="3" name="Text 1"/>
+          <p:cNvPr id="3" name="Shape 1"/>
+          <p:cNvSpPr/>
+          <p:nvPr/>
+        </p:nvSpPr>
+        <p:spPr>
+          <a:xfrm>
+            <a:off x="0" y="164592"/>
+            <a:ext cx="146304" cy="6693408"/>
+          </a:xfrm>
+          <a:prstGeom prst="rect">
+            <a:avLst/>
+          </a:prstGeom>
+          <a:solidFill>
+            <a:srgbClr val="2F8A28"/>
+          </a:solidFill>
+          <a:ln w="12700">
+            <a:solidFill>
+              <a:srgbClr val="2F8A28"/>
+            </a:solidFill>
+            <a:prstDash val="solid"/>
+          </a:ln>
+        </p:spPr>
+      </p:sp>
+      <p:sp>
+        <p:nvSpPr>
+          <p:cNvPr id="4" name="Text 2"/>
           <p:cNvSpPr/>
           <p:nvPr/>
         </p:nvSpPr>
@@ -3074,7 +3629,7 @@
       </p:sp>
       <p:sp>
         <p:nvSpPr>
-          <p:cNvPr id="4" name="Text 2"/>
+          <p:cNvPr id="5" name="Text 3"/>
           <p:cNvSpPr/>
           <p:nvPr/>
         </p:nvSpPr>
@@ -3113,7 +3668,7 @@
       </p:sp>
       <p:sp>
         <p:nvSpPr>
-          <p:cNvPr id="5" name="Text 3"/>
+          <p:cNvPr id="6" name="Text 4"/>
           <p:cNvSpPr/>
           <p:nvPr/>
         </p:nvSpPr>
@@ -3152,13 +3707,77 @@
       </p:sp>
       <p:sp>
         <p:nvSpPr>
-          <p:cNvPr id="6" name="Text 4"/>
+          <p:cNvPr id="7" name="Shape 5"/>
           <p:cNvSpPr/>
           <p:nvPr/>
         </p:nvSpPr>
         <p:spPr>
           <a:xfrm>
             <a:off x="640080" y="658368"/>
+            <a:ext cx="420624" cy="420624"/>
+          </a:xfrm>
+          <a:prstGeom prst="ellipse">
+            <a:avLst/>
+          </a:prstGeom>
+          <a:solidFill>
+            <a:srgbClr val="0068B7"/>
+          </a:solidFill>
+          <a:ln w="12700">
+            <a:solidFill>
+              <a:srgbClr val="0068B7"/>
+            </a:solidFill>
+            <a:prstDash val="solid"/>
+          </a:ln>
+        </p:spPr>
+      </p:sp>
+      <p:sp>
+        <p:nvSpPr>
+          <p:cNvPr id="8" name="Text 6"/>
+          <p:cNvSpPr/>
+          <p:nvPr/>
+        </p:nvSpPr>
+        <p:spPr>
+          <a:xfrm>
+            <a:off x="640080" y="731520"/>
+            <a:ext cx="420624" cy="164592"/>
+          </a:xfrm>
+          <a:prstGeom prst="rect">
+            <a:avLst/>
+          </a:prstGeom>
+          <a:noFill/>
+          <a:ln/>
+        </p:spPr>
+        <p:txBody>
+          <a:bodyPr wrap="square" lIns="0" tIns="0" rIns="0" bIns="0" rtlCol="0" anchor="ctr"/>
+          <a:lstStyle/>
+          <a:p>
+            <a:pPr algn="ctr" indent="0" marL="0">
+              <a:buNone/>
+            </a:pPr>
+            <a:r>
+              <a:rPr lang="en-US" sz="1100" b="1" dirty="0">
+                <a:solidFill>
+                  <a:srgbClr val="FFFFFF"/>
+                </a:solidFill>
+                <a:latin typeface="Aptos" pitchFamily="34" charset="0"/>
+                <a:ea typeface="Aptos" pitchFamily="34" charset="-122"/>
+                <a:cs typeface="Aptos" pitchFamily="34" charset="-120"/>
+              </a:rPr>
+              <a:t>7</a:t>
+            </a:r>
+            <a:endParaRPr lang="en-US" sz="1100" dirty="0"/>
+          </a:p>
+        </p:txBody>
+      </p:sp>
+      <p:sp>
+        <p:nvSpPr>
+          <p:cNvPr id="9" name="Text 7"/>
+          <p:cNvSpPr/>
+          <p:nvPr/>
+        </p:nvSpPr>
+        <p:spPr>
+          <a:xfrm>
+            <a:off x="640080" y="621792"/>
             <a:ext cx="10881360" cy="566928"/>
           </a:xfrm>
           <a:prstGeom prst="rect">
@@ -3185,7 +3804,7 @@
                 <a:ea typeface="Aptos Display" pitchFamily="34" charset="-122"/>
                 <a:cs typeface="Aptos Display" pitchFamily="34" charset="-120"/>
               </a:rPr>
-              <a:t>Reflection Questions</a:t>
+              <a:t>Risks, Failure Modes, and Guardrails</a:t>
             </a:r>
             <a:endParaRPr lang="en-US" sz="2700" dirty="0"/>
           </a:p>
@@ -3193,32 +3812,178 @@
       </p:sp>
       <p:sp>
         <p:nvSpPr>
-          <p:cNvPr id="7" name="Text 5"/>
-          <p:cNvSpPr/>
-          <p:nvPr/>
-        </p:nvSpPr>
-        <p:spPr>
-          <a:xfrm>
-            <a:off x="822960" y="1325880"/>
-            <a:ext cx="10378440" cy="4800600"/>
-          </a:xfrm>
-          <a:prstGeom prst="rect">
-            <a:avLst/>
-          </a:prstGeom>
-          <a:noFill/>
-          <a:ln/>
-        </p:spPr>
-        <p:txBody>
-          <a:bodyPr wrap="square" lIns="1016" tIns="1016" rIns="1016" bIns="1016" rtlCol="0" anchor="t">
+          <p:cNvPr id="10" name="Text 8"/>
+          <p:cNvSpPr/>
+          <p:nvPr/>
+        </p:nvSpPr>
+        <p:spPr>
+          <a:xfrm>
+            <a:off x="868680" y="1417320"/>
+            <a:ext cx="6675120" cy="4434840"/>
+          </a:xfrm>
+          <a:prstGeom prst="rect">
+            <a:avLst/>
+          </a:prstGeom>
+          <a:noFill/>
+          <a:ln/>
+        </p:spPr>
+        <p:txBody>
+          <a:bodyPr wrap="square" lIns="635" tIns="635" rIns="635" bIns="635" rtlCol="0" anchor="t">
             <a:normAutofit/>
           </a:bodyPr>
           <a:lstStyle/>
           <a:p>
+            <a:r>
+              <a:rPr lang="en-US" sz="1700" dirty="0">
+                <a:solidFill>
+                  <a:srgbClr val="17364A"/>
+                </a:solidFill>
+                <a:latin typeface="Aptos" pitchFamily="34" charset="0"/>
+                <a:ea typeface="Aptos" pitchFamily="34" charset="-122"/>
+                <a:cs typeface="Aptos" pitchFamily="34" charset="-120"/>
+              </a:rPr>
+              <a:t>A major failure mode is false precision.</a:t>
+            </a:r>
+            <a:endParaRPr lang="en-US" sz="1700" dirty="0"/>
+          </a:p>
+          <a:p>
+            <a:r>
+              <a:rPr lang="en-US" sz="1700" dirty="0">
+                <a:solidFill>
+                  <a:srgbClr val="17364A"/>
+                </a:solidFill>
+                <a:latin typeface="Aptos" pitchFamily="34" charset="0"/>
+                <a:ea typeface="Aptos" pitchFamily="34" charset="-122"/>
+                <a:cs typeface="Aptos" pitchFamily="34" charset="-120"/>
+              </a:rPr>
+              <a:t>A model may produce a number such as 82.4 percent risk, but the data and validation may not support that level of exactness.</a:t>
+            </a:r>
+            <a:endParaRPr lang="en-US" sz="1700" dirty="0"/>
+          </a:p>
+          <a:p>
+            <a:r>
+              <a:rPr lang="en-US" sz="1700" dirty="0">
+                <a:solidFill>
+                  <a:srgbClr val="17364A"/>
+                </a:solidFill>
+                <a:latin typeface="Aptos" pitchFamily="34" charset="0"/>
+                <a:ea typeface="Aptos" pitchFamily="34" charset="-122"/>
+                <a:cs typeface="Aptos" pitchFamily="34" charset="-120"/>
+              </a:rPr>
+              <a:t>A guardrail is to use appropriate rounding, risk categories, and uncertainty statements.</a:t>
+            </a:r>
+            <a:endParaRPr lang="en-US" sz="1700" dirty="0"/>
+          </a:p>
+          <a:p>
+            <a:r>
+              <a:rPr lang="en-US" sz="1700" dirty="0">
+                <a:solidFill>
+                  <a:srgbClr val="17364A"/>
+                </a:solidFill>
+                <a:latin typeface="Aptos" pitchFamily="34" charset="0"/>
+                <a:ea typeface="Aptos" pitchFamily="34" charset="-122"/>
+                <a:cs typeface="Aptos" pitchFamily="34" charset="-120"/>
+              </a:rPr>
+              <a:t>Another failure mode is hiding limitations to make results look more actionable.</a:t>
+            </a:r>
+            <a:endParaRPr lang="en-US" sz="1700" dirty="0"/>
+          </a:p>
+        </p:txBody>
+      </p:sp>
+      <p:sp>
+        <p:nvSpPr>
+          <p:cNvPr id="11" name="Shape 9"/>
+          <p:cNvSpPr/>
+          <p:nvPr/>
+        </p:nvSpPr>
+        <p:spPr>
+          <a:xfrm>
+            <a:off x="7909560" y="1417320"/>
+            <a:ext cx="3154680" cy="1828800"/>
+          </a:xfrm>
+          <a:prstGeom prst="roundRect">
+            <a:avLst>
+              <a:gd name="adj" fmla="val 6000"/>
+            </a:avLst>
+          </a:prstGeom>
+          <a:solidFill>
+            <a:srgbClr val="EEF8ED"/>
+          </a:solidFill>
+          <a:ln w="12700">
+            <a:solidFill>
+              <a:srgbClr val="B9D7E6"/>
+            </a:solidFill>
+            <a:prstDash val="solid"/>
+          </a:ln>
+        </p:spPr>
+      </p:sp>
+      <p:sp>
+        <p:nvSpPr>
+          <p:cNvPr id="12" name="Text 10"/>
+          <p:cNvSpPr/>
+          <p:nvPr/>
+        </p:nvSpPr>
+        <p:spPr>
+          <a:xfrm>
+            <a:off x="8074152" y="1563624"/>
+            <a:ext cx="2825496" cy="201168"/>
+          </a:xfrm>
+          <a:prstGeom prst="rect">
+            <a:avLst/>
+          </a:prstGeom>
+          <a:noFill/>
+          <a:ln/>
+        </p:spPr>
+        <p:txBody>
+          <a:bodyPr wrap="square" lIns="0" tIns="0" rIns="0" bIns="0" rtlCol="0" anchor="ctr"/>
+          <a:lstStyle/>
+          <a:p>
             <a:pPr indent="0" marL="0">
               <a:buNone/>
             </a:pPr>
             <a:r>
-              <a:rPr lang="en-US" sz="1420" dirty="0">
+              <a:rPr lang="en-US" sz="950" b="1" dirty="0">
+                <a:solidFill>
+                  <a:srgbClr val="0068B7"/>
+                </a:solidFill>
+                <a:latin typeface="Aptos" pitchFamily="34" charset="0"/>
+                <a:ea typeface="Aptos" pitchFamily="34" charset="-122"/>
+                <a:cs typeface="Aptos" pitchFamily="34" charset="-120"/>
+              </a:rPr>
+              <a:t>Key idea</a:t>
+            </a:r>
+            <a:endParaRPr lang="en-US" sz="950" dirty="0"/>
+          </a:p>
+        </p:txBody>
+      </p:sp>
+      <p:sp>
+        <p:nvSpPr>
+          <p:cNvPr id="13" name="Text 11"/>
+          <p:cNvSpPr/>
+          <p:nvPr/>
+        </p:nvSpPr>
+        <p:spPr>
+          <a:xfrm>
+            <a:off x="8074152" y="1856232"/>
+            <a:ext cx="2825496" cy="1261872"/>
+          </a:xfrm>
+          <a:prstGeom prst="rect">
+            <a:avLst/>
+          </a:prstGeom>
+          <a:noFill/>
+          <a:ln/>
+        </p:spPr>
+        <p:txBody>
+          <a:bodyPr wrap="square" lIns="0" tIns="0" rIns="0" bIns="0" rtlCol="0" anchor="t">
+            <a:normAutofit/>
+          </a:bodyPr>
+          <a:lstStyle/>
+          <a:p>
+            <a:pPr indent="0" marL="0">
+              <a:buNone/>
+            </a:pPr>
+            <a:r>
+              <a:rPr lang="en-US" sz="1250" dirty="0">
                 <a:solidFill>
                   <a:srgbClr val="17364A"/>
                 </a:solidFill>
@@ -3226,9 +3991,116 @@
                 <a:ea typeface="Aptos" pitchFamily="34" charset="-122"/>
                 <a:cs typeface="Aptos" pitchFamily="34" charset="-120"/>
               </a:rPr>
-              <a:t>Who needs to understand this model result? What decision will the result support? What uncertainty or limitation could change the decision?</a:t>
-            </a:r>
-            <a:endParaRPr lang="en-US" sz="1420" dirty="0"/>
+              <a:t>A major failure mode is false precision.</a:t>
+            </a:r>
+            <a:endParaRPr lang="en-US" sz="1250" dirty="0"/>
+          </a:p>
+        </p:txBody>
+      </p:sp>
+      <p:sp>
+        <p:nvSpPr>
+          <p:cNvPr id="14" name="Shape 12"/>
+          <p:cNvSpPr/>
+          <p:nvPr/>
+        </p:nvSpPr>
+        <p:spPr>
+          <a:xfrm>
+            <a:off x="7909560" y="3520440"/>
+            <a:ext cx="3154680" cy="1737360"/>
+          </a:xfrm>
+          <a:prstGeom prst="roundRect">
+            <a:avLst>
+              <a:gd name="adj" fmla="val 6316"/>
+            </a:avLst>
+          </a:prstGeom>
+          <a:solidFill>
+            <a:srgbClr val="EAF6F8"/>
+          </a:solidFill>
+          <a:ln w="12700">
+            <a:solidFill>
+              <a:srgbClr val="B9D7E6"/>
+            </a:solidFill>
+            <a:prstDash val="solid"/>
+          </a:ln>
+        </p:spPr>
+      </p:sp>
+      <p:sp>
+        <p:nvSpPr>
+          <p:cNvPr id="15" name="Text 13"/>
+          <p:cNvSpPr/>
+          <p:nvPr/>
+        </p:nvSpPr>
+        <p:spPr>
+          <a:xfrm>
+            <a:off x="8074152" y="3666744"/>
+            <a:ext cx="2825496" cy="201168"/>
+          </a:xfrm>
+          <a:prstGeom prst="rect">
+            <a:avLst/>
+          </a:prstGeom>
+          <a:noFill/>
+          <a:ln/>
+        </p:spPr>
+        <p:txBody>
+          <a:bodyPr wrap="square" lIns="0" tIns="0" rIns="0" bIns="0" rtlCol="0" anchor="ctr"/>
+          <a:lstStyle/>
+          <a:p>
+            <a:pPr indent="0" marL="0">
+              <a:buNone/>
+            </a:pPr>
+            <a:r>
+              <a:rPr lang="en-US" sz="950" b="1" dirty="0">
+                <a:solidFill>
+                  <a:srgbClr val="0068B7"/>
+                </a:solidFill>
+                <a:latin typeface="Aptos" pitchFamily="34" charset="0"/>
+                <a:ea typeface="Aptos" pitchFamily="34" charset="-122"/>
+                <a:cs typeface="Aptos" pitchFamily="34" charset="-120"/>
+              </a:rPr>
+              <a:t>Use this for</a:t>
+            </a:r>
+            <a:endParaRPr lang="en-US" sz="950" dirty="0"/>
+          </a:p>
+        </p:txBody>
+      </p:sp>
+      <p:sp>
+        <p:nvSpPr>
+          <p:cNvPr id="16" name="Text 14"/>
+          <p:cNvSpPr/>
+          <p:nvPr/>
+        </p:nvSpPr>
+        <p:spPr>
+          <a:xfrm>
+            <a:off x="8074152" y="3959352"/>
+            <a:ext cx="2825496" cy="1170432"/>
+          </a:xfrm>
+          <a:prstGeom prst="rect">
+            <a:avLst/>
+          </a:prstGeom>
+          <a:noFill/>
+          <a:ln/>
+        </p:spPr>
+        <p:txBody>
+          <a:bodyPr wrap="square" lIns="0" tIns="0" rIns="0" bIns="0" rtlCol="0" anchor="t">
+            <a:normAutofit/>
+          </a:bodyPr>
+          <a:lstStyle/>
+          <a:p>
+            <a:pPr indent="0" marL="0">
+              <a:buNone/>
+            </a:pPr>
+            <a:r>
+              <a:rPr lang="en-US" sz="1250" dirty="0">
+                <a:solidFill>
+                  <a:srgbClr val="17364A"/>
+                </a:solidFill>
+                <a:latin typeface="Aptos" pitchFamily="34" charset="0"/>
+                <a:ea typeface="Aptos" pitchFamily="34" charset="-122"/>
+                <a:cs typeface="Aptos" pitchFamily="34" charset="-120"/>
+              </a:rPr>
+              <a:t>Connect the concept to public health decisions, safeguards, documentation, or implementation work.</a:t>
+            </a:r>
+            <a:endParaRPr lang="en-US" sz="1250" dirty="0"/>
           </a:p>
         </p:txBody>
       </p:sp>
@@ -3291,7 +4163,32 @@
       </p:sp>
       <p:sp>
         <p:nvSpPr>
-          <p:cNvPr id="3" name="Text 1"/>
+          <p:cNvPr id="3" name="Shape 1"/>
+          <p:cNvSpPr/>
+          <p:nvPr/>
+        </p:nvSpPr>
+        <p:spPr>
+          <a:xfrm>
+            <a:off x="0" y="164592"/>
+            <a:ext cx="146304" cy="6693408"/>
+          </a:xfrm>
+          <a:prstGeom prst="rect">
+            <a:avLst/>
+          </a:prstGeom>
+          <a:solidFill>
+            <a:srgbClr val="2F8A28"/>
+          </a:solidFill>
+          <a:ln w="12700">
+            <a:solidFill>
+              <a:srgbClr val="2F8A28"/>
+            </a:solidFill>
+            <a:prstDash val="solid"/>
+          </a:ln>
+        </p:spPr>
+      </p:sp>
+      <p:sp>
+        <p:nvSpPr>
+          <p:cNvPr id="4" name="Text 2"/>
           <p:cNvSpPr/>
           <p:nvPr/>
         </p:nvSpPr>
@@ -3330,7 +4227,7 @@
       </p:sp>
       <p:sp>
         <p:nvSpPr>
-          <p:cNvPr id="4" name="Text 2"/>
+          <p:cNvPr id="5" name="Text 3"/>
           <p:cNvSpPr/>
           <p:nvPr/>
         </p:nvSpPr>
@@ -3369,7 +4266,7 @@
       </p:sp>
       <p:sp>
         <p:nvSpPr>
-          <p:cNvPr id="5" name="Text 3"/>
+          <p:cNvPr id="6" name="Text 4"/>
           <p:cNvSpPr/>
           <p:nvPr/>
         </p:nvSpPr>
@@ -3408,13 +4305,77 @@
       </p:sp>
       <p:sp>
         <p:nvSpPr>
-          <p:cNvPr id="6" name="Text 4"/>
+          <p:cNvPr id="7" name="Shape 5"/>
           <p:cNvSpPr/>
           <p:nvPr/>
         </p:nvSpPr>
         <p:spPr>
           <a:xfrm>
             <a:off x="640080" y="658368"/>
+            <a:ext cx="420624" cy="420624"/>
+          </a:xfrm>
+          <a:prstGeom prst="ellipse">
+            <a:avLst/>
+          </a:prstGeom>
+          <a:solidFill>
+            <a:srgbClr val="0068B7"/>
+          </a:solidFill>
+          <a:ln w="12700">
+            <a:solidFill>
+              <a:srgbClr val="0068B7"/>
+            </a:solidFill>
+            <a:prstDash val="solid"/>
+          </a:ln>
+        </p:spPr>
+      </p:sp>
+      <p:sp>
+        <p:nvSpPr>
+          <p:cNvPr id="8" name="Text 6"/>
+          <p:cNvSpPr/>
+          <p:nvPr/>
+        </p:nvSpPr>
+        <p:spPr>
+          <a:xfrm>
+            <a:off x="640080" y="731520"/>
+            <a:ext cx="420624" cy="164592"/>
+          </a:xfrm>
+          <a:prstGeom prst="rect">
+            <a:avLst/>
+          </a:prstGeom>
+          <a:noFill/>
+          <a:ln/>
+        </p:spPr>
+        <p:txBody>
+          <a:bodyPr wrap="square" lIns="0" tIns="0" rIns="0" bIns="0" rtlCol="0" anchor="ctr"/>
+          <a:lstStyle/>
+          <a:p>
+            <a:pPr algn="ctr" indent="0" marL="0">
+              <a:buNone/>
+            </a:pPr>
+            <a:r>
+              <a:rPr lang="en-US" sz="1100" b="1" dirty="0">
+                <a:solidFill>
+                  <a:srgbClr val="FFFFFF"/>
+                </a:solidFill>
+                <a:latin typeface="Aptos" pitchFamily="34" charset="0"/>
+                <a:ea typeface="Aptos" pitchFamily="34" charset="-122"/>
+                <a:cs typeface="Aptos" pitchFamily="34" charset="-120"/>
+              </a:rPr>
+              <a:t>8</a:t>
+            </a:r>
+            <a:endParaRPr lang="en-US" sz="1100" dirty="0"/>
+          </a:p>
+        </p:txBody>
+      </p:sp>
+      <p:sp>
+        <p:nvSpPr>
+          <p:cNvPr id="9" name="Text 7"/>
+          <p:cNvSpPr/>
+          <p:nvPr/>
+        </p:nvSpPr>
+        <p:spPr>
+          <a:xfrm>
+            <a:off x="640080" y="621792"/>
             <a:ext cx="10881360" cy="566928"/>
           </a:xfrm>
           <a:prstGeom prst="rect">
@@ -3441,7 +4402,7 @@
                 <a:ea typeface="Aptos Display" pitchFamily="34" charset="-122"/>
                 <a:cs typeface="Aptos Display" pitchFamily="34" charset="-120"/>
               </a:rPr>
-              <a:t>Reflection Questions Continued</a:t>
+              <a:t>Application to AI-Supported Workflows</a:t>
             </a:r>
             <a:endParaRPr lang="en-US" sz="2700" dirty="0"/>
           </a:p>
@@ -3449,32 +4410,164 @@
       </p:sp>
       <p:sp>
         <p:nvSpPr>
-          <p:cNvPr id="7" name="Text 5"/>
-          <p:cNvSpPr/>
-          <p:nvPr/>
-        </p:nvSpPr>
-        <p:spPr>
-          <a:xfrm>
-            <a:off x="822960" y="1325880"/>
-            <a:ext cx="10378440" cy="4800600"/>
-          </a:xfrm>
-          <a:prstGeom prst="rect">
-            <a:avLst/>
-          </a:prstGeom>
-          <a:noFill/>
-          <a:ln/>
-        </p:spPr>
-        <p:txBody>
-          <a:bodyPr wrap="square" lIns="1016" tIns="1016" rIns="1016" bIns="1016" rtlCol="0" anchor="t">
+          <p:cNvPr id="10" name="Text 8"/>
+          <p:cNvSpPr/>
+          <p:nvPr/>
+        </p:nvSpPr>
+        <p:spPr>
+          <a:xfrm>
+            <a:off x="868680" y="1417320"/>
+            <a:ext cx="6675120" cy="4434840"/>
+          </a:xfrm>
+          <a:prstGeom prst="rect">
+            <a:avLst/>
+          </a:prstGeom>
+          <a:noFill/>
+          <a:ln/>
+        </p:spPr>
+        <p:txBody>
+          <a:bodyPr wrap="square" lIns="635" tIns="635" rIns="635" bIns="635" rtlCol="0" anchor="t">
             <a:normAutofit/>
           </a:bodyPr>
           <a:lstStyle/>
           <a:p>
+            <a:r>
+              <a:rPr lang="en-US" sz="1700" dirty="0">
+                <a:solidFill>
+                  <a:srgbClr val="17364A"/>
+                </a:solidFill>
+                <a:latin typeface="Aptos" pitchFamily="34" charset="0"/>
+                <a:ea typeface="Aptos" pitchFamily="34" charset="-122"/>
+                <a:cs typeface="Aptos" pitchFamily="34" charset="-120"/>
+              </a:rPr>
+              <a:t>Generative AI can help draft summaries of model findings, but the draft must be checked by analysts who understand the model.</a:t>
+            </a:r>
+            <a:endParaRPr lang="en-US" sz="1700" dirty="0"/>
+          </a:p>
+          <a:p>
+            <a:r>
+              <a:rPr lang="en-US" sz="1700" dirty="0">
+                <a:solidFill>
+                  <a:srgbClr val="17364A"/>
+                </a:solidFill>
+                <a:latin typeface="Aptos" pitchFamily="34" charset="0"/>
+                <a:ea typeface="Aptos" pitchFamily="34" charset="-122"/>
+                <a:cs typeface="Aptos" pitchFamily="34" charset="-120"/>
+              </a:rPr>
+              <a:t>Predictive analytics, outbreak forecasts, risk stratification tools, and geospatial models all require communication.</a:t>
+            </a:r>
+            <a:endParaRPr lang="en-US" sz="1700" dirty="0"/>
+          </a:p>
+          <a:p>
+            <a:r>
+              <a:rPr lang="en-US" sz="1700" dirty="0">
+                <a:solidFill>
+                  <a:srgbClr val="17364A"/>
+                </a:solidFill>
+                <a:latin typeface="Aptos" pitchFamily="34" charset="0"/>
+                <a:ea typeface="Aptos" pitchFamily="34" charset="-122"/>
+                <a:cs typeface="Aptos" pitchFamily="34" charset="-120"/>
+              </a:rPr>
+              <a:t>RAG systems used for briefings should cite source reports and validation evidence.</a:t>
+            </a:r>
+            <a:endParaRPr lang="en-US" sz="1700" dirty="0"/>
+          </a:p>
+        </p:txBody>
+      </p:sp>
+      <p:sp>
+        <p:nvSpPr>
+          <p:cNvPr id="11" name="Shape 9"/>
+          <p:cNvSpPr/>
+          <p:nvPr/>
+        </p:nvSpPr>
+        <p:spPr>
+          <a:xfrm>
+            <a:off x="7909560" y="1417320"/>
+            <a:ext cx="3154680" cy="1828800"/>
+          </a:xfrm>
+          <a:prstGeom prst="roundRect">
+            <a:avLst>
+              <a:gd name="adj" fmla="val 6000"/>
+            </a:avLst>
+          </a:prstGeom>
+          <a:solidFill>
+            <a:srgbClr val="EEF8ED"/>
+          </a:solidFill>
+          <a:ln w="12700">
+            <a:solidFill>
+              <a:srgbClr val="B9D7E6"/>
+            </a:solidFill>
+            <a:prstDash val="solid"/>
+          </a:ln>
+        </p:spPr>
+      </p:sp>
+      <p:sp>
+        <p:nvSpPr>
+          <p:cNvPr id="12" name="Text 10"/>
+          <p:cNvSpPr/>
+          <p:nvPr/>
+        </p:nvSpPr>
+        <p:spPr>
+          <a:xfrm>
+            <a:off x="8074152" y="1563624"/>
+            <a:ext cx="2825496" cy="201168"/>
+          </a:xfrm>
+          <a:prstGeom prst="rect">
+            <a:avLst/>
+          </a:prstGeom>
+          <a:noFill/>
+          <a:ln/>
+        </p:spPr>
+        <p:txBody>
+          <a:bodyPr wrap="square" lIns="0" tIns="0" rIns="0" bIns="0" rtlCol="0" anchor="ctr"/>
+          <a:lstStyle/>
+          <a:p>
             <a:pPr indent="0" marL="0">
               <a:buNone/>
             </a:pPr>
             <a:r>
-              <a:rPr lang="en-US" sz="1420" dirty="0">
+              <a:rPr lang="en-US" sz="950" b="1" dirty="0">
+                <a:solidFill>
+                  <a:srgbClr val="0068B7"/>
+                </a:solidFill>
+                <a:latin typeface="Aptos" pitchFamily="34" charset="0"/>
+                <a:ea typeface="Aptos" pitchFamily="34" charset="-122"/>
+                <a:cs typeface="Aptos" pitchFamily="34" charset="-120"/>
+              </a:rPr>
+              <a:t>Key idea</a:t>
+            </a:r>
+            <a:endParaRPr lang="en-US" sz="950" dirty="0"/>
+          </a:p>
+        </p:txBody>
+      </p:sp>
+      <p:sp>
+        <p:nvSpPr>
+          <p:cNvPr id="13" name="Text 11"/>
+          <p:cNvSpPr/>
+          <p:nvPr/>
+        </p:nvSpPr>
+        <p:spPr>
+          <a:xfrm>
+            <a:off x="8074152" y="1856232"/>
+            <a:ext cx="2825496" cy="1261872"/>
+          </a:xfrm>
+          <a:prstGeom prst="rect">
+            <a:avLst/>
+          </a:prstGeom>
+          <a:noFill/>
+          <a:ln/>
+        </p:spPr>
+        <p:txBody>
+          <a:bodyPr wrap="square" lIns="0" tIns="0" rIns="0" bIns="0" rtlCol="0" anchor="t">
+            <a:normAutofit/>
+          </a:bodyPr>
+          <a:lstStyle/>
+          <a:p>
+            <a:pPr indent="0" marL="0">
+              <a:buNone/>
+            </a:pPr>
+            <a:r>
+              <a:rPr lang="en-US" sz="1250" dirty="0">
                 <a:solidFill>
                   <a:srgbClr val="17364A"/>
                 </a:solidFill>
@@ -3482,9 +4575,116 @@
                 <a:ea typeface="Aptos" pitchFamily="34" charset="-122"/>
                 <a:cs typeface="Aptos" pitchFamily="34" charset="-120"/>
               </a:rPr>
-              <a:t>Are there subgroup performance concerns? What wording would prevent overclaiming?</a:t>
-            </a:r>
-            <a:endParaRPr lang="en-US" sz="1420" dirty="0"/>
+              <a:t>Generative AI can help draft summaries of model findings, but the draft must be checked by analysts who understand the model.</a:t>
+            </a:r>
+            <a:endParaRPr lang="en-US" sz="1250" dirty="0"/>
+          </a:p>
+        </p:txBody>
+      </p:sp>
+      <p:sp>
+        <p:nvSpPr>
+          <p:cNvPr id="14" name="Shape 12"/>
+          <p:cNvSpPr/>
+          <p:nvPr/>
+        </p:nvSpPr>
+        <p:spPr>
+          <a:xfrm>
+            <a:off x="7909560" y="3520440"/>
+            <a:ext cx="3154680" cy="1737360"/>
+          </a:xfrm>
+          <a:prstGeom prst="roundRect">
+            <a:avLst>
+              <a:gd name="adj" fmla="val 6316"/>
+            </a:avLst>
+          </a:prstGeom>
+          <a:solidFill>
+            <a:srgbClr val="EAF6F8"/>
+          </a:solidFill>
+          <a:ln w="12700">
+            <a:solidFill>
+              <a:srgbClr val="B9D7E6"/>
+            </a:solidFill>
+            <a:prstDash val="solid"/>
+          </a:ln>
+        </p:spPr>
+      </p:sp>
+      <p:sp>
+        <p:nvSpPr>
+          <p:cNvPr id="15" name="Text 13"/>
+          <p:cNvSpPr/>
+          <p:nvPr/>
+        </p:nvSpPr>
+        <p:spPr>
+          <a:xfrm>
+            <a:off x="8074152" y="3666744"/>
+            <a:ext cx="2825496" cy="201168"/>
+          </a:xfrm>
+          <a:prstGeom prst="rect">
+            <a:avLst/>
+          </a:prstGeom>
+          <a:noFill/>
+          <a:ln/>
+        </p:spPr>
+        <p:txBody>
+          <a:bodyPr wrap="square" lIns="0" tIns="0" rIns="0" bIns="0" rtlCol="0" anchor="ctr"/>
+          <a:lstStyle/>
+          <a:p>
+            <a:pPr indent="0" marL="0">
+              <a:buNone/>
+            </a:pPr>
+            <a:r>
+              <a:rPr lang="en-US" sz="950" b="1" dirty="0">
+                <a:solidFill>
+                  <a:srgbClr val="0068B7"/>
+                </a:solidFill>
+                <a:latin typeface="Aptos" pitchFamily="34" charset="0"/>
+                <a:ea typeface="Aptos" pitchFamily="34" charset="-122"/>
+                <a:cs typeface="Aptos" pitchFamily="34" charset="-120"/>
+              </a:rPr>
+              <a:t>Use this for</a:t>
+            </a:r>
+            <a:endParaRPr lang="en-US" sz="950" dirty="0"/>
+          </a:p>
+        </p:txBody>
+      </p:sp>
+      <p:sp>
+        <p:nvSpPr>
+          <p:cNvPr id="16" name="Text 14"/>
+          <p:cNvSpPr/>
+          <p:nvPr/>
+        </p:nvSpPr>
+        <p:spPr>
+          <a:xfrm>
+            <a:off x="8074152" y="3959352"/>
+            <a:ext cx="2825496" cy="1170432"/>
+          </a:xfrm>
+          <a:prstGeom prst="rect">
+            <a:avLst/>
+          </a:prstGeom>
+          <a:noFill/>
+          <a:ln/>
+        </p:spPr>
+        <p:txBody>
+          <a:bodyPr wrap="square" lIns="0" tIns="0" rIns="0" bIns="0" rtlCol="0" anchor="t">
+            <a:normAutofit/>
+          </a:bodyPr>
+          <a:lstStyle/>
+          <a:p>
+            <a:pPr indent="0" marL="0">
+              <a:buNone/>
+            </a:pPr>
+            <a:r>
+              <a:rPr lang="en-US" sz="1250" dirty="0">
+                <a:solidFill>
+                  <a:srgbClr val="17364A"/>
+                </a:solidFill>
+                <a:latin typeface="Aptos" pitchFamily="34" charset="0"/>
+                <a:ea typeface="Aptos" pitchFamily="34" charset="-122"/>
+                <a:cs typeface="Aptos" pitchFamily="34" charset="-120"/>
+              </a:rPr>
+              <a:t>Connect the concept to public health decisions, safeguards, documentation, or implementation work.</a:t>
+            </a:r>
+            <a:endParaRPr lang="en-US" sz="1250" dirty="0"/>
           </a:p>
         </p:txBody>
       </p:sp>
@@ -3547,7 +4747,32 @@
       </p:sp>
       <p:sp>
         <p:nvSpPr>
-          <p:cNvPr id="3" name="Text 1"/>
+          <p:cNvPr id="3" name="Shape 1"/>
+          <p:cNvSpPr/>
+          <p:nvPr/>
+        </p:nvSpPr>
+        <p:spPr>
+          <a:xfrm>
+            <a:off x="0" y="164592"/>
+            <a:ext cx="146304" cy="6693408"/>
+          </a:xfrm>
+          <a:prstGeom prst="rect">
+            <a:avLst/>
+          </a:prstGeom>
+          <a:solidFill>
+            <a:srgbClr val="2F8A28"/>
+          </a:solidFill>
+          <a:ln w="12700">
+            <a:solidFill>
+              <a:srgbClr val="2F8A28"/>
+            </a:solidFill>
+            <a:prstDash val="solid"/>
+          </a:ln>
+        </p:spPr>
+      </p:sp>
+      <p:sp>
+        <p:nvSpPr>
+          <p:cNvPr id="4" name="Text 2"/>
           <p:cNvSpPr/>
           <p:nvPr/>
         </p:nvSpPr>
@@ -3586,7 +4811,7 @@
       </p:sp>
       <p:sp>
         <p:nvSpPr>
-          <p:cNvPr id="4" name="Text 2"/>
+          <p:cNvPr id="5" name="Text 3"/>
           <p:cNvSpPr/>
           <p:nvPr/>
         </p:nvSpPr>
@@ -3625,7 +4850,7 @@
       </p:sp>
       <p:sp>
         <p:nvSpPr>
-          <p:cNvPr id="5" name="Text 3"/>
+          <p:cNvPr id="6" name="Text 4"/>
           <p:cNvSpPr/>
           <p:nvPr/>
         </p:nvSpPr>
@@ -3664,13 +4889,77 @@
       </p:sp>
       <p:sp>
         <p:nvSpPr>
-          <p:cNvPr id="6" name="Text 4"/>
+          <p:cNvPr id="7" name="Shape 5"/>
           <p:cNvSpPr/>
           <p:nvPr/>
         </p:nvSpPr>
         <p:spPr>
           <a:xfrm>
             <a:off x="640080" y="658368"/>
+            <a:ext cx="420624" cy="420624"/>
+          </a:xfrm>
+          <a:prstGeom prst="ellipse">
+            <a:avLst/>
+          </a:prstGeom>
+          <a:solidFill>
+            <a:srgbClr val="0068B7"/>
+          </a:solidFill>
+          <a:ln w="12700">
+            <a:solidFill>
+              <a:srgbClr val="0068B7"/>
+            </a:solidFill>
+            <a:prstDash val="solid"/>
+          </a:ln>
+        </p:spPr>
+      </p:sp>
+      <p:sp>
+        <p:nvSpPr>
+          <p:cNvPr id="8" name="Text 6"/>
+          <p:cNvSpPr/>
+          <p:nvPr/>
+        </p:nvSpPr>
+        <p:spPr>
+          <a:xfrm>
+            <a:off x="640080" y="731520"/>
+            <a:ext cx="420624" cy="164592"/>
+          </a:xfrm>
+          <a:prstGeom prst="rect">
+            <a:avLst/>
+          </a:prstGeom>
+          <a:noFill/>
+          <a:ln/>
+        </p:spPr>
+        <p:txBody>
+          <a:bodyPr wrap="square" lIns="0" tIns="0" rIns="0" bIns="0" rtlCol="0" anchor="ctr"/>
+          <a:lstStyle/>
+          <a:p>
+            <a:pPr algn="ctr" indent="0" marL="0">
+              <a:buNone/>
+            </a:pPr>
+            <a:r>
+              <a:rPr lang="en-US" sz="1100" b="1" dirty="0">
+                <a:solidFill>
+                  <a:srgbClr val="FFFFFF"/>
+                </a:solidFill>
+                <a:latin typeface="Aptos" pitchFamily="34" charset="0"/>
+                <a:ea typeface="Aptos" pitchFamily="34" charset="-122"/>
+                <a:cs typeface="Aptos" pitchFamily="34" charset="-120"/>
+              </a:rPr>
+              <a:t>9</a:t>
+            </a:r>
+            <a:endParaRPr lang="en-US" sz="1100" dirty="0"/>
+          </a:p>
+        </p:txBody>
+      </p:sp>
+      <p:sp>
+        <p:nvSpPr>
+          <p:cNvPr id="9" name="Text 7"/>
+          <p:cNvSpPr/>
+          <p:nvPr/>
+        </p:nvSpPr>
+        <p:spPr>
+          <a:xfrm>
+            <a:off x="640080" y="621792"/>
             <a:ext cx="10881360" cy="566928"/>
           </a:xfrm>
           <a:prstGeom prst="rect">
@@ -3697,7 +4986,7 @@
                 <a:ea typeface="Aptos Display" pitchFamily="34" charset="-122"/>
                 <a:cs typeface="Aptos Display" pitchFamily="34" charset="-120"/>
               </a:rPr>
-              <a:t>Practical Exercise</a:t>
+              <a:t>Reflection Questions</a:t>
             </a:r>
             <a:endParaRPr lang="en-US" sz="2700" dirty="0"/>
           </a:p>
@@ -3705,32 +4994,164 @@
       </p:sp>
       <p:sp>
         <p:nvSpPr>
-          <p:cNvPr id="7" name="Text 5"/>
-          <p:cNvSpPr/>
-          <p:nvPr/>
-        </p:nvSpPr>
-        <p:spPr>
-          <a:xfrm>
-            <a:off x="822960" y="1325880"/>
-            <a:ext cx="10378440" cy="4800600"/>
-          </a:xfrm>
-          <a:prstGeom prst="rect">
-            <a:avLst/>
-          </a:prstGeom>
-          <a:noFill/>
-          <a:ln/>
-        </p:spPr>
-        <p:txBody>
-          <a:bodyPr wrap="square" lIns="1016" tIns="1016" rIns="1016" bIns="1016" rtlCol="0" anchor="t">
+          <p:cNvPr id="10" name="Text 8"/>
+          <p:cNvSpPr/>
+          <p:nvPr/>
+        </p:nvSpPr>
+        <p:spPr>
+          <a:xfrm>
+            <a:off x="868680" y="1417320"/>
+            <a:ext cx="6675120" cy="4434840"/>
+          </a:xfrm>
+          <a:prstGeom prst="rect">
+            <a:avLst/>
+          </a:prstGeom>
+          <a:noFill/>
+          <a:ln/>
+        </p:spPr>
+        <p:txBody>
+          <a:bodyPr wrap="square" lIns="635" tIns="635" rIns="635" bIns="635" rtlCol="0" anchor="t">
             <a:normAutofit/>
           </a:bodyPr>
           <a:lstStyle/>
           <a:p>
+            <a:r>
+              <a:rPr lang="en-US" sz="1700" dirty="0">
+                <a:solidFill>
+                  <a:srgbClr val="17364A"/>
+                </a:solidFill>
+                <a:latin typeface="Aptos" pitchFamily="34" charset="0"/>
+                <a:ea typeface="Aptos" pitchFamily="34" charset="-122"/>
+                <a:cs typeface="Aptos" pitchFamily="34" charset="-120"/>
+              </a:rPr>
+              <a:t>Who needs to understand this model result?</a:t>
+            </a:r>
+            <a:endParaRPr lang="en-US" sz="1700" dirty="0"/>
+          </a:p>
+          <a:p>
+            <a:r>
+              <a:rPr lang="en-US" sz="1700" dirty="0">
+                <a:solidFill>
+                  <a:srgbClr val="17364A"/>
+                </a:solidFill>
+                <a:latin typeface="Aptos" pitchFamily="34" charset="0"/>
+                <a:ea typeface="Aptos" pitchFamily="34" charset="-122"/>
+                <a:cs typeface="Aptos" pitchFamily="34" charset="-120"/>
+              </a:rPr>
+              <a:t>What decision will the result support?</a:t>
+            </a:r>
+            <a:endParaRPr lang="en-US" sz="1700" dirty="0"/>
+          </a:p>
+          <a:p>
+            <a:r>
+              <a:rPr lang="en-US" sz="1700" dirty="0">
+                <a:solidFill>
+                  <a:srgbClr val="17364A"/>
+                </a:solidFill>
+                <a:latin typeface="Aptos" pitchFamily="34" charset="0"/>
+                <a:ea typeface="Aptos" pitchFamily="34" charset="-122"/>
+                <a:cs typeface="Aptos" pitchFamily="34" charset="-120"/>
+              </a:rPr>
+              <a:t>What uncertainty or limitation could change the decision?</a:t>
+            </a:r>
+            <a:endParaRPr lang="en-US" sz="1700" dirty="0"/>
+          </a:p>
+        </p:txBody>
+      </p:sp>
+      <p:sp>
+        <p:nvSpPr>
+          <p:cNvPr id="11" name="Shape 9"/>
+          <p:cNvSpPr/>
+          <p:nvPr/>
+        </p:nvSpPr>
+        <p:spPr>
+          <a:xfrm>
+            <a:off x="7909560" y="1417320"/>
+            <a:ext cx="3154680" cy="1828800"/>
+          </a:xfrm>
+          <a:prstGeom prst="roundRect">
+            <a:avLst>
+              <a:gd name="adj" fmla="val 6000"/>
+            </a:avLst>
+          </a:prstGeom>
+          <a:solidFill>
+            <a:srgbClr val="EEF8ED"/>
+          </a:solidFill>
+          <a:ln w="12700">
+            <a:solidFill>
+              <a:srgbClr val="B9D7E6"/>
+            </a:solidFill>
+            <a:prstDash val="solid"/>
+          </a:ln>
+        </p:spPr>
+      </p:sp>
+      <p:sp>
+        <p:nvSpPr>
+          <p:cNvPr id="12" name="Text 10"/>
+          <p:cNvSpPr/>
+          <p:nvPr/>
+        </p:nvSpPr>
+        <p:spPr>
+          <a:xfrm>
+            <a:off x="8074152" y="1563624"/>
+            <a:ext cx="2825496" cy="201168"/>
+          </a:xfrm>
+          <a:prstGeom prst="rect">
+            <a:avLst/>
+          </a:prstGeom>
+          <a:noFill/>
+          <a:ln/>
+        </p:spPr>
+        <p:txBody>
+          <a:bodyPr wrap="square" lIns="0" tIns="0" rIns="0" bIns="0" rtlCol="0" anchor="ctr"/>
+          <a:lstStyle/>
+          <a:p>
             <a:pPr indent="0" marL="0">
               <a:buNone/>
             </a:pPr>
             <a:r>
-              <a:rPr lang="en-US" sz="1420" dirty="0">
+              <a:rPr lang="en-US" sz="950" b="1" dirty="0">
+                <a:solidFill>
+                  <a:srgbClr val="0068B7"/>
+                </a:solidFill>
+                <a:latin typeface="Aptos" pitchFamily="34" charset="0"/>
+                <a:ea typeface="Aptos" pitchFamily="34" charset="-122"/>
+                <a:cs typeface="Aptos" pitchFamily="34" charset="-120"/>
+              </a:rPr>
+              <a:t>Key idea</a:t>
+            </a:r>
+            <a:endParaRPr lang="en-US" sz="950" dirty="0"/>
+          </a:p>
+        </p:txBody>
+      </p:sp>
+      <p:sp>
+        <p:nvSpPr>
+          <p:cNvPr id="13" name="Text 11"/>
+          <p:cNvSpPr/>
+          <p:nvPr/>
+        </p:nvSpPr>
+        <p:spPr>
+          <a:xfrm>
+            <a:off x="8074152" y="1856232"/>
+            <a:ext cx="2825496" cy="1261872"/>
+          </a:xfrm>
+          <a:prstGeom prst="rect">
+            <a:avLst/>
+          </a:prstGeom>
+          <a:noFill/>
+          <a:ln/>
+        </p:spPr>
+        <p:txBody>
+          <a:bodyPr wrap="square" lIns="0" tIns="0" rIns="0" bIns="0" rtlCol="0" anchor="t">
+            <a:normAutofit/>
+          </a:bodyPr>
+          <a:lstStyle/>
+          <a:p>
+            <a:pPr indent="0" marL="0">
+              <a:buNone/>
+            </a:pPr>
+            <a:r>
+              <a:rPr lang="en-US" sz="1250" dirty="0">
                 <a:solidFill>
                   <a:srgbClr val="17364A"/>
                 </a:solidFill>
@@ -3738,9 +5159,116 @@
                 <a:ea typeface="Aptos" pitchFamily="34" charset="-122"/>
                 <a:cs typeface="Aptos" pitchFamily="34" charset="-120"/>
               </a:rPr>
-              <a:t>Create a one-page model communication brief. Include the decision question, model result, uncertainty, validation status, limitations, subgroup considerations, recommended use, prohibited use, and next review date.</a:t>
-            </a:r>
-            <a:endParaRPr lang="en-US" sz="1420" dirty="0"/>
+              <a:t>Who needs to understand this model result?</a:t>
+            </a:r>
+            <a:endParaRPr lang="en-US" sz="1250" dirty="0"/>
+          </a:p>
+        </p:txBody>
+      </p:sp>
+      <p:sp>
+        <p:nvSpPr>
+          <p:cNvPr id="14" name="Shape 12"/>
+          <p:cNvSpPr/>
+          <p:nvPr/>
+        </p:nvSpPr>
+        <p:spPr>
+          <a:xfrm>
+            <a:off x="7909560" y="3520440"/>
+            <a:ext cx="3154680" cy="1737360"/>
+          </a:xfrm>
+          <a:prstGeom prst="roundRect">
+            <a:avLst>
+              <a:gd name="adj" fmla="val 6316"/>
+            </a:avLst>
+          </a:prstGeom>
+          <a:solidFill>
+            <a:srgbClr val="EAF6F8"/>
+          </a:solidFill>
+          <a:ln w="12700">
+            <a:solidFill>
+              <a:srgbClr val="B9D7E6"/>
+            </a:solidFill>
+            <a:prstDash val="solid"/>
+          </a:ln>
+        </p:spPr>
+      </p:sp>
+      <p:sp>
+        <p:nvSpPr>
+          <p:cNvPr id="15" name="Text 13"/>
+          <p:cNvSpPr/>
+          <p:nvPr/>
+        </p:nvSpPr>
+        <p:spPr>
+          <a:xfrm>
+            <a:off x="8074152" y="3666744"/>
+            <a:ext cx="2825496" cy="201168"/>
+          </a:xfrm>
+          <a:prstGeom prst="rect">
+            <a:avLst/>
+          </a:prstGeom>
+          <a:noFill/>
+          <a:ln/>
+        </p:spPr>
+        <p:txBody>
+          <a:bodyPr wrap="square" lIns="0" tIns="0" rIns="0" bIns="0" rtlCol="0" anchor="ctr"/>
+          <a:lstStyle/>
+          <a:p>
+            <a:pPr indent="0" marL="0">
+              <a:buNone/>
+            </a:pPr>
+            <a:r>
+              <a:rPr lang="en-US" sz="950" b="1" dirty="0">
+                <a:solidFill>
+                  <a:srgbClr val="0068B7"/>
+                </a:solidFill>
+                <a:latin typeface="Aptos" pitchFamily="34" charset="0"/>
+                <a:ea typeface="Aptos" pitchFamily="34" charset="-122"/>
+                <a:cs typeface="Aptos" pitchFamily="34" charset="-120"/>
+              </a:rPr>
+              <a:t>Use this for</a:t>
+            </a:r>
+            <a:endParaRPr lang="en-US" sz="950" dirty="0"/>
+          </a:p>
+        </p:txBody>
+      </p:sp>
+      <p:sp>
+        <p:nvSpPr>
+          <p:cNvPr id="16" name="Text 14"/>
+          <p:cNvSpPr/>
+          <p:nvPr/>
+        </p:nvSpPr>
+        <p:spPr>
+          <a:xfrm>
+            <a:off x="8074152" y="3959352"/>
+            <a:ext cx="2825496" cy="1170432"/>
+          </a:xfrm>
+          <a:prstGeom prst="rect">
+            <a:avLst/>
+          </a:prstGeom>
+          <a:noFill/>
+          <a:ln/>
+        </p:spPr>
+        <p:txBody>
+          <a:bodyPr wrap="square" lIns="0" tIns="0" rIns="0" bIns="0" rtlCol="0" anchor="t">
+            <a:normAutofit/>
+          </a:bodyPr>
+          <a:lstStyle/>
+          <a:p>
+            <a:pPr indent="0" marL="0">
+              <a:buNone/>
+            </a:pPr>
+            <a:r>
+              <a:rPr lang="en-US" sz="1250" dirty="0">
+                <a:solidFill>
+                  <a:srgbClr val="17364A"/>
+                </a:solidFill>
+                <a:latin typeface="Aptos" pitchFamily="34" charset="0"/>
+                <a:ea typeface="Aptos" pitchFamily="34" charset="-122"/>
+                <a:cs typeface="Aptos" pitchFamily="34" charset="-120"/>
+              </a:rPr>
+              <a:t>Connect the concept to public health decisions, safeguards, documentation, or implementation work.</a:t>
+            </a:r>
+            <a:endParaRPr lang="en-US" sz="1250" dirty="0"/>
           </a:p>
         </p:txBody>
       </p:sp>
@@ -3803,7 +5331,32 @@
       </p:sp>
       <p:sp>
         <p:nvSpPr>
-          <p:cNvPr id="3" name="Text 1"/>
+          <p:cNvPr id="3" name="Shape 1"/>
+          <p:cNvSpPr/>
+          <p:nvPr/>
+        </p:nvSpPr>
+        <p:spPr>
+          <a:xfrm>
+            <a:off x="0" y="164592"/>
+            <a:ext cx="146304" cy="6693408"/>
+          </a:xfrm>
+          <a:prstGeom prst="rect">
+            <a:avLst/>
+          </a:prstGeom>
+          <a:solidFill>
+            <a:srgbClr val="2F8A28"/>
+          </a:solidFill>
+          <a:ln w="12700">
+            <a:solidFill>
+              <a:srgbClr val="2F8A28"/>
+            </a:solidFill>
+            <a:prstDash val="solid"/>
+          </a:ln>
+        </p:spPr>
+      </p:sp>
+      <p:sp>
+        <p:nvSpPr>
+          <p:cNvPr id="4" name="Text 2"/>
           <p:cNvSpPr/>
           <p:nvPr/>
         </p:nvSpPr>
@@ -3842,7 +5395,7 @@
       </p:sp>
       <p:sp>
         <p:nvSpPr>
-          <p:cNvPr id="4" name="Text 2"/>
+          <p:cNvPr id="5" name="Text 3"/>
           <p:cNvSpPr/>
           <p:nvPr/>
         </p:nvSpPr>
@@ -3881,7 +5434,7 @@
       </p:sp>
       <p:sp>
         <p:nvSpPr>
-          <p:cNvPr id="5" name="Text 3"/>
+          <p:cNvPr id="6" name="Text 4"/>
           <p:cNvSpPr/>
           <p:nvPr/>
         </p:nvSpPr>
@@ -3920,7 +5473,7 @@
       </p:sp>
       <p:sp>
         <p:nvSpPr>
-          <p:cNvPr id="6" name="Text 4"/>
+          <p:cNvPr id="7" name="Text 5"/>
           <p:cNvSpPr/>
           <p:nvPr/>
         </p:nvSpPr>
@@ -3953,7 +5506,7 @@
                 <a:ea typeface="Aptos Display" pitchFamily="34" charset="-122"/>
                 <a:cs typeface="Aptos Display" pitchFamily="34" charset="-120"/>
               </a:rPr>
-              <a:t>Expected Artifact or Evidence</a:t>
+              <a:t>Reflection Questions Continued</a:t>
             </a:r>
             <a:endParaRPr lang="en-US" sz="2700" dirty="0"/>
           </a:p>
@@ -3961,32 +5514,150 @@
       </p:sp>
       <p:sp>
         <p:nvSpPr>
-          <p:cNvPr id="7" name="Text 5"/>
-          <p:cNvSpPr/>
-          <p:nvPr/>
-        </p:nvSpPr>
-        <p:spPr>
-          <a:xfrm>
-            <a:off x="822960" y="1325880"/>
-            <a:ext cx="10378440" cy="4800600"/>
-          </a:xfrm>
-          <a:prstGeom prst="rect">
-            <a:avLst/>
-          </a:prstGeom>
-          <a:noFill/>
-          <a:ln/>
-        </p:spPr>
-        <p:txBody>
-          <a:bodyPr wrap="square" lIns="1016" tIns="1016" rIns="1016" bIns="1016" rtlCol="0" anchor="t">
+          <p:cNvPr id="8" name="Text 6"/>
+          <p:cNvSpPr/>
+          <p:nvPr/>
+        </p:nvSpPr>
+        <p:spPr>
+          <a:xfrm>
+            <a:off x="868680" y="1417320"/>
+            <a:ext cx="6675120" cy="4434840"/>
+          </a:xfrm>
+          <a:prstGeom prst="rect">
+            <a:avLst/>
+          </a:prstGeom>
+          <a:noFill/>
+          <a:ln/>
+        </p:spPr>
+        <p:txBody>
+          <a:bodyPr wrap="square" lIns="635" tIns="635" rIns="635" bIns="635" rtlCol="0" anchor="t">
             <a:normAutofit/>
           </a:bodyPr>
           <a:lstStyle/>
           <a:p>
+            <a:r>
+              <a:rPr lang="en-US" sz="1700" dirty="0">
+                <a:solidFill>
+                  <a:srgbClr val="17364A"/>
+                </a:solidFill>
+                <a:latin typeface="Aptos" pitchFamily="34" charset="0"/>
+                <a:ea typeface="Aptos" pitchFamily="34" charset="-122"/>
+                <a:cs typeface="Aptos" pitchFamily="34" charset="-120"/>
+              </a:rPr>
+              <a:t>Are there subgroup performance concerns?</a:t>
+            </a:r>
+            <a:endParaRPr lang="en-US" sz="1700" dirty="0"/>
+          </a:p>
+          <a:p>
+            <a:r>
+              <a:rPr lang="en-US" sz="1700" dirty="0">
+                <a:solidFill>
+                  <a:srgbClr val="17364A"/>
+                </a:solidFill>
+                <a:latin typeface="Aptos" pitchFamily="34" charset="0"/>
+                <a:ea typeface="Aptos" pitchFamily="34" charset="-122"/>
+                <a:cs typeface="Aptos" pitchFamily="34" charset="-120"/>
+              </a:rPr>
+              <a:t>What wording would prevent overclaiming?</a:t>
+            </a:r>
+            <a:endParaRPr lang="en-US" sz="1700" dirty="0"/>
+          </a:p>
+        </p:txBody>
+      </p:sp>
+      <p:sp>
+        <p:nvSpPr>
+          <p:cNvPr id="9" name="Shape 7"/>
+          <p:cNvSpPr/>
+          <p:nvPr/>
+        </p:nvSpPr>
+        <p:spPr>
+          <a:xfrm>
+            <a:off x="7909560" y="1417320"/>
+            <a:ext cx="3154680" cy="1828800"/>
+          </a:xfrm>
+          <a:prstGeom prst="roundRect">
+            <a:avLst>
+              <a:gd name="adj" fmla="val 6000"/>
+            </a:avLst>
+          </a:prstGeom>
+          <a:solidFill>
+            <a:srgbClr val="EEF8ED"/>
+          </a:solidFill>
+          <a:ln w="12700">
+            <a:solidFill>
+              <a:srgbClr val="B9D7E6"/>
+            </a:solidFill>
+            <a:prstDash val="solid"/>
+          </a:ln>
+        </p:spPr>
+      </p:sp>
+      <p:sp>
+        <p:nvSpPr>
+          <p:cNvPr id="10" name="Text 8"/>
+          <p:cNvSpPr/>
+          <p:nvPr/>
+        </p:nvSpPr>
+        <p:spPr>
+          <a:xfrm>
+            <a:off x="8074152" y="1563624"/>
+            <a:ext cx="2825496" cy="201168"/>
+          </a:xfrm>
+          <a:prstGeom prst="rect">
+            <a:avLst/>
+          </a:prstGeom>
+          <a:noFill/>
+          <a:ln/>
+        </p:spPr>
+        <p:txBody>
+          <a:bodyPr wrap="square" lIns="0" tIns="0" rIns="0" bIns="0" rtlCol="0" anchor="ctr"/>
+          <a:lstStyle/>
+          <a:p>
             <a:pPr indent="0" marL="0">
               <a:buNone/>
             </a:pPr>
             <a:r>
-              <a:rPr lang="en-US" sz="1420" dirty="0">
+              <a:rPr lang="en-US" sz="950" b="1" dirty="0">
+                <a:solidFill>
+                  <a:srgbClr val="0068B7"/>
+                </a:solidFill>
+                <a:latin typeface="Aptos" pitchFamily="34" charset="0"/>
+                <a:ea typeface="Aptos" pitchFamily="34" charset="-122"/>
+                <a:cs typeface="Aptos" pitchFamily="34" charset="-120"/>
+              </a:rPr>
+              <a:t>Key idea</a:t>
+            </a:r>
+            <a:endParaRPr lang="en-US" sz="950" dirty="0"/>
+          </a:p>
+        </p:txBody>
+      </p:sp>
+      <p:sp>
+        <p:nvSpPr>
+          <p:cNvPr id="11" name="Text 9"/>
+          <p:cNvSpPr/>
+          <p:nvPr/>
+        </p:nvSpPr>
+        <p:spPr>
+          <a:xfrm>
+            <a:off x="8074152" y="1856232"/>
+            <a:ext cx="2825496" cy="1261872"/>
+          </a:xfrm>
+          <a:prstGeom prst="rect">
+            <a:avLst/>
+          </a:prstGeom>
+          <a:noFill/>
+          <a:ln/>
+        </p:spPr>
+        <p:txBody>
+          <a:bodyPr wrap="square" lIns="0" tIns="0" rIns="0" bIns="0" rtlCol="0" anchor="t">
+            <a:normAutofit/>
+          </a:bodyPr>
+          <a:lstStyle/>
+          <a:p>
+            <a:pPr indent="0" marL="0">
+              <a:buNone/>
+            </a:pPr>
+            <a:r>
+              <a:rPr lang="en-US" sz="1250" dirty="0">
                 <a:solidFill>
                   <a:srgbClr val="17364A"/>
                 </a:solidFill>
@@ -3994,9 +5665,116 @@
                 <a:ea typeface="Aptos" pitchFamily="34" charset="-122"/>
                 <a:cs typeface="Aptos" pitchFamily="34" charset="-120"/>
               </a:rPr>
-              <a:t>Model communication brief Plain-language uncertainty statement Subgroup caveat if relevant</a:t>
-            </a:r>
-            <a:endParaRPr lang="en-US" sz="1420" dirty="0"/>
+              <a:t>Are there subgroup performance concerns?</a:t>
+            </a:r>
+            <a:endParaRPr lang="en-US" sz="1250" dirty="0"/>
+          </a:p>
+        </p:txBody>
+      </p:sp>
+      <p:sp>
+        <p:nvSpPr>
+          <p:cNvPr id="12" name="Shape 10"/>
+          <p:cNvSpPr/>
+          <p:nvPr/>
+        </p:nvSpPr>
+        <p:spPr>
+          <a:xfrm>
+            <a:off x="7909560" y="3520440"/>
+            <a:ext cx="3154680" cy="1737360"/>
+          </a:xfrm>
+          <a:prstGeom prst="roundRect">
+            <a:avLst>
+              <a:gd name="adj" fmla="val 6316"/>
+            </a:avLst>
+          </a:prstGeom>
+          <a:solidFill>
+            <a:srgbClr val="EAF6F8"/>
+          </a:solidFill>
+          <a:ln w="12700">
+            <a:solidFill>
+              <a:srgbClr val="B9D7E6"/>
+            </a:solidFill>
+            <a:prstDash val="solid"/>
+          </a:ln>
+        </p:spPr>
+      </p:sp>
+      <p:sp>
+        <p:nvSpPr>
+          <p:cNvPr id="13" name="Text 11"/>
+          <p:cNvSpPr/>
+          <p:nvPr/>
+        </p:nvSpPr>
+        <p:spPr>
+          <a:xfrm>
+            <a:off x="8074152" y="3666744"/>
+            <a:ext cx="2825496" cy="201168"/>
+          </a:xfrm>
+          <a:prstGeom prst="rect">
+            <a:avLst/>
+          </a:prstGeom>
+          <a:noFill/>
+          <a:ln/>
+        </p:spPr>
+        <p:txBody>
+          <a:bodyPr wrap="square" lIns="0" tIns="0" rIns="0" bIns="0" rtlCol="0" anchor="ctr"/>
+          <a:lstStyle/>
+          <a:p>
+            <a:pPr indent="0" marL="0">
+              <a:buNone/>
+            </a:pPr>
+            <a:r>
+              <a:rPr lang="en-US" sz="950" b="1" dirty="0">
+                <a:solidFill>
+                  <a:srgbClr val="0068B7"/>
+                </a:solidFill>
+                <a:latin typeface="Aptos" pitchFamily="34" charset="0"/>
+                <a:ea typeface="Aptos" pitchFamily="34" charset="-122"/>
+                <a:cs typeface="Aptos" pitchFamily="34" charset="-120"/>
+              </a:rPr>
+              <a:t>Use this for</a:t>
+            </a:r>
+            <a:endParaRPr lang="en-US" sz="950" dirty="0"/>
+          </a:p>
+        </p:txBody>
+      </p:sp>
+      <p:sp>
+        <p:nvSpPr>
+          <p:cNvPr id="14" name="Text 12"/>
+          <p:cNvSpPr/>
+          <p:nvPr/>
+        </p:nvSpPr>
+        <p:spPr>
+          <a:xfrm>
+            <a:off x="8074152" y="3959352"/>
+            <a:ext cx="2825496" cy="1170432"/>
+          </a:xfrm>
+          <a:prstGeom prst="rect">
+            <a:avLst/>
+          </a:prstGeom>
+          <a:noFill/>
+          <a:ln/>
+        </p:spPr>
+        <p:txBody>
+          <a:bodyPr wrap="square" lIns="0" tIns="0" rIns="0" bIns="0" rtlCol="0" anchor="t">
+            <a:normAutofit/>
+          </a:bodyPr>
+          <a:lstStyle/>
+          <a:p>
+            <a:pPr indent="0" marL="0">
+              <a:buNone/>
+            </a:pPr>
+            <a:r>
+              <a:rPr lang="en-US" sz="1250" dirty="0">
+                <a:solidFill>
+                  <a:srgbClr val="17364A"/>
+                </a:solidFill>
+                <a:latin typeface="Aptos" pitchFamily="34" charset="0"/>
+                <a:ea typeface="Aptos" pitchFamily="34" charset="-122"/>
+                <a:cs typeface="Aptos" pitchFamily="34" charset="-120"/>
+              </a:rPr>
+              <a:t>Connect the concept to public health decisions, safeguards, documentation, or implementation work.</a:t>
+            </a:r>
+            <a:endParaRPr lang="en-US" sz="1250" dirty="0"/>
           </a:p>
         </p:txBody>
       </p:sp>
@@ -4059,7 +5837,32 @@
       </p:sp>
       <p:sp>
         <p:nvSpPr>
-          <p:cNvPr id="3" name="Text 1"/>
+          <p:cNvPr id="3" name="Shape 1"/>
+          <p:cNvSpPr/>
+          <p:nvPr/>
+        </p:nvSpPr>
+        <p:spPr>
+          <a:xfrm>
+            <a:off x="0" y="164592"/>
+            <a:ext cx="146304" cy="6693408"/>
+          </a:xfrm>
+          <a:prstGeom prst="rect">
+            <a:avLst/>
+          </a:prstGeom>
+          <a:solidFill>
+            <a:srgbClr val="2F8A28"/>
+          </a:solidFill>
+          <a:ln w="12700">
+            <a:solidFill>
+              <a:srgbClr val="2F8A28"/>
+            </a:solidFill>
+            <a:prstDash val="solid"/>
+          </a:ln>
+        </p:spPr>
+      </p:sp>
+      <p:sp>
+        <p:nvSpPr>
+          <p:cNvPr id="4" name="Text 2"/>
           <p:cNvSpPr/>
           <p:nvPr/>
         </p:nvSpPr>
@@ -4098,7 +5901,7 @@
       </p:sp>
       <p:sp>
         <p:nvSpPr>
-          <p:cNvPr id="4" name="Text 2"/>
+          <p:cNvPr id="5" name="Text 3"/>
           <p:cNvSpPr/>
           <p:nvPr/>
         </p:nvSpPr>
@@ -4137,7 +5940,7 @@
       </p:sp>
       <p:sp>
         <p:nvSpPr>
-          <p:cNvPr id="5" name="Text 3"/>
+          <p:cNvPr id="6" name="Text 4"/>
           <p:cNvSpPr/>
           <p:nvPr/>
         </p:nvSpPr>
@@ -4176,13 +5979,77 @@
       </p:sp>
       <p:sp>
         <p:nvSpPr>
-          <p:cNvPr id="6" name="Text 4"/>
+          <p:cNvPr id="7" name="Shape 5"/>
           <p:cNvSpPr/>
           <p:nvPr/>
         </p:nvSpPr>
         <p:spPr>
           <a:xfrm>
             <a:off x="640080" y="658368"/>
+            <a:ext cx="420624" cy="420624"/>
+          </a:xfrm>
+          <a:prstGeom prst="ellipse">
+            <a:avLst/>
+          </a:prstGeom>
+          <a:solidFill>
+            <a:srgbClr val="0068B7"/>
+          </a:solidFill>
+          <a:ln w="12700">
+            <a:solidFill>
+              <a:srgbClr val="0068B7"/>
+            </a:solidFill>
+            <a:prstDash val="solid"/>
+          </a:ln>
+        </p:spPr>
+      </p:sp>
+      <p:sp>
+        <p:nvSpPr>
+          <p:cNvPr id="8" name="Text 6"/>
+          <p:cNvSpPr/>
+          <p:nvPr/>
+        </p:nvSpPr>
+        <p:spPr>
+          <a:xfrm>
+            <a:off x="640080" y="731520"/>
+            <a:ext cx="420624" cy="164592"/>
+          </a:xfrm>
+          <a:prstGeom prst="rect">
+            <a:avLst/>
+          </a:prstGeom>
+          <a:noFill/>
+          <a:ln/>
+        </p:spPr>
+        <p:txBody>
+          <a:bodyPr wrap="square" lIns="0" tIns="0" rIns="0" bIns="0" rtlCol="0" anchor="ctr"/>
+          <a:lstStyle/>
+          <a:p>
+            <a:pPr algn="ctr" indent="0" marL="0">
+              <a:buNone/>
+            </a:pPr>
+            <a:r>
+              <a:rPr lang="en-US" sz="1100" b="1" dirty="0">
+                <a:solidFill>
+                  <a:srgbClr val="FFFFFF"/>
+                </a:solidFill>
+                <a:latin typeface="Aptos" pitchFamily="34" charset="0"/>
+                <a:ea typeface="Aptos" pitchFamily="34" charset="-122"/>
+                <a:cs typeface="Aptos" pitchFamily="34" charset="-120"/>
+              </a:rPr>
+              <a:t>10</a:t>
+            </a:r>
+            <a:endParaRPr lang="en-US" sz="1100" dirty="0"/>
+          </a:p>
+        </p:txBody>
+      </p:sp>
+      <p:sp>
+        <p:nvSpPr>
+          <p:cNvPr id="9" name="Text 7"/>
+          <p:cNvSpPr/>
+          <p:nvPr/>
+        </p:nvSpPr>
+        <p:spPr>
+          <a:xfrm>
+            <a:off x="640080" y="621792"/>
             <a:ext cx="10881360" cy="566928"/>
           </a:xfrm>
           <a:prstGeom prst="rect">
@@ -4209,7 +6076,7 @@
                 <a:ea typeface="Aptos Display" pitchFamily="34" charset="-122"/>
                 <a:cs typeface="Aptos Display" pitchFamily="34" charset="-120"/>
               </a:rPr>
-              <a:t>Expected Artifact or Evidence Continued</a:t>
+              <a:t>Practical Exercise</a:t>
             </a:r>
             <a:endParaRPr lang="en-US" sz="2700" dirty="0"/>
           </a:p>
@@ -4217,32 +6084,150 @@
       </p:sp>
       <p:sp>
         <p:nvSpPr>
-          <p:cNvPr id="7" name="Text 5"/>
-          <p:cNvSpPr/>
-          <p:nvPr/>
-        </p:nvSpPr>
-        <p:spPr>
-          <a:xfrm>
-            <a:off x="822960" y="1325880"/>
-            <a:ext cx="10378440" cy="4800600"/>
-          </a:xfrm>
-          <a:prstGeom prst="rect">
-            <a:avLst/>
-          </a:prstGeom>
-          <a:noFill/>
-          <a:ln/>
-        </p:spPr>
-        <p:txBody>
-          <a:bodyPr wrap="square" lIns="1016" tIns="1016" rIns="1016" bIns="1016" rtlCol="0" anchor="t">
+          <p:cNvPr id="10" name="Text 8"/>
+          <p:cNvSpPr/>
+          <p:nvPr/>
+        </p:nvSpPr>
+        <p:spPr>
+          <a:xfrm>
+            <a:off x="868680" y="1417320"/>
+            <a:ext cx="6675120" cy="4434840"/>
+          </a:xfrm>
+          <a:prstGeom prst="rect">
+            <a:avLst/>
+          </a:prstGeom>
+          <a:noFill/>
+          <a:ln/>
+        </p:spPr>
+        <p:txBody>
+          <a:bodyPr wrap="square" lIns="635" tIns="635" rIns="635" bIns="635" rtlCol="0" anchor="t">
             <a:normAutofit/>
           </a:bodyPr>
           <a:lstStyle/>
           <a:p>
+            <a:r>
+              <a:rPr lang="en-US" sz="1700" dirty="0">
+                <a:solidFill>
+                  <a:srgbClr val="17364A"/>
+                </a:solidFill>
+                <a:latin typeface="Aptos" pitchFamily="34" charset="0"/>
+                <a:ea typeface="Aptos" pitchFamily="34" charset="-122"/>
+                <a:cs typeface="Aptos" pitchFamily="34" charset="-120"/>
+              </a:rPr>
+              <a:t>Create a one-page model communication brief.</a:t>
+            </a:r>
+            <a:endParaRPr lang="en-US" sz="1700" dirty="0"/>
+          </a:p>
+          <a:p>
+            <a:r>
+              <a:rPr lang="en-US" sz="1700" dirty="0">
+                <a:solidFill>
+                  <a:srgbClr val="17364A"/>
+                </a:solidFill>
+                <a:latin typeface="Aptos" pitchFamily="34" charset="0"/>
+                <a:ea typeface="Aptos" pitchFamily="34" charset="-122"/>
+                <a:cs typeface="Aptos" pitchFamily="34" charset="-120"/>
+              </a:rPr>
+              <a:t>Include the decision question, model result, uncertainty, validation status, limitations, subgroup considerations,.</a:t>
+            </a:r>
+            <a:endParaRPr lang="en-US" sz="1700" dirty="0"/>
+          </a:p>
+        </p:txBody>
+      </p:sp>
+      <p:sp>
+        <p:nvSpPr>
+          <p:cNvPr id="11" name="Shape 9"/>
+          <p:cNvSpPr/>
+          <p:nvPr/>
+        </p:nvSpPr>
+        <p:spPr>
+          <a:xfrm>
+            <a:off x="7909560" y="1417320"/>
+            <a:ext cx="3154680" cy="1828800"/>
+          </a:xfrm>
+          <a:prstGeom prst="roundRect">
+            <a:avLst>
+              <a:gd name="adj" fmla="val 6000"/>
+            </a:avLst>
+          </a:prstGeom>
+          <a:solidFill>
+            <a:srgbClr val="EEF8ED"/>
+          </a:solidFill>
+          <a:ln w="12700">
+            <a:solidFill>
+              <a:srgbClr val="B9D7E6"/>
+            </a:solidFill>
+            <a:prstDash val="solid"/>
+          </a:ln>
+        </p:spPr>
+      </p:sp>
+      <p:sp>
+        <p:nvSpPr>
+          <p:cNvPr id="12" name="Text 10"/>
+          <p:cNvSpPr/>
+          <p:nvPr/>
+        </p:nvSpPr>
+        <p:spPr>
+          <a:xfrm>
+            <a:off x="8074152" y="1563624"/>
+            <a:ext cx="2825496" cy="201168"/>
+          </a:xfrm>
+          <a:prstGeom prst="rect">
+            <a:avLst/>
+          </a:prstGeom>
+          <a:noFill/>
+          <a:ln/>
+        </p:spPr>
+        <p:txBody>
+          <a:bodyPr wrap="square" lIns="0" tIns="0" rIns="0" bIns="0" rtlCol="0" anchor="ctr"/>
+          <a:lstStyle/>
+          <a:p>
             <a:pPr indent="0" marL="0">
               <a:buNone/>
             </a:pPr>
             <a:r>
-              <a:rPr lang="en-US" sz="1420" dirty="0">
+              <a:rPr lang="en-US" sz="950" b="1" dirty="0">
+                <a:solidFill>
+                  <a:srgbClr val="0068B7"/>
+                </a:solidFill>
+                <a:latin typeface="Aptos" pitchFamily="34" charset="0"/>
+                <a:ea typeface="Aptos" pitchFamily="34" charset="-122"/>
+                <a:cs typeface="Aptos" pitchFamily="34" charset="-120"/>
+              </a:rPr>
+              <a:t>Key idea</a:t>
+            </a:r>
+            <a:endParaRPr lang="en-US" sz="950" dirty="0"/>
+          </a:p>
+        </p:txBody>
+      </p:sp>
+      <p:sp>
+        <p:nvSpPr>
+          <p:cNvPr id="13" name="Text 11"/>
+          <p:cNvSpPr/>
+          <p:nvPr/>
+        </p:nvSpPr>
+        <p:spPr>
+          <a:xfrm>
+            <a:off x="8074152" y="1856232"/>
+            <a:ext cx="2825496" cy="1261872"/>
+          </a:xfrm>
+          <a:prstGeom prst="rect">
+            <a:avLst/>
+          </a:prstGeom>
+          <a:noFill/>
+          <a:ln/>
+        </p:spPr>
+        <p:txBody>
+          <a:bodyPr wrap="square" lIns="0" tIns="0" rIns="0" bIns="0" rtlCol="0" anchor="t">
+            <a:normAutofit/>
+          </a:bodyPr>
+          <a:lstStyle/>
+          <a:p>
+            <a:pPr indent="0" marL="0">
+              <a:buNone/>
+            </a:pPr>
+            <a:r>
+              <a:rPr lang="en-US" sz="1250" dirty="0">
                 <a:solidFill>
                   <a:srgbClr val="17364A"/>
                 </a:solidFill>
@@ -4250,9 +6235,116 @@
                 <a:ea typeface="Aptos" pitchFamily="34" charset="-122"/>
                 <a:cs typeface="Aptos" pitchFamily="34" charset="-120"/>
               </a:rPr>
-              <a:t>Review sign-off note</a:t>
-            </a:r>
-            <a:endParaRPr lang="en-US" sz="1420" dirty="0"/>
+              <a:t>Create a one-page model communication brief.</a:t>
+            </a:r>
+            <a:endParaRPr lang="en-US" sz="1250" dirty="0"/>
+          </a:p>
+        </p:txBody>
+      </p:sp>
+      <p:sp>
+        <p:nvSpPr>
+          <p:cNvPr id="14" name="Shape 12"/>
+          <p:cNvSpPr/>
+          <p:nvPr/>
+        </p:nvSpPr>
+        <p:spPr>
+          <a:xfrm>
+            <a:off x="7909560" y="3520440"/>
+            <a:ext cx="3154680" cy="1737360"/>
+          </a:xfrm>
+          <a:prstGeom prst="roundRect">
+            <a:avLst>
+              <a:gd name="adj" fmla="val 6316"/>
+            </a:avLst>
+          </a:prstGeom>
+          <a:solidFill>
+            <a:srgbClr val="EAF6F8"/>
+          </a:solidFill>
+          <a:ln w="12700">
+            <a:solidFill>
+              <a:srgbClr val="B9D7E6"/>
+            </a:solidFill>
+            <a:prstDash val="solid"/>
+          </a:ln>
+        </p:spPr>
+      </p:sp>
+      <p:sp>
+        <p:nvSpPr>
+          <p:cNvPr id="15" name="Text 13"/>
+          <p:cNvSpPr/>
+          <p:nvPr/>
+        </p:nvSpPr>
+        <p:spPr>
+          <a:xfrm>
+            <a:off x="8074152" y="3666744"/>
+            <a:ext cx="2825496" cy="201168"/>
+          </a:xfrm>
+          <a:prstGeom prst="rect">
+            <a:avLst/>
+          </a:prstGeom>
+          <a:noFill/>
+          <a:ln/>
+        </p:spPr>
+        <p:txBody>
+          <a:bodyPr wrap="square" lIns="0" tIns="0" rIns="0" bIns="0" rtlCol="0" anchor="ctr"/>
+          <a:lstStyle/>
+          <a:p>
+            <a:pPr indent="0" marL="0">
+              <a:buNone/>
+            </a:pPr>
+            <a:r>
+              <a:rPr lang="en-US" sz="950" b="1" dirty="0">
+                <a:solidFill>
+                  <a:srgbClr val="0068B7"/>
+                </a:solidFill>
+                <a:latin typeface="Aptos" pitchFamily="34" charset="0"/>
+                <a:ea typeface="Aptos" pitchFamily="34" charset="-122"/>
+                <a:cs typeface="Aptos" pitchFamily="34" charset="-120"/>
+              </a:rPr>
+              <a:t>Use this for</a:t>
+            </a:r>
+            <a:endParaRPr lang="en-US" sz="950" dirty="0"/>
+          </a:p>
+        </p:txBody>
+      </p:sp>
+      <p:sp>
+        <p:nvSpPr>
+          <p:cNvPr id="16" name="Text 14"/>
+          <p:cNvSpPr/>
+          <p:nvPr/>
+        </p:nvSpPr>
+        <p:spPr>
+          <a:xfrm>
+            <a:off x="8074152" y="3959352"/>
+            <a:ext cx="2825496" cy="1170432"/>
+          </a:xfrm>
+          <a:prstGeom prst="rect">
+            <a:avLst/>
+          </a:prstGeom>
+          <a:noFill/>
+          <a:ln/>
+        </p:spPr>
+        <p:txBody>
+          <a:bodyPr wrap="square" lIns="0" tIns="0" rIns="0" bIns="0" rtlCol="0" anchor="t">
+            <a:normAutofit/>
+          </a:bodyPr>
+          <a:lstStyle/>
+          <a:p>
+            <a:pPr indent="0" marL="0">
+              <a:buNone/>
+            </a:pPr>
+            <a:r>
+              <a:rPr lang="en-US" sz="1250" dirty="0">
+                <a:solidFill>
+                  <a:srgbClr val="17364A"/>
+                </a:solidFill>
+                <a:latin typeface="Aptos" pitchFamily="34" charset="0"/>
+                <a:ea typeface="Aptos" pitchFamily="34" charset="-122"/>
+                <a:cs typeface="Aptos" pitchFamily="34" charset="-120"/>
+              </a:rPr>
+              <a:t>Connect the concept to public health decisions, safeguards, documentation, or implementation work.</a:t>
+            </a:r>
+            <a:endParaRPr lang="en-US" sz="1250" dirty="0"/>
           </a:p>
         </p:txBody>
       </p:sp>
@@ -4315,7 +6407,32 @@
       </p:sp>
       <p:sp>
         <p:nvSpPr>
-          <p:cNvPr id="3" name="Text 1"/>
+          <p:cNvPr id="3" name="Shape 1"/>
+          <p:cNvSpPr/>
+          <p:nvPr/>
+        </p:nvSpPr>
+        <p:spPr>
+          <a:xfrm>
+            <a:off x="0" y="164592"/>
+            <a:ext cx="146304" cy="6693408"/>
+          </a:xfrm>
+          <a:prstGeom prst="rect">
+            <a:avLst/>
+          </a:prstGeom>
+          <a:solidFill>
+            <a:srgbClr val="2F8A28"/>
+          </a:solidFill>
+          <a:ln w="12700">
+            <a:solidFill>
+              <a:srgbClr val="2F8A28"/>
+            </a:solidFill>
+            <a:prstDash val="solid"/>
+          </a:ln>
+        </p:spPr>
+      </p:sp>
+      <p:sp>
+        <p:nvSpPr>
+          <p:cNvPr id="4" name="Text 2"/>
           <p:cNvSpPr/>
           <p:nvPr/>
         </p:nvSpPr>
@@ -4354,7 +6471,7 @@
       </p:sp>
       <p:sp>
         <p:nvSpPr>
-          <p:cNvPr id="4" name="Text 2"/>
+          <p:cNvPr id="5" name="Text 3"/>
           <p:cNvSpPr/>
           <p:nvPr/>
         </p:nvSpPr>
@@ -4393,7 +6510,7 @@
       </p:sp>
       <p:sp>
         <p:nvSpPr>
-          <p:cNvPr id="5" name="Text 3"/>
+          <p:cNvPr id="6" name="Text 4"/>
           <p:cNvSpPr/>
           <p:nvPr/>
         </p:nvSpPr>
@@ -4432,13 +6549,77 @@
       </p:sp>
       <p:sp>
         <p:nvSpPr>
-          <p:cNvPr id="6" name="Text 4"/>
+          <p:cNvPr id="7" name="Shape 5"/>
           <p:cNvSpPr/>
           <p:nvPr/>
         </p:nvSpPr>
         <p:spPr>
           <a:xfrm>
             <a:off x="640080" y="658368"/>
+            <a:ext cx="420624" cy="420624"/>
+          </a:xfrm>
+          <a:prstGeom prst="ellipse">
+            <a:avLst/>
+          </a:prstGeom>
+          <a:solidFill>
+            <a:srgbClr val="0068B7"/>
+          </a:solidFill>
+          <a:ln w="12700">
+            <a:solidFill>
+              <a:srgbClr val="0068B7"/>
+            </a:solidFill>
+            <a:prstDash val="solid"/>
+          </a:ln>
+        </p:spPr>
+      </p:sp>
+      <p:sp>
+        <p:nvSpPr>
+          <p:cNvPr id="8" name="Text 6"/>
+          <p:cNvSpPr/>
+          <p:nvPr/>
+        </p:nvSpPr>
+        <p:spPr>
+          <a:xfrm>
+            <a:off x="640080" y="731520"/>
+            <a:ext cx="420624" cy="164592"/>
+          </a:xfrm>
+          <a:prstGeom prst="rect">
+            <a:avLst/>
+          </a:prstGeom>
+          <a:noFill/>
+          <a:ln/>
+        </p:spPr>
+        <p:txBody>
+          <a:bodyPr wrap="square" lIns="0" tIns="0" rIns="0" bIns="0" rtlCol="0" anchor="ctr"/>
+          <a:lstStyle/>
+          <a:p>
+            <a:pPr algn="ctr" indent="0" marL="0">
+              <a:buNone/>
+            </a:pPr>
+            <a:r>
+              <a:rPr lang="en-US" sz="1100" b="1" dirty="0">
+                <a:solidFill>
+                  <a:srgbClr val="FFFFFF"/>
+                </a:solidFill>
+                <a:latin typeface="Aptos" pitchFamily="34" charset="0"/>
+                <a:ea typeface="Aptos" pitchFamily="34" charset="-122"/>
+                <a:cs typeface="Aptos" pitchFamily="34" charset="-120"/>
+              </a:rPr>
+              <a:t>11</a:t>
+            </a:r>
+            <a:endParaRPr lang="en-US" sz="1100" dirty="0"/>
+          </a:p>
+        </p:txBody>
+      </p:sp>
+      <p:sp>
+        <p:nvSpPr>
+          <p:cNvPr id="9" name="Text 7"/>
+          <p:cNvSpPr/>
+          <p:nvPr/>
+        </p:nvSpPr>
+        <p:spPr>
+          <a:xfrm>
+            <a:off x="640080" y="621792"/>
             <a:ext cx="10881360" cy="566928"/>
           </a:xfrm>
           <a:prstGeom prst="rect">
@@ -4465,7 +6646,7 @@
                 <a:ea typeface="Aptos Display" pitchFamily="34" charset="-122"/>
                 <a:cs typeface="Aptos Display" pitchFamily="34" charset="-120"/>
               </a:rPr>
-              <a:t>Expected Assignment</a:t>
+              <a:t>Expected Artifact or Evidence</a:t>
             </a:r>
             <a:endParaRPr lang="en-US" sz="2700" dirty="0"/>
           </a:p>
@@ -4473,14 +6654,14 @@
       </p:sp>
       <p:sp>
         <p:nvSpPr>
-          <p:cNvPr id="7" name="Text 5"/>
-          <p:cNvSpPr/>
-          <p:nvPr/>
-        </p:nvSpPr>
-        <p:spPr>
-          <a:xfrm>
-            <a:off x="822960" y="1325880"/>
-            <a:ext cx="10378440" cy="4800600"/>
+          <p:cNvPr id="10" name="Text 8"/>
+          <p:cNvSpPr/>
+          <p:nvPr/>
+        </p:nvSpPr>
+        <p:spPr>
+          <a:xfrm>
+            <a:off x="868680" y="1417320"/>
+            <a:ext cx="6675120" cy="4434840"/>
           </a:xfrm>
           <a:prstGeom prst="rect">
             <a:avLst/>
@@ -4495,7 +6676,7 @@
           <a:lstStyle/>
           <a:p>
             <a:r>
-              <a:rPr lang="en-US" sz="1450" dirty="0">
+              <a:rPr lang="en-US" sz="1700" dirty="0">
                 <a:solidFill>
                   <a:srgbClr val="17364A"/>
                 </a:solidFill>
@@ -4505,11 +6686,11 @@
               </a:rPr>
               <a:t>Model communication brief</a:t>
             </a:r>
-            <a:endParaRPr lang="en-US" sz="1450" dirty="0"/>
-          </a:p>
-          <a:p>
-            <a:r>
-              <a:rPr lang="en-US" sz="1450" dirty="0">
+            <a:endParaRPr lang="en-US" sz="1700" dirty="0"/>
+          </a:p>
+          <a:p>
+            <a:r>
+              <a:rPr lang="en-US" sz="1700" dirty="0">
                 <a:solidFill>
                   <a:srgbClr val="17364A"/>
                 </a:solidFill>
@@ -4519,11 +6700,11 @@
               </a:rPr>
               <a:t>Plain-language uncertainty statement</a:t>
             </a:r>
-            <a:endParaRPr lang="en-US" sz="1450" dirty="0"/>
-          </a:p>
-          <a:p>
-            <a:r>
-              <a:rPr lang="en-US" sz="1450" dirty="0">
+            <a:endParaRPr lang="en-US" sz="1700" dirty="0"/>
+          </a:p>
+          <a:p>
+            <a:r>
+              <a:rPr lang="en-US" sz="1700" dirty="0">
                 <a:solidFill>
                   <a:srgbClr val="17364A"/>
                 </a:solidFill>
@@ -4533,11 +6714,104 @@
               </a:rPr>
               <a:t>Subgroup caveat if relevant</a:t>
             </a:r>
-            <a:endParaRPr lang="en-US" sz="1450" dirty="0"/>
-          </a:p>
-          <a:p>
-            <a:r>
-              <a:rPr lang="en-US" sz="1450" dirty="0">
+            <a:endParaRPr lang="en-US" sz="1700" dirty="0"/>
+          </a:p>
+        </p:txBody>
+      </p:sp>
+      <p:sp>
+        <p:nvSpPr>
+          <p:cNvPr id="11" name="Shape 9"/>
+          <p:cNvSpPr/>
+          <p:nvPr/>
+        </p:nvSpPr>
+        <p:spPr>
+          <a:xfrm>
+            <a:off x="7909560" y="1417320"/>
+            <a:ext cx="3154680" cy="1828800"/>
+          </a:xfrm>
+          <a:prstGeom prst="roundRect">
+            <a:avLst>
+              <a:gd name="adj" fmla="val 6000"/>
+            </a:avLst>
+          </a:prstGeom>
+          <a:solidFill>
+            <a:srgbClr val="EEF8ED"/>
+          </a:solidFill>
+          <a:ln w="12700">
+            <a:solidFill>
+              <a:srgbClr val="B9D7E6"/>
+            </a:solidFill>
+            <a:prstDash val="solid"/>
+          </a:ln>
+        </p:spPr>
+      </p:sp>
+      <p:sp>
+        <p:nvSpPr>
+          <p:cNvPr id="12" name="Text 10"/>
+          <p:cNvSpPr/>
+          <p:nvPr/>
+        </p:nvSpPr>
+        <p:spPr>
+          <a:xfrm>
+            <a:off x="8074152" y="1563624"/>
+            <a:ext cx="2825496" cy="201168"/>
+          </a:xfrm>
+          <a:prstGeom prst="rect">
+            <a:avLst/>
+          </a:prstGeom>
+          <a:noFill/>
+          <a:ln/>
+        </p:spPr>
+        <p:txBody>
+          <a:bodyPr wrap="square" lIns="0" tIns="0" rIns="0" bIns="0" rtlCol="0" anchor="ctr"/>
+          <a:lstStyle/>
+          <a:p>
+            <a:pPr indent="0" marL="0">
+              <a:buNone/>
+            </a:pPr>
+            <a:r>
+              <a:rPr lang="en-US" sz="950" b="1" dirty="0">
+                <a:solidFill>
+                  <a:srgbClr val="0068B7"/>
+                </a:solidFill>
+                <a:latin typeface="Aptos" pitchFamily="34" charset="0"/>
+                <a:ea typeface="Aptos" pitchFamily="34" charset="-122"/>
+                <a:cs typeface="Aptos" pitchFamily="34" charset="-120"/>
+              </a:rPr>
+              <a:t>Key idea</a:t>
+            </a:r>
+            <a:endParaRPr lang="en-US" sz="950" dirty="0"/>
+          </a:p>
+        </p:txBody>
+      </p:sp>
+      <p:sp>
+        <p:nvSpPr>
+          <p:cNvPr id="13" name="Text 11"/>
+          <p:cNvSpPr/>
+          <p:nvPr/>
+        </p:nvSpPr>
+        <p:spPr>
+          <a:xfrm>
+            <a:off x="8074152" y="1856232"/>
+            <a:ext cx="2825496" cy="1261872"/>
+          </a:xfrm>
+          <a:prstGeom prst="rect">
+            <a:avLst/>
+          </a:prstGeom>
+          <a:noFill/>
+          <a:ln/>
+        </p:spPr>
+        <p:txBody>
+          <a:bodyPr wrap="square" lIns="0" tIns="0" rIns="0" bIns="0" rtlCol="0" anchor="t">
+            <a:normAutofit/>
+          </a:bodyPr>
+          <a:lstStyle/>
+          <a:p>
+            <a:pPr indent="0" marL="0">
+              <a:buNone/>
+            </a:pPr>
+            <a:r>
+              <a:rPr lang="en-US" sz="1250" dirty="0">
                 <a:solidFill>
                   <a:srgbClr val="17364A"/>
                 </a:solidFill>
@@ -4545,9 +6819,116 @@
                 <a:ea typeface="Aptos" pitchFamily="34" charset="-122"/>
                 <a:cs typeface="Aptos" pitchFamily="34" charset="-120"/>
               </a:rPr>
-              <a:t>Review sign-off note</a:t>
-            </a:r>
-            <a:endParaRPr lang="en-US" sz="1450" dirty="0"/>
+              <a:t>Model communication brief</a:t>
+            </a:r>
+            <a:endParaRPr lang="en-US" sz="1250" dirty="0"/>
+          </a:p>
+        </p:txBody>
+      </p:sp>
+      <p:sp>
+        <p:nvSpPr>
+          <p:cNvPr id="14" name="Shape 12"/>
+          <p:cNvSpPr/>
+          <p:nvPr/>
+        </p:nvSpPr>
+        <p:spPr>
+          <a:xfrm>
+            <a:off x="7909560" y="3520440"/>
+            <a:ext cx="3154680" cy="1737360"/>
+          </a:xfrm>
+          <a:prstGeom prst="roundRect">
+            <a:avLst>
+              <a:gd name="adj" fmla="val 6316"/>
+            </a:avLst>
+          </a:prstGeom>
+          <a:solidFill>
+            <a:srgbClr val="EAF6F8"/>
+          </a:solidFill>
+          <a:ln w="12700">
+            <a:solidFill>
+              <a:srgbClr val="B9D7E6"/>
+            </a:solidFill>
+            <a:prstDash val="solid"/>
+          </a:ln>
+        </p:spPr>
+      </p:sp>
+      <p:sp>
+        <p:nvSpPr>
+          <p:cNvPr id="15" name="Text 13"/>
+          <p:cNvSpPr/>
+          <p:nvPr/>
+        </p:nvSpPr>
+        <p:spPr>
+          <a:xfrm>
+            <a:off x="8074152" y="3666744"/>
+            <a:ext cx="2825496" cy="201168"/>
+          </a:xfrm>
+          <a:prstGeom prst="rect">
+            <a:avLst/>
+          </a:prstGeom>
+          <a:noFill/>
+          <a:ln/>
+        </p:spPr>
+        <p:txBody>
+          <a:bodyPr wrap="square" lIns="0" tIns="0" rIns="0" bIns="0" rtlCol="0" anchor="ctr"/>
+          <a:lstStyle/>
+          <a:p>
+            <a:pPr indent="0" marL="0">
+              <a:buNone/>
+            </a:pPr>
+            <a:r>
+              <a:rPr lang="en-US" sz="950" b="1" dirty="0">
+                <a:solidFill>
+                  <a:srgbClr val="0068B7"/>
+                </a:solidFill>
+                <a:latin typeface="Aptos" pitchFamily="34" charset="0"/>
+                <a:ea typeface="Aptos" pitchFamily="34" charset="-122"/>
+                <a:cs typeface="Aptos" pitchFamily="34" charset="-120"/>
+              </a:rPr>
+              <a:t>Use this for</a:t>
+            </a:r>
+            <a:endParaRPr lang="en-US" sz="950" dirty="0"/>
+          </a:p>
+        </p:txBody>
+      </p:sp>
+      <p:sp>
+        <p:nvSpPr>
+          <p:cNvPr id="16" name="Text 14"/>
+          <p:cNvSpPr/>
+          <p:nvPr/>
+        </p:nvSpPr>
+        <p:spPr>
+          <a:xfrm>
+            <a:off x="8074152" y="3959352"/>
+            <a:ext cx="2825496" cy="1170432"/>
+          </a:xfrm>
+          <a:prstGeom prst="rect">
+            <a:avLst/>
+          </a:prstGeom>
+          <a:noFill/>
+          <a:ln/>
+        </p:spPr>
+        <p:txBody>
+          <a:bodyPr wrap="square" lIns="0" tIns="0" rIns="0" bIns="0" rtlCol="0" anchor="t">
+            <a:normAutofit/>
+          </a:bodyPr>
+          <a:lstStyle/>
+          <a:p>
+            <a:pPr indent="0" marL="0">
+              <a:buNone/>
+            </a:pPr>
+            <a:r>
+              <a:rPr lang="en-US" sz="1250" dirty="0">
+                <a:solidFill>
+                  <a:srgbClr val="17364A"/>
+                </a:solidFill>
+                <a:latin typeface="Aptos" pitchFamily="34" charset="0"/>
+                <a:ea typeface="Aptos" pitchFamily="34" charset="-122"/>
+                <a:cs typeface="Aptos" pitchFamily="34" charset="-120"/>
+              </a:rPr>
+              <a:t>Connect the concept to public health decisions, safeguards, documentation, or implementation work.</a:t>
+            </a:r>
+            <a:endParaRPr lang="en-US" sz="1250" dirty="0"/>
           </a:p>
         </p:txBody>
       </p:sp>
@@ -4610,7 +6991,32 @@
       </p:sp>
       <p:sp>
         <p:nvSpPr>
-          <p:cNvPr id="3" name="Text 1"/>
+          <p:cNvPr id="3" name="Shape 1"/>
+          <p:cNvSpPr/>
+          <p:nvPr/>
+        </p:nvSpPr>
+        <p:spPr>
+          <a:xfrm>
+            <a:off x="0" y="164592"/>
+            <a:ext cx="146304" cy="6693408"/>
+          </a:xfrm>
+          <a:prstGeom prst="rect">
+            <a:avLst/>
+          </a:prstGeom>
+          <a:solidFill>
+            <a:srgbClr val="2F8A28"/>
+          </a:solidFill>
+          <a:ln w="12700">
+            <a:solidFill>
+              <a:srgbClr val="2F8A28"/>
+            </a:solidFill>
+            <a:prstDash val="solid"/>
+          </a:ln>
+        </p:spPr>
+      </p:sp>
+      <p:sp>
+        <p:nvSpPr>
+          <p:cNvPr id="4" name="Text 2"/>
           <p:cNvSpPr/>
           <p:nvPr/>
         </p:nvSpPr>
@@ -4649,7 +7055,7 @@
       </p:sp>
       <p:sp>
         <p:nvSpPr>
-          <p:cNvPr id="4" name="Text 2"/>
+          <p:cNvPr id="5" name="Text 3"/>
           <p:cNvSpPr/>
           <p:nvPr/>
         </p:nvSpPr>
@@ -4688,7 +7094,7 @@
       </p:sp>
       <p:sp>
         <p:nvSpPr>
-          <p:cNvPr id="5" name="Text 3"/>
+          <p:cNvPr id="6" name="Text 4"/>
           <p:cNvSpPr/>
           <p:nvPr/>
         </p:nvSpPr>
@@ -4727,7 +7133,7 @@
       </p:sp>
       <p:sp>
         <p:nvSpPr>
-          <p:cNvPr id="6" name="Text 4"/>
+          <p:cNvPr id="7" name="Text 5"/>
           <p:cNvSpPr/>
           <p:nvPr/>
         </p:nvSpPr>
@@ -4760,7 +7166,7 @@
                 <a:ea typeface="Aptos Display" pitchFamily="34" charset="-122"/>
                 <a:cs typeface="Aptos Display" pitchFamily="34" charset="-120"/>
               </a:rPr>
-              <a:t>Knowledge Check</a:t>
+              <a:t>Expected Artifact or Evidence Continued</a:t>
             </a:r>
             <a:endParaRPr lang="en-US" sz="2700" dirty="0"/>
           </a:p>
@@ -4768,14 +7174,14 @@
       </p:sp>
       <p:sp>
         <p:nvSpPr>
-          <p:cNvPr id="7" name="Text 5"/>
-          <p:cNvSpPr/>
-          <p:nvPr/>
-        </p:nvSpPr>
-        <p:spPr>
-          <a:xfrm>
-            <a:off x="822960" y="1325880"/>
-            <a:ext cx="10378440" cy="4800600"/>
+          <p:cNvPr id="8" name="Text 6"/>
+          <p:cNvSpPr/>
+          <p:nvPr/>
+        </p:nvSpPr>
+        <p:spPr>
+          <a:xfrm>
+            <a:off x="868680" y="1417320"/>
+            <a:ext cx="6675120" cy="4434840"/>
           </a:xfrm>
           <a:prstGeom prst="rect">
             <a:avLst/>
@@ -4790,7 +7196,7 @@
           <a:lstStyle/>
           <a:p>
             <a:r>
-              <a:rPr lang="en-US" sz="1450" dirty="0">
+              <a:rPr lang="en-US" sz="1700" dirty="0">
                 <a:solidFill>
                   <a:srgbClr val="17364A"/>
                 </a:solidFill>
@@ -4798,13 +7204,106 @@
                 <a:ea typeface="Aptos" pitchFamily="34" charset="-122"/>
                 <a:cs typeface="Aptos" pitchFamily="34" charset="-120"/>
               </a:rPr>
-              <a:t>1. What is the best reason to communicate uncertainty with model results?</a:t>
-            </a:r>
-            <a:endParaRPr lang="en-US" sz="1450" dirty="0"/>
-          </a:p>
-          <a:p>
-            <a:r>
-              <a:rPr lang="en-US" sz="1450" dirty="0">
+              <a:t>Review sign-off note</a:t>
+            </a:r>
+            <a:endParaRPr lang="en-US" sz="1700" dirty="0"/>
+          </a:p>
+        </p:txBody>
+      </p:sp>
+      <p:sp>
+        <p:nvSpPr>
+          <p:cNvPr id="9" name="Shape 7"/>
+          <p:cNvSpPr/>
+          <p:nvPr/>
+        </p:nvSpPr>
+        <p:spPr>
+          <a:xfrm>
+            <a:off x="7909560" y="1417320"/>
+            <a:ext cx="3154680" cy="1828800"/>
+          </a:xfrm>
+          <a:prstGeom prst="roundRect">
+            <a:avLst>
+              <a:gd name="adj" fmla="val 6000"/>
+            </a:avLst>
+          </a:prstGeom>
+          <a:solidFill>
+            <a:srgbClr val="EEF8ED"/>
+          </a:solidFill>
+          <a:ln w="12700">
+            <a:solidFill>
+              <a:srgbClr val="B9D7E6"/>
+            </a:solidFill>
+            <a:prstDash val="solid"/>
+          </a:ln>
+        </p:spPr>
+      </p:sp>
+      <p:sp>
+        <p:nvSpPr>
+          <p:cNvPr id="10" name="Text 8"/>
+          <p:cNvSpPr/>
+          <p:nvPr/>
+        </p:nvSpPr>
+        <p:spPr>
+          <a:xfrm>
+            <a:off x="8074152" y="1563624"/>
+            <a:ext cx="2825496" cy="201168"/>
+          </a:xfrm>
+          <a:prstGeom prst="rect">
+            <a:avLst/>
+          </a:prstGeom>
+          <a:noFill/>
+          <a:ln/>
+        </p:spPr>
+        <p:txBody>
+          <a:bodyPr wrap="square" lIns="0" tIns="0" rIns="0" bIns="0" rtlCol="0" anchor="ctr"/>
+          <a:lstStyle/>
+          <a:p>
+            <a:pPr indent="0" marL="0">
+              <a:buNone/>
+            </a:pPr>
+            <a:r>
+              <a:rPr lang="en-US" sz="950" b="1" dirty="0">
+                <a:solidFill>
+                  <a:srgbClr val="0068B7"/>
+                </a:solidFill>
+                <a:latin typeface="Aptos" pitchFamily="34" charset="0"/>
+                <a:ea typeface="Aptos" pitchFamily="34" charset="-122"/>
+                <a:cs typeface="Aptos" pitchFamily="34" charset="-120"/>
+              </a:rPr>
+              <a:t>Key idea</a:t>
+            </a:r>
+            <a:endParaRPr lang="en-US" sz="950" dirty="0"/>
+          </a:p>
+        </p:txBody>
+      </p:sp>
+      <p:sp>
+        <p:nvSpPr>
+          <p:cNvPr id="11" name="Text 9"/>
+          <p:cNvSpPr/>
+          <p:nvPr/>
+        </p:nvSpPr>
+        <p:spPr>
+          <a:xfrm>
+            <a:off x="8074152" y="1856232"/>
+            <a:ext cx="2825496" cy="1261872"/>
+          </a:xfrm>
+          <a:prstGeom prst="rect">
+            <a:avLst/>
+          </a:prstGeom>
+          <a:noFill/>
+          <a:ln/>
+        </p:spPr>
+        <p:txBody>
+          <a:bodyPr wrap="square" lIns="0" tIns="0" rIns="0" bIns="0" rtlCol="0" anchor="t">
+            <a:normAutofit/>
+          </a:bodyPr>
+          <a:lstStyle/>
+          <a:p>
+            <a:pPr indent="0" marL="0">
+              <a:buNone/>
+            </a:pPr>
+            <a:r>
+              <a:rPr lang="en-US" sz="1250" dirty="0">
                 <a:solidFill>
                   <a:srgbClr val="17364A"/>
                 </a:solidFill>
@@ -4812,13 +7311,106 @@
                 <a:ea typeface="Aptos" pitchFamily="34" charset="-122"/>
                 <a:cs typeface="Aptos" pitchFamily="34" charset="-120"/>
               </a:rPr>
-              <a:t>2. What is the best reason to assign an accountability owner?</a:t>
-            </a:r>
-            <a:endParaRPr lang="en-US" sz="1450" dirty="0"/>
-          </a:p>
-          <a:p>
-            <a:r>
-              <a:rPr lang="en-US" sz="1450" dirty="0">
+              <a:t>Review sign-off note</a:t>
+            </a:r>
+            <a:endParaRPr lang="en-US" sz="1250" dirty="0"/>
+          </a:p>
+        </p:txBody>
+      </p:sp>
+      <p:sp>
+        <p:nvSpPr>
+          <p:cNvPr id="12" name="Shape 10"/>
+          <p:cNvSpPr/>
+          <p:nvPr/>
+        </p:nvSpPr>
+        <p:spPr>
+          <a:xfrm>
+            <a:off x="7909560" y="3520440"/>
+            <a:ext cx="3154680" cy="1737360"/>
+          </a:xfrm>
+          <a:prstGeom prst="roundRect">
+            <a:avLst>
+              <a:gd name="adj" fmla="val 6316"/>
+            </a:avLst>
+          </a:prstGeom>
+          <a:solidFill>
+            <a:srgbClr val="EAF6F8"/>
+          </a:solidFill>
+          <a:ln w="12700">
+            <a:solidFill>
+              <a:srgbClr val="B9D7E6"/>
+            </a:solidFill>
+            <a:prstDash val="solid"/>
+          </a:ln>
+        </p:spPr>
+      </p:sp>
+      <p:sp>
+        <p:nvSpPr>
+          <p:cNvPr id="13" name="Text 11"/>
+          <p:cNvSpPr/>
+          <p:nvPr/>
+        </p:nvSpPr>
+        <p:spPr>
+          <a:xfrm>
+            <a:off x="8074152" y="3666744"/>
+            <a:ext cx="2825496" cy="201168"/>
+          </a:xfrm>
+          <a:prstGeom prst="rect">
+            <a:avLst/>
+          </a:prstGeom>
+          <a:noFill/>
+          <a:ln/>
+        </p:spPr>
+        <p:txBody>
+          <a:bodyPr wrap="square" lIns="0" tIns="0" rIns="0" bIns="0" rtlCol="0" anchor="ctr"/>
+          <a:lstStyle/>
+          <a:p>
+            <a:pPr indent="0" marL="0">
+              <a:buNone/>
+            </a:pPr>
+            <a:r>
+              <a:rPr lang="en-US" sz="950" b="1" dirty="0">
+                <a:solidFill>
+                  <a:srgbClr val="0068B7"/>
+                </a:solidFill>
+                <a:latin typeface="Aptos" pitchFamily="34" charset="0"/>
+                <a:ea typeface="Aptos" pitchFamily="34" charset="-122"/>
+                <a:cs typeface="Aptos" pitchFamily="34" charset="-120"/>
+              </a:rPr>
+              <a:t>Use this for</a:t>
+            </a:r>
+            <a:endParaRPr lang="en-US" sz="950" dirty="0"/>
+          </a:p>
+        </p:txBody>
+      </p:sp>
+      <p:sp>
+        <p:nvSpPr>
+          <p:cNvPr id="14" name="Text 12"/>
+          <p:cNvSpPr/>
+          <p:nvPr/>
+        </p:nvSpPr>
+        <p:spPr>
+          <a:xfrm>
+            <a:off x="8074152" y="3959352"/>
+            <a:ext cx="2825496" cy="1170432"/>
+          </a:xfrm>
+          <a:prstGeom prst="rect">
+            <a:avLst/>
+          </a:prstGeom>
+          <a:noFill/>
+          <a:ln/>
+        </p:spPr>
+        <p:txBody>
+          <a:bodyPr wrap="square" lIns="0" tIns="0" rIns="0" bIns="0" rtlCol="0" anchor="t">
+            <a:normAutofit/>
+          </a:bodyPr>
+          <a:lstStyle/>
+          <a:p>
+            <a:pPr indent="0" marL="0">
+              <a:buNone/>
+            </a:pPr>
+            <a:r>
+              <a:rPr lang="en-US" sz="1250" dirty="0">
                 <a:solidFill>
                   <a:srgbClr val="17364A"/>
                 </a:solidFill>
@@ -4826,37 +7418,9 @@
                 <a:ea typeface="Aptos" pitchFamily="34" charset="-122"/>
                 <a:cs typeface="Aptos" pitchFamily="34" charset="-120"/>
               </a:rPr>
-              <a:t>3. When should an AI-supported workflow be escalated for review?</a:t>
-            </a:r>
-            <a:endParaRPr lang="en-US" sz="1450" dirty="0"/>
-          </a:p>
-          <a:p>
-            <a:r>
-              <a:rPr lang="en-US" sz="1450" dirty="0">
-                <a:solidFill>
-                  <a:srgbClr val="17364A"/>
-                </a:solidFill>
-                <a:latin typeface="Aptos" pitchFamily="34" charset="0"/>
-                <a:ea typeface="Aptos" pitchFamily="34" charset="-122"/>
-                <a:cs typeface="Aptos" pitchFamily="34" charset="-120"/>
-              </a:rPr>
-              <a:t>4. Which practice best supports public accountability?</a:t>
-            </a:r>
-            <a:endParaRPr lang="en-US" sz="1450" dirty="0"/>
-          </a:p>
-          <a:p>
-            <a:r>
-              <a:rPr lang="en-US" sz="1450" dirty="0">
-                <a:solidFill>
-                  <a:srgbClr val="17364A"/>
-                </a:solidFill>
-                <a:latin typeface="Aptos" pitchFamily="34" charset="0"/>
-                <a:ea typeface="Aptos" pitchFamily="34" charset="-122"/>
-                <a:cs typeface="Aptos" pitchFamily="34" charset="-120"/>
-              </a:rPr>
-              <a:t>5. What should happen when data sources, policy, vendor configuration, or workflow use changes?</a:t>
-            </a:r>
-            <a:endParaRPr lang="en-US" sz="1450" dirty="0"/>
+              <a:t>Connect the concept to public health decisions, safeguards, documentation, or implementation work.</a:t>
+            </a:r>
+            <a:endParaRPr lang="en-US" sz="1250" dirty="0"/>
           </a:p>
         </p:txBody>
       </p:sp>
@@ -4919,7 +7483,32 @@
       </p:sp>
       <p:sp>
         <p:nvSpPr>
-          <p:cNvPr id="3" name="Text 1"/>
+          <p:cNvPr id="3" name="Shape 1"/>
+          <p:cNvSpPr/>
+          <p:nvPr/>
+        </p:nvSpPr>
+        <p:spPr>
+          <a:xfrm>
+            <a:off x="0" y="164592"/>
+            <a:ext cx="146304" cy="6693408"/>
+          </a:xfrm>
+          <a:prstGeom prst="rect">
+            <a:avLst/>
+          </a:prstGeom>
+          <a:solidFill>
+            <a:srgbClr val="2F8A28"/>
+          </a:solidFill>
+          <a:ln w="12700">
+            <a:solidFill>
+              <a:srgbClr val="2F8A28"/>
+            </a:solidFill>
+            <a:prstDash val="solid"/>
+          </a:ln>
+        </p:spPr>
+      </p:sp>
+      <p:sp>
+        <p:nvSpPr>
+          <p:cNvPr id="4" name="Text 2"/>
           <p:cNvSpPr/>
           <p:nvPr/>
         </p:nvSpPr>
@@ -4958,7 +7547,7 @@
       </p:sp>
       <p:sp>
         <p:nvSpPr>
-          <p:cNvPr id="4" name="Text 2"/>
+          <p:cNvPr id="5" name="Text 3"/>
           <p:cNvSpPr/>
           <p:nvPr/>
         </p:nvSpPr>
@@ -4997,7 +7586,7 @@
       </p:sp>
       <p:sp>
         <p:nvSpPr>
-          <p:cNvPr id="5" name="Text 3"/>
+          <p:cNvPr id="6" name="Text 4"/>
           <p:cNvSpPr/>
           <p:nvPr/>
         </p:nvSpPr>
@@ -5036,13 +7625,77 @@
       </p:sp>
       <p:sp>
         <p:nvSpPr>
-          <p:cNvPr id="6" name="Text 4"/>
+          <p:cNvPr id="7" name="Shape 5"/>
           <p:cNvSpPr/>
           <p:nvPr/>
         </p:nvSpPr>
         <p:spPr>
           <a:xfrm>
             <a:off x="640080" y="658368"/>
+            <a:ext cx="420624" cy="420624"/>
+          </a:xfrm>
+          <a:prstGeom prst="ellipse">
+            <a:avLst/>
+          </a:prstGeom>
+          <a:solidFill>
+            <a:srgbClr val="0068B7"/>
+          </a:solidFill>
+          <a:ln w="12700">
+            <a:solidFill>
+              <a:srgbClr val="0068B7"/>
+            </a:solidFill>
+            <a:prstDash val="solid"/>
+          </a:ln>
+        </p:spPr>
+      </p:sp>
+      <p:sp>
+        <p:nvSpPr>
+          <p:cNvPr id="8" name="Text 6"/>
+          <p:cNvSpPr/>
+          <p:nvPr/>
+        </p:nvSpPr>
+        <p:spPr>
+          <a:xfrm>
+            <a:off x="640080" y="731520"/>
+            <a:ext cx="420624" cy="164592"/>
+          </a:xfrm>
+          <a:prstGeom prst="rect">
+            <a:avLst/>
+          </a:prstGeom>
+          <a:noFill/>
+          <a:ln/>
+        </p:spPr>
+        <p:txBody>
+          <a:bodyPr wrap="square" lIns="0" tIns="0" rIns="0" bIns="0" rtlCol="0" anchor="ctr"/>
+          <a:lstStyle/>
+          <a:p>
+            <a:pPr algn="ctr" indent="0" marL="0">
+              <a:buNone/>
+            </a:pPr>
+            <a:r>
+              <a:rPr lang="en-US" sz="1100" b="1" dirty="0">
+                <a:solidFill>
+                  <a:srgbClr val="FFFFFF"/>
+                </a:solidFill>
+                <a:latin typeface="Aptos" pitchFamily="34" charset="0"/>
+                <a:ea typeface="Aptos" pitchFamily="34" charset="-122"/>
+                <a:cs typeface="Aptos" pitchFamily="34" charset="-120"/>
+              </a:rPr>
+              <a:t>12</a:t>
+            </a:r>
+            <a:endParaRPr lang="en-US" sz="1100" dirty="0"/>
+          </a:p>
+        </p:txBody>
+      </p:sp>
+      <p:sp>
+        <p:nvSpPr>
+          <p:cNvPr id="9" name="Text 7"/>
+          <p:cNvSpPr/>
+          <p:nvPr/>
+        </p:nvSpPr>
+        <p:spPr>
+          <a:xfrm>
+            <a:off x="640080" y="621792"/>
             <a:ext cx="10881360" cy="566928"/>
           </a:xfrm>
           <a:prstGeom prst="rect">
@@ -5069,7 +7722,7 @@
                 <a:ea typeface="Aptos Display" pitchFamily="34" charset="-122"/>
                 <a:cs typeface="Aptos Display" pitchFamily="34" charset="-120"/>
               </a:rPr>
-              <a:t>References and Resources</a:t>
+              <a:t>Expected Assignment</a:t>
             </a:r>
             <a:endParaRPr lang="en-US" sz="2700" dirty="0"/>
           </a:p>
@@ -5077,14 +7730,14 @@
       </p:sp>
       <p:sp>
         <p:nvSpPr>
-          <p:cNvPr id="7" name="Text 5"/>
-          <p:cNvSpPr/>
-          <p:nvPr/>
-        </p:nvSpPr>
-        <p:spPr>
-          <a:xfrm>
-            <a:off x="822960" y="1325880"/>
-            <a:ext cx="10378440" cy="4800600"/>
+          <p:cNvPr id="10" name="Text 8"/>
+          <p:cNvSpPr/>
+          <p:nvPr/>
+        </p:nvSpPr>
+        <p:spPr>
+          <a:xfrm>
+            <a:off x="868680" y="1417320"/>
+            <a:ext cx="6675120" cy="4434840"/>
           </a:xfrm>
           <a:prstGeom prst="rect">
             <a:avLst/>
@@ -5099,7 +7752,7 @@
           <a:lstStyle/>
           <a:p>
             <a:r>
-              <a:rPr lang="en-US" sz="1450" dirty="0">
+              <a:rPr lang="en-US" sz="1700" dirty="0">
                 <a:solidFill>
                   <a:srgbClr val="17364A"/>
                 </a:solidFill>
@@ -5107,13 +7760,13 @@
                 <a:ea typeface="Aptos" pitchFamily="34" charset="-122"/>
                 <a:cs typeface="Aptos" pitchFamily="34" charset="-120"/>
               </a:rPr>
-              <a:t>CDC Public Health Data Strategy and Data Modernization resources: https://www.cdc.gov/public-health-data-strategy/php/about/index.html</a:t>
-            </a:r>
-            <a:endParaRPr lang="en-US" sz="1450" dirty="0"/>
-          </a:p>
-          <a:p>
-            <a:r>
-              <a:rPr lang="en-US" sz="1450" dirty="0">
+              <a:t>Model communication brief</a:t>
+            </a:r>
+            <a:endParaRPr lang="en-US" sz="1700" dirty="0"/>
+          </a:p>
+          <a:p>
+            <a:r>
+              <a:rPr lang="en-US" sz="1700" dirty="0">
                 <a:solidFill>
                   <a:srgbClr val="17364A"/>
                 </a:solidFill>
@@ -5121,13 +7774,13 @@
                 <a:ea typeface="Aptos" pitchFamily="34" charset="-122"/>
                 <a:cs typeface="Aptos" pitchFamily="34" charset="-120"/>
               </a:rPr>
-              <a:t>NIST Artificial Intelligence Risk Management Framework and NIST Generative AI Profile: https://www.nist.gov/publications/artificial-intelligence-risk-management-framework-generative-artificial-intelligence</a:t>
-            </a:r>
-            <a:endParaRPr lang="en-US" sz="1450" dirty="0"/>
-          </a:p>
-          <a:p>
-            <a:r>
-              <a:rPr lang="en-US" sz="1450" dirty="0">
+              <a:t>Plain-language uncertainty statement</a:t>
+            </a:r>
+            <a:endParaRPr lang="en-US" sz="1700" dirty="0"/>
+          </a:p>
+          <a:p>
+            <a:r>
+              <a:rPr lang="en-US" sz="1700" dirty="0">
                 <a:solidFill>
                   <a:srgbClr val="17364A"/>
                 </a:solidFill>
@@ -5135,13 +7788,13 @@
                 <a:ea typeface="Aptos" pitchFamily="34" charset="-122"/>
                 <a:cs typeface="Aptos" pitchFamily="34" charset="-120"/>
               </a:rPr>
-              <a:t>WHO Ethics and Governance of Artificial Intelligence for Health guidance: https://www.who.int/publications/i/item/9789240029200</a:t>
-            </a:r>
-            <a:endParaRPr lang="en-US" sz="1450" dirty="0"/>
-          </a:p>
-          <a:p>
-            <a:r>
-              <a:rPr lang="en-US" sz="1450" dirty="0">
+              <a:t>Subgroup caveat if relevant</a:t>
+            </a:r>
+            <a:endParaRPr lang="en-US" sz="1700" dirty="0"/>
+          </a:p>
+          <a:p>
+            <a:r>
+              <a:rPr lang="en-US" sz="1700" dirty="0">
                 <a:solidFill>
                   <a:srgbClr val="17364A"/>
                 </a:solidFill>
@@ -5149,13 +7802,106 @@
                 <a:ea typeface="Aptos" pitchFamily="34" charset="-122"/>
                 <a:cs typeface="Aptos" pitchFamily="34" charset="-120"/>
               </a:rPr>
-              <a:t>OWASP Top 10 for Large Language Model Applications: https://owasp.org/www-project-top-10-for-large-language-model-applications/</a:t>
-            </a:r>
-            <a:endParaRPr lang="en-US" sz="1450" dirty="0"/>
-          </a:p>
-          <a:p>
-            <a:r>
-              <a:rPr lang="en-US" sz="1450" dirty="0">
+              <a:t>Review sign-off note</a:t>
+            </a:r>
+            <a:endParaRPr lang="en-US" sz="1700" dirty="0"/>
+          </a:p>
+        </p:txBody>
+      </p:sp>
+      <p:sp>
+        <p:nvSpPr>
+          <p:cNvPr id="11" name="Shape 9"/>
+          <p:cNvSpPr/>
+          <p:nvPr/>
+        </p:nvSpPr>
+        <p:spPr>
+          <a:xfrm>
+            <a:off x="7909560" y="1417320"/>
+            <a:ext cx="3154680" cy="1828800"/>
+          </a:xfrm>
+          <a:prstGeom prst="roundRect">
+            <a:avLst>
+              <a:gd name="adj" fmla="val 6000"/>
+            </a:avLst>
+          </a:prstGeom>
+          <a:solidFill>
+            <a:srgbClr val="EEF8ED"/>
+          </a:solidFill>
+          <a:ln w="12700">
+            <a:solidFill>
+              <a:srgbClr val="B9D7E6"/>
+            </a:solidFill>
+            <a:prstDash val="solid"/>
+          </a:ln>
+        </p:spPr>
+      </p:sp>
+      <p:sp>
+        <p:nvSpPr>
+          <p:cNvPr id="12" name="Text 10"/>
+          <p:cNvSpPr/>
+          <p:nvPr/>
+        </p:nvSpPr>
+        <p:spPr>
+          <a:xfrm>
+            <a:off x="8074152" y="1563624"/>
+            <a:ext cx="2825496" cy="201168"/>
+          </a:xfrm>
+          <a:prstGeom prst="rect">
+            <a:avLst/>
+          </a:prstGeom>
+          <a:noFill/>
+          <a:ln/>
+        </p:spPr>
+        <p:txBody>
+          <a:bodyPr wrap="square" lIns="0" tIns="0" rIns="0" bIns="0" rtlCol="0" anchor="ctr"/>
+          <a:lstStyle/>
+          <a:p>
+            <a:pPr indent="0" marL="0">
+              <a:buNone/>
+            </a:pPr>
+            <a:r>
+              <a:rPr lang="en-US" sz="950" b="1" dirty="0">
+                <a:solidFill>
+                  <a:srgbClr val="0068B7"/>
+                </a:solidFill>
+                <a:latin typeface="Aptos" pitchFamily="34" charset="0"/>
+                <a:ea typeface="Aptos" pitchFamily="34" charset="-122"/>
+                <a:cs typeface="Aptos" pitchFamily="34" charset="-120"/>
+              </a:rPr>
+              <a:t>Key idea</a:t>
+            </a:r>
+            <a:endParaRPr lang="en-US" sz="950" dirty="0"/>
+          </a:p>
+        </p:txBody>
+      </p:sp>
+      <p:sp>
+        <p:nvSpPr>
+          <p:cNvPr id="13" name="Text 11"/>
+          <p:cNvSpPr/>
+          <p:nvPr/>
+        </p:nvSpPr>
+        <p:spPr>
+          <a:xfrm>
+            <a:off x="8074152" y="1856232"/>
+            <a:ext cx="2825496" cy="1261872"/>
+          </a:xfrm>
+          <a:prstGeom prst="rect">
+            <a:avLst/>
+          </a:prstGeom>
+          <a:noFill/>
+          <a:ln/>
+        </p:spPr>
+        <p:txBody>
+          <a:bodyPr wrap="square" lIns="0" tIns="0" rIns="0" bIns="0" rtlCol="0" anchor="t">
+            <a:normAutofit/>
+          </a:bodyPr>
+          <a:lstStyle/>
+          <a:p>
+            <a:pPr indent="0" marL="0">
+              <a:buNone/>
+            </a:pPr>
+            <a:r>
+              <a:rPr lang="en-US" sz="1250" dirty="0">
                 <a:solidFill>
                   <a:srgbClr val="17364A"/>
                 </a:solidFill>
@@ -5163,9 +7909,116 @@
                 <a:ea typeface="Aptos" pitchFamily="34" charset="-122"/>
                 <a:cs typeface="Aptos" pitchFamily="34" charset="-120"/>
               </a:rPr>
-              <a:t>ONC health IT, interoperability, and information blocking resources: https://www.healthit.gov/</a:t>
-            </a:r>
-            <a:endParaRPr lang="en-US" sz="1450" dirty="0"/>
+              <a:t>Model communication brief</a:t>
+            </a:r>
+            <a:endParaRPr lang="en-US" sz="1250" dirty="0"/>
+          </a:p>
+        </p:txBody>
+      </p:sp>
+      <p:sp>
+        <p:nvSpPr>
+          <p:cNvPr id="14" name="Shape 12"/>
+          <p:cNvSpPr/>
+          <p:nvPr/>
+        </p:nvSpPr>
+        <p:spPr>
+          <a:xfrm>
+            <a:off x="7909560" y="3520440"/>
+            <a:ext cx="3154680" cy="1737360"/>
+          </a:xfrm>
+          <a:prstGeom prst="roundRect">
+            <a:avLst>
+              <a:gd name="adj" fmla="val 6316"/>
+            </a:avLst>
+          </a:prstGeom>
+          <a:solidFill>
+            <a:srgbClr val="EAF6F8"/>
+          </a:solidFill>
+          <a:ln w="12700">
+            <a:solidFill>
+              <a:srgbClr val="B9D7E6"/>
+            </a:solidFill>
+            <a:prstDash val="solid"/>
+          </a:ln>
+        </p:spPr>
+      </p:sp>
+      <p:sp>
+        <p:nvSpPr>
+          <p:cNvPr id="15" name="Text 13"/>
+          <p:cNvSpPr/>
+          <p:nvPr/>
+        </p:nvSpPr>
+        <p:spPr>
+          <a:xfrm>
+            <a:off x="8074152" y="3666744"/>
+            <a:ext cx="2825496" cy="201168"/>
+          </a:xfrm>
+          <a:prstGeom prst="rect">
+            <a:avLst/>
+          </a:prstGeom>
+          <a:noFill/>
+          <a:ln/>
+        </p:spPr>
+        <p:txBody>
+          <a:bodyPr wrap="square" lIns="0" tIns="0" rIns="0" bIns="0" rtlCol="0" anchor="ctr"/>
+          <a:lstStyle/>
+          <a:p>
+            <a:pPr indent="0" marL="0">
+              <a:buNone/>
+            </a:pPr>
+            <a:r>
+              <a:rPr lang="en-US" sz="950" b="1" dirty="0">
+                <a:solidFill>
+                  <a:srgbClr val="0068B7"/>
+                </a:solidFill>
+                <a:latin typeface="Aptos" pitchFamily="34" charset="0"/>
+                <a:ea typeface="Aptos" pitchFamily="34" charset="-122"/>
+                <a:cs typeface="Aptos" pitchFamily="34" charset="-120"/>
+              </a:rPr>
+              <a:t>Use this for</a:t>
+            </a:r>
+            <a:endParaRPr lang="en-US" sz="950" dirty="0"/>
+          </a:p>
+        </p:txBody>
+      </p:sp>
+      <p:sp>
+        <p:nvSpPr>
+          <p:cNvPr id="16" name="Text 14"/>
+          <p:cNvSpPr/>
+          <p:nvPr/>
+        </p:nvSpPr>
+        <p:spPr>
+          <a:xfrm>
+            <a:off x="8074152" y="3959352"/>
+            <a:ext cx="2825496" cy="1170432"/>
+          </a:xfrm>
+          <a:prstGeom prst="rect">
+            <a:avLst/>
+          </a:prstGeom>
+          <a:noFill/>
+          <a:ln/>
+        </p:spPr>
+        <p:txBody>
+          <a:bodyPr wrap="square" lIns="0" tIns="0" rIns="0" bIns="0" rtlCol="0" anchor="t">
+            <a:normAutofit/>
+          </a:bodyPr>
+          <a:lstStyle/>
+          <a:p>
+            <a:pPr indent="0" marL="0">
+              <a:buNone/>
+            </a:pPr>
+            <a:r>
+              <a:rPr lang="en-US" sz="1250" dirty="0">
+                <a:solidFill>
+                  <a:srgbClr val="17364A"/>
+                </a:solidFill>
+                <a:latin typeface="Aptos" pitchFamily="34" charset="0"/>
+                <a:ea typeface="Aptos" pitchFamily="34" charset="-122"/>
+                <a:cs typeface="Aptos" pitchFamily="34" charset="-120"/>
+              </a:rPr>
+              <a:t>Connect the concept to public health decisions, safeguards, documentation, or implementation work.</a:t>
+            </a:r>
+            <a:endParaRPr lang="en-US" sz="1250" dirty="0"/>
           </a:p>
         </p:txBody>
       </p:sp>
@@ -5228,7 +8081,32 @@
       </p:sp>
       <p:sp>
         <p:nvSpPr>
-          <p:cNvPr id="3" name="Text 1"/>
+          <p:cNvPr id="3" name="Shape 1"/>
+          <p:cNvSpPr/>
+          <p:nvPr/>
+        </p:nvSpPr>
+        <p:spPr>
+          <a:xfrm>
+            <a:off x="0" y="164592"/>
+            <a:ext cx="146304" cy="6693408"/>
+          </a:xfrm>
+          <a:prstGeom prst="rect">
+            <a:avLst/>
+          </a:prstGeom>
+          <a:solidFill>
+            <a:srgbClr val="2F8A28"/>
+          </a:solidFill>
+          <a:ln w="12700">
+            <a:solidFill>
+              <a:srgbClr val="2F8A28"/>
+            </a:solidFill>
+            <a:prstDash val="solid"/>
+          </a:ln>
+        </p:spPr>
+      </p:sp>
+      <p:sp>
+        <p:nvSpPr>
+          <p:cNvPr id="4" name="Text 2"/>
           <p:cNvSpPr/>
           <p:nvPr/>
         </p:nvSpPr>
@@ -5267,7 +8145,7 @@
       </p:sp>
       <p:sp>
         <p:nvSpPr>
-          <p:cNvPr id="4" name="Text 2"/>
+          <p:cNvPr id="5" name="Text 3"/>
           <p:cNvSpPr/>
           <p:nvPr/>
         </p:nvSpPr>
@@ -5306,7 +8184,7 @@
       </p:sp>
       <p:sp>
         <p:nvSpPr>
-          <p:cNvPr id="5" name="Text 3"/>
+          <p:cNvPr id="6" name="Text 4"/>
           <p:cNvSpPr/>
           <p:nvPr/>
         </p:nvSpPr>
@@ -5345,13 +8223,77 @@
       </p:sp>
       <p:sp>
         <p:nvSpPr>
-          <p:cNvPr id="6" name="Text 4"/>
+          <p:cNvPr id="7" name="Shape 5"/>
           <p:cNvSpPr/>
           <p:nvPr/>
         </p:nvSpPr>
         <p:spPr>
           <a:xfrm>
             <a:off x="640080" y="658368"/>
+            <a:ext cx="420624" cy="420624"/>
+          </a:xfrm>
+          <a:prstGeom prst="ellipse">
+            <a:avLst/>
+          </a:prstGeom>
+          <a:solidFill>
+            <a:srgbClr val="0068B7"/>
+          </a:solidFill>
+          <a:ln w="12700">
+            <a:solidFill>
+              <a:srgbClr val="0068B7"/>
+            </a:solidFill>
+            <a:prstDash val="solid"/>
+          </a:ln>
+        </p:spPr>
+      </p:sp>
+      <p:sp>
+        <p:nvSpPr>
+          <p:cNvPr id="8" name="Text 6"/>
+          <p:cNvSpPr/>
+          <p:nvPr/>
+        </p:nvSpPr>
+        <p:spPr>
+          <a:xfrm>
+            <a:off x="640080" y="731520"/>
+            <a:ext cx="420624" cy="164592"/>
+          </a:xfrm>
+          <a:prstGeom prst="rect">
+            <a:avLst/>
+          </a:prstGeom>
+          <a:noFill/>
+          <a:ln/>
+        </p:spPr>
+        <p:txBody>
+          <a:bodyPr wrap="square" lIns="0" tIns="0" rIns="0" bIns="0" rtlCol="0" anchor="ctr"/>
+          <a:lstStyle/>
+          <a:p>
+            <a:pPr algn="ctr" indent="0" marL="0">
+              <a:buNone/>
+            </a:pPr>
+            <a:r>
+              <a:rPr lang="en-US" sz="1100" b="1" dirty="0">
+                <a:solidFill>
+                  <a:srgbClr val="FFFFFF"/>
+                </a:solidFill>
+                <a:latin typeface="Aptos" pitchFamily="34" charset="0"/>
+                <a:ea typeface="Aptos" pitchFamily="34" charset="-122"/>
+                <a:cs typeface="Aptos" pitchFamily="34" charset="-120"/>
+              </a:rPr>
+              <a:t>13</a:t>
+            </a:r>
+            <a:endParaRPr lang="en-US" sz="1100" dirty="0"/>
+          </a:p>
+        </p:txBody>
+      </p:sp>
+      <p:sp>
+        <p:nvSpPr>
+          <p:cNvPr id="9" name="Text 7"/>
+          <p:cNvSpPr/>
+          <p:nvPr/>
+        </p:nvSpPr>
+        <p:spPr>
+          <a:xfrm>
+            <a:off x="640080" y="621792"/>
             <a:ext cx="10881360" cy="566928"/>
           </a:xfrm>
           <a:prstGeom prst="rect">
@@ -5378,7 +8320,7 @@
                 <a:ea typeface="Aptos Display" pitchFamily="34" charset="-122"/>
                 <a:cs typeface="Aptos Display" pitchFamily="34" charset="-120"/>
               </a:rPr>
-              <a:t>References and Resources Continued</a:t>
+              <a:t>Knowledge Check</a:t>
             </a:r>
             <a:endParaRPr lang="en-US" sz="2700" dirty="0"/>
           </a:p>
@@ -5386,14 +8328,14 @@
       </p:sp>
       <p:sp>
         <p:nvSpPr>
-          <p:cNvPr id="7" name="Text 5"/>
-          <p:cNvSpPr/>
-          <p:nvPr/>
-        </p:nvSpPr>
-        <p:spPr>
-          <a:xfrm>
-            <a:off x="822960" y="1325880"/>
-            <a:ext cx="10378440" cy="4800600"/>
+          <p:cNvPr id="10" name="Text 8"/>
+          <p:cNvSpPr/>
+          <p:nvPr/>
+        </p:nvSpPr>
+        <p:spPr>
+          <a:xfrm>
+            <a:off x="868680" y="1417320"/>
+            <a:ext cx="6675120" cy="4434840"/>
           </a:xfrm>
           <a:prstGeom prst="rect">
             <a:avLst/>
@@ -5408,7 +8350,7 @@
           <a:lstStyle/>
           <a:p>
             <a:r>
-              <a:rPr lang="en-US" sz="1450" dirty="0">
+              <a:rPr lang="en-US" sz="1700" dirty="0">
                 <a:solidFill>
                   <a:srgbClr val="17364A"/>
                 </a:solidFill>
@@ -5416,9 +8358,265 @@
                 <a:ea typeface="Aptos" pitchFamily="34" charset="-122"/>
                 <a:cs typeface="Aptos" pitchFamily="34" charset="-120"/>
               </a:rPr>
-              <a:t>Agency policies for privacy, public records, cybersecurity, procurement, civil rights, accessibility, language access, and emergency communications</a:t>
-            </a:r>
-            <a:endParaRPr lang="en-US" sz="1450" dirty="0"/>
+              <a:t>1. What is the best reason to communicate uncertainty with model results?</a:t>
+            </a:r>
+            <a:endParaRPr lang="en-US" sz="1700" dirty="0"/>
+          </a:p>
+          <a:p>
+            <a:r>
+              <a:rPr lang="en-US" sz="1700" dirty="0">
+                <a:solidFill>
+                  <a:srgbClr val="17364A"/>
+                </a:solidFill>
+                <a:latin typeface="Aptos" pitchFamily="34" charset="0"/>
+                <a:ea typeface="Aptos" pitchFamily="34" charset="-122"/>
+                <a:cs typeface="Aptos" pitchFamily="34" charset="-120"/>
+              </a:rPr>
+              <a:t>2. What is the best reason to assign an accountability owner?</a:t>
+            </a:r>
+            <a:endParaRPr lang="en-US" sz="1700" dirty="0"/>
+          </a:p>
+          <a:p>
+            <a:r>
+              <a:rPr lang="en-US" sz="1700" dirty="0">
+                <a:solidFill>
+                  <a:srgbClr val="17364A"/>
+                </a:solidFill>
+                <a:latin typeface="Aptos" pitchFamily="34" charset="0"/>
+                <a:ea typeface="Aptos" pitchFamily="34" charset="-122"/>
+                <a:cs typeface="Aptos" pitchFamily="34" charset="-120"/>
+              </a:rPr>
+              <a:t>3. When should an AI-supported workflow be escalated for review?</a:t>
+            </a:r>
+            <a:endParaRPr lang="en-US" sz="1700" dirty="0"/>
+          </a:p>
+          <a:p>
+            <a:r>
+              <a:rPr lang="en-US" sz="1700" dirty="0">
+                <a:solidFill>
+                  <a:srgbClr val="17364A"/>
+                </a:solidFill>
+                <a:latin typeface="Aptos" pitchFamily="34" charset="0"/>
+                <a:ea typeface="Aptos" pitchFamily="34" charset="-122"/>
+                <a:cs typeface="Aptos" pitchFamily="34" charset="-120"/>
+              </a:rPr>
+              <a:t>4. Which practice best supports public accountability?</a:t>
+            </a:r>
+            <a:endParaRPr lang="en-US" sz="1700" dirty="0"/>
+          </a:p>
+        </p:txBody>
+      </p:sp>
+      <p:sp>
+        <p:nvSpPr>
+          <p:cNvPr id="11" name="Shape 9"/>
+          <p:cNvSpPr/>
+          <p:nvPr/>
+        </p:nvSpPr>
+        <p:spPr>
+          <a:xfrm>
+            <a:off x="7909560" y="1417320"/>
+            <a:ext cx="3154680" cy="1828800"/>
+          </a:xfrm>
+          <a:prstGeom prst="roundRect">
+            <a:avLst>
+              <a:gd name="adj" fmla="val 6000"/>
+            </a:avLst>
+          </a:prstGeom>
+          <a:solidFill>
+            <a:srgbClr val="EEF8ED"/>
+          </a:solidFill>
+          <a:ln w="12700">
+            <a:solidFill>
+              <a:srgbClr val="B9D7E6"/>
+            </a:solidFill>
+            <a:prstDash val="solid"/>
+          </a:ln>
+        </p:spPr>
+      </p:sp>
+      <p:sp>
+        <p:nvSpPr>
+          <p:cNvPr id="12" name="Text 10"/>
+          <p:cNvSpPr/>
+          <p:nvPr/>
+        </p:nvSpPr>
+        <p:spPr>
+          <a:xfrm>
+            <a:off x="8074152" y="1563624"/>
+            <a:ext cx="2825496" cy="201168"/>
+          </a:xfrm>
+          <a:prstGeom prst="rect">
+            <a:avLst/>
+          </a:prstGeom>
+          <a:noFill/>
+          <a:ln/>
+        </p:spPr>
+        <p:txBody>
+          <a:bodyPr wrap="square" lIns="0" tIns="0" rIns="0" bIns="0" rtlCol="0" anchor="ctr"/>
+          <a:lstStyle/>
+          <a:p>
+            <a:pPr indent="0" marL="0">
+              <a:buNone/>
+            </a:pPr>
+            <a:r>
+              <a:rPr lang="en-US" sz="950" b="1" dirty="0">
+                <a:solidFill>
+                  <a:srgbClr val="0068B7"/>
+                </a:solidFill>
+                <a:latin typeface="Aptos" pitchFamily="34" charset="0"/>
+                <a:ea typeface="Aptos" pitchFamily="34" charset="-122"/>
+                <a:cs typeface="Aptos" pitchFamily="34" charset="-120"/>
+              </a:rPr>
+              <a:t>Key idea</a:t>
+            </a:r>
+            <a:endParaRPr lang="en-US" sz="950" dirty="0"/>
+          </a:p>
+        </p:txBody>
+      </p:sp>
+      <p:sp>
+        <p:nvSpPr>
+          <p:cNvPr id="13" name="Text 11"/>
+          <p:cNvSpPr/>
+          <p:nvPr/>
+        </p:nvSpPr>
+        <p:spPr>
+          <a:xfrm>
+            <a:off x="8074152" y="1856232"/>
+            <a:ext cx="2825496" cy="1261872"/>
+          </a:xfrm>
+          <a:prstGeom prst="rect">
+            <a:avLst/>
+          </a:prstGeom>
+          <a:noFill/>
+          <a:ln/>
+        </p:spPr>
+        <p:txBody>
+          <a:bodyPr wrap="square" lIns="0" tIns="0" rIns="0" bIns="0" rtlCol="0" anchor="t">
+            <a:normAutofit/>
+          </a:bodyPr>
+          <a:lstStyle/>
+          <a:p>
+            <a:pPr indent="0" marL="0">
+              <a:buNone/>
+            </a:pPr>
+            <a:r>
+              <a:rPr lang="en-US" sz="1250" dirty="0">
+                <a:solidFill>
+                  <a:srgbClr val="17364A"/>
+                </a:solidFill>
+                <a:latin typeface="Aptos" pitchFamily="34" charset="0"/>
+                <a:ea typeface="Aptos" pitchFamily="34" charset="-122"/>
+                <a:cs typeface="Aptos" pitchFamily="34" charset="-120"/>
+              </a:rPr>
+              <a:t>1. What is the best reason to communicate uncertainty with model results?</a:t>
+            </a:r>
+            <a:endParaRPr lang="en-US" sz="1250" dirty="0"/>
+          </a:p>
+        </p:txBody>
+      </p:sp>
+      <p:sp>
+        <p:nvSpPr>
+          <p:cNvPr id="14" name="Shape 12"/>
+          <p:cNvSpPr/>
+          <p:nvPr/>
+        </p:nvSpPr>
+        <p:spPr>
+          <a:xfrm>
+            <a:off x="7909560" y="3520440"/>
+            <a:ext cx="3154680" cy="1737360"/>
+          </a:xfrm>
+          <a:prstGeom prst="roundRect">
+            <a:avLst>
+              <a:gd name="adj" fmla="val 6316"/>
+            </a:avLst>
+          </a:prstGeom>
+          <a:solidFill>
+            <a:srgbClr val="EAF6F8"/>
+          </a:solidFill>
+          <a:ln w="12700">
+            <a:solidFill>
+              <a:srgbClr val="B9D7E6"/>
+            </a:solidFill>
+            <a:prstDash val="solid"/>
+          </a:ln>
+        </p:spPr>
+      </p:sp>
+      <p:sp>
+        <p:nvSpPr>
+          <p:cNvPr id="15" name="Text 13"/>
+          <p:cNvSpPr/>
+          <p:nvPr/>
+        </p:nvSpPr>
+        <p:spPr>
+          <a:xfrm>
+            <a:off x="8074152" y="3666744"/>
+            <a:ext cx="2825496" cy="201168"/>
+          </a:xfrm>
+          <a:prstGeom prst="rect">
+            <a:avLst/>
+          </a:prstGeom>
+          <a:noFill/>
+          <a:ln/>
+        </p:spPr>
+        <p:txBody>
+          <a:bodyPr wrap="square" lIns="0" tIns="0" rIns="0" bIns="0" rtlCol="0" anchor="ctr"/>
+          <a:lstStyle/>
+          <a:p>
+            <a:pPr indent="0" marL="0">
+              <a:buNone/>
+            </a:pPr>
+            <a:r>
+              <a:rPr lang="en-US" sz="950" b="1" dirty="0">
+                <a:solidFill>
+                  <a:srgbClr val="0068B7"/>
+                </a:solidFill>
+                <a:latin typeface="Aptos" pitchFamily="34" charset="0"/>
+                <a:ea typeface="Aptos" pitchFamily="34" charset="-122"/>
+                <a:cs typeface="Aptos" pitchFamily="34" charset="-120"/>
+              </a:rPr>
+              <a:t>Use this for</a:t>
+            </a:r>
+            <a:endParaRPr lang="en-US" sz="950" dirty="0"/>
+          </a:p>
+        </p:txBody>
+      </p:sp>
+      <p:sp>
+        <p:nvSpPr>
+          <p:cNvPr id="16" name="Text 14"/>
+          <p:cNvSpPr/>
+          <p:nvPr/>
+        </p:nvSpPr>
+        <p:spPr>
+          <a:xfrm>
+            <a:off x="8074152" y="3959352"/>
+            <a:ext cx="2825496" cy="1170432"/>
+          </a:xfrm>
+          <a:prstGeom prst="rect">
+            <a:avLst/>
+          </a:prstGeom>
+          <a:noFill/>
+          <a:ln/>
+        </p:spPr>
+        <p:txBody>
+          <a:bodyPr wrap="square" lIns="0" tIns="0" rIns="0" bIns="0" rtlCol="0" anchor="t">
+            <a:normAutofit/>
+          </a:bodyPr>
+          <a:lstStyle/>
+          <a:p>
+            <a:pPr indent="0" marL="0">
+              <a:buNone/>
+            </a:pPr>
+            <a:r>
+              <a:rPr lang="en-US" sz="1250" dirty="0">
+                <a:solidFill>
+                  <a:srgbClr val="17364A"/>
+                </a:solidFill>
+                <a:latin typeface="Aptos" pitchFamily="34" charset="0"/>
+                <a:ea typeface="Aptos" pitchFamily="34" charset="-122"/>
+                <a:cs typeface="Aptos" pitchFamily="34" charset="-120"/>
+              </a:rPr>
+              <a:t>Connect the concept to public health decisions, safeguards, documentation, or implementation work.</a:t>
+            </a:r>
+            <a:endParaRPr lang="en-US" sz="1250" dirty="0"/>
           </a:p>
         </p:txBody>
       </p:sp>
@@ -5481,7 +8679,32 @@
       </p:sp>
       <p:sp>
         <p:nvSpPr>
-          <p:cNvPr id="3" name="Text 1"/>
+          <p:cNvPr id="3" name="Shape 1"/>
+          <p:cNvSpPr/>
+          <p:nvPr/>
+        </p:nvSpPr>
+        <p:spPr>
+          <a:xfrm>
+            <a:off x="0" y="164592"/>
+            <a:ext cx="146304" cy="6693408"/>
+          </a:xfrm>
+          <a:prstGeom prst="rect">
+            <a:avLst/>
+          </a:prstGeom>
+          <a:solidFill>
+            <a:srgbClr val="2F8A28"/>
+          </a:solidFill>
+          <a:ln w="12700">
+            <a:solidFill>
+              <a:srgbClr val="2F8A28"/>
+            </a:solidFill>
+            <a:prstDash val="solid"/>
+          </a:ln>
+        </p:spPr>
+      </p:sp>
+      <p:sp>
+        <p:nvSpPr>
+          <p:cNvPr id="4" name="Text 2"/>
           <p:cNvSpPr/>
           <p:nvPr/>
         </p:nvSpPr>
@@ -5520,7 +8743,7 @@
       </p:sp>
       <p:sp>
         <p:nvSpPr>
-          <p:cNvPr id="4" name="Text 2"/>
+          <p:cNvPr id="5" name="Text 3"/>
           <p:cNvSpPr/>
           <p:nvPr/>
         </p:nvSpPr>
@@ -5559,7 +8782,7 @@
       </p:sp>
       <p:sp>
         <p:nvSpPr>
-          <p:cNvPr id="5" name="Text 3"/>
+          <p:cNvPr id="6" name="Text 4"/>
           <p:cNvSpPr/>
           <p:nvPr/>
         </p:nvSpPr>
@@ -5598,7 +8821,7 @@
       </p:sp>
       <p:sp>
         <p:nvSpPr>
-          <p:cNvPr id="6" name="Text 4"/>
+          <p:cNvPr id="7" name="Text 5"/>
           <p:cNvSpPr/>
           <p:nvPr/>
         </p:nvSpPr>
@@ -5631,7 +8854,7 @@
                 <a:ea typeface="Aptos Display" pitchFamily="34" charset="-122"/>
                 <a:cs typeface="Aptos Display" pitchFamily="34" charset="-120"/>
               </a:rPr>
-              <a:t>Module Context</a:t>
+              <a:t>What this module helps you do</a:t>
             </a:r>
             <a:endParaRPr lang="en-US" sz="2700" dirty="0"/>
           </a:p>
@@ -5639,14 +8862,14 @@
       </p:sp>
       <p:sp>
         <p:nvSpPr>
-          <p:cNvPr id="7" name="Text 5"/>
-          <p:cNvSpPr/>
-          <p:nvPr/>
-        </p:nvSpPr>
-        <p:spPr>
-          <a:xfrm>
-            <a:off x="822960" y="1325880"/>
-            <a:ext cx="10378440" cy="1371600"/>
+          <p:cNvPr id="8" name="Text 6"/>
+          <p:cNvSpPr/>
+          <p:nvPr/>
+        </p:nvSpPr>
+        <p:spPr>
+          <a:xfrm>
+            <a:off x="868680" y="1417320"/>
+            <a:ext cx="6675120" cy="3291840"/>
           </a:xfrm>
           <a:prstGeom prst="rect">
             <a:avLst/>
@@ -5661,7 +8884,7 @@
           <a:lstStyle/>
           <a:p>
             <a:r>
-              <a:rPr lang="en-US" sz="1600" dirty="0">
+              <a:rPr lang="en-US" sz="1700" dirty="0">
                 <a:solidFill>
                   <a:srgbClr val="17364A"/>
                 </a:solidFill>
@@ -5669,13 +8892,13 @@
                 <a:ea typeface="Aptos" pitchFamily="34" charset="-122"/>
                 <a:cs typeface="Aptos" pitchFamily="34" charset="-120"/>
               </a:rPr>
-              <a:t>Level: intermediate/practitioner</a:t>
-            </a:r>
-            <a:endParaRPr lang="en-US" sz="1600" dirty="0"/>
-          </a:p>
-          <a:p>
-            <a:r>
-              <a:rPr lang="en-US" sz="1600" dirty="0">
+              <a:t>Public health staff often need to communicate AI or model results to leaders, partners, the public, or operational teams.</a:t>
+            </a:r>
+            <a:endParaRPr lang="en-US" sz="1700" dirty="0"/>
+          </a:p>
+          <a:p>
+            <a:r>
+              <a:rPr lang="en-US" sz="1700" dirty="0">
                 <a:solidFill>
                   <a:srgbClr val="17364A"/>
                 </a:solidFill>
@@ -5683,13 +8906,13 @@
                 <a:ea typeface="Aptos" pitchFamily="34" charset="-122"/>
                 <a:cs typeface="Aptos" pitchFamily="34" charset="-120"/>
               </a:rPr>
-              <a:t>Primary track: Analytics and Modeling Track</a:t>
-            </a:r>
-            <a:endParaRPr lang="en-US" sz="1600" dirty="0"/>
-          </a:p>
-          <a:p>
-            <a:r>
-              <a:rPr lang="en-US" sz="1600" dirty="0">
+              <a:t>This module teaches learners how to explain model outputs, uncertainty, limitations, and appropriate use without overstating precision or creating.</a:t>
+            </a:r>
+            <a:endParaRPr lang="en-US" sz="1700" dirty="0"/>
+          </a:p>
+          <a:p>
+            <a:r>
+              <a:rPr lang="en-US" sz="1700" dirty="0">
                 <a:solidFill>
                   <a:srgbClr val="17364A"/>
                 </a:solidFill>
@@ -5697,31 +8920,111 @@
                 <a:ea typeface="Aptos" pitchFamily="34" charset="-122"/>
                 <a:cs typeface="Aptos" pitchFamily="34" charset="-120"/>
               </a:rPr>
-              <a:t>Appears in tracks: analytics-modeling, communications, public-health-executive-leadership, epidemiology, governance-security</a:t>
-            </a:r>
-            <a:endParaRPr lang="en-US" sz="1600" dirty="0"/>
-          </a:p>
-        </p:txBody>
-      </p:sp>
-      <p:sp>
-        <p:nvSpPr>
-          <p:cNvPr id="8" name="Text 6"/>
-          <p:cNvSpPr/>
-          <p:nvPr/>
-        </p:nvSpPr>
-        <p:spPr>
-          <a:xfrm>
-            <a:off x="822960" y="2743200"/>
-            <a:ext cx="10378440" cy="2834640"/>
-          </a:xfrm>
-          <a:prstGeom prst="rect">
-            <a:avLst/>
-          </a:prstGeom>
-          <a:noFill/>
-          <a:ln/>
-        </p:spPr>
-        <p:txBody>
-          <a:bodyPr wrap="square" lIns="1016" tIns="1016" rIns="1016" bIns="1016" rtlCol="0" anchor="t">
+              <a:t>The module focuses on practical communication.</a:t>
+            </a:r>
+            <a:endParaRPr lang="en-US" sz="1700" dirty="0"/>
+          </a:p>
+          <a:p>
+            <a:r>
+              <a:rPr lang="en-US" sz="1700" dirty="0">
+                <a:solidFill>
+                  <a:srgbClr val="17364A"/>
+                </a:solidFill>
+                <a:latin typeface="Aptos" pitchFamily="34" charset="0"/>
+                <a:ea typeface="Aptos" pitchFamily="34" charset="-122"/>
+                <a:cs typeface="Aptos" pitchFamily="34" charset="-120"/>
+              </a:rPr>
+              <a:t>Learners translate metrics, confidence, caveats, and validation findings into language that supports responsible decisions.</a:t>
+            </a:r>
+            <a:endParaRPr lang="en-US" sz="1700" dirty="0"/>
+          </a:p>
+        </p:txBody>
+      </p:sp>
+      <p:sp>
+        <p:nvSpPr>
+          <p:cNvPr id="9" name="Shape 7"/>
+          <p:cNvSpPr/>
+          <p:nvPr/>
+        </p:nvSpPr>
+        <p:spPr>
+          <a:xfrm>
+            <a:off x="7909560" y="1417320"/>
+            <a:ext cx="3154680" cy="1920240"/>
+          </a:xfrm>
+          <a:prstGeom prst="roundRect">
+            <a:avLst>
+              <a:gd name="adj" fmla="val 5714"/>
+            </a:avLst>
+          </a:prstGeom>
+          <a:solidFill>
+            <a:srgbClr val="EAF6F8"/>
+          </a:solidFill>
+          <a:ln w="12700">
+            <a:solidFill>
+              <a:srgbClr val="B9D7E6"/>
+            </a:solidFill>
+            <a:prstDash val="solid"/>
+          </a:ln>
+        </p:spPr>
+      </p:sp>
+      <p:sp>
+        <p:nvSpPr>
+          <p:cNvPr id="10" name="Text 8"/>
+          <p:cNvSpPr/>
+          <p:nvPr/>
+        </p:nvSpPr>
+        <p:spPr>
+          <a:xfrm>
+            <a:off x="8074152" y="1563624"/>
+            <a:ext cx="2825496" cy="201168"/>
+          </a:xfrm>
+          <a:prstGeom prst="rect">
+            <a:avLst/>
+          </a:prstGeom>
+          <a:noFill/>
+          <a:ln/>
+        </p:spPr>
+        <p:txBody>
+          <a:bodyPr wrap="square" lIns="0" tIns="0" rIns="0" bIns="0" rtlCol="0" anchor="ctr"/>
+          <a:lstStyle/>
+          <a:p>
+            <a:pPr indent="0" marL="0">
+              <a:buNone/>
+            </a:pPr>
+            <a:r>
+              <a:rPr lang="en-US" sz="950" b="1" dirty="0">
+                <a:solidFill>
+                  <a:srgbClr val="0068B7"/>
+                </a:solidFill>
+                <a:latin typeface="Aptos" pitchFamily="34" charset="0"/>
+                <a:ea typeface="Aptos" pitchFamily="34" charset="-122"/>
+                <a:cs typeface="Aptos" pitchFamily="34" charset="-120"/>
+              </a:rPr>
+              <a:t>Module details</a:t>
+            </a:r>
+            <a:endParaRPr lang="en-US" sz="950" dirty="0"/>
+          </a:p>
+        </p:txBody>
+      </p:sp>
+      <p:sp>
+        <p:nvSpPr>
+          <p:cNvPr id="11" name="Text 9"/>
+          <p:cNvSpPr/>
+          <p:nvPr/>
+        </p:nvSpPr>
+        <p:spPr>
+          <a:xfrm>
+            <a:off x="8074152" y="1856232"/>
+            <a:ext cx="2825496" cy="1353312"/>
+          </a:xfrm>
+          <a:prstGeom prst="rect">
+            <a:avLst/>
+          </a:prstGeom>
+          <a:noFill/>
+          <a:ln/>
+        </p:spPr>
+        <p:txBody>
+          <a:bodyPr wrap="square" lIns="0" tIns="0" rIns="0" bIns="0" rtlCol="0" anchor="t">
             <a:normAutofit/>
           </a:bodyPr>
           <a:lstStyle/>
@@ -5730,7 +9033,7 @@
               <a:buNone/>
             </a:pPr>
             <a:r>
-              <a:rPr lang="en-US" sz="1400" dirty="0">
+              <a:rPr lang="en-US" sz="1250" dirty="0">
                 <a:solidFill>
                   <a:srgbClr val="17364A"/>
                 </a:solidFill>
@@ -5738,9 +9041,1240 @@
                 <a:ea typeface="Aptos" pitchFamily="34" charset="-122"/>
                 <a:cs typeface="Aptos" pitchFamily="34" charset="-120"/>
               </a:rPr>
-              <a:t>Public health staff often need to communicate AI or model results to leaders, partners, the public, or operational teams. This module teaches learners how to explain model outputs, uncertainty, limitations, and appropriate use without overstating precision or creating false confidence. The module focuses on practical communication. Learners translate metrics, confidence, caveats, and validation findings into language that supports responsible decisions. The goal is to ensure that model results inform judgment rather than replace it.</a:t>
-            </a:r>
-            <a:endParaRPr lang="en-US" sz="1400" dirty="0"/>
+              <a:t>Level: intermediate/practitioner</a:t>
+            </a:r>
+            <a:endParaRPr lang="en-US" sz="1250" dirty="0"/>
+          </a:p>
+          <a:p>
+            <a:pPr indent="0" marL="0">
+              <a:buNone/>
+            </a:pPr>
+            <a:r>
+              <a:rPr lang="en-US" sz="1250" dirty="0">
+                <a:solidFill>
+                  <a:srgbClr val="17364A"/>
+                </a:solidFill>
+                <a:latin typeface="Aptos" pitchFamily="34" charset="0"/>
+                <a:ea typeface="Aptos" pitchFamily="34" charset="-122"/>
+                <a:cs typeface="Aptos" pitchFamily="34" charset="-120"/>
+              </a:rPr>
+              <a:t>Primary track: Analytics and Modeling Track</a:t>
+            </a:r>
+            <a:endParaRPr lang="en-US" sz="1250" dirty="0"/>
+          </a:p>
+          <a:p>
+            <a:pPr indent="0" marL="0">
+              <a:buNone/>
+            </a:pPr>
+            <a:r>
+              <a:rPr lang="en-US" sz="1250" dirty="0">
+                <a:solidFill>
+                  <a:srgbClr val="17364A"/>
+                </a:solidFill>
+                <a:latin typeface="Aptos" pitchFamily="34" charset="0"/>
+                <a:ea typeface="Aptos" pitchFamily="34" charset="-122"/>
+                <a:cs typeface="Aptos" pitchFamily="34" charset="-120"/>
+              </a:rPr>
+              <a:t>Appears in tracks: analytics-modeling, communications, public-health-executive-leadership, epidemiology, governance-security</a:t>
+            </a:r>
+            <a:endParaRPr lang="en-US" sz="1250" dirty="0"/>
+          </a:p>
+        </p:txBody>
+      </p:sp>
+      <p:sp>
+        <p:nvSpPr>
+          <p:cNvPr id="12" name="Shape 10"/>
+          <p:cNvSpPr/>
+          <p:nvPr/>
+        </p:nvSpPr>
+        <p:spPr>
+          <a:xfrm>
+            <a:off x="7909560" y="3611880"/>
+            <a:ext cx="3154680" cy="1783080"/>
+          </a:xfrm>
+          <a:prstGeom prst="roundRect">
+            <a:avLst>
+              <a:gd name="adj" fmla="val 6154"/>
+            </a:avLst>
+          </a:prstGeom>
+          <a:solidFill>
+            <a:srgbClr val="EEF8ED"/>
+          </a:solidFill>
+          <a:ln w="12700">
+            <a:solidFill>
+              <a:srgbClr val="B9D7E6"/>
+            </a:solidFill>
+            <a:prstDash val="solid"/>
+          </a:ln>
+        </p:spPr>
+      </p:sp>
+      <p:sp>
+        <p:nvSpPr>
+          <p:cNvPr id="13" name="Text 11"/>
+          <p:cNvSpPr/>
+          <p:nvPr/>
+        </p:nvSpPr>
+        <p:spPr>
+          <a:xfrm>
+            <a:off x="8074152" y="3758184"/>
+            <a:ext cx="2825496" cy="201168"/>
+          </a:xfrm>
+          <a:prstGeom prst="rect">
+            <a:avLst/>
+          </a:prstGeom>
+          <a:noFill/>
+          <a:ln/>
+        </p:spPr>
+        <p:txBody>
+          <a:bodyPr wrap="square" lIns="0" tIns="0" rIns="0" bIns="0" rtlCol="0" anchor="ctr"/>
+          <a:lstStyle/>
+          <a:p>
+            <a:pPr indent="0" marL="0">
+              <a:buNone/>
+            </a:pPr>
+            <a:r>
+              <a:rPr lang="en-US" sz="950" b="1" dirty="0">
+                <a:solidFill>
+                  <a:srgbClr val="0068B7"/>
+                </a:solidFill>
+                <a:latin typeface="Aptos" pitchFamily="34" charset="0"/>
+                <a:ea typeface="Aptos" pitchFamily="34" charset="-122"/>
+                <a:cs typeface="Aptos" pitchFamily="34" charset="-120"/>
+              </a:rPr>
+              <a:t>Learning approach</a:t>
+            </a:r>
+            <a:endParaRPr lang="en-US" sz="950" dirty="0"/>
+          </a:p>
+        </p:txBody>
+      </p:sp>
+      <p:sp>
+        <p:nvSpPr>
+          <p:cNvPr id="14" name="Text 12"/>
+          <p:cNvSpPr/>
+          <p:nvPr/>
+        </p:nvSpPr>
+        <p:spPr>
+          <a:xfrm>
+            <a:off x="8074152" y="4050792"/>
+            <a:ext cx="2825496" cy="1216152"/>
+          </a:xfrm>
+          <a:prstGeom prst="rect">
+            <a:avLst/>
+          </a:prstGeom>
+          <a:noFill/>
+          <a:ln/>
+        </p:spPr>
+        <p:txBody>
+          <a:bodyPr wrap="square" lIns="0" tIns="0" rIns="0" bIns="0" rtlCol="0" anchor="t">
+            <a:normAutofit/>
+          </a:bodyPr>
+          <a:lstStyle/>
+          <a:p>
+            <a:pPr indent="0" marL="0">
+              <a:buNone/>
+            </a:pPr>
+            <a:r>
+              <a:rPr lang="en-US" sz="1250" dirty="0">
+                <a:solidFill>
+                  <a:srgbClr val="17364A"/>
+                </a:solidFill>
+                <a:latin typeface="Aptos" pitchFamily="34" charset="0"/>
+                <a:ea typeface="Aptos" pitchFamily="34" charset="-122"/>
+                <a:cs typeface="Aptos" pitchFamily="34" charset="-120"/>
+              </a:rPr>
+              <a:t>Review the core ideas, complete the practical exercise, check your understanding, and use the related plays and tools to apply the lesson.</a:t>
+            </a:r>
+            <a:endParaRPr lang="en-US" sz="1250" dirty="0"/>
+          </a:p>
+        </p:txBody>
+      </p:sp>
+    </p:spTree>
+  </p:cSld>
+  <p:clrMapOvr>
+    <a:masterClrMapping/>
+  </p:clrMapOvr>
+</p:sld>
+</file>
+
+<file path=ppt/slides/slide20.xml><?xml version="1.0" encoding="utf-8"?>
+<p:sld xmlns:a="http://schemas.openxmlformats.org/drawingml/2006/main" xmlns:r="http://schemas.openxmlformats.org/officeDocument/2006/relationships" xmlns:p="http://schemas.openxmlformats.org/presentationml/2006/main">
+  <p:cSld name="Slide 20">
+    <p:bg>
+      <p:bgPr>
+        <a:solidFill>
+          <a:srgbClr val="F7FBFD"/>
+        </a:solidFill>
+      </p:bgPr>
+    </p:bg>
+    <p:spTree>
+      <p:nvGrpSpPr>
+        <p:cNvPr id="1" name=""/>
+        <p:cNvGrpSpPr/>
+        <p:nvPr/>
+      </p:nvGrpSpPr>
+      <p:grpSpPr>
+        <a:xfrm>
+          <a:off x="0" y="0"/>
+          <a:ext cx="0" cy="0"/>
+          <a:chOff x="0" y="0"/>
+          <a:chExt cx="0" cy="0"/>
+        </a:xfrm>
+      </p:grpSpPr>
+      <p:sp>
+        <p:nvSpPr>
+          <p:cNvPr id="2" name="Shape 0"/>
+          <p:cNvSpPr/>
+          <p:nvPr/>
+        </p:nvSpPr>
+        <p:spPr>
+          <a:xfrm>
+            <a:off x="0" y="0"/>
+            <a:ext cx="12191695" cy="164592"/>
+          </a:xfrm>
+          <a:prstGeom prst="rect">
+            <a:avLst/>
+          </a:prstGeom>
+          <a:solidFill>
+            <a:srgbClr val="0068B7"/>
+          </a:solidFill>
+          <a:ln w="12700">
+            <a:solidFill>
+              <a:srgbClr val="0068B7"/>
+            </a:solidFill>
+            <a:prstDash val="solid"/>
+          </a:ln>
+        </p:spPr>
+      </p:sp>
+      <p:sp>
+        <p:nvSpPr>
+          <p:cNvPr id="3" name="Shape 1"/>
+          <p:cNvSpPr/>
+          <p:nvPr/>
+        </p:nvSpPr>
+        <p:spPr>
+          <a:xfrm>
+            <a:off x="0" y="164592"/>
+            <a:ext cx="146304" cy="6693408"/>
+          </a:xfrm>
+          <a:prstGeom prst="rect">
+            <a:avLst/>
+          </a:prstGeom>
+          <a:solidFill>
+            <a:srgbClr val="2F8A28"/>
+          </a:solidFill>
+          <a:ln w="12700">
+            <a:solidFill>
+              <a:srgbClr val="2F8A28"/>
+            </a:solidFill>
+            <a:prstDash val="solid"/>
+          </a:ln>
+        </p:spPr>
+      </p:sp>
+      <p:sp>
+        <p:nvSpPr>
+          <p:cNvPr id="4" name="Text 2"/>
+          <p:cNvSpPr/>
+          <p:nvPr/>
+        </p:nvSpPr>
+        <p:spPr>
+          <a:xfrm>
+            <a:off x="502920" y="292608"/>
+            <a:ext cx="10149840" cy="256032"/>
+          </a:xfrm>
+          <a:prstGeom prst="rect">
+            <a:avLst/>
+          </a:prstGeom>
+          <a:noFill/>
+          <a:ln/>
+        </p:spPr>
+        <p:txBody>
+          <a:bodyPr wrap="square" lIns="0" tIns="0" rIns="0" bIns="0" rtlCol="0" anchor="ctr"/>
+          <a:lstStyle/>
+          <a:p>
+            <a:pPr indent="0" marL="0">
+              <a:buNone/>
+            </a:pPr>
+            <a:r>
+              <a:rPr lang="en-US" sz="900" b="1" dirty="0">
+                <a:solidFill>
+                  <a:srgbClr val="5F7181"/>
+                </a:solidFill>
+                <a:latin typeface="Aptos" pitchFamily="34" charset="0"/>
+                <a:ea typeface="Aptos" pitchFamily="34" charset="-122"/>
+                <a:cs typeface="Aptos" pitchFamily="34" charset="-120"/>
+              </a:rPr>
+              <a:t>Communicating Model Results and Uncertainty</a:t>
+            </a:r>
+            <a:endParaRPr lang="en-US" sz="900" dirty="0"/>
+          </a:p>
+        </p:txBody>
+      </p:sp>
+      <p:sp>
+        <p:nvSpPr>
+          <p:cNvPr id="5" name="Text 3"/>
+          <p:cNvSpPr/>
+          <p:nvPr/>
+        </p:nvSpPr>
+        <p:spPr>
+          <a:xfrm>
+            <a:off x="502920" y="6537960"/>
+            <a:ext cx="7772400" cy="201168"/>
+          </a:xfrm>
+          <a:prstGeom prst="rect">
+            <a:avLst/>
+          </a:prstGeom>
+          <a:noFill/>
+          <a:ln/>
+        </p:spPr>
+        <p:txBody>
+          <a:bodyPr wrap="square" lIns="0" tIns="0" rIns="0" bIns="0" rtlCol="0" anchor="ctr"/>
+          <a:lstStyle/>
+          <a:p>
+            <a:pPr indent="0" marL="0">
+              <a:buNone/>
+            </a:pPr>
+            <a:r>
+              <a:rPr lang="en-US" sz="800" dirty="0">
+                <a:solidFill>
+                  <a:srgbClr val="5F7181"/>
+                </a:solidFill>
+                <a:latin typeface="Aptos" pitchFamily="34" charset="0"/>
+                <a:ea typeface="Aptos" pitchFamily="34" charset="-122"/>
+                <a:cs typeface="Aptos" pitchFamily="34" charset="-120"/>
+              </a:rPr>
+              <a:t>AI Playbook and Toolkit for Public Health Departments</a:t>
+            </a:r>
+            <a:endParaRPr lang="en-US" sz="800" dirty="0"/>
+          </a:p>
+        </p:txBody>
+      </p:sp>
+      <p:sp>
+        <p:nvSpPr>
+          <p:cNvPr id="6" name="Text 4"/>
+          <p:cNvSpPr/>
+          <p:nvPr/>
+        </p:nvSpPr>
+        <p:spPr>
+          <a:xfrm>
+            <a:off x="9966960" y="6537960"/>
+            <a:ext cx="1645920" cy="201168"/>
+          </a:xfrm>
+          <a:prstGeom prst="rect">
+            <a:avLst/>
+          </a:prstGeom>
+          <a:noFill/>
+          <a:ln/>
+        </p:spPr>
+        <p:txBody>
+          <a:bodyPr wrap="square" lIns="0" tIns="0" rIns="0" bIns="0" rtlCol="0" anchor="ctr"/>
+          <a:lstStyle/>
+          <a:p>
+            <a:pPr algn="r" indent="0" marL="0">
+              <a:buNone/>
+            </a:pPr>
+            <a:r>
+              <a:rPr lang="en-US" sz="800" dirty="0">
+                <a:solidFill>
+                  <a:srgbClr val="5F7181"/>
+                </a:solidFill>
+                <a:latin typeface="Aptos" pitchFamily="34" charset="0"/>
+                <a:ea typeface="Aptos" pitchFamily="34" charset="-122"/>
+                <a:cs typeface="Aptos" pitchFamily="34" charset="-120"/>
+              </a:rPr>
+              <a:t>© Paula Soper</a:t>
+            </a:r>
+            <a:endParaRPr lang="en-US" sz="800" dirty="0"/>
+          </a:p>
+        </p:txBody>
+      </p:sp>
+      <p:sp>
+        <p:nvSpPr>
+          <p:cNvPr id="7" name="Shape 5"/>
+          <p:cNvSpPr/>
+          <p:nvPr/>
+        </p:nvSpPr>
+        <p:spPr>
+          <a:xfrm>
+            <a:off x="640080" y="658368"/>
+            <a:ext cx="420624" cy="420624"/>
+          </a:xfrm>
+          <a:prstGeom prst="ellipse">
+            <a:avLst/>
+          </a:prstGeom>
+          <a:solidFill>
+            <a:srgbClr val="0068B7"/>
+          </a:solidFill>
+          <a:ln w="12700">
+            <a:solidFill>
+              <a:srgbClr val="0068B7"/>
+            </a:solidFill>
+            <a:prstDash val="solid"/>
+          </a:ln>
+        </p:spPr>
+      </p:sp>
+      <p:sp>
+        <p:nvSpPr>
+          <p:cNvPr id="8" name="Text 6"/>
+          <p:cNvSpPr/>
+          <p:nvPr/>
+        </p:nvSpPr>
+        <p:spPr>
+          <a:xfrm>
+            <a:off x="640080" y="731520"/>
+            <a:ext cx="420624" cy="164592"/>
+          </a:xfrm>
+          <a:prstGeom prst="rect">
+            <a:avLst/>
+          </a:prstGeom>
+          <a:noFill/>
+          <a:ln/>
+        </p:spPr>
+        <p:txBody>
+          <a:bodyPr wrap="square" lIns="0" tIns="0" rIns="0" bIns="0" rtlCol="0" anchor="ctr"/>
+          <a:lstStyle/>
+          <a:p>
+            <a:pPr algn="ctr" indent="0" marL="0">
+              <a:buNone/>
+            </a:pPr>
+            <a:r>
+              <a:rPr lang="en-US" sz="1100" b="1" dirty="0">
+                <a:solidFill>
+                  <a:srgbClr val="FFFFFF"/>
+                </a:solidFill>
+                <a:latin typeface="Aptos" pitchFamily="34" charset="0"/>
+                <a:ea typeface="Aptos" pitchFamily="34" charset="-122"/>
+                <a:cs typeface="Aptos" pitchFamily="34" charset="-120"/>
+              </a:rPr>
+              <a:t>14</a:t>
+            </a:r>
+            <a:endParaRPr lang="en-US" sz="1100" dirty="0"/>
+          </a:p>
+        </p:txBody>
+      </p:sp>
+      <p:sp>
+        <p:nvSpPr>
+          <p:cNvPr id="9" name="Text 7"/>
+          <p:cNvSpPr/>
+          <p:nvPr/>
+        </p:nvSpPr>
+        <p:spPr>
+          <a:xfrm>
+            <a:off x="640080" y="621792"/>
+            <a:ext cx="10881360" cy="566928"/>
+          </a:xfrm>
+          <a:prstGeom prst="rect">
+            <a:avLst/>
+          </a:prstGeom>
+          <a:noFill/>
+          <a:ln/>
+        </p:spPr>
+        <p:txBody>
+          <a:bodyPr wrap="square" lIns="0" tIns="0" rIns="0" bIns="0" rtlCol="0" anchor="ctr">
+            <a:normAutofit/>
+          </a:bodyPr>
+          <a:lstStyle/>
+          <a:p>
+            <a:pPr indent="0" marL="0">
+              <a:buNone/>
+            </a:pPr>
+            <a:r>
+              <a:rPr lang="en-US" sz="2700" b="1" dirty="0">
+                <a:solidFill>
+                  <a:srgbClr val="003A63"/>
+                </a:solidFill>
+                <a:latin typeface="Aptos Display" pitchFamily="34" charset="0"/>
+                <a:ea typeface="Aptos Display" pitchFamily="34" charset="-122"/>
+                <a:cs typeface="Aptos Display" pitchFamily="34" charset="-120"/>
+              </a:rPr>
+              <a:t>References and Resources</a:t>
+            </a:r>
+            <a:endParaRPr lang="en-US" sz="2700" dirty="0"/>
+          </a:p>
+        </p:txBody>
+      </p:sp>
+      <p:sp>
+        <p:nvSpPr>
+          <p:cNvPr id="10" name="Text 8"/>
+          <p:cNvSpPr/>
+          <p:nvPr/>
+        </p:nvSpPr>
+        <p:spPr>
+          <a:xfrm>
+            <a:off x="868680" y="1417320"/>
+            <a:ext cx="6675120" cy="4434840"/>
+          </a:xfrm>
+          <a:prstGeom prst="rect">
+            <a:avLst/>
+          </a:prstGeom>
+          <a:noFill/>
+          <a:ln/>
+        </p:spPr>
+        <p:txBody>
+          <a:bodyPr wrap="square" lIns="635" tIns="635" rIns="635" bIns="635" rtlCol="0" anchor="t">
+            <a:normAutofit/>
+          </a:bodyPr>
+          <a:lstStyle/>
+          <a:p>
+            <a:r>
+              <a:rPr lang="en-US" sz="1700" dirty="0">
+                <a:solidFill>
+                  <a:srgbClr val="17364A"/>
+                </a:solidFill>
+                <a:latin typeface="Aptos" pitchFamily="34" charset="0"/>
+                <a:ea typeface="Aptos" pitchFamily="34" charset="-122"/>
+                <a:cs typeface="Aptos" pitchFamily="34" charset="-120"/>
+              </a:rPr>
+              <a:t>CDC Public Health Data Strategy and Data Modernization resources:.</a:t>
+            </a:r>
+            <a:endParaRPr lang="en-US" sz="1700" dirty="0"/>
+          </a:p>
+          <a:p>
+            <a:r>
+              <a:rPr lang="en-US" sz="1700" dirty="0">
+                <a:solidFill>
+                  <a:srgbClr val="17364A"/>
+                </a:solidFill>
+                <a:latin typeface="Aptos" pitchFamily="34" charset="0"/>
+                <a:ea typeface="Aptos" pitchFamily="34" charset="-122"/>
+                <a:cs typeface="Aptos" pitchFamily="34" charset="-120"/>
+              </a:rPr>
+              <a:t>NIST Artificial Intelligence Risk Management Framework and NIST Generative AI Profile:.</a:t>
+            </a:r>
+            <a:endParaRPr lang="en-US" sz="1700" dirty="0"/>
+          </a:p>
+          <a:p>
+            <a:r>
+              <a:rPr lang="en-US" sz="1700" dirty="0">
+                <a:solidFill>
+                  <a:srgbClr val="17364A"/>
+                </a:solidFill>
+                <a:latin typeface="Aptos" pitchFamily="34" charset="0"/>
+                <a:ea typeface="Aptos" pitchFamily="34" charset="-122"/>
+                <a:cs typeface="Aptos" pitchFamily="34" charset="-120"/>
+              </a:rPr>
+              <a:t>WHO Ethics and Governance of Artificial Intelligence for Health guidance: https://www.who.int/publications/i/item/9789240029200</a:t>
+            </a:r>
+            <a:endParaRPr lang="en-US" sz="1700" dirty="0"/>
+          </a:p>
+          <a:p>
+            <a:r>
+              <a:rPr lang="en-US" sz="1700" dirty="0">
+                <a:solidFill>
+                  <a:srgbClr val="17364A"/>
+                </a:solidFill>
+                <a:latin typeface="Aptos" pitchFamily="34" charset="0"/>
+                <a:ea typeface="Aptos" pitchFamily="34" charset="-122"/>
+                <a:cs typeface="Aptos" pitchFamily="34" charset="-120"/>
+              </a:rPr>
+              <a:t>OWASP Top 10 for Large Language Model Applications: https://owasp.org/www-project-top-10-for-large-language-model-applications/</a:t>
+            </a:r>
+            <a:endParaRPr lang="en-US" sz="1700" dirty="0"/>
+          </a:p>
+        </p:txBody>
+      </p:sp>
+      <p:sp>
+        <p:nvSpPr>
+          <p:cNvPr id="11" name="Shape 9"/>
+          <p:cNvSpPr/>
+          <p:nvPr/>
+        </p:nvSpPr>
+        <p:spPr>
+          <a:xfrm>
+            <a:off x="7909560" y="1417320"/>
+            <a:ext cx="3154680" cy="1828800"/>
+          </a:xfrm>
+          <a:prstGeom prst="roundRect">
+            <a:avLst>
+              <a:gd name="adj" fmla="val 6000"/>
+            </a:avLst>
+          </a:prstGeom>
+          <a:solidFill>
+            <a:srgbClr val="EEF8ED"/>
+          </a:solidFill>
+          <a:ln w="12700">
+            <a:solidFill>
+              <a:srgbClr val="B9D7E6"/>
+            </a:solidFill>
+            <a:prstDash val="solid"/>
+          </a:ln>
+        </p:spPr>
+      </p:sp>
+      <p:sp>
+        <p:nvSpPr>
+          <p:cNvPr id="12" name="Text 10"/>
+          <p:cNvSpPr/>
+          <p:nvPr/>
+        </p:nvSpPr>
+        <p:spPr>
+          <a:xfrm>
+            <a:off x="8074152" y="1563624"/>
+            <a:ext cx="2825496" cy="201168"/>
+          </a:xfrm>
+          <a:prstGeom prst="rect">
+            <a:avLst/>
+          </a:prstGeom>
+          <a:noFill/>
+          <a:ln/>
+        </p:spPr>
+        <p:txBody>
+          <a:bodyPr wrap="square" lIns="0" tIns="0" rIns="0" bIns="0" rtlCol="0" anchor="ctr"/>
+          <a:lstStyle/>
+          <a:p>
+            <a:pPr indent="0" marL="0">
+              <a:buNone/>
+            </a:pPr>
+            <a:r>
+              <a:rPr lang="en-US" sz="950" b="1" dirty="0">
+                <a:solidFill>
+                  <a:srgbClr val="0068B7"/>
+                </a:solidFill>
+                <a:latin typeface="Aptos" pitchFamily="34" charset="0"/>
+                <a:ea typeface="Aptos" pitchFamily="34" charset="-122"/>
+                <a:cs typeface="Aptos" pitchFamily="34" charset="-120"/>
+              </a:rPr>
+              <a:t>Key idea</a:t>
+            </a:r>
+            <a:endParaRPr lang="en-US" sz="950" dirty="0"/>
+          </a:p>
+        </p:txBody>
+      </p:sp>
+      <p:sp>
+        <p:nvSpPr>
+          <p:cNvPr id="13" name="Text 11"/>
+          <p:cNvSpPr/>
+          <p:nvPr/>
+        </p:nvSpPr>
+        <p:spPr>
+          <a:xfrm>
+            <a:off x="8074152" y="1856232"/>
+            <a:ext cx="2825496" cy="1261872"/>
+          </a:xfrm>
+          <a:prstGeom prst="rect">
+            <a:avLst/>
+          </a:prstGeom>
+          <a:noFill/>
+          <a:ln/>
+        </p:spPr>
+        <p:txBody>
+          <a:bodyPr wrap="square" lIns="0" tIns="0" rIns="0" bIns="0" rtlCol="0" anchor="t">
+            <a:normAutofit/>
+          </a:bodyPr>
+          <a:lstStyle/>
+          <a:p>
+            <a:pPr indent="0" marL="0">
+              <a:buNone/>
+            </a:pPr>
+            <a:r>
+              <a:rPr lang="en-US" sz="1250" dirty="0">
+                <a:solidFill>
+                  <a:srgbClr val="17364A"/>
+                </a:solidFill>
+                <a:latin typeface="Aptos" pitchFamily="34" charset="0"/>
+                <a:ea typeface="Aptos" pitchFamily="34" charset="-122"/>
+                <a:cs typeface="Aptos" pitchFamily="34" charset="-120"/>
+              </a:rPr>
+              <a:t>CDC Public Health Data Strategy and Data Modernization resources:.</a:t>
+            </a:r>
+            <a:endParaRPr lang="en-US" sz="1250" dirty="0"/>
+          </a:p>
+        </p:txBody>
+      </p:sp>
+      <p:sp>
+        <p:nvSpPr>
+          <p:cNvPr id="14" name="Shape 12"/>
+          <p:cNvSpPr/>
+          <p:nvPr/>
+        </p:nvSpPr>
+        <p:spPr>
+          <a:xfrm>
+            <a:off x="7909560" y="3520440"/>
+            <a:ext cx="3154680" cy="1737360"/>
+          </a:xfrm>
+          <a:prstGeom prst="roundRect">
+            <a:avLst>
+              <a:gd name="adj" fmla="val 6316"/>
+            </a:avLst>
+          </a:prstGeom>
+          <a:solidFill>
+            <a:srgbClr val="EAF6F8"/>
+          </a:solidFill>
+          <a:ln w="12700">
+            <a:solidFill>
+              <a:srgbClr val="B9D7E6"/>
+            </a:solidFill>
+            <a:prstDash val="solid"/>
+          </a:ln>
+        </p:spPr>
+      </p:sp>
+      <p:sp>
+        <p:nvSpPr>
+          <p:cNvPr id="15" name="Text 13"/>
+          <p:cNvSpPr/>
+          <p:nvPr/>
+        </p:nvSpPr>
+        <p:spPr>
+          <a:xfrm>
+            <a:off x="8074152" y="3666744"/>
+            <a:ext cx="2825496" cy="201168"/>
+          </a:xfrm>
+          <a:prstGeom prst="rect">
+            <a:avLst/>
+          </a:prstGeom>
+          <a:noFill/>
+          <a:ln/>
+        </p:spPr>
+        <p:txBody>
+          <a:bodyPr wrap="square" lIns="0" tIns="0" rIns="0" bIns="0" rtlCol="0" anchor="ctr"/>
+          <a:lstStyle/>
+          <a:p>
+            <a:pPr indent="0" marL="0">
+              <a:buNone/>
+            </a:pPr>
+            <a:r>
+              <a:rPr lang="en-US" sz="950" b="1" dirty="0">
+                <a:solidFill>
+                  <a:srgbClr val="0068B7"/>
+                </a:solidFill>
+                <a:latin typeface="Aptos" pitchFamily="34" charset="0"/>
+                <a:ea typeface="Aptos" pitchFamily="34" charset="-122"/>
+                <a:cs typeface="Aptos" pitchFamily="34" charset="-120"/>
+              </a:rPr>
+              <a:t>Use this for</a:t>
+            </a:r>
+            <a:endParaRPr lang="en-US" sz="950" dirty="0"/>
+          </a:p>
+        </p:txBody>
+      </p:sp>
+      <p:sp>
+        <p:nvSpPr>
+          <p:cNvPr id="16" name="Text 14"/>
+          <p:cNvSpPr/>
+          <p:nvPr/>
+        </p:nvSpPr>
+        <p:spPr>
+          <a:xfrm>
+            <a:off x="8074152" y="3959352"/>
+            <a:ext cx="2825496" cy="1170432"/>
+          </a:xfrm>
+          <a:prstGeom prst="rect">
+            <a:avLst/>
+          </a:prstGeom>
+          <a:noFill/>
+          <a:ln/>
+        </p:spPr>
+        <p:txBody>
+          <a:bodyPr wrap="square" lIns="0" tIns="0" rIns="0" bIns="0" rtlCol="0" anchor="t">
+            <a:normAutofit/>
+          </a:bodyPr>
+          <a:lstStyle/>
+          <a:p>
+            <a:pPr indent="0" marL="0">
+              <a:buNone/>
+            </a:pPr>
+            <a:r>
+              <a:rPr lang="en-US" sz="1250" dirty="0">
+                <a:solidFill>
+                  <a:srgbClr val="17364A"/>
+                </a:solidFill>
+                <a:latin typeface="Aptos" pitchFamily="34" charset="0"/>
+                <a:ea typeface="Aptos" pitchFamily="34" charset="-122"/>
+                <a:cs typeface="Aptos" pitchFamily="34" charset="-120"/>
+              </a:rPr>
+              <a:t>Connect the concept to public health decisions, safeguards, documentation, or implementation work.</a:t>
+            </a:r>
+            <a:endParaRPr lang="en-US" sz="1250" dirty="0"/>
+          </a:p>
+        </p:txBody>
+      </p:sp>
+    </p:spTree>
+  </p:cSld>
+  <p:clrMapOvr>
+    <a:masterClrMapping/>
+  </p:clrMapOvr>
+</p:sld>
+</file>
+
+<file path=ppt/slides/slide21.xml><?xml version="1.0" encoding="utf-8"?>
+<p:sld xmlns:a="http://schemas.openxmlformats.org/drawingml/2006/main" xmlns:r="http://schemas.openxmlformats.org/officeDocument/2006/relationships" xmlns:p="http://schemas.openxmlformats.org/presentationml/2006/main">
+  <p:cSld name="Slide 21">
+    <p:bg>
+      <p:bgPr>
+        <a:solidFill>
+          <a:srgbClr val="F7FBFD"/>
+        </a:solidFill>
+      </p:bgPr>
+    </p:bg>
+    <p:spTree>
+      <p:nvGrpSpPr>
+        <p:cNvPr id="1" name=""/>
+        <p:cNvGrpSpPr/>
+        <p:nvPr/>
+      </p:nvGrpSpPr>
+      <p:grpSpPr>
+        <a:xfrm>
+          <a:off x="0" y="0"/>
+          <a:ext cx="0" cy="0"/>
+          <a:chOff x="0" y="0"/>
+          <a:chExt cx="0" cy="0"/>
+        </a:xfrm>
+      </p:grpSpPr>
+      <p:sp>
+        <p:nvSpPr>
+          <p:cNvPr id="2" name="Shape 0"/>
+          <p:cNvSpPr/>
+          <p:nvPr/>
+        </p:nvSpPr>
+        <p:spPr>
+          <a:xfrm>
+            <a:off x="0" y="0"/>
+            <a:ext cx="12191695" cy="164592"/>
+          </a:xfrm>
+          <a:prstGeom prst="rect">
+            <a:avLst/>
+          </a:prstGeom>
+          <a:solidFill>
+            <a:srgbClr val="0068B7"/>
+          </a:solidFill>
+          <a:ln w="12700">
+            <a:solidFill>
+              <a:srgbClr val="0068B7"/>
+            </a:solidFill>
+            <a:prstDash val="solid"/>
+          </a:ln>
+        </p:spPr>
+      </p:sp>
+      <p:sp>
+        <p:nvSpPr>
+          <p:cNvPr id="3" name="Shape 1"/>
+          <p:cNvSpPr/>
+          <p:nvPr/>
+        </p:nvSpPr>
+        <p:spPr>
+          <a:xfrm>
+            <a:off x="0" y="164592"/>
+            <a:ext cx="146304" cy="6693408"/>
+          </a:xfrm>
+          <a:prstGeom prst="rect">
+            <a:avLst/>
+          </a:prstGeom>
+          <a:solidFill>
+            <a:srgbClr val="2F8A28"/>
+          </a:solidFill>
+          <a:ln w="12700">
+            <a:solidFill>
+              <a:srgbClr val="2F8A28"/>
+            </a:solidFill>
+            <a:prstDash val="solid"/>
+          </a:ln>
+        </p:spPr>
+      </p:sp>
+      <p:sp>
+        <p:nvSpPr>
+          <p:cNvPr id="4" name="Text 2"/>
+          <p:cNvSpPr/>
+          <p:nvPr/>
+        </p:nvSpPr>
+        <p:spPr>
+          <a:xfrm>
+            <a:off x="502920" y="292608"/>
+            <a:ext cx="10149840" cy="256032"/>
+          </a:xfrm>
+          <a:prstGeom prst="rect">
+            <a:avLst/>
+          </a:prstGeom>
+          <a:noFill/>
+          <a:ln/>
+        </p:spPr>
+        <p:txBody>
+          <a:bodyPr wrap="square" lIns="0" tIns="0" rIns="0" bIns="0" rtlCol="0" anchor="ctr"/>
+          <a:lstStyle/>
+          <a:p>
+            <a:pPr indent="0" marL="0">
+              <a:buNone/>
+            </a:pPr>
+            <a:r>
+              <a:rPr lang="en-US" sz="900" b="1" dirty="0">
+                <a:solidFill>
+                  <a:srgbClr val="5F7181"/>
+                </a:solidFill>
+                <a:latin typeface="Aptos" pitchFamily="34" charset="0"/>
+                <a:ea typeface="Aptos" pitchFamily="34" charset="-122"/>
+                <a:cs typeface="Aptos" pitchFamily="34" charset="-120"/>
+              </a:rPr>
+              <a:t>Communicating Model Results and Uncertainty</a:t>
+            </a:r>
+            <a:endParaRPr lang="en-US" sz="900" dirty="0"/>
+          </a:p>
+        </p:txBody>
+      </p:sp>
+      <p:sp>
+        <p:nvSpPr>
+          <p:cNvPr id="5" name="Text 3"/>
+          <p:cNvSpPr/>
+          <p:nvPr/>
+        </p:nvSpPr>
+        <p:spPr>
+          <a:xfrm>
+            <a:off x="502920" y="6537960"/>
+            <a:ext cx="7772400" cy="201168"/>
+          </a:xfrm>
+          <a:prstGeom prst="rect">
+            <a:avLst/>
+          </a:prstGeom>
+          <a:noFill/>
+          <a:ln/>
+        </p:spPr>
+        <p:txBody>
+          <a:bodyPr wrap="square" lIns="0" tIns="0" rIns="0" bIns="0" rtlCol="0" anchor="ctr"/>
+          <a:lstStyle/>
+          <a:p>
+            <a:pPr indent="0" marL="0">
+              <a:buNone/>
+            </a:pPr>
+            <a:r>
+              <a:rPr lang="en-US" sz="800" dirty="0">
+                <a:solidFill>
+                  <a:srgbClr val="5F7181"/>
+                </a:solidFill>
+                <a:latin typeface="Aptos" pitchFamily="34" charset="0"/>
+                <a:ea typeface="Aptos" pitchFamily="34" charset="-122"/>
+                <a:cs typeface="Aptos" pitchFamily="34" charset="-120"/>
+              </a:rPr>
+              <a:t>AI Playbook and Toolkit for Public Health Departments</a:t>
+            </a:r>
+            <a:endParaRPr lang="en-US" sz="800" dirty="0"/>
+          </a:p>
+        </p:txBody>
+      </p:sp>
+      <p:sp>
+        <p:nvSpPr>
+          <p:cNvPr id="6" name="Text 4"/>
+          <p:cNvSpPr/>
+          <p:nvPr/>
+        </p:nvSpPr>
+        <p:spPr>
+          <a:xfrm>
+            <a:off x="9966960" y="6537960"/>
+            <a:ext cx="1645920" cy="201168"/>
+          </a:xfrm>
+          <a:prstGeom prst="rect">
+            <a:avLst/>
+          </a:prstGeom>
+          <a:noFill/>
+          <a:ln/>
+        </p:spPr>
+        <p:txBody>
+          <a:bodyPr wrap="square" lIns="0" tIns="0" rIns="0" bIns="0" rtlCol="0" anchor="ctr"/>
+          <a:lstStyle/>
+          <a:p>
+            <a:pPr algn="r" indent="0" marL="0">
+              <a:buNone/>
+            </a:pPr>
+            <a:r>
+              <a:rPr lang="en-US" sz="800" dirty="0">
+                <a:solidFill>
+                  <a:srgbClr val="5F7181"/>
+                </a:solidFill>
+                <a:latin typeface="Aptos" pitchFamily="34" charset="0"/>
+                <a:ea typeface="Aptos" pitchFamily="34" charset="-122"/>
+                <a:cs typeface="Aptos" pitchFamily="34" charset="-120"/>
+              </a:rPr>
+              <a:t>© Paula Soper</a:t>
+            </a:r>
+            <a:endParaRPr lang="en-US" sz="800" dirty="0"/>
+          </a:p>
+        </p:txBody>
+      </p:sp>
+      <p:sp>
+        <p:nvSpPr>
+          <p:cNvPr id="7" name="Text 5"/>
+          <p:cNvSpPr/>
+          <p:nvPr/>
+        </p:nvSpPr>
+        <p:spPr>
+          <a:xfrm>
+            <a:off x="640080" y="658368"/>
+            <a:ext cx="10881360" cy="566928"/>
+          </a:xfrm>
+          <a:prstGeom prst="rect">
+            <a:avLst/>
+          </a:prstGeom>
+          <a:noFill/>
+          <a:ln/>
+        </p:spPr>
+        <p:txBody>
+          <a:bodyPr wrap="square" lIns="0" tIns="0" rIns="0" bIns="0" rtlCol="0" anchor="ctr">
+            <a:normAutofit/>
+          </a:bodyPr>
+          <a:lstStyle/>
+          <a:p>
+            <a:pPr indent="0" marL="0">
+              <a:buNone/>
+            </a:pPr>
+            <a:r>
+              <a:rPr lang="en-US" sz="2700" b="1" dirty="0">
+                <a:solidFill>
+                  <a:srgbClr val="003A63"/>
+                </a:solidFill>
+                <a:latin typeface="Aptos Display" pitchFamily="34" charset="0"/>
+                <a:ea typeface="Aptos Display" pitchFamily="34" charset="-122"/>
+                <a:cs typeface="Aptos Display" pitchFamily="34" charset="-120"/>
+              </a:rPr>
+              <a:t>References and Resources Continued</a:t>
+            </a:r>
+            <a:endParaRPr lang="en-US" sz="2700" dirty="0"/>
+          </a:p>
+        </p:txBody>
+      </p:sp>
+      <p:sp>
+        <p:nvSpPr>
+          <p:cNvPr id="8" name="Text 6"/>
+          <p:cNvSpPr/>
+          <p:nvPr/>
+        </p:nvSpPr>
+        <p:spPr>
+          <a:xfrm>
+            <a:off x="868680" y="1417320"/>
+            <a:ext cx="6675120" cy="4434840"/>
+          </a:xfrm>
+          <a:prstGeom prst="rect">
+            <a:avLst/>
+          </a:prstGeom>
+          <a:noFill/>
+          <a:ln/>
+        </p:spPr>
+        <p:txBody>
+          <a:bodyPr wrap="square" lIns="635" tIns="635" rIns="635" bIns="635" rtlCol="0" anchor="t">
+            <a:normAutofit/>
+          </a:bodyPr>
+          <a:lstStyle/>
+          <a:p>
+            <a:r>
+              <a:rPr lang="en-US" sz="1700" dirty="0">
+                <a:solidFill>
+                  <a:srgbClr val="17364A"/>
+                </a:solidFill>
+                <a:latin typeface="Aptos" pitchFamily="34" charset="0"/>
+                <a:ea typeface="Aptos" pitchFamily="34" charset="-122"/>
+                <a:cs typeface="Aptos" pitchFamily="34" charset="-120"/>
+              </a:rPr>
+              <a:t>Agency policies for privacy, public records, cybersecurity, procurement, civil rights, accessibility, language access, and.</a:t>
+            </a:r>
+            <a:endParaRPr lang="en-US" sz="1700" dirty="0"/>
+          </a:p>
+        </p:txBody>
+      </p:sp>
+      <p:sp>
+        <p:nvSpPr>
+          <p:cNvPr id="9" name="Shape 7"/>
+          <p:cNvSpPr/>
+          <p:nvPr/>
+        </p:nvSpPr>
+        <p:spPr>
+          <a:xfrm>
+            <a:off x="7909560" y="1417320"/>
+            <a:ext cx="3154680" cy="1828800"/>
+          </a:xfrm>
+          <a:prstGeom prst="roundRect">
+            <a:avLst>
+              <a:gd name="adj" fmla="val 6000"/>
+            </a:avLst>
+          </a:prstGeom>
+          <a:solidFill>
+            <a:srgbClr val="EEF8ED"/>
+          </a:solidFill>
+          <a:ln w="12700">
+            <a:solidFill>
+              <a:srgbClr val="B9D7E6"/>
+            </a:solidFill>
+            <a:prstDash val="solid"/>
+          </a:ln>
+        </p:spPr>
+      </p:sp>
+      <p:sp>
+        <p:nvSpPr>
+          <p:cNvPr id="10" name="Text 8"/>
+          <p:cNvSpPr/>
+          <p:nvPr/>
+        </p:nvSpPr>
+        <p:spPr>
+          <a:xfrm>
+            <a:off x="8074152" y="1563624"/>
+            <a:ext cx="2825496" cy="201168"/>
+          </a:xfrm>
+          <a:prstGeom prst="rect">
+            <a:avLst/>
+          </a:prstGeom>
+          <a:noFill/>
+          <a:ln/>
+        </p:spPr>
+        <p:txBody>
+          <a:bodyPr wrap="square" lIns="0" tIns="0" rIns="0" bIns="0" rtlCol="0" anchor="ctr"/>
+          <a:lstStyle/>
+          <a:p>
+            <a:pPr indent="0" marL="0">
+              <a:buNone/>
+            </a:pPr>
+            <a:r>
+              <a:rPr lang="en-US" sz="950" b="1" dirty="0">
+                <a:solidFill>
+                  <a:srgbClr val="0068B7"/>
+                </a:solidFill>
+                <a:latin typeface="Aptos" pitchFamily="34" charset="0"/>
+                <a:ea typeface="Aptos" pitchFamily="34" charset="-122"/>
+                <a:cs typeface="Aptos" pitchFamily="34" charset="-120"/>
+              </a:rPr>
+              <a:t>Key idea</a:t>
+            </a:r>
+            <a:endParaRPr lang="en-US" sz="950" dirty="0"/>
+          </a:p>
+        </p:txBody>
+      </p:sp>
+      <p:sp>
+        <p:nvSpPr>
+          <p:cNvPr id="11" name="Text 9"/>
+          <p:cNvSpPr/>
+          <p:nvPr/>
+        </p:nvSpPr>
+        <p:spPr>
+          <a:xfrm>
+            <a:off x="8074152" y="1856232"/>
+            <a:ext cx="2825496" cy="1261872"/>
+          </a:xfrm>
+          <a:prstGeom prst="rect">
+            <a:avLst/>
+          </a:prstGeom>
+          <a:noFill/>
+          <a:ln/>
+        </p:spPr>
+        <p:txBody>
+          <a:bodyPr wrap="square" lIns="0" tIns="0" rIns="0" bIns="0" rtlCol="0" anchor="t">
+            <a:normAutofit/>
+          </a:bodyPr>
+          <a:lstStyle/>
+          <a:p>
+            <a:pPr indent="0" marL="0">
+              <a:buNone/>
+            </a:pPr>
+            <a:r>
+              <a:rPr lang="en-US" sz="1250" dirty="0">
+                <a:solidFill>
+                  <a:srgbClr val="17364A"/>
+                </a:solidFill>
+                <a:latin typeface="Aptos" pitchFamily="34" charset="0"/>
+                <a:ea typeface="Aptos" pitchFamily="34" charset="-122"/>
+                <a:cs typeface="Aptos" pitchFamily="34" charset="-120"/>
+              </a:rPr>
+              <a:t>Agency policies for privacy, public records, cybersecurity, procurement, civil rights, accessibility, language access, and.</a:t>
+            </a:r>
+            <a:endParaRPr lang="en-US" sz="1250" dirty="0"/>
+          </a:p>
+        </p:txBody>
+      </p:sp>
+      <p:sp>
+        <p:nvSpPr>
+          <p:cNvPr id="12" name="Shape 10"/>
+          <p:cNvSpPr/>
+          <p:nvPr/>
+        </p:nvSpPr>
+        <p:spPr>
+          <a:xfrm>
+            <a:off x="7909560" y="3520440"/>
+            <a:ext cx="3154680" cy="1737360"/>
+          </a:xfrm>
+          <a:prstGeom prst="roundRect">
+            <a:avLst>
+              <a:gd name="adj" fmla="val 6316"/>
+            </a:avLst>
+          </a:prstGeom>
+          <a:solidFill>
+            <a:srgbClr val="EAF6F8"/>
+          </a:solidFill>
+          <a:ln w="12700">
+            <a:solidFill>
+              <a:srgbClr val="B9D7E6"/>
+            </a:solidFill>
+            <a:prstDash val="solid"/>
+          </a:ln>
+        </p:spPr>
+      </p:sp>
+      <p:sp>
+        <p:nvSpPr>
+          <p:cNvPr id="13" name="Text 11"/>
+          <p:cNvSpPr/>
+          <p:nvPr/>
+        </p:nvSpPr>
+        <p:spPr>
+          <a:xfrm>
+            <a:off x="8074152" y="3666744"/>
+            <a:ext cx="2825496" cy="201168"/>
+          </a:xfrm>
+          <a:prstGeom prst="rect">
+            <a:avLst/>
+          </a:prstGeom>
+          <a:noFill/>
+          <a:ln/>
+        </p:spPr>
+        <p:txBody>
+          <a:bodyPr wrap="square" lIns="0" tIns="0" rIns="0" bIns="0" rtlCol="0" anchor="ctr"/>
+          <a:lstStyle/>
+          <a:p>
+            <a:pPr indent="0" marL="0">
+              <a:buNone/>
+            </a:pPr>
+            <a:r>
+              <a:rPr lang="en-US" sz="950" b="1" dirty="0">
+                <a:solidFill>
+                  <a:srgbClr val="0068B7"/>
+                </a:solidFill>
+                <a:latin typeface="Aptos" pitchFamily="34" charset="0"/>
+                <a:ea typeface="Aptos" pitchFamily="34" charset="-122"/>
+                <a:cs typeface="Aptos" pitchFamily="34" charset="-120"/>
+              </a:rPr>
+              <a:t>Use this for</a:t>
+            </a:r>
+            <a:endParaRPr lang="en-US" sz="950" dirty="0"/>
+          </a:p>
+        </p:txBody>
+      </p:sp>
+      <p:sp>
+        <p:nvSpPr>
+          <p:cNvPr id="14" name="Text 12"/>
+          <p:cNvSpPr/>
+          <p:nvPr/>
+        </p:nvSpPr>
+        <p:spPr>
+          <a:xfrm>
+            <a:off x="8074152" y="3959352"/>
+            <a:ext cx="2825496" cy="1170432"/>
+          </a:xfrm>
+          <a:prstGeom prst="rect">
+            <a:avLst/>
+          </a:prstGeom>
+          <a:noFill/>
+          <a:ln/>
+        </p:spPr>
+        <p:txBody>
+          <a:bodyPr wrap="square" lIns="0" tIns="0" rIns="0" bIns="0" rtlCol="0" anchor="t">
+            <a:normAutofit/>
+          </a:bodyPr>
+          <a:lstStyle/>
+          <a:p>
+            <a:pPr indent="0" marL="0">
+              <a:buNone/>
+            </a:pPr>
+            <a:r>
+              <a:rPr lang="en-US" sz="1250" dirty="0">
+                <a:solidFill>
+                  <a:srgbClr val="17364A"/>
+                </a:solidFill>
+                <a:latin typeface="Aptos" pitchFamily="34" charset="0"/>
+                <a:ea typeface="Aptos" pitchFamily="34" charset="-122"/>
+                <a:cs typeface="Aptos" pitchFamily="34" charset="-120"/>
+              </a:rPr>
+              <a:t>Connect the concept to public health decisions, safeguards, documentation, or implementation work.</a:t>
+            </a:r>
+            <a:endParaRPr lang="en-US" sz="1250" dirty="0"/>
           </a:p>
         </p:txBody>
       </p:sp>
@@ -5803,7 +10337,32 @@
       </p:sp>
       <p:sp>
         <p:nvSpPr>
-          <p:cNvPr id="3" name="Text 1"/>
+          <p:cNvPr id="3" name="Shape 1"/>
+          <p:cNvSpPr/>
+          <p:nvPr/>
+        </p:nvSpPr>
+        <p:spPr>
+          <a:xfrm>
+            <a:off x="0" y="164592"/>
+            <a:ext cx="146304" cy="6693408"/>
+          </a:xfrm>
+          <a:prstGeom prst="rect">
+            <a:avLst/>
+          </a:prstGeom>
+          <a:solidFill>
+            <a:srgbClr val="2F8A28"/>
+          </a:solidFill>
+          <a:ln w="12700">
+            <a:solidFill>
+              <a:srgbClr val="2F8A28"/>
+            </a:solidFill>
+            <a:prstDash val="solid"/>
+          </a:ln>
+        </p:spPr>
+      </p:sp>
+      <p:sp>
+        <p:nvSpPr>
+          <p:cNvPr id="4" name="Text 2"/>
           <p:cNvSpPr/>
           <p:nvPr/>
         </p:nvSpPr>
@@ -5842,7 +10401,7 @@
       </p:sp>
       <p:sp>
         <p:nvSpPr>
-          <p:cNvPr id="4" name="Text 2"/>
+          <p:cNvPr id="5" name="Text 3"/>
           <p:cNvSpPr/>
           <p:nvPr/>
         </p:nvSpPr>
@@ -5881,7 +10440,7 @@
       </p:sp>
       <p:sp>
         <p:nvSpPr>
-          <p:cNvPr id="5" name="Text 3"/>
+          <p:cNvPr id="6" name="Text 4"/>
           <p:cNvSpPr/>
           <p:nvPr/>
         </p:nvSpPr>
@@ -5920,7 +10479,7 @@
       </p:sp>
       <p:sp>
         <p:nvSpPr>
-          <p:cNvPr id="6" name="Text 4"/>
+          <p:cNvPr id="7" name="Text 5"/>
           <p:cNvSpPr/>
           <p:nvPr/>
         </p:nvSpPr>
@@ -5953,7 +10512,7 @@
                 <a:ea typeface="Aptos Display" pitchFamily="34" charset="-122"/>
                 <a:cs typeface="Aptos Display" pitchFamily="34" charset="-120"/>
               </a:rPr>
-              <a:t>Learning Objectives</a:t>
+              <a:t>How this module connects to the playbook</a:t>
             </a:r>
             <a:endParaRPr lang="en-US" sz="2700" dirty="0"/>
           </a:p>
@@ -5961,14 +10520,14 @@
       </p:sp>
       <p:sp>
         <p:nvSpPr>
-          <p:cNvPr id="7" name="Text 5"/>
-          <p:cNvSpPr/>
-          <p:nvPr/>
-        </p:nvSpPr>
-        <p:spPr>
-          <a:xfrm>
-            <a:off x="822960" y="1325880"/>
-            <a:ext cx="10378440" cy="4800600"/>
+          <p:cNvPr id="8" name="Text 6"/>
+          <p:cNvSpPr/>
+          <p:nvPr/>
+        </p:nvSpPr>
+        <p:spPr>
+          <a:xfrm>
+            <a:off x="868680" y="1417320"/>
+            <a:ext cx="6903720" cy="4480560"/>
           </a:xfrm>
           <a:prstGeom prst="rect">
             <a:avLst/>
@@ -5983,7 +10542,7 @@
           <a:lstStyle/>
           <a:p>
             <a:r>
-              <a:rPr lang="en-US" sz="1450" dirty="0">
+              <a:rPr lang="en-US" sz="1540" dirty="0">
                 <a:solidFill>
                   <a:srgbClr val="17364A"/>
                 </a:solidFill>
@@ -5991,13 +10550,13 @@
                 <a:ea typeface="Aptos" pitchFamily="34" charset="-122"/>
                 <a:cs typeface="Aptos" pitchFamily="34" charset="-120"/>
               </a:rPr>
-              <a:t>Explain model results in plain language for nontechnical audiences.</a:t>
-            </a:r>
-            <a:endParaRPr lang="en-US" sz="1450" dirty="0"/>
-          </a:p>
-          <a:p>
-            <a:r>
-              <a:rPr lang="en-US" sz="1450" dirty="0">
+              <a:t>Play 11: Build and Deploy AI Solutions - This lesson informs Play 11 by helping learners connect the lesson topic to build and deploy.</a:t>
+            </a:r>
+            <a:endParaRPr lang="en-US" sz="1540" dirty="0"/>
+          </a:p>
+          <a:p>
+            <a:r>
+              <a:rPr lang="en-US" sz="1540" dirty="0">
                 <a:solidFill>
                   <a:srgbClr val="17364A"/>
                 </a:solidFill>
@@ -6005,13 +10564,13 @@
                 <a:ea typeface="Aptos" pitchFamily="34" charset="-122"/>
                 <a:cs typeface="Aptos" pitchFamily="34" charset="-120"/>
               </a:rPr>
-              <a:t>Distinguish uncertainty, variability, error, bias, and data limitations.</a:t>
-            </a:r>
-            <a:endParaRPr lang="en-US" sz="1450" dirty="0"/>
-          </a:p>
-          <a:p>
-            <a:r>
-              <a:rPr lang="en-US" sz="1450" dirty="0">
+              <a:t>Play 1: Vision &amp; Guardrails - This lesson informs Play 1 by helping learners connect the lesson topic to vision &amp; guardrails work in.</a:t>
+            </a:r>
+            <a:endParaRPr lang="en-US" sz="1540" dirty="0"/>
+          </a:p>
+          <a:p>
+            <a:r>
+              <a:rPr lang="en-US" sz="1540" dirty="0">
                 <a:solidFill>
                   <a:srgbClr val="17364A"/>
                 </a:solidFill>
@@ -6019,13 +10578,13 @@
                 <a:ea typeface="Aptos" pitchFamily="34" charset="-122"/>
                 <a:cs typeface="Aptos" pitchFamily="34" charset="-120"/>
               </a:rPr>
-              <a:t>Identify when model results should include confidence intervals, prediction intervals, caveats, or subgroup findings.</a:t>
-            </a:r>
-            <a:endParaRPr lang="en-US" sz="1450" dirty="0"/>
-          </a:p>
-          <a:p>
-            <a:r>
-              <a:rPr lang="en-US" sz="1450" dirty="0">
+              <a:t>Play 7: Prioritize Use Cases - This lesson informs Play 7 by helping learners connect the lesson topic to prioritize use cases work.</a:t>
+            </a:r>
+            <a:endParaRPr lang="en-US" sz="1540" dirty="0"/>
+          </a:p>
+          <a:p>
+            <a:r>
+              <a:rPr lang="en-US" sz="1540" dirty="0">
                 <a:solidFill>
                   <a:srgbClr val="17364A"/>
                 </a:solidFill>
@@ -6033,13 +10592,106 @@
                 <a:ea typeface="Aptos" pitchFamily="34" charset="-122"/>
                 <a:cs typeface="Aptos" pitchFamily="34" charset="-120"/>
               </a:rPr>
-              <a:t>Avoid overclaiming, causal overreach, and false precision in AI communications.</a:t>
-            </a:r>
-            <a:endParaRPr lang="en-US" sz="1450" dirty="0"/>
-          </a:p>
-          <a:p>
-            <a:r>
-              <a:rPr lang="en-US" sz="1450" dirty="0">
+              <a:t>Play 2: Readiness Assessment - This lesson informs Play 2 by helping learners connect the lesson topic to readiness assessment work.</a:t>
+            </a:r>
+            <a:endParaRPr lang="en-US" sz="1540" dirty="0"/>
+          </a:p>
+        </p:txBody>
+      </p:sp>
+      <p:sp>
+        <p:nvSpPr>
+          <p:cNvPr id="9" name="Shape 7"/>
+          <p:cNvSpPr/>
+          <p:nvPr/>
+        </p:nvSpPr>
+        <p:spPr>
+          <a:xfrm>
+            <a:off x="8046720" y="1417320"/>
+            <a:ext cx="3063240" cy="2103120"/>
+          </a:xfrm>
+          <a:prstGeom prst="roundRect">
+            <a:avLst>
+              <a:gd name="adj" fmla="val 5217"/>
+            </a:avLst>
+          </a:prstGeom>
+          <a:solidFill>
+            <a:srgbClr val="EEF8ED"/>
+          </a:solidFill>
+          <a:ln w="12700">
+            <a:solidFill>
+              <a:srgbClr val="B9D7E6"/>
+            </a:solidFill>
+            <a:prstDash val="solid"/>
+          </a:ln>
+        </p:spPr>
+      </p:sp>
+      <p:sp>
+        <p:nvSpPr>
+          <p:cNvPr id="10" name="Text 8"/>
+          <p:cNvSpPr/>
+          <p:nvPr/>
+        </p:nvSpPr>
+        <p:spPr>
+          <a:xfrm>
+            <a:off x="8211312" y="1563624"/>
+            <a:ext cx="2734056" cy="201168"/>
+          </a:xfrm>
+          <a:prstGeom prst="rect">
+            <a:avLst/>
+          </a:prstGeom>
+          <a:noFill/>
+          <a:ln/>
+        </p:spPr>
+        <p:txBody>
+          <a:bodyPr wrap="square" lIns="0" tIns="0" rIns="0" bIns="0" rtlCol="0" anchor="ctr"/>
+          <a:lstStyle/>
+          <a:p>
+            <a:pPr indent="0" marL="0">
+              <a:buNone/>
+            </a:pPr>
+            <a:r>
+              <a:rPr lang="en-US" sz="950" b="1" dirty="0">
+                <a:solidFill>
+                  <a:srgbClr val="0068B7"/>
+                </a:solidFill>
+                <a:latin typeface="Aptos" pitchFamily="34" charset="0"/>
+                <a:ea typeface="Aptos" pitchFamily="34" charset="-122"/>
+                <a:cs typeface="Aptos" pitchFamily="34" charset="-120"/>
+              </a:rPr>
+              <a:t>Apply the lesson</a:t>
+            </a:r>
+            <a:endParaRPr lang="en-US" sz="950" dirty="0"/>
+          </a:p>
+        </p:txBody>
+      </p:sp>
+      <p:sp>
+        <p:nvSpPr>
+          <p:cNvPr id="11" name="Text 9"/>
+          <p:cNvSpPr/>
+          <p:nvPr/>
+        </p:nvSpPr>
+        <p:spPr>
+          <a:xfrm>
+            <a:off x="8211312" y="1856232"/>
+            <a:ext cx="2734056" cy="1536192"/>
+          </a:xfrm>
+          <a:prstGeom prst="rect">
+            <a:avLst/>
+          </a:prstGeom>
+          <a:noFill/>
+          <a:ln/>
+        </p:spPr>
+        <p:txBody>
+          <a:bodyPr wrap="square" lIns="0" tIns="0" rIns="0" bIns="0" rtlCol="0" anchor="t">
+            <a:normAutofit/>
+          </a:bodyPr>
+          <a:lstStyle/>
+          <a:p>
+            <a:pPr indent="0" marL="0">
+              <a:buNone/>
+            </a:pPr>
+            <a:r>
+              <a:rPr lang="en-US" sz="1250" dirty="0">
                 <a:solidFill>
                   <a:srgbClr val="17364A"/>
                 </a:solidFill>
@@ -6047,9 +10699,116 @@
                 <a:ea typeface="Aptos" pitchFamily="34" charset="-122"/>
                 <a:cs typeface="Aptos" pitchFamily="34" charset="-120"/>
               </a:rPr>
-              <a:t>Create a model communication brief for a public health decision-maker.</a:t>
-            </a:r>
-            <a:endParaRPr lang="en-US" sz="1450" dirty="0"/>
+              <a:t>Use the related plays to identify decisions, participants, timing, approvals, and documentation needed for responsible implementation.</a:t>
+            </a:r>
+            <a:endParaRPr lang="en-US" sz="1250" dirty="0"/>
+          </a:p>
+        </p:txBody>
+      </p:sp>
+      <p:sp>
+        <p:nvSpPr>
+          <p:cNvPr id="12" name="Shape 10"/>
+          <p:cNvSpPr/>
+          <p:nvPr/>
+        </p:nvSpPr>
+        <p:spPr>
+          <a:xfrm>
+            <a:off x="8046720" y="3794760"/>
+            <a:ext cx="3063240" cy="1508760"/>
+          </a:xfrm>
+          <a:prstGeom prst="roundRect">
+            <a:avLst>
+              <a:gd name="adj" fmla="val 7273"/>
+            </a:avLst>
+          </a:prstGeom>
+          <a:solidFill>
+            <a:srgbClr val="FFF4D9"/>
+          </a:solidFill>
+          <a:ln w="12700">
+            <a:solidFill>
+              <a:srgbClr val="B9D7E6"/>
+            </a:solidFill>
+            <a:prstDash val="solid"/>
+          </a:ln>
+        </p:spPr>
+      </p:sp>
+      <p:sp>
+        <p:nvSpPr>
+          <p:cNvPr id="13" name="Text 11"/>
+          <p:cNvSpPr/>
+          <p:nvPr/>
+        </p:nvSpPr>
+        <p:spPr>
+          <a:xfrm>
+            <a:off x="8211312" y="3941064"/>
+            <a:ext cx="2734056" cy="201168"/>
+          </a:xfrm>
+          <a:prstGeom prst="rect">
+            <a:avLst/>
+          </a:prstGeom>
+          <a:noFill/>
+          <a:ln/>
+        </p:spPr>
+        <p:txBody>
+          <a:bodyPr wrap="square" lIns="0" tIns="0" rIns="0" bIns="0" rtlCol="0" anchor="ctr"/>
+          <a:lstStyle/>
+          <a:p>
+            <a:pPr indent="0" marL="0">
+              <a:buNone/>
+            </a:pPr>
+            <a:r>
+              <a:rPr lang="en-US" sz="950" b="1" dirty="0">
+                <a:solidFill>
+                  <a:srgbClr val="0068B7"/>
+                </a:solidFill>
+                <a:latin typeface="Aptos" pitchFamily="34" charset="0"/>
+                <a:ea typeface="Aptos" pitchFamily="34" charset="-122"/>
+                <a:cs typeface="Aptos" pitchFamily="34" charset="-120"/>
+              </a:rPr>
+              <a:t>Keep in mind</a:t>
+            </a:r>
+            <a:endParaRPr lang="en-US" sz="950" dirty="0"/>
+          </a:p>
+        </p:txBody>
+      </p:sp>
+      <p:sp>
+        <p:nvSpPr>
+          <p:cNvPr id="14" name="Text 12"/>
+          <p:cNvSpPr/>
+          <p:nvPr/>
+        </p:nvSpPr>
+        <p:spPr>
+          <a:xfrm>
+            <a:off x="8211312" y="4233672"/>
+            <a:ext cx="2734056" cy="941832"/>
+          </a:xfrm>
+          <a:prstGeom prst="rect">
+            <a:avLst/>
+          </a:prstGeom>
+          <a:noFill/>
+          <a:ln/>
+        </p:spPr>
+        <p:txBody>
+          <a:bodyPr wrap="square" lIns="0" tIns="0" rIns="0" bIns="0" rtlCol="0" anchor="t">
+            <a:normAutofit/>
+          </a:bodyPr>
+          <a:lstStyle/>
+          <a:p>
+            <a:pPr indent="0" marL="0">
+              <a:buNone/>
+            </a:pPr>
+            <a:r>
+              <a:rPr lang="en-US" sz="1250" dirty="0">
+                <a:solidFill>
+                  <a:srgbClr val="17364A"/>
+                </a:solidFill>
+                <a:latin typeface="Aptos" pitchFamily="34" charset="0"/>
+                <a:ea typeface="Aptos" pitchFamily="34" charset="-122"/>
+                <a:cs typeface="Aptos" pitchFamily="34" charset="-120"/>
+              </a:rPr>
+              <a:t>The playbook connection helps turn training into agency work, not just individual knowledge.</a:t>
+            </a:r>
+            <a:endParaRPr lang="en-US" sz="1250" dirty="0"/>
           </a:p>
         </p:txBody>
       </p:sp>
@@ -6112,7 +10871,32 @@
       </p:sp>
       <p:sp>
         <p:nvSpPr>
-          <p:cNvPr id="3" name="Text 1"/>
+          <p:cNvPr id="3" name="Shape 1"/>
+          <p:cNvSpPr/>
+          <p:nvPr/>
+        </p:nvSpPr>
+        <p:spPr>
+          <a:xfrm>
+            <a:off x="0" y="164592"/>
+            <a:ext cx="146304" cy="6693408"/>
+          </a:xfrm>
+          <a:prstGeom prst="rect">
+            <a:avLst/>
+          </a:prstGeom>
+          <a:solidFill>
+            <a:srgbClr val="2F8A28"/>
+          </a:solidFill>
+          <a:ln w="12700">
+            <a:solidFill>
+              <a:srgbClr val="2F8A28"/>
+            </a:solidFill>
+            <a:prstDash val="solid"/>
+          </a:ln>
+        </p:spPr>
+      </p:sp>
+      <p:sp>
+        <p:nvSpPr>
+          <p:cNvPr id="4" name="Text 2"/>
           <p:cNvSpPr/>
           <p:nvPr/>
         </p:nvSpPr>
@@ -6151,7 +10935,7 @@
       </p:sp>
       <p:sp>
         <p:nvSpPr>
-          <p:cNvPr id="4" name="Text 2"/>
+          <p:cNvPr id="5" name="Text 3"/>
           <p:cNvSpPr/>
           <p:nvPr/>
         </p:nvSpPr>
@@ -6190,7 +10974,7 @@
       </p:sp>
       <p:sp>
         <p:nvSpPr>
-          <p:cNvPr id="5" name="Text 3"/>
+          <p:cNvPr id="6" name="Text 4"/>
           <p:cNvSpPr/>
           <p:nvPr/>
         </p:nvSpPr>
@@ -6229,7 +11013,7 @@
       </p:sp>
       <p:sp>
         <p:nvSpPr>
-          <p:cNvPr id="6" name="Text 4"/>
+          <p:cNvPr id="7" name="Text 5"/>
           <p:cNvSpPr/>
           <p:nvPr/>
         </p:nvSpPr>
@@ -6262,7 +11046,7 @@
                 <a:ea typeface="Aptos Display" pitchFamily="34" charset="-122"/>
                 <a:cs typeface="Aptos Display" pitchFamily="34" charset="-120"/>
               </a:rPr>
-              <a:t>Module Overview</a:t>
+              <a:t>Related toolkit resources</a:t>
             </a:r>
             <a:endParaRPr lang="en-US" sz="2700" dirty="0"/>
           </a:p>
@@ -6270,32 +11054,192 @@
       </p:sp>
       <p:sp>
         <p:nvSpPr>
-          <p:cNvPr id="7" name="Text 5"/>
-          <p:cNvSpPr/>
-          <p:nvPr/>
-        </p:nvSpPr>
-        <p:spPr>
-          <a:xfrm>
-            <a:off x="822960" y="1325880"/>
-            <a:ext cx="10378440" cy="4800600"/>
-          </a:xfrm>
-          <a:prstGeom prst="rect">
-            <a:avLst/>
-          </a:prstGeom>
-          <a:noFill/>
-          <a:ln/>
-        </p:spPr>
-        <p:txBody>
-          <a:bodyPr wrap="square" lIns="1016" tIns="1016" rIns="1016" bIns="1016" rtlCol="0" anchor="t">
+          <p:cNvPr id="8" name="Text 6"/>
+          <p:cNvSpPr/>
+          <p:nvPr/>
+        </p:nvSpPr>
+        <p:spPr>
+          <a:xfrm>
+            <a:off x="868680" y="1417320"/>
+            <a:ext cx="6903720" cy="4480560"/>
+          </a:xfrm>
+          <a:prstGeom prst="rect">
+            <a:avLst/>
+          </a:prstGeom>
+          <a:noFill/>
+          <a:ln/>
+        </p:spPr>
+        <p:txBody>
+          <a:bodyPr wrap="square" lIns="635" tIns="635" rIns="635" bIns="635" rtlCol="0" anchor="t">
             <a:normAutofit/>
           </a:bodyPr>
           <a:lstStyle/>
           <a:p>
+            <a:r>
+              <a:rPr lang="en-US" sz="1460" dirty="0">
+                <a:solidFill>
+                  <a:srgbClr val="17364A"/>
+                </a:solidFill>
+                <a:latin typeface="Aptos" pitchFamily="34" charset="0"/>
+                <a:ea typeface="Aptos" pitchFamily="34" charset="-122"/>
+                <a:cs typeface="Aptos" pitchFamily="34" charset="-120"/>
+              </a:rPr>
+              <a:t>Tool 3: Equity Impact Assessment Checklist (Checklist) - Use this tool to complete or strengthen the practical exercise for the.</a:t>
+            </a:r>
+            <a:endParaRPr lang="en-US" sz="1460" dirty="0"/>
+          </a:p>
+          <a:p>
+            <a:r>
+              <a:rPr lang="en-US" sz="1460" dirty="0">
+                <a:solidFill>
+                  <a:srgbClr val="17364A"/>
+                </a:solidFill>
+                <a:latin typeface="Aptos" pitchFamily="34" charset="0"/>
+                <a:ea typeface="Aptos" pitchFamily="34" charset="-122"/>
+                <a:cs typeface="Aptos" pitchFamily="34" charset="-120"/>
+              </a:rPr>
+              <a:t>Tool 4: AI Policy Landscape Scan (Worksheet) - Use AI Policy Landscape Scan to translate this lesson into a documented public health.</a:t>
+            </a:r>
+            <a:endParaRPr lang="en-US" sz="1460" dirty="0"/>
+          </a:p>
+          <a:p>
+            <a:r>
+              <a:rPr lang="en-US" sz="1460" dirty="0">
+                <a:solidFill>
+                  <a:srgbClr val="17364A"/>
+                </a:solidFill>
+                <a:latin typeface="Aptos" pitchFamily="34" charset="0"/>
+                <a:ea typeface="Aptos" pitchFamily="34" charset="-122"/>
+                <a:cs typeface="Aptos" pitchFamily="34" charset="-120"/>
+              </a:rPr>
+              <a:t>Tool 5: AI Environmental and Resource Impact Review (Checklist) - Use AI Environmental and Resource Impact Review to translate this.</a:t>
+            </a:r>
+            <a:endParaRPr lang="en-US" sz="1460" dirty="0"/>
+          </a:p>
+          <a:p>
+            <a:r>
+              <a:rPr lang="en-US" sz="1460" dirty="0">
+                <a:solidFill>
+                  <a:srgbClr val="17364A"/>
+                </a:solidFill>
+                <a:latin typeface="Aptos" pitchFamily="34" charset="0"/>
+                <a:ea typeface="Aptos" pitchFamily="34" charset="-122"/>
+                <a:cs typeface="Aptos" pitchFamily="34" charset="-120"/>
+              </a:rPr>
+              <a:t>Tool 6: Human-Centered AI Decision Rule Checklist (Checklist) - Use Human-Centered AI Decision Rule Checklist to translate this.</a:t>
+            </a:r>
+            <a:endParaRPr lang="en-US" sz="1460" dirty="0"/>
+          </a:p>
+          <a:p>
+            <a:r>
+              <a:rPr lang="en-US" sz="1460" dirty="0">
+                <a:solidFill>
+                  <a:srgbClr val="17364A"/>
+                </a:solidFill>
+                <a:latin typeface="Aptos" pitchFamily="34" charset="0"/>
+                <a:ea typeface="Aptos" pitchFamily="34" charset="-122"/>
+                <a:cs typeface="Aptos" pitchFamily="34" charset="-120"/>
+              </a:rPr>
+              <a:t>Tool 8: AI Project Charter (Planning) - Use AI Project Charter to translate this lesson into a documented public health AI planning,.</a:t>
+            </a:r>
+            <a:endParaRPr lang="en-US" sz="1460" dirty="0"/>
+          </a:p>
+        </p:txBody>
+      </p:sp>
+      <p:sp>
+        <p:nvSpPr>
+          <p:cNvPr id="9" name="Shape 7"/>
+          <p:cNvSpPr/>
+          <p:nvPr/>
+        </p:nvSpPr>
+        <p:spPr>
+          <a:xfrm>
+            <a:off x="8046720" y="1417320"/>
+            <a:ext cx="3063240" cy="2103120"/>
+          </a:xfrm>
+          <a:prstGeom prst="roundRect">
+            <a:avLst>
+              <a:gd name="adj" fmla="val 5217"/>
+            </a:avLst>
+          </a:prstGeom>
+          <a:solidFill>
+            <a:srgbClr val="EAF6F8"/>
+          </a:solidFill>
+          <a:ln w="12700">
+            <a:solidFill>
+              <a:srgbClr val="B9D7E6"/>
+            </a:solidFill>
+            <a:prstDash val="solid"/>
+          </a:ln>
+        </p:spPr>
+      </p:sp>
+      <p:sp>
+        <p:nvSpPr>
+          <p:cNvPr id="10" name="Text 8"/>
+          <p:cNvSpPr/>
+          <p:nvPr/>
+        </p:nvSpPr>
+        <p:spPr>
+          <a:xfrm>
+            <a:off x="8211312" y="1563624"/>
+            <a:ext cx="2734056" cy="201168"/>
+          </a:xfrm>
+          <a:prstGeom prst="rect">
+            <a:avLst/>
+          </a:prstGeom>
+          <a:noFill/>
+          <a:ln/>
+        </p:spPr>
+        <p:txBody>
+          <a:bodyPr wrap="square" lIns="0" tIns="0" rIns="0" bIns="0" rtlCol="0" anchor="ctr"/>
+          <a:lstStyle/>
+          <a:p>
             <a:pPr indent="0" marL="0">
               <a:buNone/>
             </a:pPr>
             <a:r>
-              <a:rPr lang="en-US" sz="1420" dirty="0">
+              <a:rPr lang="en-US" sz="950" b="1" dirty="0">
+                <a:solidFill>
+                  <a:srgbClr val="0068B7"/>
+                </a:solidFill>
+                <a:latin typeface="Aptos" pitchFamily="34" charset="0"/>
+                <a:ea typeface="Aptos" pitchFamily="34" charset="-122"/>
+                <a:cs typeface="Aptos" pitchFamily="34" charset="-120"/>
+              </a:rPr>
+              <a:t>Use the tools</a:t>
+            </a:r>
+            <a:endParaRPr lang="en-US" sz="950" dirty="0"/>
+          </a:p>
+        </p:txBody>
+      </p:sp>
+      <p:sp>
+        <p:nvSpPr>
+          <p:cNvPr id="11" name="Text 9"/>
+          <p:cNvSpPr/>
+          <p:nvPr/>
+        </p:nvSpPr>
+        <p:spPr>
+          <a:xfrm>
+            <a:off x="8211312" y="1856232"/>
+            <a:ext cx="2734056" cy="1536192"/>
+          </a:xfrm>
+          <a:prstGeom prst="rect">
+            <a:avLst/>
+          </a:prstGeom>
+          <a:noFill/>
+          <a:ln/>
+        </p:spPr>
+        <p:txBody>
+          <a:bodyPr wrap="square" lIns="0" tIns="0" rIns="0" bIns="0" rtlCol="0" anchor="t">
+            <a:normAutofit/>
+          </a:bodyPr>
+          <a:lstStyle/>
+          <a:p>
+            <a:pPr indent="0" marL="0">
+              <a:buNone/>
+            </a:pPr>
+            <a:r>
+              <a:rPr lang="en-US" sz="1250" dirty="0">
                 <a:solidFill>
                   <a:srgbClr val="17364A"/>
                 </a:solidFill>
@@ -6303,9 +11247,116 @@
                 <a:ea typeface="Aptos" pitchFamily="34" charset="-122"/>
                 <a:cs typeface="Aptos" pitchFamily="34" charset="-120"/>
               </a:rPr>
-              <a:t>Public health staff often need to communicate AI or model results to leaders, partners, the public, or operational teams. This module teaches learners how to explain model outputs, uncertainty, limitations, and appropriate use without overstating precision or creating false confidence. The module focuses on practical communication. Learners translate metrics, confidence, caveats, and validation findings into language that supports responsible decisions. The goal is to ensure that model results inform judgment rather than replace it.</a:t>
-            </a:r>
-            <a:endParaRPr lang="en-US" sz="1420" dirty="0"/>
+              <a:t>Use linked tools when your department needs a structured worksheet, template, checklist, review process, or documentation artifact.</a:t>
+            </a:r>
+            <a:endParaRPr lang="en-US" sz="1250" dirty="0"/>
+          </a:p>
+        </p:txBody>
+      </p:sp>
+      <p:sp>
+        <p:nvSpPr>
+          <p:cNvPr id="12" name="Shape 10"/>
+          <p:cNvSpPr/>
+          <p:nvPr/>
+        </p:nvSpPr>
+        <p:spPr>
+          <a:xfrm>
+            <a:off x="8046720" y="3794760"/>
+            <a:ext cx="3063240" cy="1508760"/>
+          </a:xfrm>
+          <a:prstGeom prst="roundRect">
+            <a:avLst>
+              <a:gd name="adj" fmla="val 7273"/>
+            </a:avLst>
+          </a:prstGeom>
+          <a:solidFill>
+            <a:srgbClr val="EEF8ED"/>
+          </a:solidFill>
+          <a:ln w="12700">
+            <a:solidFill>
+              <a:srgbClr val="B9D7E6"/>
+            </a:solidFill>
+            <a:prstDash val="solid"/>
+          </a:ln>
+        </p:spPr>
+      </p:sp>
+      <p:sp>
+        <p:nvSpPr>
+          <p:cNvPr id="13" name="Text 11"/>
+          <p:cNvSpPr/>
+          <p:nvPr/>
+        </p:nvSpPr>
+        <p:spPr>
+          <a:xfrm>
+            <a:off x="8211312" y="3941064"/>
+            <a:ext cx="2734056" cy="201168"/>
+          </a:xfrm>
+          <a:prstGeom prst="rect">
+            <a:avLst/>
+          </a:prstGeom>
+          <a:noFill/>
+          <a:ln/>
+        </p:spPr>
+        <p:txBody>
+          <a:bodyPr wrap="square" lIns="0" tIns="0" rIns="0" bIns="0" rtlCol="0" anchor="ctr"/>
+          <a:lstStyle/>
+          <a:p>
+            <a:pPr indent="0" marL="0">
+              <a:buNone/>
+            </a:pPr>
+            <a:r>
+              <a:rPr lang="en-US" sz="950" b="1" dirty="0">
+                <a:solidFill>
+                  <a:srgbClr val="0068B7"/>
+                </a:solidFill>
+                <a:latin typeface="Aptos" pitchFamily="34" charset="0"/>
+                <a:ea typeface="Aptos" pitchFamily="34" charset="-122"/>
+                <a:cs typeface="Aptos" pitchFamily="34" charset="-120"/>
+              </a:rPr>
+              <a:t>Avoid duplication</a:t>
+            </a:r>
+            <a:endParaRPr lang="en-US" sz="950" dirty="0"/>
+          </a:p>
+        </p:txBody>
+      </p:sp>
+      <p:sp>
+        <p:nvSpPr>
+          <p:cNvPr id="14" name="Text 12"/>
+          <p:cNvSpPr/>
+          <p:nvPr/>
+        </p:nvSpPr>
+        <p:spPr>
+          <a:xfrm>
+            <a:off x="8211312" y="4233672"/>
+            <a:ext cx="2734056" cy="941832"/>
+          </a:xfrm>
+          <a:prstGeom prst="rect">
+            <a:avLst/>
+          </a:prstGeom>
+          <a:noFill/>
+          <a:ln/>
+        </p:spPr>
+        <p:txBody>
+          <a:bodyPr wrap="square" lIns="0" tIns="0" rIns="0" bIns="0" rtlCol="0" anchor="t">
+            <a:normAutofit/>
+          </a:bodyPr>
+          <a:lstStyle/>
+          <a:p>
+            <a:pPr indent="0" marL="0">
+              <a:buNone/>
+            </a:pPr>
+            <a:r>
+              <a:rPr lang="en-US" sz="1250" dirty="0">
+                <a:solidFill>
+                  <a:srgbClr val="17364A"/>
+                </a:solidFill>
+                <a:latin typeface="Aptos" pitchFamily="34" charset="0"/>
+                <a:ea typeface="Aptos" pitchFamily="34" charset="-122"/>
+                <a:cs typeface="Aptos" pitchFamily="34" charset="-120"/>
+              </a:rPr>
+              <a:t>If your department already has a strong equivalent tool, adapt or use the existing process instead of recreating it.</a:t>
+            </a:r>
+            <a:endParaRPr lang="en-US" sz="1250" dirty="0"/>
           </a:p>
         </p:txBody>
       </p:sp>
@@ -6368,7 +11419,32 @@
       </p:sp>
       <p:sp>
         <p:nvSpPr>
-          <p:cNvPr id="3" name="Text 1"/>
+          <p:cNvPr id="3" name="Shape 1"/>
+          <p:cNvSpPr/>
+          <p:nvPr/>
+        </p:nvSpPr>
+        <p:spPr>
+          <a:xfrm>
+            <a:off x="0" y="164592"/>
+            <a:ext cx="146304" cy="6693408"/>
+          </a:xfrm>
+          <a:prstGeom prst="rect">
+            <a:avLst/>
+          </a:prstGeom>
+          <a:solidFill>
+            <a:srgbClr val="2F8A28"/>
+          </a:solidFill>
+          <a:ln w="12700">
+            <a:solidFill>
+              <a:srgbClr val="2F8A28"/>
+            </a:solidFill>
+            <a:prstDash val="solid"/>
+          </a:ln>
+        </p:spPr>
+      </p:sp>
+      <p:sp>
+        <p:nvSpPr>
+          <p:cNvPr id="4" name="Text 2"/>
           <p:cNvSpPr/>
           <p:nvPr/>
         </p:nvSpPr>
@@ -6407,7 +11483,7 @@
       </p:sp>
       <p:sp>
         <p:nvSpPr>
-          <p:cNvPr id="4" name="Text 2"/>
+          <p:cNvPr id="5" name="Text 3"/>
           <p:cNvSpPr/>
           <p:nvPr/>
         </p:nvSpPr>
@@ -6446,7 +11522,7 @@
       </p:sp>
       <p:sp>
         <p:nvSpPr>
-          <p:cNvPr id="5" name="Text 3"/>
+          <p:cNvPr id="6" name="Text 4"/>
           <p:cNvSpPr/>
           <p:nvPr/>
         </p:nvSpPr>
@@ -6485,13 +11561,77 @@
       </p:sp>
       <p:sp>
         <p:nvSpPr>
-          <p:cNvPr id="6" name="Text 4"/>
+          <p:cNvPr id="7" name="Shape 5"/>
           <p:cNvSpPr/>
           <p:nvPr/>
         </p:nvSpPr>
         <p:spPr>
           <a:xfrm>
             <a:off x="640080" y="658368"/>
+            <a:ext cx="420624" cy="420624"/>
+          </a:xfrm>
+          <a:prstGeom prst="ellipse">
+            <a:avLst/>
+          </a:prstGeom>
+          <a:solidFill>
+            <a:srgbClr val="0068B7"/>
+          </a:solidFill>
+          <a:ln w="12700">
+            <a:solidFill>
+              <a:srgbClr val="0068B7"/>
+            </a:solidFill>
+            <a:prstDash val="solid"/>
+          </a:ln>
+        </p:spPr>
+      </p:sp>
+      <p:sp>
+        <p:nvSpPr>
+          <p:cNvPr id="8" name="Text 6"/>
+          <p:cNvSpPr/>
+          <p:nvPr/>
+        </p:nvSpPr>
+        <p:spPr>
+          <a:xfrm>
+            <a:off x="640080" y="731520"/>
+            <a:ext cx="420624" cy="164592"/>
+          </a:xfrm>
+          <a:prstGeom prst="rect">
+            <a:avLst/>
+          </a:prstGeom>
+          <a:noFill/>
+          <a:ln/>
+        </p:spPr>
+        <p:txBody>
+          <a:bodyPr wrap="square" lIns="0" tIns="0" rIns="0" bIns="0" rtlCol="0" anchor="ctr"/>
+          <a:lstStyle/>
+          <a:p>
+            <a:pPr algn="ctr" indent="0" marL="0">
+              <a:buNone/>
+            </a:pPr>
+            <a:r>
+              <a:rPr lang="en-US" sz="1100" b="1" dirty="0">
+                <a:solidFill>
+                  <a:srgbClr val="FFFFFF"/>
+                </a:solidFill>
+                <a:latin typeface="Aptos" pitchFamily="34" charset="0"/>
+                <a:ea typeface="Aptos" pitchFamily="34" charset="-122"/>
+                <a:cs typeface="Aptos" pitchFamily="34" charset="-120"/>
+              </a:rPr>
+              <a:t>1</a:t>
+            </a:r>
+            <a:endParaRPr lang="en-US" sz="1100" dirty="0"/>
+          </a:p>
+        </p:txBody>
+      </p:sp>
+      <p:sp>
+        <p:nvSpPr>
+          <p:cNvPr id="9" name="Text 7"/>
+          <p:cNvSpPr/>
+          <p:nvPr/>
+        </p:nvSpPr>
+        <p:spPr>
+          <a:xfrm>
+            <a:off x="640080" y="621792"/>
             <a:ext cx="10881360" cy="566928"/>
           </a:xfrm>
           <a:prstGeom prst="rect">
@@ -6518,7 +11658,7 @@
                 <a:ea typeface="Aptos Display" pitchFamily="34" charset="-122"/>
                 <a:cs typeface="Aptos Display" pitchFamily="34" charset="-120"/>
               </a:rPr>
-              <a:t>Definitions</a:t>
+              <a:t>Learning Objectives</a:t>
             </a:r>
             <a:endParaRPr lang="en-US" sz="2700" dirty="0"/>
           </a:p>
@@ -6526,14 +11666,14 @@
       </p:sp>
       <p:sp>
         <p:nvSpPr>
-          <p:cNvPr id="7" name="Text 5"/>
-          <p:cNvSpPr/>
-          <p:nvPr/>
-        </p:nvSpPr>
-        <p:spPr>
-          <a:xfrm>
-            <a:off x="822960" y="1325880"/>
-            <a:ext cx="10378440" cy="4800600"/>
+          <p:cNvPr id="10" name="Text 8"/>
+          <p:cNvSpPr/>
+          <p:nvPr/>
+        </p:nvSpPr>
+        <p:spPr>
+          <a:xfrm>
+            <a:off x="868680" y="1417320"/>
+            <a:ext cx="6675120" cy="4434840"/>
           </a:xfrm>
           <a:prstGeom prst="rect">
             <a:avLst/>
@@ -6548,7 +11688,7 @@
           <a:lstStyle/>
           <a:p>
             <a:r>
-              <a:rPr lang="en-US" sz="1450" dirty="0">
+              <a:rPr lang="en-US" sz="1700" dirty="0">
                 <a:solidFill>
                   <a:srgbClr val="17364A"/>
                 </a:solidFill>
@@ -6556,13 +11696,13 @@
                 <a:ea typeface="Aptos" pitchFamily="34" charset="-122"/>
                 <a:cs typeface="Aptos" pitchFamily="34" charset="-120"/>
               </a:rPr>
-              <a:t>Uncertainty: The degree to which an estimate, prediction, or conclusion may be imprecise or incomplete.</a:t>
-            </a:r>
-            <a:endParaRPr lang="en-US" sz="1450" dirty="0"/>
-          </a:p>
-          <a:p>
-            <a:r>
-              <a:rPr lang="en-US" sz="1450" dirty="0">
+              <a:t>Explain model results in plain language for nontechnical audiences.</a:t>
+            </a:r>
+            <a:endParaRPr lang="en-US" sz="1700" dirty="0"/>
+          </a:p>
+          <a:p>
+            <a:r>
+              <a:rPr lang="en-US" sz="1700" dirty="0">
                 <a:solidFill>
                   <a:srgbClr val="17364A"/>
                 </a:solidFill>
@@ -6570,13 +11710,13 @@
                 <a:ea typeface="Aptos" pitchFamily="34" charset="-122"/>
                 <a:cs typeface="Aptos" pitchFamily="34" charset="-120"/>
               </a:rPr>
-              <a:t>Prediction interval: A range that estimates where a future observation may fall.</a:t>
-            </a:r>
-            <a:endParaRPr lang="en-US" sz="1450" dirty="0"/>
-          </a:p>
-          <a:p>
-            <a:r>
-              <a:rPr lang="en-US" sz="1450" dirty="0">
+              <a:t>Distinguish uncertainty, variability, error, bias, and data limitations.</a:t>
+            </a:r>
+            <a:endParaRPr lang="en-US" sz="1700" dirty="0"/>
+          </a:p>
+          <a:p>
+            <a:r>
+              <a:rPr lang="en-US" sz="1700" dirty="0">
                 <a:solidFill>
                   <a:srgbClr val="17364A"/>
                 </a:solidFill>
@@ -6584,13 +11724,13 @@
                 <a:ea typeface="Aptos" pitchFamily="34" charset="-122"/>
                 <a:cs typeface="Aptos" pitchFamily="34" charset="-120"/>
               </a:rPr>
-              <a:t>Confidence interval: A range that expresses uncertainty around an estimated parameter.</a:t>
-            </a:r>
-            <a:endParaRPr lang="en-US" sz="1450" dirty="0"/>
-          </a:p>
-          <a:p>
-            <a:r>
-              <a:rPr lang="en-US" sz="1450" dirty="0">
+              <a:t>Identify when model results should include confidence intervals, prediction intervals, caveats, or subgroup findings.</a:t>
+            </a:r>
+            <a:endParaRPr lang="en-US" sz="1700" dirty="0"/>
+          </a:p>
+          <a:p>
+            <a:r>
+              <a:rPr lang="en-US" sz="1700" dirty="0">
                 <a:solidFill>
                   <a:srgbClr val="17364A"/>
                 </a:solidFill>
@@ -6598,13 +11738,106 @@
                 <a:ea typeface="Aptos" pitchFamily="34" charset="-122"/>
                 <a:cs typeface="Aptos" pitchFamily="34" charset="-120"/>
               </a:rPr>
-              <a:t>Calibration: How closely predicted probabilities match observed outcomes.</a:t>
-            </a:r>
-            <a:endParaRPr lang="en-US" sz="1450" dirty="0"/>
-          </a:p>
-          <a:p>
-            <a:r>
-              <a:rPr lang="en-US" sz="1450" dirty="0">
+              <a:t>Avoid overclaiming, causal overreach, and false precision in AI communications.</a:t>
+            </a:r>
+            <a:endParaRPr lang="en-US" sz="1700" dirty="0"/>
+          </a:p>
+        </p:txBody>
+      </p:sp>
+      <p:sp>
+        <p:nvSpPr>
+          <p:cNvPr id="11" name="Shape 9"/>
+          <p:cNvSpPr/>
+          <p:nvPr/>
+        </p:nvSpPr>
+        <p:spPr>
+          <a:xfrm>
+            <a:off x="7909560" y="1417320"/>
+            <a:ext cx="3154680" cy="1828800"/>
+          </a:xfrm>
+          <a:prstGeom prst="roundRect">
+            <a:avLst>
+              <a:gd name="adj" fmla="val 6000"/>
+            </a:avLst>
+          </a:prstGeom>
+          <a:solidFill>
+            <a:srgbClr val="EEF8ED"/>
+          </a:solidFill>
+          <a:ln w="12700">
+            <a:solidFill>
+              <a:srgbClr val="B9D7E6"/>
+            </a:solidFill>
+            <a:prstDash val="solid"/>
+          </a:ln>
+        </p:spPr>
+      </p:sp>
+      <p:sp>
+        <p:nvSpPr>
+          <p:cNvPr id="12" name="Text 10"/>
+          <p:cNvSpPr/>
+          <p:nvPr/>
+        </p:nvSpPr>
+        <p:spPr>
+          <a:xfrm>
+            <a:off x="8074152" y="1563624"/>
+            <a:ext cx="2825496" cy="201168"/>
+          </a:xfrm>
+          <a:prstGeom prst="rect">
+            <a:avLst/>
+          </a:prstGeom>
+          <a:noFill/>
+          <a:ln/>
+        </p:spPr>
+        <p:txBody>
+          <a:bodyPr wrap="square" lIns="0" tIns="0" rIns="0" bIns="0" rtlCol="0" anchor="ctr"/>
+          <a:lstStyle/>
+          <a:p>
+            <a:pPr indent="0" marL="0">
+              <a:buNone/>
+            </a:pPr>
+            <a:r>
+              <a:rPr lang="en-US" sz="950" b="1" dirty="0">
+                <a:solidFill>
+                  <a:srgbClr val="0068B7"/>
+                </a:solidFill>
+                <a:latin typeface="Aptos" pitchFamily="34" charset="0"/>
+                <a:ea typeface="Aptos" pitchFamily="34" charset="-122"/>
+                <a:cs typeface="Aptos" pitchFamily="34" charset="-120"/>
+              </a:rPr>
+              <a:t>Key idea</a:t>
+            </a:r>
+            <a:endParaRPr lang="en-US" sz="950" dirty="0"/>
+          </a:p>
+        </p:txBody>
+      </p:sp>
+      <p:sp>
+        <p:nvSpPr>
+          <p:cNvPr id="13" name="Text 11"/>
+          <p:cNvSpPr/>
+          <p:nvPr/>
+        </p:nvSpPr>
+        <p:spPr>
+          <a:xfrm>
+            <a:off x="8074152" y="1856232"/>
+            <a:ext cx="2825496" cy="1261872"/>
+          </a:xfrm>
+          <a:prstGeom prst="rect">
+            <a:avLst/>
+          </a:prstGeom>
+          <a:noFill/>
+          <a:ln/>
+        </p:spPr>
+        <p:txBody>
+          <a:bodyPr wrap="square" lIns="0" tIns="0" rIns="0" bIns="0" rtlCol="0" anchor="t">
+            <a:normAutofit/>
+          </a:bodyPr>
+          <a:lstStyle/>
+          <a:p>
+            <a:pPr indent="0" marL="0">
+              <a:buNone/>
+            </a:pPr>
+            <a:r>
+              <a:rPr lang="en-US" sz="1250" dirty="0">
                 <a:solidFill>
                   <a:srgbClr val="17364A"/>
                 </a:solidFill>
@@ -6612,9 +11845,116 @@
                 <a:ea typeface="Aptos" pitchFamily="34" charset="-122"/>
                 <a:cs typeface="Aptos" pitchFamily="34" charset="-120"/>
               </a:rPr>
-              <a:t>Caveat: A clear statement of limitation, condition, or caution.</a:t>
-            </a:r>
-            <a:endParaRPr lang="en-US" sz="1450" dirty="0"/>
+              <a:t>Explain model results in plain language for nontechnical audiences.</a:t>
+            </a:r>
+            <a:endParaRPr lang="en-US" sz="1250" dirty="0"/>
+          </a:p>
+        </p:txBody>
+      </p:sp>
+      <p:sp>
+        <p:nvSpPr>
+          <p:cNvPr id="14" name="Shape 12"/>
+          <p:cNvSpPr/>
+          <p:nvPr/>
+        </p:nvSpPr>
+        <p:spPr>
+          <a:xfrm>
+            <a:off x="7909560" y="3520440"/>
+            <a:ext cx="3154680" cy="1737360"/>
+          </a:xfrm>
+          <a:prstGeom prst="roundRect">
+            <a:avLst>
+              <a:gd name="adj" fmla="val 6316"/>
+            </a:avLst>
+          </a:prstGeom>
+          <a:solidFill>
+            <a:srgbClr val="EAF6F8"/>
+          </a:solidFill>
+          <a:ln w="12700">
+            <a:solidFill>
+              <a:srgbClr val="B9D7E6"/>
+            </a:solidFill>
+            <a:prstDash val="solid"/>
+          </a:ln>
+        </p:spPr>
+      </p:sp>
+      <p:sp>
+        <p:nvSpPr>
+          <p:cNvPr id="15" name="Text 13"/>
+          <p:cNvSpPr/>
+          <p:nvPr/>
+        </p:nvSpPr>
+        <p:spPr>
+          <a:xfrm>
+            <a:off x="8074152" y="3666744"/>
+            <a:ext cx="2825496" cy="201168"/>
+          </a:xfrm>
+          <a:prstGeom prst="rect">
+            <a:avLst/>
+          </a:prstGeom>
+          <a:noFill/>
+          <a:ln/>
+        </p:spPr>
+        <p:txBody>
+          <a:bodyPr wrap="square" lIns="0" tIns="0" rIns="0" bIns="0" rtlCol="0" anchor="ctr"/>
+          <a:lstStyle/>
+          <a:p>
+            <a:pPr indent="0" marL="0">
+              <a:buNone/>
+            </a:pPr>
+            <a:r>
+              <a:rPr lang="en-US" sz="950" b="1" dirty="0">
+                <a:solidFill>
+                  <a:srgbClr val="0068B7"/>
+                </a:solidFill>
+                <a:latin typeface="Aptos" pitchFamily="34" charset="0"/>
+                <a:ea typeface="Aptos" pitchFamily="34" charset="-122"/>
+                <a:cs typeface="Aptos" pitchFamily="34" charset="-120"/>
+              </a:rPr>
+              <a:t>Use this for</a:t>
+            </a:r>
+            <a:endParaRPr lang="en-US" sz="950" dirty="0"/>
+          </a:p>
+        </p:txBody>
+      </p:sp>
+      <p:sp>
+        <p:nvSpPr>
+          <p:cNvPr id="16" name="Text 14"/>
+          <p:cNvSpPr/>
+          <p:nvPr/>
+        </p:nvSpPr>
+        <p:spPr>
+          <a:xfrm>
+            <a:off x="8074152" y="3959352"/>
+            <a:ext cx="2825496" cy="1170432"/>
+          </a:xfrm>
+          <a:prstGeom prst="rect">
+            <a:avLst/>
+          </a:prstGeom>
+          <a:noFill/>
+          <a:ln/>
+        </p:spPr>
+        <p:txBody>
+          <a:bodyPr wrap="square" lIns="0" tIns="0" rIns="0" bIns="0" rtlCol="0" anchor="t">
+            <a:normAutofit/>
+          </a:bodyPr>
+          <a:lstStyle/>
+          <a:p>
+            <a:pPr indent="0" marL="0">
+              <a:buNone/>
+            </a:pPr>
+            <a:r>
+              <a:rPr lang="en-US" sz="1250" dirty="0">
+                <a:solidFill>
+                  <a:srgbClr val="17364A"/>
+                </a:solidFill>
+                <a:latin typeface="Aptos" pitchFamily="34" charset="0"/>
+                <a:ea typeface="Aptos" pitchFamily="34" charset="-122"/>
+                <a:cs typeface="Aptos" pitchFamily="34" charset="-120"/>
+              </a:rPr>
+              <a:t>Connect the concept to public health decisions, safeguards, documentation, or implementation work.</a:t>
+            </a:r>
+            <a:endParaRPr lang="en-US" sz="1250" dirty="0"/>
           </a:p>
         </p:txBody>
       </p:sp>
@@ -6677,7 +12017,32 @@
       </p:sp>
       <p:sp>
         <p:nvSpPr>
-          <p:cNvPr id="3" name="Text 1"/>
+          <p:cNvPr id="3" name="Shape 1"/>
+          <p:cNvSpPr/>
+          <p:nvPr/>
+        </p:nvSpPr>
+        <p:spPr>
+          <a:xfrm>
+            <a:off x="0" y="164592"/>
+            <a:ext cx="146304" cy="6693408"/>
+          </a:xfrm>
+          <a:prstGeom prst="rect">
+            <a:avLst/>
+          </a:prstGeom>
+          <a:solidFill>
+            <a:srgbClr val="2F8A28"/>
+          </a:solidFill>
+          <a:ln w="12700">
+            <a:solidFill>
+              <a:srgbClr val="2F8A28"/>
+            </a:solidFill>
+            <a:prstDash val="solid"/>
+          </a:ln>
+        </p:spPr>
+      </p:sp>
+      <p:sp>
+        <p:nvSpPr>
+          <p:cNvPr id="4" name="Text 2"/>
           <p:cNvSpPr/>
           <p:nvPr/>
         </p:nvSpPr>
@@ -6716,7 +12081,7 @@
       </p:sp>
       <p:sp>
         <p:nvSpPr>
-          <p:cNvPr id="4" name="Text 2"/>
+          <p:cNvPr id="5" name="Text 3"/>
           <p:cNvSpPr/>
           <p:nvPr/>
         </p:nvSpPr>
@@ -6755,7 +12120,7 @@
       </p:sp>
       <p:sp>
         <p:nvSpPr>
-          <p:cNvPr id="5" name="Text 3"/>
+          <p:cNvPr id="6" name="Text 4"/>
           <p:cNvSpPr/>
           <p:nvPr/>
         </p:nvSpPr>
@@ -6794,13 +12159,77 @@
       </p:sp>
       <p:sp>
         <p:nvSpPr>
-          <p:cNvPr id="6" name="Text 4"/>
+          <p:cNvPr id="7" name="Shape 5"/>
           <p:cNvSpPr/>
           <p:nvPr/>
         </p:nvSpPr>
         <p:spPr>
           <a:xfrm>
             <a:off x="640080" y="658368"/>
+            <a:ext cx="420624" cy="420624"/>
+          </a:xfrm>
+          <a:prstGeom prst="ellipse">
+            <a:avLst/>
+          </a:prstGeom>
+          <a:solidFill>
+            <a:srgbClr val="0068B7"/>
+          </a:solidFill>
+          <a:ln w="12700">
+            <a:solidFill>
+              <a:srgbClr val="0068B7"/>
+            </a:solidFill>
+            <a:prstDash val="solid"/>
+          </a:ln>
+        </p:spPr>
+      </p:sp>
+      <p:sp>
+        <p:nvSpPr>
+          <p:cNvPr id="8" name="Text 6"/>
+          <p:cNvSpPr/>
+          <p:nvPr/>
+        </p:nvSpPr>
+        <p:spPr>
+          <a:xfrm>
+            <a:off x="640080" y="731520"/>
+            <a:ext cx="420624" cy="164592"/>
+          </a:xfrm>
+          <a:prstGeom prst="rect">
+            <a:avLst/>
+          </a:prstGeom>
+          <a:noFill/>
+          <a:ln/>
+        </p:spPr>
+        <p:txBody>
+          <a:bodyPr wrap="square" lIns="0" tIns="0" rIns="0" bIns="0" rtlCol="0" anchor="ctr"/>
+          <a:lstStyle/>
+          <a:p>
+            <a:pPr algn="ctr" indent="0" marL="0">
+              <a:buNone/>
+            </a:pPr>
+            <a:r>
+              <a:rPr lang="en-US" sz="1100" b="1" dirty="0">
+                <a:solidFill>
+                  <a:srgbClr val="FFFFFF"/>
+                </a:solidFill>
+                <a:latin typeface="Aptos" pitchFamily="34" charset="0"/>
+                <a:ea typeface="Aptos" pitchFamily="34" charset="-122"/>
+                <a:cs typeface="Aptos" pitchFamily="34" charset="-120"/>
+              </a:rPr>
+              <a:t>2</a:t>
+            </a:r>
+            <a:endParaRPr lang="en-US" sz="1100" dirty="0"/>
+          </a:p>
+        </p:txBody>
+      </p:sp>
+      <p:sp>
+        <p:nvSpPr>
+          <p:cNvPr id="9" name="Text 7"/>
+          <p:cNvSpPr/>
+          <p:nvPr/>
+        </p:nvSpPr>
+        <p:spPr>
+          <a:xfrm>
+            <a:off x="640080" y="621792"/>
             <a:ext cx="10881360" cy="566928"/>
           </a:xfrm>
           <a:prstGeom prst="rect">
@@ -6827,7 +12256,7 @@
                 <a:ea typeface="Aptos Display" pitchFamily="34" charset="-122"/>
                 <a:cs typeface="Aptos Display" pitchFamily="34" charset="-120"/>
               </a:rPr>
-              <a:t>Why This Topic Matters for Public Health AI</a:t>
+              <a:t>Module Overview</a:t>
             </a:r>
             <a:endParaRPr lang="en-US" sz="2700" dirty="0"/>
           </a:p>
@@ -6835,32 +12264,178 @@
       </p:sp>
       <p:sp>
         <p:nvSpPr>
-          <p:cNvPr id="7" name="Text 5"/>
-          <p:cNvSpPr/>
-          <p:nvPr/>
-        </p:nvSpPr>
-        <p:spPr>
-          <a:xfrm>
-            <a:off x="822960" y="1325880"/>
-            <a:ext cx="10378440" cy="4800600"/>
-          </a:xfrm>
-          <a:prstGeom prst="rect">
-            <a:avLst/>
-          </a:prstGeom>
-          <a:noFill/>
-          <a:ln/>
-        </p:spPr>
-        <p:txBody>
-          <a:bodyPr wrap="square" lIns="1016" tIns="1016" rIns="1016" bIns="1016" rtlCol="0" anchor="t">
+          <p:cNvPr id="10" name="Text 8"/>
+          <p:cNvSpPr/>
+          <p:nvPr/>
+        </p:nvSpPr>
+        <p:spPr>
+          <a:xfrm>
+            <a:off x="868680" y="1417320"/>
+            <a:ext cx="6675120" cy="4434840"/>
+          </a:xfrm>
+          <a:prstGeom prst="rect">
+            <a:avLst/>
+          </a:prstGeom>
+          <a:noFill/>
+          <a:ln/>
+        </p:spPr>
+        <p:txBody>
+          <a:bodyPr wrap="square" lIns="635" tIns="635" rIns="635" bIns="635" rtlCol="0" anchor="t">
             <a:normAutofit/>
           </a:bodyPr>
           <a:lstStyle/>
           <a:p>
+            <a:r>
+              <a:rPr lang="en-US" sz="1700" dirty="0">
+                <a:solidFill>
+                  <a:srgbClr val="17364A"/>
+                </a:solidFill>
+                <a:latin typeface="Aptos" pitchFamily="34" charset="0"/>
+                <a:ea typeface="Aptos" pitchFamily="34" charset="-122"/>
+                <a:cs typeface="Aptos" pitchFamily="34" charset="-120"/>
+              </a:rPr>
+              <a:t>Public health staff often need to communicate AI or model results to leaders, partners, the public, or operational teams.</a:t>
+            </a:r>
+            <a:endParaRPr lang="en-US" sz="1700" dirty="0"/>
+          </a:p>
+          <a:p>
+            <a:r>
+              <a:rPr lang="en-US" sz="1700" dirty="0">
+                <a:solidFill>
+                  <a:srgbClr val="17364A"/>
+                </a:solidFill>
+                <a:latin typeface="Aptos" pitchFamily="34" charset="0"/>
+                <a:ea typeface="Aptos" pitchFamily="34" charset="-122"/>
+                <a:cs typeface="Aptos" pitchFamily="34" charset="-120"/>
+              </a:rPr>
+              <a:t>This module teaches learners how to explain model outputs, uncertainty, limitations, and appropriate use without.</a:t>
+            </a:r>
+            <a:endParaRPr lang="en-US" sz="1700" dirty="0"/>
+          </a:p>
+          <a:p>
+            <a:r>
+              <a:rPr lang="en-US" sz="1700" dirty="0">
+                <a:solidFill>
+                  <a:srgbClr val="17364A"/>
+                </a:solidFill>
+                <a:latin typeface="Aptos" pitchFamily="34" charset="0"/>
+                <a:ea typeface="Aptos" pitchFamily="34" charset="-122"/>
+                <a:cs typeface="Aptos" pitchFamily="34" charset="-120"/>
+              </a:rPr>
+              <a:t>The module focuses on practical communication.</a:t>
+            </a:r>
+            <a:endParaRPr lang="en-US" sz="1700" dirty="0"/>
+          </a:p>
+          <a:p>
+            <a:r>
+              <a:rPr lang="en-US" sz="1700" dirty="0">
+                <a:solidFill>
+                  <a:srgbClr val="17364A"/>
+                </a:solidFill>
+                <a:latin typeface="Aptos" pitchFamily="34" charset="0"/>
+                <a:ea typeface="Aptos" pitchFamily="34" charset="-122"/>
+                <a:cs typeface="Aptos" pitchFamily="34" charset="-120"/>
+              </a:rPr>
+              <a:t>Learners translate metrics, confidence, caveats, and validation findings into language that supports responsible decisions.</a:t>
+            </a:r>
+            <a:endParaRPr lang="en-US" sz="1700" dirty="0"/>
+          </a:p>
+        </p:txBody>
+      </p:sp>
+      <p:sp>
+        <p:nvSpPr>
+          <p:cNvPr id="11" name="Shape 9"/>
+          <p:cNvSpPr/>
+          <p:nvPr/>
+        </p:nvSpPr>
+        <p:spPr>
+          <a:xfrm>
+            <a:off x="7909560" y="1417320"/>
+            <a:ext cx="3154680" cy="1828800"/>
+          </a:xfrm>
+          <a:prstGeom prst="roundRect">
+            <a:avLst>
+              <a:gd name="adj" fmla="val 6000"/>
+            </a:avLst>
+          </a:prstGeom>
+          <a:solidFill>
+            <a:srgbClr val="EEF8ED"/>
+          </a:solidFill>
+          <a:ln w="12700">
+            <a:solidFill>
+              <a:srgbClr val="B9D7E6"/>
+            </a:solidFill>
+            <a:prstDash val="solid"/>
+          </a:ln>
+        </p:spPr>
+      </p:sp>
+      <p:sp>
+        <p:nvSpPr>
+          <p:cNvPr id="12" name="Text 10"/>
+          <p:cNvSpPr/>
+          <p:nvPr/>
+        </p:nvSpPr>
+        <p:spPr>
+          <a:xfrm>
+            <a:off x="8074152" y="1563624"/>
+            <a:ext cx="2825496" cy="201168"/>
+          </a:xfrm>
+          <a:prstGeom prst="rect">
+            <a:avLst/>
+          </a:prstGeom>
+          <a:noFill/>
+          <a:ln/>
+        </p:spPr>
+        <p:txBody>
+          <a:bodyPr wrap="square" lIns="0" tIns="0" rIns="0" bIns="0" rtlCol="0" anchor="ctr"/>
+          <a:lstStyle/>
+          <a:p>
             <a:pPr indent="0" marL="0">
               <a:buNone/>
             </a:pPr>
             <a:r>
-              <a:rPr lang="en-US" sz="1420" dirty="0">
+              <a:rPr lang="en-US" sz="950" b="1" dirty="0">
+                <a:solidFill>
+                  <a:srgbClr val="0068B7"/>
+                </a:solidFill>
+                <a:latin typeface="Aptos" pitchFamily="34" charset="0"/>
+                <a:ea typeface="Aptos" pitchFamily="34" charset="-122"/>
+                <a:cs typeface="Aptos" pitchFamily="34" charset="-120"/>
+              </a:rPr>
+              <a:t>Key idea</a:t>
+            </a:r>
+            <a:endParaRPr lang="en-US" sz="950" dirty="0"/>
+          </a:p>
+        </p:txBody>
+      </p:sp>
+      <p:sp>
+        <p:nvSpPr>
+          <p:cNvPr id="13" name="Text 11"/>
+          <p:cNvSpPr/>
+          <p:nvPr/>
+        </p:nvSpPr>
+        <p:spPr>
+          <a:xfrm>
+            <a:off x="8074152" y="1856232"/>
+            <a:ext cx="2825496" cy="1261872"/>
+          </a:xfrm>
+          <a:prstGeom prst="rect">
+            <a:avLst/>
+          </a:prstGeom>
+          <a:noFill/>
+          <a:ln/>
+        </p:spPr>
+        <p:txBody>
+          <a:bodyPr wrap="square" lIns="0" tIns="0" rIns="0" bIns="0" rtlCol="0" anchor="t">
+            <a:normAutofit/>
+          </a:bodyPr>
+          <a:lstStyle/>
+          <a:p>
+            <a:pPr indent="0" marL="0">
+              <a:buNone/>
+            </a:pPr>
+            <a:r>
+              <a:rPr lang="en-US" sz="1250" dirty="0">
                 <a:solidFill>
                   <a:srgbClr val="17364A"/>
                 </a:solidFill>
@@ -6868,9 +12443,116 @@
                 <a:ea typeface="Aptos" pitchFamily="34" charset="-122"/>
                 <a:cs typeface="Aptos" pitchFamily="34" charset="-120"/>
               </a:rPr>
-              <a:t>Model outputs can influence urgent decisions. A forecast may affect staffing, a risk score may affect outreach, and a hotspot map may affect deployment of field teams. If uncertainty is not explained clearly, decision-makers may treat estimates as facts or ignore important limitations. Public health communication must balance clarity and caution. Too much technical detail can obscure the message, but too little detail can hide uncertainty. A strong communication product explains what the model suggests, what it does not show, how reliable it is, and what human judgment or additional evidence is needed.</a:t>
-            </a:r>
-            <a:endParaRPr lang="en-US" sz="1420" dirty="0"/>
+              <a:t>Public health staff often need to communicate AI or model results to leaders, partners, the public, or operational teams.</a:t>
+            </a:r>
+            <a:endParaRPr lang="en-US" sz="1250" dirty="0"/>
+          </a:p>
+        </p:txBody>
+      </p:sp>
+      <p:sp>
+        <p:nvSpPr>
+          <p:cNvPr id="14" name="Shape 12"/>
+          <p:cNvSpPr/>
+          <p:nvPr/>
+        </p:nvSpPr>
+        <p:spPr>
+          <a:xfrm>
+            <a:off x="7909560" y="3520440"/>
+            <a:ext cx="3154680" cy="1737360"/>
+          </a:xfrm>
+          <a:prstGeom prst="roundRect">
+            <a:avLst>
+              <a:gd name="adj" fmla="val 6316"/>
+            </a:avLst>
+          </a:prstGeom>
+          <a:solidFill>
+            <a:srgbClr val="EAF6F8"/>
+          </a:solidFill>
+          <a:ln w="12700">
+            <a:solidFill>
+              <a:srgbClr val="B9D7E6"/>
+            </a:solidFill>
+            <a:prstDash val="solid"/>
+          </a:ln>
+        </p:spPr>
+      </p:sp>
+      <p:sp>
+        <p:nvSpPr>
+          <p:cNvPr id="15" name="Text 13"/>
+          <p:cNvSpPr/>
+          <p:nvPr/>
+        </p:nvSpPr>
+        <p:spPr>
+          <a:xfrm>
+            <a:off x="8074152" y="3666744"/>
+            <a:ext cx="2825496" cy="201168"/>
+          </a:xfrm>
+          <a:prstGeom prst="rect">
+            <a:avLst/>
+          </a:prstGeom>
+          <a:noFill/>
+          <a:ln/>
+        </p:spPr>
+        <p:txBody>
+          <a:bodyPr wrap="square" lIns="0" tIns="0" rIns="0" bIns="0" rtlCol="0" anchor="ctr"/>
+          <a:lstStyle/>
+          <a:p>
+            <a:pPr indent="0" marL="0">
+              <a:buNone/>
+            </a:pPr>
+            <a:r>
+              <a:rPr lang="en-US" sz="950" b="1" dirty="0">
+                <a:solidFill>
+                  <a:srgbClr val="0068B7"/>
+                </a:solidFill>
+                <a:latin typeface="Aptos" pitchFamily="34" charset="0"/>
+                <a:ea typeface="Aptos" pitchFamily="34" charset="-122"/>
+                <a:cs typeface="Aptos" pitchFamily="34" charset="-120"/>
+              </a:rPr>
+              <a:t>Use this for</a:t>
+            </a:r>
+            <a:endParaRPr lang="en-US" sz="950" dirty="0"/>
+          </a:p>
+        </p:txBody>
+      </p:sp>
+      <p:sp>
+        <p:nvSpPr>
+          <p:cNvPr id="16" name="Text 14"/>
+          <p:cNvSpPr/>
+          <p:nvPr/>
+        </p:nvSpPr>
+        <p:spPr>
+          <a:xfrm>
+            <a:off x="8074152" y="3959352"/>
+            <a:ext cx="2825496" cy="1170432"/>
+          </a:xfrm>
+          <a:prstGeom prst="rect">
+            <a:avLst/>
+          </a:prstGeom>
+          <a:noFill/>
+          <a:ln/>
+        </p:spPr>
+        <p:txBody>
+          <a:bodyPr wrap="square" lIns="0" tIns="0" rIns="0" bIns="0" rtlCol="0" anchor="t">
+            <a:normAutofit/>
+          </a:bodyPr>
+          <a:lstStyle/>
+          <a:p>
+            <a:pPr indent="0" marL="0">
+              <a:buNone/>
+            </a:pPr>
+            <a:r>
+              <a:rPr lang="en-US" sz="1250" dirty="0">
+                <a:solidFill>
+                  <a:srgbClr val="17364A"/>
+                </a:solidFill>
+                <a:latin typeface="Aptos" pitchFamily="34" charset="0"/>
+                <a:ea typeface="Aptos" pitchFamily="34" charset="-122"/>
+                <a:cs typeface="Aptos" pitchFamily="34" charset="-120"/>
+              </a:rPr>
+              <a:t>Connect the concept to public health decisions, safeguards, documentation, or implementation work.</a:t>
+            </a:r>
+            <a:endParaRPr lang="en-US" sz="1250" dirty="0"/>
           </a:p>
         </p:txBody>
       </p:sp>
@@ -6933,7 +12615,32 @@
       </p:sp>
       <p:sp>
         <p:nvSpPr>
-          <p:cNvPr id="3" name="Text 1"/>
+          <p:cNvPr id="3" name="Shape 1"/>
+          <p:cNvSpPr/>
+          <p:nvPr/>
+        </p:nvSpPr>
+        <p:spPr>
+          <a:xfrm>
+            <a:off x="0" y="164592"/>
+            <a:ext cx="146304" cy="6693408"/>
+          </a:xfrm>
+          <a:prstGeom prst="rect">
+            <a:avLst/>
+          </a:prstGeom>
+          <a:solidFill>
+            <a:srgbClr val="2F8A28"/>
+          </a:solidFill>
+          <a:ln w="12700">
+            <a:solidFill>
+              <a:srgbClr val="2F8A28"/>
+            </a:solidFill>
+            <a:prstDash val="solid"/>
+          </a:ln>
+        </p:spPr>
+      </p:sp>
+      <p:sp>
+        <p:nvSpPr>
+          <p:cNvPr id="4" name="Text 2"/>
           <p:cNvSpPr/>
           <p:nvPr/>
         </p:nvSpPr>
@@ -6972,7 +12679,7 @@
       </p:sp>
       <p:sp>
         <p:nvSpPr>
-          <p:cNvPr id="4" name="Text 2"/>
+          <p:cNvPr id="5" name="Text 3"/>
           <p:cNvSpPr/>
           <p:nvPr/>
         </p:nvSpPr>
@@ -7011,7 +12718,7 @@
       </p:sp>
       <p:sp>
         <p:nvSpPr>
-          <p:cNvPr id="5" name="Text 3"/>
+          <p:cNvPr id="6" name="Text 4"/>
           <p:cNvSpPr/>
           <p:nvPr/>
         </p:nvSpPr>
@@ -7050,13 +12757,77 @@
       </p:sp>
       <p:sp>
         <p:nvSpPr>
-          <p:cNvPr id="6" name="Text 4"/>
+          <p:cNvPr id="7" name="Shape 5"/>
           <p:cNvSpPr/>
           <p:nvPr/>
         </p:nvSpPr>
         <p:spPr>
           <a:xfrm>
             <a:off x="640080" y="658368"/>
+            <a:ext cx="420624" cy="420624"/>
+          </a:xfrm>
+          <a:prstGeom prst="ellipse">
+            <a:avLst/>
+          </a:prstGeom>
+          <a:solidFill>
+            <a:srgbClr val="0068B7"/>
+          </a:solidFill>
+          <a:ln w="12700">
+            <a:solidFill>
+              <a:srgbClr val="0068B7"/>
+            </a:solidFill>
+            <a:prstDash val="solid"/>
+          </a:ln>
+        </p:spPr>
+      </p:sp>
+      <p:sp>
+        <p:nvSpPr>
+          <p:cNvPr id="8" name="Text 6"/>
+          <p:cNvSpPr/>
+          <p:nvPr/>
+        </p:nvSpPr>
+        <p:spPr>
+          <a:xfrm>
+            <a:off x="640080" y="731520"/>
+            <a:ext cx="420624" cy="164592"/>
+          </a:xfrm>
+          <a:prstGeom prst="rect">
+            <a:avLst/>
+          </a:prstGeom>
+          <a:noFill/>
+          <a:ln/>
+        </p:spPr>
+        <p:txBody>
+          <a:bodyPr wrap="square" lIns="0" tIns="0" rIns="0" bIns="0" rtlCol="0" anchor="ctr"/>
+          <a:lstStyle/>
+          <a:p>
+            <a:pPr algn="ctr" indent="0" marL="0">
+              <a:buNone/>
+            </a:pPr>
+            <a:r>
+              <a:rPr lang="en-US" sz="1100" b="1" dirty="0">
+                <a:solidFill>
+                  <a:srgbClr val="FFFFFF"/>
+                </a:solidFill>
+                <a:latin typeface="Aptos" pitchFamily="34" charset="0"/>
+                <a:ea typeface="Aptos" pitchFamily="34" charset="-122"/>
+                <a:cs typeface="Aptos" pitchFamily="34" charset="-120"/>
+              </a:rPr>
+              <a:t>3</a:t>
+            </a:r>
+            <a:endParaRPr lang="en-US" sz="1100" dirty="0"/>
+          </a:p>
+        </p:txBody>
+      </p:sp>
+      <p:sp>
+        <p:nvSpPr>
+          <p:cNvPr id="9" name="Text 7"/>
+          <p:cNvSpPr/>
+          <p:nvPr/>
+        </p:nvSpPr>
+        <p:spPr>
+          <a:xfrm>
+            <a:off x="640080" y="621792"/>
             <a:ext cx="10881360" cy="566928"/>
           </a:xfrm>
           <a:prstGeom prst="rect">
@@ -7083,7 +12854,7 @@
                 <a:ea typeface="Aptos Display" pitchFamily="34" charset="-122"/>
                 <a:cs typeface="Aptos Display" pitchFamily="34" charset="-120"/>
               </a:rPr>
-              <a:t>Public Health Example</a:t>
+              <a:t>Definitions</a:t>
             </a:r>
             <a:endParaRPr lang="en-US" sz="2700" dirty="0"/>
           </a:p>
@@ -7091,32 +12862,178 @@
       </p:sp>
       <p:sp>
         <p:nvSpPr>
-          <p:cNvPr id="7" name="Text 5"/>
-          <p:cNvSpPr/>
-          <p:nvPr/>
-        </p:nvSpPr>
-        <p:spPr>
-          <a:xfrm>
-            <a:off x="822960" y="1325880"/>
-            <a:ext cx="10378440" cy="4800600"/>
-          </a:xfrm>
-          <a:prstGeom prst="rect">
-            <a:avLst/>
-          </a:prstGeom>
-          <a:noFill/>
-          <a:ln/>
-        </p:spPr>
-        <p:txBody>
-          <a:bodyPr wrap="square" lIns="1016" tIns="1016" rIns="1016" bIns="1016" rtlCol="0" anchor="t">
+          <p:cNvPr id="10" name="Text 8"/>
+          <p:cNvSpPr/>
+          <p:nvPr/>
+        </p:nvSpPr>
+        <p:spPr>
+          <a:xfrm>
+            <a:off x="868680" y="1417320"/>
+            <a:ext cx="6675120" cy="4434840"/>
+          </a:xfrm>
+          <a:prstGeom prst="rect">
+            <a:avLst/>
+          </a:prstGeom>
+          <a:noFill/>
+          <a:ln/>
+        </p:spPr>
+        <p:txBody>
+          <a:bodyPr wrap="square" lIns="635" tIns="635" rIns="635" bIns="635" rtlCol="0" anchor="t">
             <a:normAutofit/>
           </a:bodyPr>
           <a:lstStyle/>
           <a:p>
+            <a:r>
+              <a:rPr lang="en-US" sz="1700" dirty="0">
+                <a:solidFill>
+                  <a:srgbClr val="17364A"/>
+                </a:solidFill>
+                <a:latin typeface="Aptos" pitchFamily="34" charset="0"/>
+                <a:ea typeface="Aptos" pitchFamily="34" charset="-122"/>
+                <a:cs typeface="Aptos" pitchFamily="34" charset="-120"/>
+              </a:rPr>
+              <a:t>Uncertainty: The degree to which an estimate, prediction, or conclusion may be imprecise or incomplete.</a:t>
+            </a:r>
+            <a:endParaRPr lang="en-US" sz="1700" dirty="0"/>
+          </a:p>
+          <a:p>
+            <a:r>
+              <a:rPr lang="en-US" sz="1700" dirty="0">
+                <a:solidFill>
+                  <a:srgbClr val="17364A"/>
+                </a:solidFill>
+                <a:latin typeface="Aptos" pitchFamily="34" charset="0"/>
+                <a:ea typeface="Aptos" pitchFamily="34" charset="-122"/>
+                <a:cs typeface="Aptos" pitchFamily="34" charset="-120"/>
+              </a:rPr>
+              <a:t>Prediction interval: A range that estimates where a future observation may fall.</a:t>
+            </a:r>
+            <a:endParaRPr lang="en-US" sz="1700" dirty="0"/>
+          </a:p>
+          <a:p>
+            <a:r>
+              <a:rPr lang="en-US" sz="1700" dirty="0">
+                <a:solidFill>
+                  <a:srgbClr val="17364A"/>
+                </a:solidFill>
+                <a:latin typeface="Aptos" pitchFamily="34" charset="0"/>
+                <a:ea typeface="Aptos" pitchFamily="34" charset="-122"/>
+                <a:cs typeface="Aptos" pitchFamily="34" charset="-120"/>
+              </a:rPr>
+              <a:t>Confidence interval: A range that expresses uncertainty around an estimated parameter.</a:t>
+            </a:r>
+            <a:endParaRPr lang="en-US" sz="1700" dirty="0"/>
+          </a:p>
+          <a:p>
+            <a:r>
+              <a:rPr lang="en-US" sz="1700" dirty="0">
+                <a:solidFill>
+                  <a:srgbClr val="17364A"/>
+                </a:solidFill>
+                <a:latin typeface="Aptos" pitchFamily="34" charset="0"/>
+                <a:ea typeface="Aptos" pitchFamily="34" charset="-122"/>
+                <a:cs typeface="Aptos" pitchFamily="34" charset="-120"/>
+              </a:rPr>
+              <a:t>Calibration: How closely predicted probabilities match observed outcomes.</a:t>
+            </a:r>
+            <a:endParaRPr lang="en-US" sz="1700" dirty="0"/>
+          </a:p>
+        </p:txBody>
+      </p:sp>
+      <p:sp>
+        <p:nvSpPr>
+          <p:cNvPr id="11" name="Shape 9"/>
+          <p:cNvSpPr/>
+          <p:nvPr/>
+        </p:nvSpPr>
+        <p:spPr>
+          <a:xfrm>
+            <a:off x="7909560" y="1417320"/>
+            <a:ext cx="3154680" cy="1828800"/>
+          </a:xfrm>
+          <a:prstGeom prst="roundRect">
+            <a:avLst>
+              <a:gd name="adj" fmla="val 6000"/>
+            </a:avLst>
+          </a:prstGeom>
+          <a:solidFill>
+            <a:srgbClr val="EEF8ED"/>
+          </a:solidFill>
+          <a:ln w="12700">
+            <a:solidFill>
+              <a:srgbClr val="B9D7E6"/>
+            </a:solidFill>
+            <a:prstDash val="solid"/>
+          </a:ln>
+        </p:spPr>
+      </p:sp>
+      <p:sp>
+        <p:nvSpPr>
+          <p:cNvPr id="12" name="Text 10"/>
+          <p:cNvSpPr/>
+          <p:nvPr/>
+        </p:nvSpPr>
+        <p:spPr>
+          <a:xfrm>
+            <a:off x="8074152" y="1563624"/>
+            <a:ext cx="2825496" cy="201168"/>
+          </a:xfrm>
+          <a:prstGeom prst="rect">
+            <a:avLst/>
+          </a:prstGeom>
+          <a:noFill/>
+          <a:ln/>
+        </p:spPr>
+        <p:txBody>
+          <a:bodyPr wrap="square" lIns="0" tIns="0" rIns="0" bIns="0" rtlCol="0" anchor="ctr"/>
+          <a:lstStyle/>
+          <a:p>
             <a:pPr indent="0" marL="0">
               <a:buNone/>
             </a:pPr>
             <a:r>
-              <a:rPr lang="en-US" sz="1420" dirty="0">
+              <a:rPr lang="en-US" sz="950" b="1" dirty="0">
+                <a:solidFill>
+                  <a:srgbClr val="0068B7"/>
+                </a:solidFill>
+                <a:latin typeface="Aptos" pitchFamily="34" charset="0"/>
+                <a:ea typeface="Aptos" pitchFamily="34" charset="-122"/>
+                <a:cs typeface="Aptos" pitchFamily="34" charset="-120"/>
+              </a:rPr>
+              <a:t>Key idea</a:t>
+            </a:r>
+            <a:endParaRPr lang="en-US" sz="950" dirty="0"/>
+          </a:p>
+        </p:txBody>
+      </p:sp>
+      <p:sp>
+        <p:nvSpPr>
+          <p:cNvPr id="13" name="Text 11"/>
+          <p:cNvSpPr/>
+          <p:nvPr/>
+        </p:nvSpPr>
+        <p:spPr>
+          <a:xfrm>
+            <a:off x="8074152" y="1856232"/>
+            <a:ext cx="2825496" cy="1261872"/>
+          </a:xfrm>
+          <a:prstGeom prst="rect">
+            <a:avLst/>
+          </a:prstGeom>
+          <a:noFill/>
+          <a:ln/>
+        </p:spPr>
+        <p:txBody>
+          <a:bodyPr wrap="square" lIns="0" tIns="0" rIns="0" bIns="0" rtlCol="0" anchor="t">
+            <a:normAutofit/>
+          </a:bodyPr>
+          <a:lstStyle/>
+          <a:p>
+            <a:pPr indent="0" marL="0">
+              <a:buNone/>
+            </a:pPr>
+            <a:r>
+              <a:rPr lang="en-US" sz="1250" dirty="0">
                 <a:solidFill>
                   <a:srgbClr val="17364A"/>
                 </a:solidFill>
@@ -7124,9 +13041,116 @@
                 <a:ea typeface="Aptos" pitchFamily="34" charset="-122"/>
                 <a:cs typeface="Aptos" pitchFamily="34" charset="-120"/>
               </a:rPr>
-              <a:t>An epidemiology team uses a time-series model to forecast emergency department visits for respiratory illness. The forecast shows a possible increase over the next two weeks, but the prediction interval is wide because reporting patterns changed after a holiday. A strong communication brief would state that visits may rise, explain the uncertainty, identify possible reasons for reduced confidence, and recommend preparedness actions that are proportional to the evidence. The brief should not say that the model proves an outbreak is occurring. It should present the forecast as one input into surveillance judgment, alongside laboratory data, provider reports, syndromic trends, and field intelligence.</a:t>
-            </a:r>
-            <a:endParaRPr lang="en-US" sz="1420" dirty="0"/>
+              <a:t>Uncertainty: The degree to which an estimate, prediction, or conclusion may be imprecise or incomplete.</a:t>
+            </a:r>
+            <a:endParaRPr lang="en-US" sz="1250" dirty="0"/>
+          </a:p>
+        </p:txBody>
+      </p:sp>
+      <p:sp>
+        <p:nvSpPr>
+          <p:cNvPr id="14" name="Shape 12"/>
+          <p:cNvSpPr/>
+          <p:nvPr/>
+        </p:nvSpPr>
+        <p:spPr>
+          <a:xfrm>
+            <a:off x="7909560" y="3520440"/>
+            <a:ext cx="3154680" cy="1737360"/>
+          </a:xfrm>
+          <a:prstGeom prst="roundRect">
+            <a:avLst>
+              <a:gd name="adj" fmla="val 6316"/>
+            </a:avLst>
+          </a:prstGeom>
+          <a:solidFill>
+            <a:srgbClr val="EAF6F8"/>
+          </a:solidFill>
+          <a:ln w="12700">
+            <a:solidFill>
+              <a:srgbClr val="B9D7E6"/>
+            </a:solidFill>
+            <a:prstDash val="solid"/>
+          </a:ln>
+        </p:spPr>
+      </p:sp>
+      <p:sp>
+        <p:nvSpPr>
+          <p:cNvPr id="15" name="Text 13"/>
+          <p:cNvSpPr/>
+          <p:nvPr/>
+        </p:nvSpPr>
+        <p:spPr>
+          <a:xfrm>
+            <a:off x="8074152" y="3666744"/>
+            <a:ext cx="2825496" cy="201168"/>
+          </a:xfrm>
+          <a:prstGeom prst="rect">
+            <a:avLst/>
+          </a:prstGeom>
+          <a:noFill/>
+          <a:ln/>
+        </p:spPr>
+        <p:txBody>
+          <a:bodyPr wrap="square" lIns="0" tIns="0" rIns="0" bIns="0" rtlCol="0" anchor="ctr"/>
+          <a:lstStyle/>
+          <a:p>
+            <a:pPr indent="0" marL="0">
+              <a:buNone/>
+            </a:pPr>
+            <a:r>
+              <a:rPr lang="en-US" sz="950" b="1" dirty="0">
+                <a:solidFill>
+                  <a:srgbClr val="0068B7"/>
+                </a:solidFill>
+                <a:latin typeface="Aptos" pitchFamily="34" charset="0"/>
+                <a:ea typeface="Aptos" pitchFamily="34" charset="-122"/>
+                <a:cs typeface="Aptos" pitchFamily="34" charset="-120"/>
+              </a:rPr>
+              <a:t>Use this for</a:t>
+            </a:r>
+            <a:endParaRPr lang="en-US" sz="950" dirty="0"/>
+          </a:p>
+        </p:txBody>
+      </p:sp>
+      <p:sp>
+        <p:nvSpPr>
+          <p:cNvPr id="16" name="Text 14"/>
+          <p:cNvSpPr/>
+          <p:nvPr/>
+        </p:nvSpPr>
+        <p:spPr>
+          <a:xfrm>
+            <a:off x="8074152" y="3959352"/>
+            <a:ext cx="2825496" cy="1170432"/>
+          </a:xfrm>
+          <a:prstGeom prst="rect">
+            <a:avLst/>
+          </a:prstGeom>
+          <a:noFill/>
+          <a:ln/>
+        </p:spPr>
+        <p:txBody>
+          <a:bodyPr wrap="square" lIns="0" tIns="0" rIns="0" bIns="0" rtlCol="0" anchor="t">
+            <a:normAutofit/>
+          </a:bodyPr>
+          <a:lstStyle/>
+          <a:p>
+            <a:pPr indent="0" marL="0">
+              <a:buNone/>
+            </a:pPr>
+            <a:r>
+              <a:rPr lang="en-US" sz="1250" dirty="0">
+                <a:solidFill>
+                  <a:srgbClr val="17364A"/>
+                </a:solidFill>
+                <a:latin typeface="Aptos" pitchFamily="34" charset="0"/>
+                <a:ea typeface="Aptos" pitchFamily="34" charset="-122"/>
+                <a:cs typeface="Aptos" pitchFamily="34" charset="-120"/>
+              </a:rPr>
+              <a:t>Connect the concept to public health decisions, safeguards, documentation, or implementation work.</a:t>
+            </a:r>
+            <a:endParaRPr lang="en-US" sz="1250" dirty="0"/>
           </a:p>
         </p:txBody>
       </p:sp>
@@ -7189,7 +13213,32 @@
       </p:sp>
       <p:sp>
         <p:nvSpPr>
-          <p:cNvPr id="3" name="Text 1"/>
+          <p:cNvPr id="3" name="Shape 1"/>
+          <p:cNvSpPr/>
+          <p:nvPr/>
+        </p:nvSpPr>
+        <p:spPr>
+          <a:xfrm>
+            <a:off x="0" y="164592"/>
+            <a:ext cx="146304" cy="6693408"/>
+          </a:xfrm>
+          <a:prstGeom prst="rect">
+            <a:avLst/>
+          </a:prstGeom>
+          <a:solidFill>
+            <a:srgbClr val="2F8A28"/>
+          </a:solidFill>
+          <a:ln w="12700">
+            <a:solidFill>
+              <a:srgbClr val="2F8A28"/>
+            </a:solidFill>
+            <a:prstDash val="solid"/>
+          </a:ln>
+        </p:spPr>
+      </p:sp>
+      <p:sp>
+        <p:nvSpPr>
+          <p:cNvPr id="4" name="Text 2"/>
           <p:cNvSpPr/>
           <p:nvPr/>
         </p:nvSpPr>
@@ -7228,7 +13277,7 @@
       </p:sp>
       <p:sp>
         <p:nvSpPr>
-          <p:cNvPr id="4" name="Text 2"/>
+          <p:cNvPr id="5" name="Text 3"/>
           <p:cNvSpPr/>
           <p:nvPr/>
         </p:nvSpPr>
@@ -7267,7 +13316,7 @@
       </p:sp>
       <p:sp>
         <p:nvSpPr>
-          <p:cNvPr id="5" name="Text 3"/>
+          <p:cNvPr id="6" name="Text 4"/>
           <p:cNvSpPr/>
           <p:nvPr/>
         </p:nvSpPr>
@@ -7306,13 +13355,77 @@
       </p:sp>
       <p:sp>
         <p:nvSpPr>
-          <p:cNvPr id="6" name="Text 4"/>
+          <p:cNvPr id="7" name="Shape 5"/>
           <p:cNvSpPr/>
           <p:nvPr/>
         </p:nvSpPr>
         <p:spPr>
           <a:xfrm>
             <a:off x="640080" y="658368"/>
+            <a:ext cx="420624" cy="420624"/>
+          </a:xfrm>
+          <a:prstGeom prst="ellipse">
+            <a:avLst/>
+          </a:prstGeom>
+          <a:solidFill>
+            <a:srgbClr val="0068B7"/>
+          </a:solidFill>
+          <a:ln w="12700">
+            <a:solidFill>
+              <a:srgbClr val="0068B7"/>
+            </a:solidFill>
+            <a:prstDash val="solid"/>
+          </a:ln>
+        </p:spPr>
+      </p:sp>
+      <p:sp>
+        <p:nvSpPr>
+          <p:cNvPr id="8" name="Text 6"/>
+          <p:cNvSpPr/>
+          <p:nvPr/>
+        </p:nvSpPr>
+        <p:spPr>
+          <a:xfrm>
+            <a:off x="640080" y="731520"/>
+            <a:ext cx="420624" cy="164592"/>
+          </a:xfrm>
+          <a:prstGeom prst="rect">
+            <a:avLst/>
+          </a:prstGeom>
+          <a:noFill/>
+          <a:ln/>
+        </p:spPr>
+        <p:txBody>
+          <a:bodyPr wrap="square" lIns="0" tIns="0" rIns="0" bIns="0" rtlCol="0" anchor="ctr"/>
+          <a:lstStyle/>
+          <a:p>
+            <a:pPr algn="ctr" indent="0" marL="0">
+              <a:buNone/>
+            </a:pPr>
+            <a:r>
+              <a:rPr lang="en-US" sz="1100" b="1" dirty="0">
+                <a:solidFill>
+                  <a:srgbClr val="FFFFFF"/>
+                </a:solidFill>
+                <a:latin typeface="Aptos" pitchFamily="34" charset="0"/>
+                <a:ea typeface="Aptos" pitchFamily="34" charset="-122"/>
+                <a:cs typeface="Aptos" pitchFamily="34" charset="-120"/>
+              </a:rPr>
+              <a:t>4</a:t>
+            </a:r>
+            <a:endParaRPr lang="en-US" sz="1100" dirty="0"/>
+          </a:p>
+        </p:txBody>
+      </p:sp>
+      <p:sp>
+        <p:nvSpPr>
+          <p:cNvPr id="9" name="Text 7"/>
+          <p:cNvSpPr/>
+          <p:nvPr/>
+        </p:nvSpPr>
+        <p:spPr>
+          <a:xfrm>
+            <a:off x="640080" y="621792"/>
             <a:ext cx="10881360" cy="566928"/>
           </a:xfrm>
           <a:prstGeom prst="rect">
@@ -7339,7 +13452,7 @@
                 <a:ea typeface="Aptos Display" pitchFamily="34" charset="-122"/>
                 <a:cs typeface="Aptos Display" pitchFamily="34" charset="-120"/>
               </a:rPr>
-              <a:t>Technical and Operational Deep Dive</a:t>
+              <a:t>Why This Topic Matters for Public Health AI</a:t>
             </a:r>
             <a:endParaRPr lang="en-US" sz="2700" dirty="0"/>
           </a:p>
@@ -7347,32 +13460,178 @@
       </p:sp>
       <p:sp>
         <p:nvSpPr>
-          <p:cNvPr id="7" name="Text 5"/>
-          <p:cNvSpPr/>
-          <p:nvPr/>
-        </p:nvSpPr>
-        <p:spPr>
-          <a:xfrm>
-            <a:off x="822960" y="1325880"/>
-            <a:ext cx="10378440" cy="4800600"/>
-          </a:xfrm>
-          <a:prstGeom prst="rect">
-            <a:avLst/>
-          </a:prstGeom>
-          <a:noFill/>
-          <a:ln/>
-        </p:spPr>
-        <p:txBody>
-          <a:bodyPr wrap="square" lIns="1016" tIns="1016" rIns="1016" bIns="1016" rtlCol="0" anchor="t">
+          <p:cNvPr id="10" name="Text 8"/>
+          <p:cNvSpPr/>
+          <p:nvPr/>
+        </p:nvSpPr>
+        <p:spPr>
+          <a:xfrm>
+            <a:off x="868680" y="1417320"/>
+            <a:ext cx="6675120" cy="4434840"/>
+          </a:xfrm>
+          <a:prstGeom prst="rect">
+            <a:avLst/>
+          </a:prstGeom>
+          <a:noFill/>
+          <a:ln/>
+        </p:spPr>
+        <p:txBody>
+          <a:bodyPr wrap="square" lIns="635" tIns="635" rIns="635" bIns="635" rtlCol="0" anchor="t">
             <a:normAutofit/>
           </a:bodyPr>
           <a:lstStyle/>
           <a:p>
+            <a:r>
+              <a:rPr lang="en-US" sz="1700" dirty="0">
+                <a:solidFill>
+                  <a:srgbClr val="17364A"/>
+                </a:solidFill>
+                <a:latin typeface="Aptos" pitchFamily="34" charset="0"/>
+                <a:ea typeface="Aptos" pitchFamily="34" charset="-122"/>
+                <a:cs typeface="Aptos" pitchFamily="34" charset="-120"/>
+              </a:rPr>
+              <a:t>Model outputs can influence urgent decisions.</a:t>
+            </a:r>
+            <a:endParaRPr lang="en-US" sz="1700" dirty="0"/>
+          </a:p>
+          <a:p>
+            <a:r>
+              <a:rPr lang="en-US" sz="1700" dirty="0">
+                <a:solidFill>
+                  <a:srgbClr val="17364A"/>
+                </a:solidFill>
+                <a:latin typeface="Aptos" pitchFamily="34" charset="0"/>
+                <a:ea typeface="Aptos" pitchFamily="34" charset="-122"/>
+                <a:cs typeface="Aptos" pitchFamily="34" charset="-120"/>
+              </a:rPr>
+              <a:t>A forecast may affect staffing, a risk score may affect outreach, and a hotspot map may affect deployment of field teams.</a:t>
+            </a:r>
+            <a:endParaRPr lang="en-US" sz="1700" dirty="0"/>
+          </a:p>
+          <a:p>
+            <a:r>
+              <a:rPr lang="en-US" sz="1700" dirty="0">
+                <a:solidFill>
+                  <a:srgbClr val="17364A"/>
+                </a:solidFill>
+                <a:latin typeface="Aptos" pitchFamily="34" charset="0"/>
+                <a:ea typeface="Aptos" pitchFamily="34" charset="-122"/>
+                <a:cs typeface="Aptos" pitchFamily="34" charset="-120"/>
+              </a:rPr>
+              <a:t>If uncertainty is not explained clearly, decision-makers may treat estimates as facts or ignore important limitations.</a:t>
+            </a:r>
+            <a:endParaRPr lang="en-US" sz="1700" dirty="0"/>
+          </a:p>
+          <a:p>
+            <a:r>
+              <a:rPr lang="en-US" sz="1700" dirty="0">
+                <a:solidFill>
+                  <a:srgbClr val="17364A"/>
+                </a:solidFill>
+                <a:latin typeface="Aptos" pitchFamily="34" charset="0"/>
+                <a:ea typeface="Aptos" pitchFamily="34" charset="-122"/>
+                <a:cs typeface="Aptos" pitchFamily="34" charset="-120"/>
+              </a:rPr>
+              <a:t>Public health communication must balance clarity and caution.</a:t>
+            </a:r>
+            <a:endParaRPr lang="en-US" sz="1700" dirty="0"/>
+          </a:p>
+        </p:txBody>
+      </p:sp>
+      <p:sp>
+        <p:nvSpPr>
+          <p:cNvPr id="11" name="Shape 9"/>
+          <p:cNvSpPr/>
+          <p:nvPr/>
+        </p:nvSpPr>
+        <p:spPr>
+          <a:xfrm>
+            <a:off x="7909560" y="1417320"/>
+            <a:ext cx="3154680" cy="1828800"/>
+          </a:xfrm>
+          <a:prstGeom prst="roundRect">
+            <a:avLst>
+              <a:gd name="adj" fmla="val 6000"/>
+            </a:avLst>
+          </a:prstGeom>
+          <a:solidFill>
+            <a:srgbClr val="EEF8ED"/>
+          </a:solidFill>
+          <a:ln w="12700">
+            <a:solidFill>
+              <a:srgbClr val="B9D7E6"/>
+            </a:solidFill>
+            <a:prstDash val="solid"/>
+          </a:ln>
+        </p:spPr>
+      </p:sp>
+      <p:sp>
+        <p:nvSpPr>
+          <p:cNvPr id="12" name="Text 10"/>
+          <p:cNvSpPr/>
+          <p:nvPr/>
+        </p:nvSpPr>
+        <p:spPr>
+          <a:xfrm>
+            <a:off x="8074152" y="1563624"/>
+            <a:ext cx="2825496" cy="201168"/>
+          </a:xfrm>
+          <a:prstGeom prst="rect">
+            <a:avLst/>
+          </a:prstGeom>
+          <a:noFill/>
+          <a:ln/>
+        </p:spPr>
+        <p:txBody>
+          <a:bodyPr wrap="square" lIns="0" tIns="0" rIns="0" bIns="0" rtlCol="0" anchor="ctr"/>
+          <a:lstStyle/>
+          <a:p>
             <a:pPr indent="0" marL="0">
               <a:buNone/>
             </a:pPr>
             <a:r>
-              <a:rPr lang="en-US" sz="1420" dirty="0">
+              <a:rPr lang="en-US" sz="950" b="1" dirty="0">
+                <a:solidFill>
+                  <a:srgbClr val="0068B7"/>
+                </a:solidFill>
+                <a:latin typeface="Aptos" pitchFamily="34" charset="0"/>
+                <a:ea typeface="Aptos" pitchFamily="34" charset="-122"/>
+                <a:cs typeface="Aptos" pitchFamily="34" charset="-120"/>
+              </a:rPr>
+              <a:t>Key idea</a:t>
+            </a:r>
+            <a:endParaRPr lang="en-US" sz="950" dirty="0"/>
+          </a:p>
+        </p:txBody>
+      </p:sp>
+      <p:sp>
+        <p:nvSpPr>
+          <p:cNvPr id="13" name="Text 11"/>
+          <p:cNvSpPr/>
+          <p:nvPr/>
+        </p:nvSpPr>
+        <p:spPr>
+          <a:xfrm>
+            <a:off x="8074152" y="1856232"/>
+            <a:ext cx="2825496" cy="1261872"/>
+          </a:xfrm>
+          <a:prstGeom prst="rect">
+            <a:avLst/>
+          </a:prstGeom>
+          <a:noFill/>
+          <a:ln/>
+        </p:spPr>
+        <p:txBody>
+          <a:bodyPr wrap="square" lIns="0" tIns="0" rIns="0" bIns="0" rtlCol="0" anchor="t">
+            <a:normAutofit/>
+          </a:bodyPr>
+          <a:lstStyle/>
+          <a:p>
+            <a:pPr indent="0" marL="0">
+              <a:buNone/>
+            </a:pPr>
+            <a:r>
+              <a:rPr lang="en-US" sz="1250" dirty="0">
                 <a:solidFill>
                   <a:srgbClr val="17364A"/>
                 </a:solidFill>
@@ -7380,9 +13639,116 @@
                 <a:ea typeface="Aptos" pitchFamily="34" charset="-122"/>
                 <a:cs typeface="Aptos" pitchFamily="34" charset="-120"/>
               </a:rPr>
-              <a:t>Model communication begins with the decision context. The same model output may be communicated differently to a technical team, health officer, program manager, community partner, or public audience. Technical users may need details about metrics and data limitations, while executives may need decision implications, confidence, and recommended actions. Uncertainty should be explained visually and verbally. Trend lines, ranges, maps, and risk categories can help, but they can also imply precision that the model does not have. Labels should avoid unsupported certainty. Words such as likely, possible, estimated, preliminary, and subject to change can be helpful when used consistently. Subgroup findings require special care. If model performance differs by age, race, ethnicity, language, geography, disability, housing status, or data source, communications should avoid presenting aggregate performance as universal. Decision-makers need to know whether a model is less reliable for some populations.</a:t>
-            </a:r>
-            <a:endParaRPr lang="en-US" sz="1420" dirty="0"/>
+              <a:t>Model outputs can influence urgent decisions.</a:t>
+            </a:r>
+            <a:endParaRPr lang="en-US" sz="1250" dirty="0"/>
+          </a:p>
+        </p:txBody>
+      </p:sp>
+      <p:sp>
+        <p:nvSpPr>
+          <p:cNvPr id="14" name="Shape 12"/>
+          <p:cNvSpPr/>
+          <p:nvPr/>
+        </p:nvSpPr>
+        <p:spPr>
+          <a:xfrm>
+            <a:off x="7909560" y="3520440"/>
+            <a:ext cx="3154680" cy="1737360"/>
+          </a:xfrm>
+          <a:prstGeom prst="roundRect">
+            <a:avLst>
+              <a:gd name="adj" fmla="val 6316"/>
+            </a:avLst>
+          </a:prstGeom>
+          <a:solidFill>
+            <a:srgbClr val="EAF6F8"/>
+          </a:solidFill>
+          <a:ln w="12700">
+            <a:solidFill>
+              <a:srgbClr val="B9D7E6"/>
+            </a:solidFill>
+            <a:prstDash val="solid"/>
+          </a:ln>
+        </p:spPr>
+      </p:sp>
+      <p:sp>
+        <p:nvSpPr>
+          <p:cNvPr id="15" name="Text 13"/>
+          <p:cNvSpPr/>
+          <p:nvPr/>
+        </p:nvSpPr>
+        <p:spPr>
+          <a:xfrm>
+            <a:off x="8074152" y="3666744"/>
+            <a:ext cx="2825496" cy="201168"/>
+          </a:xfrm>
+          <a:prstGeom prst="rect">
+            <a:avLst/>
+          </a:prstGeom>
+          <a:noFill/>
+          <a:ln/>
+        </p:spPr>
+        <p:txBody>
+          <a:bodyPr wrap="square" lIns="0" tIns="0" rIns="0" bIns="0" rtlCol="0" anchor="ctr"/>
+          <a:lstStyle/>
+          <a:p>
+            <a:pPr indent="0" marL="0">
+              <a:buNone/>
+            </a:pPr>
+            <a:r>
+              <a:rPr lang="en-US" sz="950" b="1" dirty="0">
+                <a:solidFill>
+                  <a:srgbClr val="0068B7"/>
+                </a:solidFill>
+                <a:latin typeface="Aptos" pitchFamily="34" charset="0"/>
+                <a:ea typeface="Aptos" pitchFamily="34" charset="-122"/>
+                <a:cs typeface="Aptos" pitchFamily="34" charset="-120"/>
+              </a:rPr>
+              <a:t>Use this for</a:t>
+            </a:r>
+            <a:endParaRPr lang="en-US" sz="950" dirty="0"/>
+          </a:p>
+        </p:txBody>
+      </p:sp>
+      <p:sp>
+        <p:nvSpPr>
+          <p:cNvPr id="16" name="Text 14"/>
+          <p:cNvSpPr/>
+          <p:nvPr/>
+        </p:nvSpPr>
+        <p:spPr>
+          <a:xfrm>
+            <a:off x="8074152" y="3959352"/>
+            <a:ext cx="2825496" cy="1170432"/>
+          </a:xfrm>
+          <a:prstGeom prst="rect">
+            <a:avLst/>
+          </a:prstGeom>
+          <a:noFill/>
+          <a:ln/>
+        </p:spPr>
+        <p:txBody>
+          <a:bodyPr wrap="square" lIns="0" tIns="0" rIns="0" bIns="0" rtlCol="0" anchor="t">
+            <a:normAutofit/>
+          </a:bodyPr>
+          <a:lstStyle/>
+          <a:p>
+            <a:pPr indent="0" marL="0">
+              <a:buNone/>
+            </a:pPr>
+            <a:r>
+              <a:rPr lang="en-US" sz="1250" dirty="0">
+                <a:solidFill>
+                  <a:srgbClr val="17364A"/>
+                </a:solidFill>
+                <a:latin typeface="Aptos" pitchFamily="34" charset="0"/>
+                <a:ea typeface="Aptos" pitchFamily="34" charset="-122"/>
+                <a:cs typeface="Aptos" pitchFamily="34" charset="-120"/>
+              </a:rPr>
+              <a:t>Connect the concept to public health decisions, safeguards, documentation, or implementation work.</a:t>
+            </a:r>
+            <a:endParaRPr lang="en-US" sz="1250" dirty="0"/>
           </a:p>
         </p:txBody>
       </p:sp>
@@ -7445,7 +13811,32 @@
       </p:sp>
       <p:sp>
         <p:nvSpPr>
-          <p:cNvPr id="3" name="Text 1"/>
+          <p:cNvPr id="3" name="Shape 1"/>
+          <p:cNvSpPr/>
+          <p:nvPr/>
+        </p:nvSpPr>
+        <p:spPr>
+          <a:xfrm>
+            <a:off x="0" y="164592"/>
+            <a:ext cx="146304" cy="6693408"/>
+          </a:xfrm>
+          <a:prstGeom prst="rect">
+            <a:avLst/>
+          </a:prstGeom>
+          <a:solidFill>
+            <a:srgbClr val="2F8A28"/>
+          </a:solidFill>
+          <a:ln w="12700">
+            <a:solidFill>
+              <a:srgbClr val="2F8A28"/>
+            </a:solidFill>
+            <a:prstDash val="solid"/>
+          </a:ln>
+        </p:spPr>
+      </p:sp>
+      <p:sp>
+        <p:nvSpPr>
+          <p:cNvPr id="4" name="Text 2"/>
           <p:cNvSpPr/>
           <p:nvPr/>
         </p:nvSpPr>
@@ -7484,7 +13875,7 @@
       </p:sp>
       <p:sp>
         <p:nvSpPr>
-          <p:cNvPr id="4" name="Text 2"/>
+          <p:cNvPr id="5" name="Text 3"/>
           <p:cNvSpPr/>
           <p:nvPr/>
         </p:nvSpPr>
@@ -7523,7 +13914,7 @@
       </p:sp>
       <p:sp>
         <p:nvSpPr>
-          <p:cNvPr id="5" name="Text 3"/>
+          <p:cNvPr id="6" name="Text 4"/>
           <p:cNvSpPr/>
           <p:nvPr/>
         </p:nvSpPr>
@@ -7562,13 +13953,77 @@
       </p:sp>
       <p:sp>
         <p:nvSpPr>
-          <p:cNvPr id="6" name="Text 4"/>
+          <p:cNvPr id="7" name="Shape 5"/>
           <p:cNvSpPr/>
           <p:nvPr/>
         </p:nvSpPr>
         <p:spPr>
           <a:xfrm>
             <a:off x="640080" y="658368"/>
+            <a:ext cx="420624" cy="420624"/>
+          </a:xfrm>
+          <a:prstGeom prst="ellipse">
+            <a:avLst/>
+          </a:prstGeom>
+          <a:solidFill>
+            <a:srgbClr val="0068B7"/>
+          </a:solidFill>
+          <a:ln w="12700">
+            <a:solidFill>
+              <a:srgbClr val="0068B7"/>
+            </a:solidFill>
+            <a:prstDash val="solid"/>
+          </a:ln>
+        </p:spPr>
+      </p:sp>
+      <p:sp>
+        <p:nvSpPr>
+          <p:cNvPr id="8" name="Text 6"/>
+          <p:cNvSpPr/>
+          <p:nvPr/>
+        </p:nvSpPr>
+        <p:spPr>
+          <a:xfrm>
+            <a:off x="640080" y="731520"/>
+            <a:ext cx="420624" cy="164592"/>
+          </a:xfrm>
+          <a:prstGeom prst="rect">
+            <a:avLst/>
+          </a:prstGeom>
+          <a:noFill/>
+          <a:ln/>
+        </p:spPr>
+        <p:txBody>
+          <a:bodyPr wrap="square" lIns="0" tIns="0" rIns="0" bIns="0" rtlCol="0" anchor="ctr"/>
+          <a:lstStyle/>
+          <a:p>
+            <a:pPr algn="ctr" indent="0" marL="0">
+              <a:buNone/>
+            </a:pPr>
+            <a:r>
+              <a:rPr lang="en-US" sz="1100" b="1" dirty="0">
+                <a:solidFill>
+                  <a:srgbClr val="FFFFFF"/>
+                </a:solidFill>
+                <a:latin typeface="Aptos" pitchFamily="34" charset="0"/>
+                <a:ea typeface="Aptos" pitchFamily="34" charset="-122"/>
+                <a:cs typeface="Aptos" pitchFamily="34" charset="-120"/>
+              </a:rPr>
+              <a:t>5</a:t>
+            </a:r>
+            <a:endParaRPr lang="en-US" sz="1100" dirty="0"/>
+          </a:p>
+        </p:txBody>
+      </p:sp>
+      <p:sp>
+        <p:nvSpPr>
+          <p:cNvPr id="9" name="Text 7"/>
+          <p:cNvSpPr/>
+          <p:nvPr/>
+        </p:nvSpPr>
+        <p:spPr>
+          <a:xfrm>
+            <a:off x="640080" y="621792"/>
             <a:ext cx="10881360" cy="566928"/>
           </a:xfrm>
           <a:prstGeom prst="rect">
@@ -7595,7 +14050,7 @@
                 <a:ea typeface="Aptos Display" pitchFamily="34" charset="-122"/>
                 <a:cs typeface="Aptos Display" pitchFamily="34" charset="-120"/>
               </a:rPr>
-              <a:t>Risks, Failure Modes, and Guardrails</a:t>
+              <a:t>Public Health Example</a:t>
             </a:r>
             <a:endParaRPr lang="en-US" sz="2700" dirty="0"/>
           </a:p>
@@ -7603,32 +14058,178 @@
       </p:sp>
       <p:sp>
         <p:nvSpPr>
-          <p:cNvPr id="7" name="Text 5"/>
-          <p:cNvSpPr/>
-          <p:nvPr/>
-        </p:nvSpPr>
-        <p:spPr>
-          <a:xfrm>
-            <a:off x="822960" y="1325880"/>
-            <a:ext cx="10378440" cy="4800600"/>
-          </a:xfrm>
-          <a:prstGeom prst="rect">
-            <a:avLst/>
-          </a:prstGeom>
-          <a:noFill/>
-          <a:ln/>
-        </p:spPr>
-        <p:txBody>
-          <a:bodyPr wrap="square" lIns="1016" tIns="1016" rIns="1016" bIns="1016" rtlCol="0" anchor="t">
+          <p:cNvPr id="10" name="Text 8"/>
+          <p:cNvSpPr/>
+          <p:nvPr/>
+        </p:nvSpPr>
+        <p:spPr>
+          <a:xfrm>
+            <a:off x="868680" y="1417320"/>
+            <a:ext cx="6675120" cy="4434840"/>
+          </a:xfrm>
+          <a:prstGeom prst="rect">
+            <a:avLst/>
+          </a:prstGeom>
+          <a:noFill/>
+          <a:ln/>
+        </p:spPr>
+        <p:txBody>
+          <a:bodyPr wrap="square" lIns="635" tIns="635" rIns="635" bIns="635" rtlCol="0" anchor="t">
             <a:normAutofit/>
           </a:bodyPr>
           <a:lstStyle/>
           <a:p>
+            <a:r>
+              <a:rPr lang="en-US" sz="1700" dirty="0">
+                <a:solidFill>
+                  <a:srgbClr val="17364A"/>
+                </a:solidFill>
+                <a:latin typeface="Aptos" pitchFamily="34" charset="0"/>
+                <a:ea typeface="Aptos" pitchFamily="34" charset="-122"/>
+                <a:cs typeface="Aptos" pitchFamily="34" charset="-120"/>
+              </a:rPr>
+              <a:t>An epidemiology team uses a time-series model to forecast emergency department visits for respiratory illness.</a:t>
+            </a:r>
+            <a:endParaRPr lang="en-US" sz="1700" dirty="0"/>
+          </a:p>
+          <a:p>
+            <a:r>
+              <a:rPr lang="en-US" sz="1700" dirty="0">
+                <a:solidFill>
+                  <a:srgbClr val="17364A"/>
+                </a:solidFill>
+                <a:latin typeface="Aptos" pitchFamily="34" charset="0"/>
+                <a:ea typeface="Aptos" pitchFamily="34" charset="-122"/>
+                <a:cs typeface="Aptos" pitchFamily="34" charset="-120"/>
+              </a:rPr>
+              <a:t>The forecast shows a possible increase over the next two weeks, but the prediction interval is wide because reporting.</a:t>
+            </a:r>
+            <a:endParaRPr lang="en-US" sz="1700" dirty="0"/>
+          </a:p>
+          <a:p>
+            <a:r>
+              <a:rPr lang="en-US" sz="1700" dirty="0">
+                <a:solidFill>
+                  <a:srgbClr val="17364A"/>
+                </a:solidFill>
+                <a:latin typeface="Aptos" pitchFamily="34" charset="0"/>
+                <a:ea typeface="Aptos" pitchFamily="34" charset="-122"/>
+                <a:cs typeface="Aptos" pitchFamily="34" charset="-120"/>
+              </a:rPr>
+              <a:t>A strong communication brief would state that visits may rise, explain the uncertainty, identify possible reasons for.</a:t>
+            </a:r>
+            <a:endParaRPr lang="en-US" sz="1700" dirty="0"/>
+          </a:p>
+          <a:p>
+            <a:r>
+              <a:rPr lang="en-US" sz="1700" dirty="0">
+                <a:solidFill>
+                  <a:srgbClr val="17364A"/>
+                </a:solidFill>
+                <a:latin typeface="Aptos" pitchFamily="34" charset="0"/>
+                <a:ea typeface="Aptos" pitchFamily="34" charset="-122"/>
+                <a:cs typeface="Aptos" pitchFamily="34" charset="-120"/>
+              </a:rPr>
+              <a:t>The brief should not say that the model proves an outbreak is occurring.</a:t>
+            </a:r>
+            <a:endParaRPr lang="en-US" sz="1700" dirty="0"/>
+          </a:p>
+        </p:txBody>
+      </p:sp>
+      <p:sp>
+        <p:nvSpPr>
+          <p:cNvPr id="11" name="Shape 9"/>
+          <p:cNvSpPr/>
+          <p:nvPr/>
+        </p:nvSpPr>
+        <p:spPr>
+          <a:xfrm>
+            <a:off x="7909560" y="1417320"/>
+            <a:ext cx="3154680" cy="1828800"/>
+          </a:xfrm>
+          <a:prstGeom prst="roundRect">
+            <a:avLst>
+              <a:gd name="adj" fmla="val 6000"/>
+            </a:avLst>
+          </a:prstGeom>
+          <a:solidFill>
+            <a:srgbClr val="EEF8ED"/>
+          </a:solidFill>
+          <a:ln w="12700">
+            <a:solidFill>
+              <a:srgbClr val="B9D7E6"/>
+            </a:solidFill>
+            <a:prstDash val="solid"/>
+          </a:ln>
+        </p:spPr>
+      </p:sp>
+      <p:sp>
+        <p:nvSpPr>
+          <p:cNvPr id="12" name="Text 10"/>
+          <p:cNvSpPr/>
+          <p:nvPr/>
+        </p:nvSpPr>
+        <p:spPr>
+          <a:xfrm>
+            <a:off x="8074152" y="1563624"/>
+            <a:ext cx="2825496" cy="201168"/>
+          </a:xfrm>
+          <a:prstGeom prst="rect">
+            <a:avLst/>
+          </a:prstGeom>
+          <a:noFill/>
+          <a:ln/>
+        </p:spPr>
+        <p:txBody>
+          <a:bodyPr wrap="square" lIns="0" tIns="0" rIns="0" bIns="0" rtlCol="0" anchor="ctr"/>
+          <a:lstStyle/>
+          <a:p>
             <a:pPr indent="0" marL="0">
               <a:buNone/>
             </a:pPr>
             <a:r>
-              <a:rPr lang="en-US" sz="1420" dirty="0">
+              <a:rPr lang="en-US" sz="950" b="1" dirty="0">
+                <a:solidFill>
+                  <a:srgbClr val="0068B7"/>
+                </a:solidFill>
+                <a:latin typeface="Aptos" pitchFamily="34" charset="0"/>
+                <a:ea typeface="Aptos" pitchFamily="34" charset="-122"/>
+                <a:cs typeface="Aptos" pitchFamily="34" charset="-120"/>
+              </a:rPr>
+              <a:t>Key idea</a:t>
+            </a:r>
+            <a:endParaRPr lang="en-US" sz="950" dirty="0"/>
+          </a:p>
+        </p:txBody>
+      </p:sp>
+      <p:sp>
+        <p:nvSpPr>
+          <p:cNvPr id="13" name="Text 11"/>
+          <p:cNvSpPr/>
+          <p:nvPr/>
+        </p:nvSpPr>
+        <p:spPr>
+          <a:xfrm>
+            <a:off x="8074152" y="1856232"/>
+            <a:ext cx="2825496" cy="1261872"/>
+          </a:xfrm>
+          <a:prstGeom prst="rect">
+            <a:avLst/>
+          </a:prstGeom>
+          <a:noFill/>
+          <a:ln/>
+        </p:spPr>
+        <p:txBody>
+          <a:bodyPr wrap="square" lIns="0" tIns="0" rIns="0" bIns="0" rtlCol="0" anchor="t">
+            <a:normAutofit/>
+          </a:bodyPr>
+          <a:lstStyle/>
+          <a:p>
+            <a:pPr indent="0" marL="0">
+              <a:buNone/>
+            </a:pPr>
+            <a:r>
+              <a:rPr lang="en-US" sz="1250" dirty="0">
                 <a:solidFill>
                   <a:srgbClr val="17364A"/>
                 </a:solidFill>
@@ -7636,9 +14237,116 @@
                 <a:ea typeface="Aptos" pitchFamily="34" charset="-122"/>
                 <a:cs typeface="Aptos" pitchFamily="34" charset="-120"/>
               </a:rPr>
-              <a:t>A major failure mode is false precision. A model may produce a number such as 82.4 percent risk, but the data and validation may not support that level of exactness. A guardrail is to use appropriate rounding, risk categories, and uncertainty statements. Another failure mode is hiding limitations to make results look more actionable. This can erode trust if the model later performs poorly. A guardrail is to include a standard limitations section in model briefs and require review before results are shared outside the technical team.</a:t>
-            </a:r>
-            <a:endParaRPr lang="en-US" sz="1420" dirty="0"/>
+              <a:t>An epidemiology team uses a time-series model to forecast emergency department visits for respiratory illness.</a:t>
+            </a:r>
+            <a:endParaRPr lang="en-US" sz="1250" dirty="0"/>
+          </a:p>
+        </p:txBody>
+      </p:sp>
+      <p:sp>
+        <p:nvSpPr>
+          <p:cNvPr id="14" name="Shape 12"/>
+          <p:cNvSpPr/>
+          <p:nvPr/>
+        </p:nvSpPr>
+        <p:spPr>
+          <a:xfrm>
+            <a:off x="7909560" y="3520440"/>
+            <a:ext cx="3154680" cy="1737360"/>
+          </a:xfrm>
+          <a:prstGeom prst="roundRect">
+            <a:avLst>
+              <a:gd name="adj" fmla="val 6316"/>
+            </a:avLst>
+          </a:prstGeom>
+          <a:solidFill>
+            <a:srgbClr val="EAF6F8"/>
+          </a:solidFill>
+          <a:ln w="12700">
+            <a:solidFill>
+              <a:srgbClr val="B9D7E6"/>
+            </a:solidFill>
+            <a:prstDash val="solid"/>
+          </a:ln>
+        </p:spPr>
+      </p:sp>
+      <p:sp>
+        <p:nvSpPr>
+          <p:cNvPr id="15" name="Text 13"/>
+          <p:cNvSpPr/>
+          <p:nvPr/>
+        </p:nvSpPr>
+        <p:spPr>
+          <a:xfrm>
+            <a:off x="8074152" y="3666744"/>
+            <a:ext cx="2825496" cy="201168"/>
+          </a:xfrm>
+          <a:prstGeom prst="rect">
+            <a:avLst/>
+          </a:prstGeom>
+          <a:noFill/>
+          <a:ln/>
+        </p:spPr>
+        <p:txBody>
+          <a:bodyPr wrap="square" lIns="0" tIns="0" rIns="0" bIns="0" rtlCol="0" anchor="ctr"/>
+          <a:lstStyle/>
+          <a:p>
+            <a:pPr indent="0" marL="0">
+              <a:buNone/>
+            </a:pPr>
+            <a:r>
+              <a:rPr lang="en-US" sz="950" b="1" dirty="0">
+                <a:solidFill>
+                  <a:srgbClr val="0068B7"/>
+                </a:solidFill>
+                <a:latin typeface="Aptos" pitchFamily="34" charset="0"/>
+                <a:ea typeface="Aptos" pitchFamily="34" charset="-122"/>
+                <a:cs typeface="Aptos" pitchFamily="34" charset="-120"/>
+              </a:rPr>
+              <a:t>Use this for</a:t>
+            </a:r>
+            <a:endParaRPr lang="en-US" sz="950" dirty="0"/>
+          </a:p>
+        </p:txBody>
+      </p:sp>
+      <p:sp>
+        <p:nvSpPr>
+          <p:cNvPr id="16" name="Text 14"/>
+          <p:cNvSpPr/>
+          <p:nvPr/>
+        </p:nvSpPr>
+        <p:spPr>
+          <a:xfrm>
+            <a:off x="8074152" y="3959352"/>
+            <a:ext cx="2825496" cy="1170432"/>
+          </a:xfrm>
+          <a:prstGeom prst="rect">
+            <a:avLst/>
+          </a:prstGeom>
+          <a:noFill/>
+          <a:ln/>
+        </p:spPr>
+        <p:txBody>
+          <a:bodyPr wrap="square" lIns="0" tIns="0" rIns="0" bIns="0" rtlCol="0" anchor="t">
+            <a:normAutofit/>
+          </a:bodyPr>
+          <a:lstStyle/>
+          <a:p>
+            <a:pPr indent="0" marL="0">
+              <a:buNone/>
+            </a:pPr>
+            <a:r>
+              <a:rPr lang="en-US" sz="1250" dirty="0">
+                <a:solidFill>
+                  <a:srgbClr val="17364A"/>
+                </a:solidFill>
+                <a:latin typeface="Aptos" pitchFamily="34" charset="0"/>
+                <a:ea typeface="Aptos" pitchFamily="34" charset="-122"/>
+                <a:cs typeface="Aptos" pitchFamily="34" charset="-120"/>
+              </a:rPr>
+              <a:t>Connect the concept to public health decisions, safeguards, documentation, or implementation work.</a:t>
+            </a:r>
+            <a:endParaRPr lang="en-US" sz="1250" dirty="0"/>
           </a:p>
         </p:txBody>
       </p:sp>

--- a/downloads/presentations/modules/lesson-12-communicating-model-results-and-uncertainty.pptx
+++ b/downloads/presentations/modules/lesson-12-communicating-model-results-and-uncertainty.pptx
@@ -2908,6 +2908,45 @@
           </a:p>
         </p:txBody>
       </p:sp>
+      <p:sp>
+        <p:nvSpPr>
+          <p:cNvPr id="8" name="Text 5"/>
+          <p:cNvSpPr/>
+          <p:nvPr/>
+        </p:nvSpPr>
+        <p:spPr>
+          <a:xfrm>
+            <a:off x="11137392" y="6510528"/>
+            <a:ext cx="411480" cy="201168"/>
+          </a:xfrm>
+          <a:prstGeom prst="rect">
+            <a:avLst/>
+          </a:prstGeom>
+          <a:noFill/>
+          <a:ln/>
+        </p:spPr>
+        <p:txBody>
+          <a:bodyPr wrap="square" lIns="0" tIns="0" rIns="0" bIns="0" rtlCol="0" anchor="ctr"/>
+          <a:lstStyle/>
+          <a:p>
+            <a:pPr algn="r" indent="0" marL="0">
+              <a:buNone/>
+            </a:pPr>
+            <a:r>
+              <a:rPr lang="en-US" sz="900" dirty="0">
+                <a:solidFill>
+                  <a:srgbClr val="5F7181"/>
+                </a:solidFill>
+                <a:latin typeface="Aptos" pitchFamily="34" charset="0"/>
+                <a:ea typeface="Aptos" pitchFamily="34" charset="-122"/>
+                <a:cs typeface="Aptos" pitchFamily="34" charset="-120"/>
+              </a:rPr>
+              <a:t>1</a:t>
+            </a:r>
+            <a:endParaRPr lang="en-US" sz="900" dirty="0"/>
+          </a:p>
+        </p:txBody>
+      </p:sp>
     </p:spTree>
   </p:cSld>
   <p:clrMapOvr>
@@ -3101,7 +3140,7 @@
                 <a:ea typeface="Aptos" pitchFamily="34" charset="-122"/>
                 <a:cs typeface="Aptos" pitchFamily="34" charset="-120"/>
               </a:rPr>
-              <a:t>© Paula Soper</a:t>
+              <a:t>Â© Paula Soper</a:t>
             </a:r>
             <a:endParaRPr lang="en-US" sz="800" dirty="0"/>
           </a:p>
@@ -3109,7 +3148,46 @@
       </p:sp>
       <p:sp>
         <p:nvSpPr>
-          <p:cNvPr id="7" name="Shape 5"/>
+          <p:cNvPr id="7" name="Text 5"/>
+          <p:cNvSpPr/>
+          <p:nvPr/>
+        </p:nvSpPr>
+        <p:spPr>
+          <a:xfrm>
+            <a:off x="11137392" y="6510528"/>
+            <a:ext cx="411480" cy="201168"/>
+          </a:xfrm>
+          <a:prstGeom prst="rect">
+            <a:avLst/>
+          </a:prstGeom>
+          <a:noFill/>
+          <a:ln/>
+        </p:spPr>
+        <p:txBody>
+          <a:bodyPr wrap="square" lIns="0" tIns="0" rIns="0" bIns="0" rtlCol="0" anchor="ctr"/>
+          <a:lstStyle/>
+          <a:p>
+            <a:pPr algn="r" indent="0" marL="0">
+              <a:buNone/>
+            </a:pPr>
+            <a:r>
+              <a:rPr lang="en-US" sz="900" dirty="0">
+                <a:solidFill>
+                  <a:srgbClr val="5F7181"/>
+                </a:solidFill>
+                <a:latin typeface="Aptos" pitchFamily="34" charset="0"/>
+                <a:ea typeface="Aptos" pitchFamily="34" charset="-122"/>
+                <a:cs typeface="Aptos" pitchFamily="34" charset="-120"/>
+              </a:rPr>
+              <a:t>10</a:t>
+            </a:r>
+            <a:endParaRPr lang="en-US" sz="900" dirty="0"/>
+          </a:p>
+        </p:txBody>
+      </p:sp>
+      <p:sp>
+        <p:nvSpPr>
+          <p:cNvPr id="8" name="Shape 6"/>
           <p:cNvSpPr/>
           <p:nvPr/>
         </p:nvSpPr>
@@ -3134,7 +3212,7 @@
       </p:sp>
       <p:sp>
         <p:nvSpPr>
-          <p:cNvPr id="8" name="Text 6"/>
+          <p:cNvPr id="9" name="Text 7"/>
           <p:cNvSpPr/>
           <p:nvPr/>
         </p:nvSpPr>
@@ -3173,14 +3251,14 @@
       </p:sp>
       <p:sp>
         <p:nvSpPr>
-          <p:cNvPr id="9" name="Text 7"/>
+          <p:cNvPr id="10" name="Text 8"/>
           <p:cNvSpPr/>
           <p:nvPr/>
         </p:nvSpPr>
         <p:spPr>
           <a:xfrm>
             <a:off x="640080" y="621792"/>
-            <a:ext cx="10881360" cy="566928"/>
+            <a:ext cx="10881360" cy="713232"/>
           </a:xfrm>
           <a:prstGeom prst="rect">
             <a:avLst/>
@@ -3198,7 +3276,7 @@
               <a:buNone/>
             </a:pPr>
             <a:r>
-              <a:rPr lang="en-US" sz="2700" b="1" dirty="0">
+              <a:rPr lang="en-US" sz="3400" b="1" dirty="0">
                 <a:solidFill>
                   <a:srgbClr val="003A63"/>
                 </a:solidFill>
@@ -3208,20 +3286,20 @@
               </a:rPr>
               <a:t>Technical and Operational Deep Dive</a:t>
             </a:r>
-            <a:endParaRPr lang="en-US" sz="2700" dirty="0"/>
-          </a:p>
-        </p:txBody>
-      </p:sp>
-      <p:sp>
-        <p:nvSpPr>
-          <p:cNvPr id="10" name="Text 8"/>
-          <p:cNvSpPr/>
-          <p:nvPr/>
-        </p:nvSpPr>
-        <p:spPr>
-          <a:xfrm>
-            <a:off x="868680" y="1417320"/>
-            <a:ext cx="6675120" cy="4434840"/>
+            <a:endParaRPr lang="en-US" sz="3400" dirty="0"/>
+          </a:p>
+        </p:txBody>
+      </p:sp>
+      <p:sp>
+        <p:nvSpPr>
+          <p:cNvPr id="11" name="Text 9"/>
+          <p:cNvSpPr/>
+          <p:nvPr/>
+        </p:nvSpPr>
+        <p:spPr>
+          <a:xfrm>
+            <a:off x="868680" y="1508760"/>
+            <a:ext cx="6537960" cy="4160520"/>
           </a:xfrm>
           <a:prstGeom prst="rect">
             <a:avLst/>
@@ -3236,7 +3314,7 @@
           <a:lstStyle/>
           <a:p>
             <a:r>
-              <a:rPr lang="en-US" sz="1700" dirty="0">
+              <a:rPr lang="en-US" sz="2100" dirty="0">
                 <a:solidFill>
                   <a:srgbClr val="17364A"/>
                 </a:solidFill>
@@ -3246,11 +3324,11 @@
               </a:rPr>
               <a:t>Model communication begins with the decision context.</a:t>
             </a:r>
-            <a:endParaRPr lang="en-US" sz="1700" dirty="0"/>
-          </a:p>
-          <a:p>
-            <a:r>
-              <a:rPr lang="en-US" sz="1700" dirty="0">
+            <a:endParaRPr lang="en-US" sz="2100" dirty="0"/>
+          </a:p>
+          <a:p>
+            <a:r>
+              <a:rPr lang="en-US" sz="2100" dirty="0">
                 <a:solidFill>
                   <a:srgbClr val="17364A"/>
                 </a:solidFill>
@@ -3258,13 +3336,13 @@
                 <a:ea typeface="Aptos" pitchFamily="34" charset="-122"/>
                 <a:cs typeface="Aptos" pitchFamily="34" charset="-120"/>
               </a:rPr>
-              <a:t>The same model output may be communicated differently to a technical team, health officer, program manager, community.</a:t>
-            </a:r>
-            <a:endParaRPr lang="en-US" sz="1700" dirty="0"/>
-          </a:p>
-          <a:p>
-            <a:r>
-              <a:rPr lang="en-US" sz="1700" dirty="0">
+              <a:t>The same model output may be communicated differently to a technical team, health officer, program.</a:t>
+            </a:r>
+            <a:endParaRPr lang="en-US" sz="2100" dirty="0"/>
+          </a:p>
+          <a:p>
+            <a:r>
+              <a:rPr lang="en-US" sz="2100" dirty="0">
                 <a:solidFill>
                   <a:srgbClr val="17364A"/>
                 </a:solidFill>
@@ -3272,29 +3350,15 @@
                 <a:ea typeface="Aptos" pitchFamily="34" charset="-122"/>
                 <a:cs typeface="Aptos" pitchFamily="34" charset="-120"/>
               </a:rPr>
-              <a:t>Technical users may need details about metrics and data limitations, while executives may need decision implications,.</a:t>
-            </a:r>
-            <a:endParaRPr lang="en-US" sz="1700" dirty="0"/>
-          </a:p>
-          <a:p>
-            <a:r>
-              <a:rPr lang="en-US" sz="1700" dirty="0">
-                <a:solidFill>
-                  <a:srgbClr val="17364A"/>
-                </a:solidFill>
-                <a:latin typeface="Aptos" pitchFamily="34" charset="0"/>
-                <a:ea typeface="Aptos" pitchFamily="34" charset="-122"/>
-                <a:cs typeface="Aptos" pitchFamily="34" charset="-120"/>
-              </a:rPr>
-              <a:t>Uncertainty should be explained visually and verbally.</a:t>
-            </a:r>
-            <a:endParaRPr lang="en-US" sz="1700" dirty="0"/>
-          </a:p>
-        </p:txBody>
-      </p:sp>
-      <p:sp>
-        <p:nvSpPr>
-          <p:cNvPr id="11" name="Shape 9"/>
+              <a:t>Technical users may need details about metrics and data limitations, while executives may need decision.</a:t>
+            </a:r>
+            <a:endParaRPr lang="en-US" sz="2100" dirty="0"/>
+          </a:p>
+        </p:txBody>
+      </p:sp>
+      <p:sp>
+        <p:nvSpPr>
+          <p:cNvPr id="12" name="Shape 10"/>
           <p:cNvSpPr/>
           <p:nvPr/>
         </p:nvSpPr>
@@ -3321,14 +3385,14 @@
       </p:sp>
       <p:sp>
         <p:nvSpPr>
-          <p:cNvPr id="12" name="Text 10"/>
+          <p:cNvPr id="13" name="Text 11"/>
           <p:cNvSpPr/>
           <p:nvPr/>
         </p:nvSpPr>
         <p:spPr>
           <a:xfrm>
             <a:off x="8074152" y="1563624"/>
-            <a:ext cx="2825496" cy="201168"/>
+            <a:ext cx="2825496" cy="256032"/>
           </a:xfrm>
           <a:prstGeom prst="rect">
             <a:avLst/>
@@ -3344,7 +3408,7 @@
               <a:buNone/>
             </a:pPr>
             <a:r>
-              <a:rPr lang="en-US" sz="950" b="1" dirty="0">
+              <a:rPr lang="en-US" sz="1300" b="1" dirty="0">
                 <a:solidFill>
                   <a:srgbClr val="0068B7"/>
                 </a:solidFill>
@@ -3354,20 +3418,20 @@
               </a:rPr>
               <a:t>Key idea</a:t>
             </a:r>
-            <a:endParaRPr lang="en-US" sz="950" dirty="0"/>
-          </a:p>
-        </p:txBody>
-      </p:sp>
-      <p:sp>
-        <p:nvSpPr>
-          <p:cNvPr id="13" name="Text 11"/>
-          <p:cNvSpPr/>
-          <p:nvPr/>
-        </p:nvSpPr>
-        <p:spPr>
-          <a:xfrm>
-            <a:off x="8074152" y="1856232"/>
-            <a:ext cx="2825496" cy="1261872"/>
+            <a:endParaRPr lang="en-US" sz="1300" dirty="0"/>
+          </a:p>
+        </p:txBody>
+      </p:sp>
+      <p:sp>
+        <p:nvSpPr>
+          <p:cNvPr id="14" name="Text 12"/>
+          <p:cNvSpPr/>
+          <p:nvPr/>
+        </p:nvSpPr>
+        <p:spPr>
+          <a:xfrm>
+            <a:off x="8074152" y="1920240"/>
+            <a:ext cx="2825496" cy="1188720"/>
           </a:xfrm>
           <a:prstGeom prst="rect">
             <a:avLst/>
@@ -3385,7 +3449,7 @@
               <a:buNone/>
             </a:pPr>
             <a:r>
-              <a:rPr lang="en-US" sz="1250" dirty="0">
+              <a:rPr lang="en-US" sz="1550" dirty="0">
                 <a:solidFill>
                   <a:srgbClr val="17364A"/>
                 </a:solidFill>
@@ -3395,13 +3459,13 @@
               </a:rPr>
               <a:t>Model communication begins with the decision context.</a:t>
             </a:r>
-            <a:endParaRPr lang="en-US" sz="1250" dirty="0"/>
-          </a:p>
-        </p:txBody>
-      </p:sp>
-      <p:sp>
-        <p:nvSpPr>
-          <p:cNvPr id="14" name="Shape 12"/>
+            <a:endParaRPr lang="en-US" sz="1550" dirty="0"/>
+          </a:p>
+        </p:txBody>
+      </p:sp>
+      <p:sp>
+        <p:nvSpPr>
+          <p:cNvPr id="15" name="Shape 13"/>
           <p:cNvSpPr/>
           <p:nvPr/>
         </p:nvSpPr>
@@ -3428,14 +3492,14 @@
       </p:sp>
       <p:sp>
         <p:nvSpPr>
-          <p:cNvPr id="15" name="Text 13"/>
+          <p:cNvPr id="16" name="Text 14"/>
           <p:cNvSpPr/>
           <p:nvPr/>
         </p:nvSpPr>
         <p:spPr>
           <a:xfrm>
             <a:off x="8074152" y="3666744"/>
-            <a:ext cx="2825496" cy="201168"/>
+            <a:ext cx="2825496" cy="256032"/>
           </a:xfrm>
           <a:prstGeom prst="rect">
             <a:avLst/>
@@ -3451,7 +3515,7 @@
               <a:buNone/>
             </a:pPr>
             <a:r>
-              <a:rPr lang="en-US" sz="950" b="1" dirty="0">
+              <a:rPr lang="en-US" sz="1300" b="1" dirty="0">
                 <a:solidFill>
                   <a:srgbClr val="0068B7"/>
                 </a:solidFill>
@@ -3461,20 +3525,20 @@
               </a:rPr>
               <a:t>Use this for</a:t>
             </a:r>
-            <a:endParaRPr lang="en-US" sz="950" dirty="0"/>
-          </a:p>
-        </p:txBody>
-      </p:sp>
-      <p:sp>
-        <p:nvSpPr>
-          <p:cNvPr id="16" name="Text 14"/>
-          <p:cNvSpPr/>
-          <p:nvPr/>
-        </p:nvSpPr>
-        <p:spPr>
-          <a:xfrm>
-            <a:off x="8074152" y="3959352"/>
-            <a:ext cx="2825496" cy="1170432"/>
+            <a:endParaRPr lang="en-US" sz="1300" dirty="0"/>
+          </a:p>
+        </p:txBody>
+      </p:sp>
+      <p:sp>
+        <p:nvSpPr>
+          <p:cNvPr id="17" name="Text 15"/>
+          <p:cNvSpPr/>
+          <p:nvPr/>
+        </p:nvSpPr>
+        <p:spPr>
+          <a:xfrm>
+            <a:off x="8074152" y="4023360"/>
+            <a:ext cx="2825496" cy="1097280"/>
           </a:xfrm>
           <a:prstGeom prst="rect">
             <a:avLst/>
@@ -3492,7 +3556,7 @@
               <a:buNone/>
             </a:pPr>
             <a:r>
-              <a:rPr lang="en-US" sz="1250" dirty="0">
+              <a:rPr lang="en-US" sz="1550" dirty="0">
                 <a:solidFill>
                   <a:srgbClr val="17364A"/>
                 </a:solidFill>
@@ -3502,7 +3566,7 @@
               </a:rPr>
               <a:t>Connect the concept to public health decisions, safeguards, documentation, or implementation work.</a:t>
             </a:r>
-            <a:endParaRPr lang="en-US" sz="1250" dirty="0"/>
+            <a:endParaRPr lang="en-US" sz="1550" dirty="0"/>
           </a:p>
         </p:txBody>
       </p:sp>
@@ -3699,7 +3763,7 @@
                 <a:ea typeface="Aptos" pitchFamily="34" charset="-122"/>
                 <a:cs typeface="Aptos" pitchFamily="34" charset="-120"/>
               </a:rPr>
-              <a:t>© Paula Soper</a:t>
+              <a:t>Â© Paula Soper</a:t>
             </a:r>
             <a:endParaRPr lang="en-US" sz="800" dirty="0"/>
           </a:p>
@@ -3707,7 +3771,46 @@
       </p:sp>
       <p:sp>
         <p:nvSpPr>
-          <p:cNvPr id="7" name="Shape 5"/>
+          <p:cNvPr id="7" name="Text 5"/>
+          <p:cNvSpPr/>
+          <p:nvPr/>
+        </p:nvSpPr>
+        <p:spPr>
+          <a:xfrm>
+            <a:off x="11137392" y="6510528"/>
+            <a:ext cx="411480" cy="201168"/>
+          </a:xfrm>
+          <a:prstGeom prst="rect">
+            <a:avLst/>
+          </a:prstGeom>
+          <a:noFill/>
+          <a:ln/>
+        </p:spPr>
+        <p:txBody>
+          <a:bodyPr wrap="square" lIns="0" tIns="0" rIns="0" bIns="0" rtlCol="0" anchor="ctr"/>
+          <a:lstStyle/>
+          <a:p>
+            <a:pPr algn="r" indent="0" marL="0">
+              <a:buNone/>
+            </a:pPr>
+            <a:r>
+              <a:rPr lang="en-US" sz="900" dirty="0">
+                <a:solidFill>
+                  <a:srgbClr val="5F7181"/>
+                </a:solidFill>
+                <a:latin typeface="Aptos" pitchFamily="34" charset="0"/>
+                <a:ea typeface="Aptos" pitchFamily="34" charset="-122"/>
+                <a:cs typeface="Aptos" pitchFamily="34" charset="-120"/>
+              </a:rPr>
+              <a:t>11</a:t>
+            </a:r>
+            <a:endParaRPr lang="en-US" sz="900" dirty="0"/>
+          </a:p>
+        </p:txBody>
+      </p:sp>
+      <p:sp>
+        <p:nvSpPr>
+          <p:cNvPr id="8" name="Shape 6"/>
           <p:cNvSpPr/>
           <p:nvPr/>
         </p:nvSpPr>
@@ -3732,7 +3835,7 @@
       </p:sp>
       <p:sp>
         <p:nvSpPr>
-          <p:cNvPr id="8" name="Text 6"/>
+          <p:cNvPr id="9" name="Text 7"/>
           <p:cNvSpPr/>
           <p:nvPr/>
         </p:nvSpPr>
@@ -3771,14 +3874,14 @@
       </p:sp>
       <p:sp>
         <p:nvSpPr>
-          <p:cNvPr id="9" name="Text 7"/>
+          <p:cNvPr id="10" name="Text 8"/>
           <p:cNvSpPr/>
           <p:nvPr/>
         </p:nvSpPr>
         <p:spPr>
           <a:xfrm>
             <a:off x="640080" y="621792"/>
-            <a:ext cx="10881360" cy="566928"/>
+            <a:ext cx="10881360" cy="713232"/>
           </a:xfrm>
           <a:prstGeom prst="rect">
             <a:avLst/>
@@ -3796,7 +3899,7 @@
               <a:buNone/>
             </a:pPr>
             <a:r>
-              <a:rPr lang="en-US" sz="2700" b="1" dirty="0">
+              <a:rPr lang="en-US" sz="3400" b="1" dirty="0">
                 <a:solidFill>
                   <a:srgbClr val="003A63"/>
                 </a:solidFill>
@@ -3806,20 +3909,20 @@
               </a:rPr>
               <a:t>Risks, Failure Modes, and Guardrails</a:t>
             </a:r>
-            <a:endParaRPr lang="en-US" sz="2700" dirty="0"/>
-          </a:p>
-        </p:txBody>
-      </p:sp>
-      <p:sp>
-        <p:nvSpPr>
-          <p:cNvPr id="10" name="Text 8"/>
-          <p:cNvSpPr/>
-          <p:nvPr/>
-        </p:nvSpPr>
-        <p:spPr>
-          <a:xfrm>
-            <a:off x="868680" y="1417320"/>
-            <a:ext cx="6675120" cy="4434840"/>
+            <a:endParaRPr lang="en-US" sz="3400" dirty="0"/>
+          </a:p>
+        </p:txBody>
+      </p:sp>
+      <p:sp>
+        <p:nvSpPr>
+          <p:cNvPr id="11" name="Text 9"/>
+          <p:cNvSpPr/>
+          <p:nvPr/>
+        </p:nvSpPr>
+        <p:spPr>
+          <a:xfrm>
+            <a:off x="868680" y="1508760"/>
+            <a:ext cx="6537960" cy="4160520"/>
           </a:xfrm>
           <a:prstGeom prst="rect">
             <a:avLst/>
@@ -3834,7 +3937,7 @@
           <a:lstStyle/>
           <a:p>
             <a:r>
-              <a:rPr lang="en-US" sz="1700" dirty="0">
+              <a:rPr lang="en-US" sz="2100" dirty="0">
                 <a:solidFill>
                   <a:srgbClr val="17364A"/>
                 </a:solidFill>
@@ -3844,11 +3947,11 @@
               </a:rPr>
               <a:t>A major failure mode is false precision.</a:t>
             </a:r>
-            <a:endParaRPr lang="en-US" sz="1700" dirty="0"/>
-          </a:p>
-          <a:p>
-            <a:r>
-              <a:rPr lang="en-US" sz="1700" dirty="0">
+            <a:endParaRPr lang="en-US" sz="2100" dirty="0"/>
+          </a:p>
+          <a:p>
+            <a:r>
+              <a:rPr lang="en-US" sz="2100" dirty="0">
                 <a:solidFill>
                   <a:srgbClr val="17364A"/>
                 </a:solidFill>
@@ -3856,13 +3959,13 @@
                 <a:ea typeface="Aptos" pitchFamily="34" charset="-122"/>
                 <a:cs typeface="Aptos" pitchFamily="34" charset="-120"/>
               </a:rPr>
-              <a:t>A model may produce a number such as 82.4 percent risk, but the data and validation may not support that level of exactness.</a:t>
-            </a:r>
-            <a:endParaRPr lang="en-US" sz="1700" dirty="0"/>
-          </a:p>
-          <a:p>
-            <a:r>
-              <a:rPr lang="en-US" sz="1700" dirty="0">
+              <a:t>A model may produce a number such as 82.4 percent risk, but the data and validation may not support.</a:t>
+            </a:r>
+            <a:endParaRPr lang="en-US" sz="2100" dirty="0"/>
+          </a:p>
+          <a:p>
+            <a:r>
+              <a:rPr lang="en-US" sz="2100" dirty="0">
                 <a:solidFill>
                   <a:srgbClr val="17364A"/>
                 </a:solidFill>
@@ -3872,27 +3975,13 @@
               </a:rPr>
               <a:t>A guardrail is to use appropriate rounding, risk categories, and uncertainty statements.</a:t>
             </a:r>
-            <a:endParaRPr lang="en-US" sz="1700" dirty="0"/>
-          </a:p>
-          <a:p>
-            <a:r>
-              <a:rPr lang="en-US" sz="1700" dirty="0">
-                <a:solidFill>
-                  <a:srgbClr val="17364A"/>
-                </a:solidFill>
-                <a:latin typeface="Aptos" pitchFamily="34" charset="0"/>
-                <a:ea typeface="Aptos" pitchFamily="34" charset="-122"/>
-                <a:cs typeface="Aptos" pitchFamily="34" charset="-120"/>
-              </a:rPr>
-              <a:t>Another failure mode is hiding limitations to make results look more actionable.</a:t>
-            </a:r>
-            <a:endParaRPr lang="en-US" sz="1700" dirty="0"/>
-          </a:p>
-        </p:txBody>
-      </p:sp>
-      <p:sp>
-        <p:nvSpPr>
-          <p:cNvPr id="11" name="Shape 9"/>
+            <a:endParaRPr lang="en-US" sz="2100" dirty="0"/>
+          </a:p>
+        </p:txBody>
+      </p:sp>
+      <p:sp>
+        <p:nvSpPr>
+          <p:cNvPr id="12" name="Shape 10"/>
           <p:cNvSpPr/>
           <p:nvPr/>
         </p:nvSpPr>
@@ -3919,14 +4008,14 @@
       </p:sp>
       <p:sp>
         <p:nvSpPr>
-          <p:cNvPr id="12" name="Text 10"/>
+          <p:cNvPr id="13" name="Text 11"/>
           <p:cNvSpPr/>
           <p:nvPr/>
         </p:nvSpPr>
         <p:spPr>
           <a:xfrm>
             <a:off x="8074152" y="1563624"/>
-            <a:ext cx="2825496" cy="201168"/>
+            <a:ext cx="2825496" cy="256032"/>
           </a:xfrm>
           <a:prstGeom prst="rect">
             <a:avLst/>
@@ -3942,7 +4031,7 @@
               <a:buNone/>
             </a:pPr>
             <a:r>
-              <a:rPr lang="en-US" sz="950" b="1" dirty="0">
+              <a:rPr lang="en-US" sz="1300" b="1" dirty="0">
                 <a:solidFill>
                   <a:srgbClr val="0068B7"/>
                 </a:solidFill>
@@ -3952,20 +4041,20 @@
               </a:rPr>
               <a:t>Key idea</a:t>
             </a:r>
-            <a:endParaRPr lang="en-US" sz="950" dirty="0"/>
-          </a:p>
-        </p:txBody>
-      </p:sp>
-      <p:sp>
-        <p:nvSpPr>
-          <p:cNvPr id="13" name="Text 11"/>
-          <p:cNvSpPr/>
-          <p:nvPr/>
-        </p:nvSpPr>
-        <p:spPr>
-          <a:xfrm>
-            <a:off x="8074152" y="1856232"/>
-            <a:ext cx="2825496" cy="1261872"/>
+            <a:endParaRPr lang="en-US" sz="1300" dirty="0"/>
+          </a:p>
+        </p:txBody>
+      </p:sp>
+      <p:sp>
+        <p:nvSpPr>
+          <p:cNvPr id="14" name="Text 12"/>
+          <p:cNvSpPr/>
+          <p:nvPr/>
+        </p:nvSpPr>
+        <p:spPr>
+          <a:xfrm>
+            <a:off x="8074152" y="1920240"/>
+            <a:ext cx="2825496" cy="1188720"/>
           </a:xfrm>
           <a:prstGeom prst="rect">
             <a:avLst/>
@@ -3983,7 +4072,7 @@
               <a:buNone/>
             </a:pPr>
             <a:r>
-              <a:rPr lang="en-US" sz="1250" dirty="0">
+              <a:rPr lang="en-US" sz="1550" dirty="0">
                 <a:solidFill>
                   <a:srgbClr val="17364A"/>
                 </a:solidFill>
@@ -3993,13 +4082,13 @@
               </a:rPr>
               <a:t>A major failure mode is false precision.</a:t>
             </a:r>
-            <a:endParaRPr lang="en-US" sz="1250" dirty="0"/>
-          </a:p>
-        </p:txBody>
-      </p:sp>
-      <p:sp>
-        <p:nvSpPr>
-          <p:cNvPr id="14" name="Shape 12"/>
+            <a:endParaRPr lang="en-US" sz="1550" dirty="0"/>
+          </a:p>
+        </p:txBody>
+      </p:sp>
+      <p:sp>
+        <p:nvSpPr>
+          <p:cNvPr id="15" name="Shape 13"/>
           <p:cNvSpPr/>
           <p:nvPr/>
         </p:nvSpPr>
@@ -4026,14 +4115,14 @@
       </p:sp>
       <p:sp>
         <p:nvSpPr>
-          <p:cNvPr id="15" name="Text 13"/>
+          <p:cNvPr id="16" name="Text 14"/>
           <p:cNvSpPr/>
           <p:nvPr/>
         </p:nvSpPr>
         <p:spPr>
           <a:xfrm>
             <a:off x="8074152" y="3666744"/>
-            <a:ext cx="2825496" cy="201168"/>
+            <a:ext cx="2825496" cy="256032"/>
           </a:xfrm>
           <a:prstGeom prst="rect">
             <a:avLst/>
@@ -4049,7 +4138,7 @@
               <a:buNone/>
             </a:pPr>
             <a:r>
-              <a:rPr lang="en-US" sz="950" b="1" dirty="0">
+              <a:rPr lang="en-US" sz="1300" b="1" dirty="0">
                 <a:solidFill>
                   <a:srgbClr val="0068B7"/>
                 </a:solidFill>
@@ -4059,20 +4148,20 @@
               </a:rPr>
               <a:t>Use this for</a:t>
             </a:r>
-            <a:endParaRPr lang="en-US" sz="950" dirty="0"/>
-          </a:p>
-        </p:txBody>
-      </p:sp>
-      <p:sp>
-        <p:nvSpPr>
-          <p:cNvPr id="16" name="Text 14"/>
-          <p:cNvSpPr/>
-          <p:nvPr/>
-        </p:nvSpPr>
-        <p:spPr>
-          <a:xfrm>
-            <a:off x="8074152" y="3959352"/>
-            <a:ext cx="2825496" cy="1170432"/>
+            <a:endParaRPr lang="en-US" sz="1300" dirty="0"/>
+          </a:p>
+        </p:txBody>
+      </p:sp>
+      <p:sp>
+        <p:nvSpPr>
+          <p:cNvPr id="17" name="Text 15"/>
+          <p:cNvSpPr/>
+          <p:nvPr/>
+        </p:nvSpPr>
+        <p:spPr>
+          <a:xfrm>
+            <a:off x="8074152" y="4023360"/>
+            <a:ext cx="2825496" cy="1097280"/>
           </a:xfrm>
           <a:prstGeom prst="rect">
             <a:avLst/>
@@ -4090,7 +4179,7 @@
               <a:buNone/>
             </a:pPr>
             <a:r>
-              <a:rPr lang="en-US" sz="1250" dirty="0">
+              <a:rPr lang="en-US" sz="1550" dirty="0">
                 <a:solidFill>
                   <a:srgbClr val="17364A"/>
                 </a:solidFill>
@@ -4100,7 +4189,7 @@
               </a:rPr>
               <a:t>Connect the concept to public health decisions, safeguards, documentation, or implementation work.</a:t>
             </a:r>
-            <a:endParaRPr lang="en-US" sz="1250" dirty="0"/>
+            <a:endParaRPr lang="en-US" sz="1550" dirty="0"/>
           </a:p>
         </p:txBody>
       </p:sp>
@@ -4297,7 +4386,7 @@
                 <a:ea typeface="Aptos" pitchFamily="34" charset="-122"/>
                 <a:cs typeface="Aptos" pitchFamily="34" charset="-120"/>
               </a:rPr>
-              <a:t>© Paula Soper</a:t>
+              <a:t>Â© Paula Soper</a:t>
             </a:r>
             <a:endParaRPr lang="en-US" sz="800" dirty="0"/>
           </a:p>
@@ -4305,7 +4394,46 @@
       </p:sp>
       <p:sp>
         <p:nvSpPr>
-          <p:cNvPr id="7" name="Shape 5"/>
+          <p:cNvPr id="7" name="Text 5"/>
+          <p:cNvSpPr/>
+          <p:nvPr/>
+        </p:nvSpPr>
+        <p:spPr>
+          <a:xfrm>
+            <a:off x="11137392" y="6510528"/>
+            <a:ext cx="411480" cy="201168"/>
+          </a:xfrm>
+          <a:prstGeom prst="rect">
+            <a:avLst/>
+          </a:prstGeom>
+          <a:noFill/>
+          <a:ln/>
+        </p:spPr>
+        <p:txBody>
+          <a:bodyPr wrap="square" lIns="0" tIns="0" rIns="0" bIns="0" rtlCol="0" anchor="ctr"/>
+          <a:lstStyle/>
+          <a:p>
+            <a:pPr algn="r" indent="0" marL="0">
+              <a:buNone/>
+            </a:pPr>
+            <a:r>
+              <a:rPr lang="en-US" sz="900" dirty="0">
+                <a:solidFill>
+                  <a:srgbClr val="5F7181"/>
+                </a:solidFill>
+                <a:latin typeface="Aptos" pitchFamily="34" charset="0"/>
+                <a:ea typeface="Aptos" pitchFamily="34" charset="-122"/>
+                <a:cs typeface="Aptos" pitchFamily="34" charset="-120"/>
+              </a:rPr>
+              <a:t>12</a:t>
+            </a:r>
+            <a:endParaRPr lang="en-US" sz="900" dirty="0"/>
+          </a:p>
+        </p:txBody>
+      </p:sp>
+      <p:sp>
+        <p:nvSpPr>
+          <p:cNvPr id="8" name="Shape 6"/>
           <p:cNvSpPr/>
           <p:nvPr/>
         </p:nvSpPr>
@@ -4330,7 +4458,7 @@
       </p:sp>
       <p:sp>
         <p:nvSpPr>
-          <p:cNvPr id="8" name="Text 6"/>
+          <p:cNvPr id="9" name="Text 7"/>
           <p:cNvSpPr/>
           <p:nvPr/>
         </p:nvSpPr>
@@ -4369,14 +4497,14 @@
       </p:sp>
       <p:sp>
         <p:nvSpPr>
-          <p:cNvPr id="9" name="Text 7"/>
+          <p:cNvPr id="10" name="Text 8"/>
           <p:cNvSpPr/>
           <p:nvPr/>
         </p:nvSpPr>
         <p:spPr>
           <a:xfrm>
             <a:off x="640080" y="621792"/>
-            <a:ext cx="10881360" cy="566928"/>
+            <a:ext cx="10881360" cy="713232"/>
           </a:xfrm>
           <a:prstGeom prst="rect">
             <a:avLst/>
@@ -4394,7 +4522,7 @@
               <a:buNone/>
             </a:pPr>
             <a:r>
-              <a:rPr lang="en-US" sz="2700" b="1" dirty="0">
+              <a:rPr lang="en-US" sz="3400" b="1" dirty="0">
                 <a:solidFill>
                   <a:srgbClr val="003A63"/>
                 </a:solidFill>
@@ -4404,20 +4532,20 @@
               </a:rPr>
               <a:t>Application to AI-Supported Workflows</a:t>
             </a:r>
-            <a:endParaRPr lang="en-US" sz="2700" dirty="0"/>
-          </a:p>
-        </p:txBody>
-      </p:sp>
-      <p:sp>
-        <p:nvSpPr>
-          <p:cNvPr id="10" name="Text 8"/>
-          <p:cNvSpPr/>
-          <p:nvPr/>
-        </p:nvSpPr>
-        <p:spPr>
-          <a:xfrm>
-            <a:off x="868680" y="1417320"/>
-            <a:ext cx="6675120" cy="4434840"/>
+            <a:endParaRPr lang="en-US" sz="3400" dirty="0"/>
+          </a:p>
+        </p:txBody>
+      </p:sp>
+      <p:sp>
+        <p:nvSpPr>
+          <p:cNvPr id="11" name="Text 9"/>
+          <p:cNvSpPr/>
+          <p:nvPr/>
+        </p:nvSpPr>
+        <p:spPr>
+          <a:xfrm>
+            <a:off x="868680" y="1508760"/>
+            <a:ext cx="6537960" cy="4160520"/>
           </a:xfrm>
           <a:prstGeom prst="rect">
             <a:avLst/>
@@ -4432,7 +4560,7 @@
           <a:lstStyle/>
           <a:p>
             <a:r>
-              <a:rPr lang="en-US" sz="1700" dirty="0">
+              <a:rPr lang="en-US" sz="2100" dirty="0">
                 <a:solidFill>
                   <a:srgbClr val="17364A"/>
                 </a:solidFill>
@@ -4440,13 +4568,13 @@
                 <a:ea typeface="Aptos" pitchFamily="34" charset="-122"/>
                 <a:cs typeface="Aptos" pitchFamily="34" charset="-120"/>
               </a:rPr>
-              <a:t>Generative AI can help draft summaries of model findings, but the draft must be checked by analysts who understand the model.</a:t>
-            </a:r>
-            <a:endParaRPr lang="en-US" sz="1700" dirty="0"/>
-          </a:p>
-          <a:p>
-            <a:r>
-              <a:rPr lang="en-US" sz="1700" dirty="0">
+              <a:t>Generative AI can help draft summaries of model findings, but the draft must be checked by analysts who.</a:t>
+            </a:r>
+            <a:endParaRPr lang="en-US" sz="2100" dirty="0"/>
+          </a:p>
+          <a:p>
+            <a:r>
+              <a:rPr lang="en-US" sz="2100" dirty="0">
                 <a:solidFill>
                   <a:srgbClr val="17364A"/>
                 </a:solidFill>
@@ -4454,13 +4582,13 @@
                 <a:ea typeface="Aptos" pitchFamily="34" charset="-122"/>
                 <a:cs typeface="Aptos" pitchFamily="34" charset="-120"/>
               </a:rPr>
-              <a:t>Predictive analytics, outbreak forecasts, risk stratification tools, and geospatial models all require communication.</a:t>
-            </a:r>
-            <a:endParaRPr lang="en-US" sz="1700" dirty="0"/>
-          </a:p>
-          <a:p>
-            <a:r>
-              <a:rPr lang="en-US" sz="1700" dirty="0">
+              <a:t>Predictive analytics, outbreak forecasts, risk stratification tools, and geospatial models all require.</a:t>
+            </a:r>
+            <a:endParaRPr lang="en-US" sz="2100" dirty="0"/>
+          </a:p>
+          <a:p>
+            <a:r>
+              <a:rPr lang="en-US" sz="2100" dirty="0">
                 <a:solidFill>
                   <a:srgbClr val="17364A"/>
                 </a:solidFill>
@@ -4470,13 +4598,13 @@
               </a:rPr>
               <a:t>RAG systems used for briefings should cite source reports and validation evidence.</a:t>
             </a:r>
-            <a:endParaRPr lang="en-US" sz="1700" dirty="0"/>
-          </a:p>
-        </p:txBody>
-      </p:sp>
-      <p:sp>
-        <p:nvSpPr>
-          <p:cNvPr id="11" name="Shape 9"/>
+            <a:endParaRPr lang="en-US" sz="2100" dirty="0"/>
+          </a:p>
+        </p:txBody>
+      </p:sp>
+      <p:sp>
+        <p:nvSpPr>
+          <p:cNvPr id="12" name="Shape 10"/>
           <p:cNvSpPr/>
           <p:nvPr/>
         </p:nvSpPr>
@@ -4503,14 +4631,14 @@
       </p:sp>
       <p:sp>
         <p:nvSpPr>
-          <p:cNvPr id="12" name="Text 10"/>
+          <p:cNvPr id="13" name="Text 11"/>
           <p:cNvSpPr/>
           <p:nvPr/>
         </p:nvSpPr>
         <p:spPr>
           <a:xfrm>
             <a:off x="8074152" y="1563624"/>
-            <a:ext cx="2825496" cy="201168"/>
+            <a:ext cx="2825496" cy="256032"/>
           </a:xfrm>
           <a:prstGeom prst="rect">
             <a:avLst/>
@@ -4526,7 +4654,7 @@
               <a:buNone/>
             </a:pPr>
             <a:r>
-              <a:rPr lang="en-US" sz="950" b="1" dirty="0">
+              <a:rPr lang="en-US" sz="1300" b="1" dirty="0">
                 <a:solidFill>
                   <a:srgbClr val="0068B7"/>
                 </a:solidFill>
@@ -4536,20 +4664,20 @@
               </a:rPr>
               <a:t>Key idea</a:t>
             </a:r>
-            <a:endParaRPr lang="en-US" sz="950" dirty="0"/>
-          </a:p>
-        </p:txBody>
-      </p:sp>
-      <p:sp>
-        <p:nvSpPr>
-          <p:cNvPr id="13" name="Text 11"/>
-          <p:cNvSpPr/>
-          <p:nvPr/>
-        </p:nvSpPr>
-        <p:spPr>
-          <a:xfrm>
-            <a:off x="8074152" y="1856232"/>
-            <a:ext cx="2825496" cy="1261872"/>
+            <a:endParaRPr lang="en-US" sz="1300" dirty="0"/>
+          </a:p>
+        </p:txBody>
+      </p:sp>
+      <p:sp>
+        <p:nvSpPr>
+          <p:cNvPr id="14" name="Text 12"/>
+          <p:cNvSpPr/>
+          <p:nvPr/>
+        </p:nvSpPr>
+        <p:spPr>
+          <a:xfrm>
+            <a:off x="8074152" y="1920240"/>
+            <a:ext cx="2825496" cy="1188720"/>
           </a:xfrm>
           <a:prstGeom prst="rect">
             <a:avLst/>
@@ -4567,7 +4695,7 @@
               <a:buNone/>
             </a:pPr>
             <a:r>
-              <a:rPr lang="en-US" sz="1250" dirty="0">
+              <a:rPr lang="en-US" sz="1550" dirty="0">
                 <a:solidFill>
                   <a:srgbClr val="17364A"/>
                 </a:solidFill>
@@ -4575,15 +4703,15 @@
                 <a:ea typeface="Aptos" pitchFamily="34" charset="-122"/>
                 <a:cs typeface="Aptos" pitchFamily="34" charset="-120"/>
               </a:rPr>
-              <a:t>Generative AI can help draft summaries of model findings, but the draft must be checked by analysts who understand the model.</a:t>
-            </a:r>
-            <a:endParaRPr lang="en-US" sz="1250" dirty="0"/>
-          </a:p>
-        </p:txBody>
-      </p:sp>
-      <p:sp>
-        <p:nvSpPr>
-          <p:cNvPr id="14" name="Shape 12"/>
+              <a:t>Generative AI can help draft summaries of model findings, but the draft must be checked by analysts who.</a:t>
+            </a:r>
+            <a:endParaRPr lang="en-US" sz="1550" dirty="0"/>
+          </a:p>
+        </p:txBody>
+      </p:sp>
+      <p:sp>
+        <p:nvSpPr>
+          <p:cNvPr id="15" name="Shape 13"/>
           <p:cNvSpPr/>
           <p:nvPr/>
         </p:nvSpPr>
@@ -4610,14 +4738,14 @@
       </p:sp>
       <p:sp>
         <p:nvSpPr>
-          <p:cNvPr id="15" name="Text 13"/>
+          <p:cNvPr id="16" name="Text 14"/>
           <p:cNvSpPr/>
           <p:nvPr/>
         </p:nvSpPr>
         <p:spPr>
           <a:xfrm>
             <a:off x="8074152" y="3666744"/>
-            <a:ext cx="2825496" cy="201168"/>
+            <a:ext cx="2825496" cy="256032"/>
           </a:xfrm>
           <a:prstGeom prst="rect">
             <a:avLst/>
@@ -4633,7 +4761,7 @@
               <a:buNone/>
             </a:pPr>
             <a:r>
-              <a:rPr lang="en-US" sz="950" b="1" dirty="0">
+              <a:rPr lang="en-US" sz="1300" b="1" dirty="0">
                 <a:solidFill>
                   <a:srgbClr val="0068B7"/>
                 </a:solidFill>
@@ -4643,20 +4771,20 @@
               </a:rPr>
               <a:t>Use this for</a:t>
             </a:r>
-            <a:endParaRPr lang="en-US" sz="950" dirty="0"/>
-          </a:p>
-        </p:txBody>
-      </p:sp>
-      <p:sp>
-        <p:nvSpPr>
-          <p:cNvPr id="16" name="Text 14"/>
-          <p:cNvSpPr/>
-          <p:nvPr/>
-        </p:nvSpPr>
-        <p:spPr>
-          <a:xfrm>
-            <a:off x="8074152" y="3959352"/>
-            <a:ext cx="2825496" cy="1170432"/>
+            <a:endParaRPr lang="en-US" sz="1300" dirty="0"/>
+          </a:p>
+        </p:txBody>
+      </p:sp>
+      <p:sp>
+        <p:nvSpPr>
+          <p:cNvPr id="17" name="Text 15"/>
+          <p:cNvSpPr/>
+          <p:nvPr/>
+        </p:nvSpPr>
+        <p:spPr>
+          <a:xfrm>
+            <a:off x="8074152" y="4023360"/>
+            <a:ext cx="2825496" cy="1097280"/>
           </a:xfrm>
           <a:prstGeom prst="rect">
             <a:avLst/>
@@ -4674,7 +4802,7 @@
               <a:buNone/>
             </a:pPr>
             <a:r>
-              <a:rPr lang="en-US" sz="1250" dirty="0">
+              <a:rPr lang="en-US" sz="1550" dirty="0">
                 <a:solidFill>
                   <a:srgbClr val="17364A"/>
                 </a:solidFill>
@@ -4684,7 +4812,7 @@
               </a:rPr>
               <a:t>Connect the concept to public health decisions, safeguards, documentation, or implementation work.</a:t>
             </a:r>
-            <a:endParaRPr lang="en-US" sz="1250" dirty="0"/>
+            <a:endParaRPr lang="en-US" sz="1550" dirty="0"/>
           </a:p>
         </p:txBody>
       </p:sp>
@@ -4881,7 +5009,7 @@
                 <a:ea typeface="Aptos" pitchFamily="34" charset="-122"/>
                 <a:cs typeface="Aptos" pitchFamily="34" charset="-120"/>
               </a:rPr>
-              <a:t>© Paula Soper</a:t>
+              <a:t>Â© Paula Soper</a:t>
             </a:r>
             <a:endParaRPr lang="en-US" sz="800" dirty="0"/>
           </a:p>
@@ -4889,7 +5017,46 @@
       </p:sp>
       <p:sp>
         <p:nvSpPr>
-          <p:cNvPr id="7" name="Shape 5"/>
+          <p:cNvPr id="7" name="Text 5"/>
+          <p:cNvSpPr/>
+          <p:nvPr/>
+        </p:nvSpPr>
+        <p:spPr>
+          <a:xfrm>
+            <a:off x="11137392" y="6510528"/>
+            <a:ext cx="411480" cy="201168"/>
+          </a:xfrm>
+          <a:prstGeom prst="rect">
+            <a:avLst/>
+          </a:prstGeom>
+          <a:noFill/>
+          <a:ln/>
+        </p:spPr>
+        <p:txBody>
+          <a:bodyPr wrap="square" lIns="0" tIns="0" rIns="0" bIns="0" rtlCol="0" anchor="ctr"/>
+          <a:lstStyle/>
+          <a:p>
+            <a:pPr algn="r" indent="0" marL="0">
+              <a:buNone/>
+            </a:pPr>
+            <a:r>
+              <a:rPr lang="en-US" sz="900" dirty="0">
+                <a:solidFill>
+                  <a:srgbClr val="5F7181"/>
+                </a:solidFill>
+                <a:latin typeface="Aptos" pitchFamily="34" charset="0"/>
+                <a:ea typeface="Aptos" pitchFamily="34" charset="-122"/>
+                <a:cs typeface="Aptos" pitchFamily="34" charset="-120"/>
+              </a:rPr>
+              <a:t>13</a:t>
+            </a:r>
+            <a:endParaRPr lang="en-US" sz="900" dirty="0"/>
+          </a:p>
+        </p:txBody>
+      </p:sp>
+      <p:sp>
+        <p:nvSpPr>
+          <p:cNvPr id="8" name="Shape 6"/>
           <p:cNvSpPr/>
           <p:nvPr/>
         </p:nvSpPr>
@@ -4914,7 +5081,7 @@
       </p:sp>
       <p:sp>
         <p:nvSpPr>
-          <p:cNvPr id="8" name="Text 6"/>
+          <p:cNvPr id="9" name="Text 7"/>
           <p:cNvSpPr/>
           <p:nvPr/>
         </p:nvSpPr>
@@ -4953,14 +5120,14 @@
       </p:sp>
       <p:sp>
         <p:nvSpPr>
-          <p:cNvPr id="9" name="Text 7"/>
+          <p:cNvPr id="10" name="Text 8"/>
           <p:cNvSpPr/>
           <p:nvPr/>
         </p:nvSpPr>
         <p:spPr>
           <a:xfrm>
             <a:off x="640080" y="621792"/>
-            <a:ext cx="10881360" cy="566928"/>
+            <a:ext cx="10881360" cy="713232"/>
           </a:xfrm>
           <a:prstGeom prst="rect">
             <a:avLst/>
@@ -4978,7 +5145,7 @@
               <a:buNone/>
             </a:pPr>
             <a:r>
-              <a:rPr lang="en-US" sz="2700" b="1" dirty="0">
+              <a:rPr lang="en-US" sz="3400" b="1" dirty="0">
                 <a:solidFill>
                   <a:srgbClr val="003A63"/>
                 </a:solidFill>
@@ -4988,20 +5155,20 @@
               </a:rPr>
               <a:t>Reflection Questions</a:t>
             </a:r>
-            <a:endParaRPr lang="en-US" sz="2700" dirty="0"/>
-          </a:p>
-        </p:txBody>
-      </p:sp>
-      <p:sp>
-        <p:nvSpPr>
-          <p:cNvPr id="10" name="Text 8"/>
-          <p:cNvSpPr/>
-          <p:nvPr/>
-        </p:nvSpPr>
-        <p:spPr>
-          <a:xfrm>
-            <a:off x="868680" y="1417320"/>
-            <a:ext cx="6675120" cy="4434840"/>
+            <a:endParaRPr lang="en-US" sz="3400" dirty="0"/>
+          </a:p>
+        </p:txBody>
+      </p:sp>
+      <p:sp>
+        <p:nvSpPr>
+          <p:cNvPr id="11" name="Text 9"/>
+          <p:cNvSpPr/>
+          <p:nvPr/>
+        </p:nvSpPr>
+        <p:spPr>
+          <a:xfrm>
+            <a:off x="868680" y="1508760"/>
+            <a:ext cx="6537960" cy="4160520"/>
           </a:xfrm>
           <a:prstGeom prst="rect">
             <a:avLst/>
@@ -5016,7 +5183,7 @@
           <a:lstStyle/>
           <a:p>
             <a:r>
-              <a:rPr lang="en-US" sz="1700" dirty="0">
+              <a:rPr lang="en-US" sz="2100" dirty="0">
                 <a:solidFill>
                   <a:srgbClr val="17364A"/>
                 </a:solidFill>
@@ -5026,11 +5193,11 @@
               </a:rPr>
               <a:t>Who needs to understand this model result?</a:t>
             </a:r>
-            <a:endParaRPr lang="en-US" sz="1700" dirty="0"/>
-          </a:p>
-          <a:p>
-            <a:r>
-              <a:rPr lang="en-US" sz="1700" dirty="0">
+            <a:endParaRPr lang="en-US" sz="2100" dirty="0"/>
+          </a:p>
+          <a:p>
+            <a:r>
+              <a:rPr lang="en-US" sz="2100" dirty="0">
                 <a:solidFill>
                   <a:srgbClr val="17364A"/>
                 </a:solidFill>
@@ -5040,11 +5207,11 @@
               </a:rPr>
               <a:t>What decision will the result support?</a:t>
             </a:r>
-            <a:endParaRPr lang="en-US" sz="1700" dirty="0"/>
-          </a:p>
-          <a:p>
-            <a:r>
-              <a:rPr lang="en-US" sz="1700" dirty="0">
+            <a:endParaRPr lang="en-US" sz="2100" dirty="0"/>
+          </a:p>
+          <a:p>
+            <a:r>
+              <a:rPr lang="en-US" sz="2100" dirty="0">
                 <a:solidFill>
                   <a:srgbClr val="17364A"/>
                 </a:solidFill>
@@ -5054,13 +5221,13 @@
               </a:rPr>
               <a:t>What uncertainty or limitation could change the decision?</a:t>
             </a:r>
-            <a:endParaRPr lang="en-US" sz="1700" dirty="0"/>
-          </a:p>
-        </p:txBody>
-      </p:sp>
-      <p:sp>
-        <p:nvSpPr>
-          <p:cNvPr id="11" name="Shape 9"/>
+            <a:endParaRPr lang="en-US" sz="2100" dirty="0"/>
+          </a:p>
+        </p:txBody>
+      </p:sp>
+      <p:sp>
+        <p:nvSpPr>
+          <p:cNvPr id="12" name="Shape 10"/>
           <p:cNvSpPr/>
           <p:nvPr/>
         </p:nvSpPr>
@@ -5087,14 +5254,14 @@
       </p:sp>
       <p:sp>
         <p:nvSpPr>
-          <p:cNvPr id="12" name="Text 10"/>
+          <p:cNvPr id="13" name="Text 11"/>
           <p:cNvSpPr/>
           <p:nvPr/>
         </p:nvSpPr>
         <p:spPr>
           <a:xfrm>
             <a:off x="8074152" y="1563624"/>
-            <a:ext cx="2825496" cy="201168"/>
+            <a:ext cx="2825496" cy="256032"/>
           </a:xfrm>
           <a:prstGeom prst="rect">
             <a:avLst/>
@@ -5110,7 +5277,7 @@
               <a:buNone/>
             </a:pPr>
             <a:r>
-              <a:rPr lang="en-US" sz="950" b="1" dirty="0">
+              <a:rPr lang="en-US" sz="1300" b="1" dirty="0">
                 <a:solidFill>
                   <a:srgbClr val="0068B7"/>
                 </a:solidFill>
@@ -5120,20 +5287,20 @@
               </a:rPr>
               <a:t>Key idea</a:t>
             </a:r>
-            <a:endParaRPr lang="en-US" sz="950" dirty="0"/>
-          </a:p>
-        </p:txBody>
-      </p:sp>
-      <p:sp>
-        <p:nvSpPr>
-          <p:cNvPr id="13" name="Text 11"/>
-          <p:cNvSpPr/>
-          <p:nvPr/>
-        </p:nvSpPr>
-        <p:spPr>
-          <a:xfrm>
-            <a:off x="8074152" y="1856232"/>
-            <a:ext cx="2825496" cy="1261872"/>
+            <a:endParaRPr lang="en-US" sz="1300" dirty="0"/>
+          </a:p>
+        </p:txBody>
+      </p:sp>
+      <p:sp>
+        <p:nvSpPr>
+          <p:cNvPr id="14" name="Text 12"/>
+          <p:cNvSpPr/>
+          <p:nvPr/>
+        </p:nvSpPr>
+        <p:spPr>
+          <a:xfrm>
+            <a:off x="8074152" y="1920240"/>
+            <a:ext cx="2825496" cy="1188720"/>
           </a:xfrm>
           <a:prstGeom prst="rect">
             <a:avLst/>
@@ -5151,7 +5318,7 @@
               <a:buNone/>
             </a:pPr>
             <a:r>
-              <a:rPr lang="en-US" sz="1250" dirty="0">
+              <a:rPr lang="en-US" sz="1550" dirty="0">
                 <a:solidFill>
                   <a:srgbClr val="17364A"/>
                 </a:solidFill>
@@ -5161,13 +5328,13 @@
               </a:rPr>
               <a:t>Who needs to understand this model result?</a:t>
             </a:r>
-            <a:endParaRPr lang="en-US" sz="1250" dirty="0"/>
-          </a:p>
-        </p:txBody>
-      </p:sp>
-      <p:sp>
-        <p:nvSpPr>
-          <p:cNvPr id="14" name="Shape 12"/>
+            <a:endParaRPr lang="en-US" sz="1550" dirty="0"/>
+          </a:p>
+        </p:txBody>
+      </p:sp>
+      <p:sp>
+        <p:nvSpPr>
+          <p:cNvPr id="15" name="Shape 13"/>
           <p:cNvSpPr/>
           <p:nvPr/>
         </p:nvSpPr>
@@ -5194,14 +5361,14 @@
       </p:sp>
       <p:sp>
         <p:nvSpPr>
-          <p:cNvPr id="15" name="Text 13"/>
+          <p:cNvPr id="16" name="Text 14"/>
           <p:cNvSpPr/>
           <p:nvPr/>
         </p:nvSpPr>
         <p:spPr>
           <a:xfrm>
             <a:off x="8074152" y="3666744"/>
-            <a:ext cx="2825496" cy="201168"/>
+            <a:ext cx="2825496" cy="256032"/>
           </a:xfrm>
           <a:prstGeom prst="rect">
             <a:avLst/>
@@ -5217,7 +5384,7 @@
               <a:buNone/>
             </a:pPr>
             <a:r>
-              <a:rPr lang="en-US" sz="950" b="1" dirty="0">
+              <a:rPr lang="en-US" sz="1300" b="1" dirty="0">
                 <a:solidFill>
                   <a:srgbClr val="0068B7"/>
                 </a:solidFill>
@@ -5227,20 +5394,20 @@
               </a:rPr>
               <a:t>Use this for</a:t>
             </a:r>
-            <a:endParaRPr lang="en-US" sz="950" dirty="0"/>
-          </a:p>
-        </p:txBody>
-      </p:sp>
-      <p:sp>
-        <p:nvSpPr>
-          <p:cNvPr id="16" name="Text 14"/>
-          <p:cNvSpPr/>
-          <p:nvPr/>
-        </p:nvSpPr>
-        <p:spPr>
-          <a:xfrm>
-            <a:off x="8074152" y="3959352"/>
-            <a:ext cx="2825496" cy="1170432"/>
+            <a:endParaRPr lang="en-US" sz="1300" dirty="0"/>
+          </a:p>
+        </p:txBody>
+      </p:sp>
+      <p:sp>
+        <p:nvSpPr>
+          <p:cNvPr id="17" name="Text 15"/>
+          <p:cNvSpPr/>
+          <p:nvPr/>
+        </p:nvSpPr>
+        <p:spPr>
+          <a:xfrm>
+            <a:off x="8074152" y="4023360"/>
+            <a:ext cx="2825496" cy="1097280"/>
           </a:xfrm>
           <a:prstGeom prst="rect">
             <a:avLst/>
@@ -5258,7 +5425,7 @@
               <a:buNone/>
             </a:pPr>
             <a:r>
-              <a:rPr lang="en-US" sz="1250" dirty="0">
+              <a:rPr lang="en-US" sz="1550" dirty="0">
                 <a:solidFill>
                   <a:srgbClr val="17364A"/>
                 </a:solidFill>
@@ -5268,7 +5435,7 @@
               </a:rPr>
               <a:t>Connect the concept to public health decisions, safeguards, documentation, or implementation work.</a:t>
             </a:r>
-            <a:endParaRPr lang="en-US" sz="1250" dirty="0"/>
+            <a:endParaRPr lang="en-US" sz="1550" dirty="0"/>
           </a:p>
         </p:txBody>
       </p:sp>
@@ -5465,7 +5632,7 @@
                 <a:ea typeface="Aptos" pitchFamily="34" charset="-122"/>
                 <a:cs typeface="Aptos" pitchFamily="34" charset="-120"/>
               </a:rPr>
-              <a:t>© Paula Soper</a:t>
+              <a:t>Â© Paula Soper</a:t>
             </a:r>
             <a:endParaRPr lang="en-US" sz="800" dirty="0"/>
           </a:p>
@@ -5479,8 +5646,47 @@
         </p:nvSpPr>
         <p:spPr>
           <a:xfrm>
+            <a:off x="11137392" y="6510528"/>
+            <a:ext cx="411480" cy="201168"/>
+          </a:xfrm>
+          <a:prstGeom prst="rect">
+            <a:avLst/>
+          </a:prstGeom>
+          <a:noFill/>
+          <a:ln/>
+        </p:spPr>
+        <p:txBody>
+          <a:bodyPr wrap="square" lIns="0" tIns="0" rIns="0" bIns="0" rtlCol="0" anchor="ctr"/>
+          <a:lstStyle/>
+          <a:p>
+            <a:pPr algn="r" indent="0" marL="0">
+              <a:buNone/>
+            </a:pPr>
+            <a:r>
+              <a:rPr lang="en-US" sz="900" dirty="0">
+                <a:solidFill>
+                  <a:srgbClr val="5F7181"/>
+                </a:solidFill>
+                <a:latin typeface="Aptos" pitchFamily="34" charset="0"/>
+                <a:ea typeface="Aptos" pitchFamily="34" charset="-122"/>
+                <a:cs typeface="Aptos" pitchFamily="34" charset="-120"/>
+              </a:rPr>
+              <a:t>14</a:t>
+            </a:r>
+            <a:endParaRPr lang="en-US" sz="900" dirty="0"/>
+          </a:p>
+        </p:txBody>
+      </p:sp>
+      <p:sp>
+        <p:nvSpPr>
+          <p:cNvPr id="8" name="Text 6"/>
+          <p:cNvSpPr/>
+          <p:nvPr/>
+        </p:nvSpPr>
+        <p:spPr>
+          <a:xfrm>
             <a:off x="640080" y="658368"/>
-            <a:ext cx="10881360" cy="566928"/>
+            <a:ext cx="10881360" cy="713232"/>
           </a:xfrm>
           <a:prstGeom prst="rect">
             <a:avLst/>
@@ -5498,7 +5704,7 @@
               <a:buNone/>
             </a:pPr>
             <a:r>
-              <a:rPr lang="en-US" sz="2700" b="1" dirty="0">
+              <a:rPr lang="en-US" sz="3400" b="1" dirty="0">
                 <a:solidFill>
                   <a:srgbClr val="003A63"/>
                 </a:solidFill>
@@ -5508,20 +5714,20 @@
               </a:rPr>
               <a:t>Reflection Questions Continued</a:t>
             </a:r>
-            <a:endParaRPr lang="en-US" sz="2700" dirty="0"/>
-          </a:p>
-        </p:txBody>
-      </p:sp>
-      <p:sp>
-        <p:nvSpPr>
-          <p:cNvPr id="8" name="Text 6"/>
-          <p:cNvSpPr/>
-          <p:nvPr/>
-        </p:nvSpPr>
-        <p:spPr>
-          <a:xfrm>
-            <a:off x="868680" y="1417320"/>
-            <a:ext cx="6675120" cy="4434840"/>
+            <a:endParaRPr lang="en-US" sz="3400" dirty="0"/>
+          </a:p>
+        </p:txBody>
+      </p:sp>
+      <p:sp>
+        <p:nvSpPr>
+          <p:cNvPr id="9" name="Text 7"/>
+          <p:cNvSpPr/>
+          <p:nvPr/>
+        </p:nvSpPr>
+        <p:spPr>
+          <a:xfrm>
+            <a:off x="868680" y="1508760"/>
+            <a:ext cx="6537960" cy="4160520"/>
           </a:xfrm>
           <a:prstGeom prst="rect">
             <a:avLst/>
@@ -5536,7 +5742,7 @@
           <a:lstStyle/>
           <a:p>
             <a:r>
-              <a:rPr lang="en-US" sz="1700" dirty="0">
+              <a:rPr lang="en-US" sz="2100" dirty="0">
                 <a:solidFill>
                   <a:srgbClr val="17364A"/>
                 </a:solidFill>
@@ -5546,11 +5752,11 @@
               </a:rPr>
               <a:t>Are there subgroup performance concerns?</a:t>
             </a:r>
-            <a:endParaRPr lang="en-US" sz="1700" dirty="0"/>
-          </a:p>
-          <a:p>
-            <a:r>
-              <a:rPr lang="en-US" sz="1700" dirty="0">
+            <a:endParaRPr lang="en-US" sz="2100" dirty="0"/>
+          </a:p>
+          <a:p>
+            <a:r>
+              <a:rPr lang="en-US" sz="2100" dirty="0">
                 <a:solidFill>
                   <a:srgbClr val="17364A"/>
                 </a:solidFill>
@@ -5560,13 +5766,13 @@
               </a:rPr>
               <a:t>What wording would prevent overclaiming?</a:t>
             </a:r>
-            <a:endParaRPr lang="en-US" sz="1700" dirty="0"/>
-          </a:p>
-        </p:txBody>
-      </p:sp>
-      <p:sp>
-        <p:nvSpPr>
-          <p:cNvPr id="9" name="Shape 7"/>
+            <a:endParaRPr lang="en-US" sz="2100" dirty="0"/>
+          </a:p>
+        </p:txBody>
+      </p:sp>
+      <p:sp>
+        <p:nvSpPr>
+          <p:cNvPr id="10" name="Shape 8"/>
           <p:cNvSpPr/>
           <p:nvPr/>
         </p:nvSpPr>
@@ -5593,14 +5799,14 @@
       </p:sp>
       <p:sp>
         <p:nvSpPr>
-          <p:cNvPr id="10" name="Text 8"/>
+          <p:cNvPr id="11" name="Text 9"/>
           <p:cNvSpPr/>
           <p:nvPr/>
         </p:nvSpPr>
         <p:spPr>
           <a:xfrm>
             <a:off x="8074152" y="1563624"/>
-            <a:ext cx="2825496" cy="201168"/>
+            <a:ext cx="2825496" cy="256032"/>
           </a:xfrm>
           <a:prstGeom prst="rect">
             <a:avLst/>
@@ -5616,7 +5822,7 @@
               <a:buNone/>
             </a:pPr>
             <a:r>
-              <a:rPr lang="en-US" sz="950" b="1" dirty="0">
+              <a:rPr lang="en-US" sz="1300" b="1" dirty="0">
                 <a:solidFill>
                   <a:srgbClr val="0068B7"/>
                 </a:solidFill>
@@ -5626,20 +5832,20 @@
               </a:rPr>
               <a:t>Key idea</a:t>
             </a:r>
-            <a:endParaRPr lang="en-US" sz="950" dirty="0"/>
-          </a:p>
-        </p:txBody>
-      </p:sp>
-      <p:sp>
-        <p:nvSpPr>
-          <p:cNvPr id="11" name="Text 9"/>
-          <p:cNvSpPr/>
-          <p:nvPr/>
-        </p:nvSpPr>
-        <p:spPr>
-          <a:xfrm>
-            <a:off x="8074152" y="1856232"/>
-            <a:ext cx="2825496" cy="1261872"/>
+            <a:endParaRPr lang="en-US" sz="1300" dirty="0"/>
+          </a:p>
+        </p:txBody>
+      </p:sp>
+      <p:sp>
+        <p:nvSpPr>
+          <p:cNvPr id="12" name="Text 10"/>
+          <p:cNvSpPr/>
+          <p:nvPr/>
+        </p:nvSpPr>
+        <p:spPr>
+          <a:xfrm>
+            <a:off x="8074152" y="1920240"/>
+            <a:ext cx="2825496" cy="1188720"/>
           </a:xfrm>
           <a:prstGeom prst="rect">
             <a:avLst/>
@@ -5657,7 +5863,7 @@
               <a:buNone/>
             </a:pPr>
             <a:r>
-              <a:rPr lang="en-US" sz="1250" dirty="0">
+              <a:rPr lang="en-US" sz="1550" dirty="0">
                 <a:solidFill>
                   <a:srgbClr val="17364A"/>
                 </a:solidFill>
@@ -5667,13 +5873,13 @@
               </a:rPr>
               <a:t>Are there subgroup performance concerns?</a:t>
             </a:r>
-            <a:endParaRPr lang="en-US" sz="1250" dirty="0"/>
-          </a:p>
-        </p:txBody>
-      </p:sp>
-      <p:sp>
-        <p:nvSpPr>
-          <p:cNvPr id="12" name="Shape 10"/>
+            <a:endParaRPr lang="en-US" sz="1550" dirty="0"/>
+          </a:p>
+        </p:txBody>
+      </p:sp>
+      <p:sp>
+        <p:nvSpPr>
+          <p:cNvPr id="13" name="Shape 11"/>
           <p:cNvSpPr/>
           <p:nvPr/>
         </p:nvSpPr>
@@ -5700,14 +5906,14 @@
       </p:sp>
       <p:sp>
         <p:nvSpPr>
-          <p:cNvPr id="13" name="Text 11"/>
+          <p:cNvPr id="14" name="Text 12"/>
           <p:cNvSpPr/>
           <p:nvPr/>
         </p:nvSpPr>
         <p:spPr>
           <a:xfrm>
             <a:off x="8074152" y="3666744"/>
-            <a:ext cx="2825496" cy="201168"/>
+            <a:ext cx="2825496" cy="256032"/>
           </a:xfrm>
           <a:prstGeom prst="rect">
             <a:avLst/>
@@ -5723,7 +5929,7 @@
               <a:buNone/>
             </a:pPr>
             <a:r>
-              <a:rPr lang="en-US" sz="950" b="1" dirty="0">
+              <a:rPr lang="en-US" sz="1300" b="1" dirty="0">
                 <a:solidFill>
                   <a:srgbClr val="0068B7"/>
                 </a:solidFill>
@@ -5733,20 +5939,20 @@
               </a:rPr>
               <a:t>Use this for</a:t>
             </a:r>
-            <a:endParaRPr lang="en-US" sz="950" dirty="0"/>
-          </a:p>
-        </p:txBody>
-      </p:sp>
-      <p:sp>
-        <p:nvSpPr>
-          <p:cNvPr id="14" name="Text 12"/>
-          <p:cNvSpPr/>
-          <p:nvPr/>
-        </p:nvSpPr>
-        <p:spPr>
-          <a:xfrm>
-            <a:off x="8074152" y="3959352"/>
-            <a:ext cx="2825496" cy="1170432"/>
+            <a:endParaRPr lang="en-US" sz="1300" dirty="0"/>
+          </a:p>
+        </p:txBody>
+      </p:sp>
+      <p:sp>
+        <p:nvSpPr>
+          <p:cNvPr id="15" name="Text 13"/>
+          <p:cNvSpPr/>
+          <p:nvPr/>
+        </p:nvSpPr>
+        <p:spPr>
+          <a:xfrm>
+            <a:off x="8074152" y="4023360"/>
+            <a:ext cx="2825496" cy="1097280"/>
           </a:xfrm>
           <a:prstGeom prst="rect">
             <a:avLst/>
@@ -5764,7 +5970,7 @@
               <a:buNone/>
             </a:pPr>
             <a:r>
-              <a:rPr lang="en-US" sz="1250" dirty="0">
+              <a:rPr lang="en-US" sz="1550" dirty="0">
                 <a:solidFill>
                   <a:srgbClr val="17364A"/>
                 </a:solidFill>
@@ -5774,7 +5980,7 @@
               </a:rPr>
               <a:t>Connect the concept to public health decisions, safeguards, documentation, or implementation work.</a:t>
             </a:r>
-            <a:endParaRPr lang="en-US" sz="1250" dirty="0"/>
+            <a:endParaRPr lang="en-US" sz="1550" dirty="0"/>
           </a:p>
         </p:txBody>
       </p:sp>
@@ -5971,7 +6177,7 @@
                 <a:ea typeface="Aptos" pitchFamily="34" charset="-122"/>
                 <a:cs typeface="Aptos" pitchFamily="34" charset="-120"/>
               </a:rPr>
-              <a:t>© Paula Soper</a:t>
+              <a:t>Â© Paula Soper</a:t>
             </a:r>
             <a:endParaRPr lang="en-US" sz="800" dirty="0"/>
           </a:p>
@@ -5979,7 +6185,46 @@
       </p:sp>
       <p:sp>
         <p:nvSpPr>
-          <p:cNvPr id="7" name="Shape 5"/>
+          <p:cNvPr id="7" name="Text 5"/>
+          <p:cNvSpPr/>
+          <p:nvPr/>
+        </p:nvSpPr>
+        <p:spPr>
+          <a:xfrm>
+            <a:off x="11137392" y="6510528"/>
+            <a:ext cx="411480" cy="201168"/>
+          </a:xfrm>
+          <a:prstGeom prst="rect">
+            <a:avLst/>
+          </a:prstGeom>
+          <a:noFill/>
+          <a:ln/>
+        </p:spPr>
+        <p:txBody>
+          <a:bodyPr wrap="square" lIns="0" tIns="0" rIns="0" bIns="0" rtlCol="0" anchor="ctr"/>
+          <a:lstStyle/>
+          <a:p>
+            <a:pPr algn="r" indent="0" marL="0">
+              <a:buNone/>
+            </a:pPr>
+            <a:r>
+              <a:rPr lang="en-US" sz="900" dirty="0">
+                <a:solidFill>
+                  <a:srgbClr val="5F7181"/>
+                </a:solidFill>
+                <a:latin typeface="Aptos" pitchFamily="34" charset="0"/>
+                <a:ea typeface="Aptos" pitchFamily="34" charset="-122"/>
+                <a:cs typeface="Aptos" pitchFamily="34" charset="-120"/>
+              </a:rPr>
+              <a:t>15</a:t>
+            </a:r>
+            <a:endParaRPr lang="en-US" sz="900" dirty="0"/>
+          </a:p>
+        </p:txBody>
+      </p:sp>
+      <p:sp>
+        <p:nvSpPr>
+          <p:cNvPr id="8" name="Shape 6"/>
           <p:cNvSpPr/>
           <p:nvPr/>
         </p:nvSpPr>
@@ -6004,7 +6249,7 @@
       </p:sp>
       <p:sp>
         <p:nvSpPr>
-          <p:cNvPr id="8" name="Text 6"/>
+          <p:cNvPr id="9" name="Text 7"/>
           <p:cNvSpPr/>
           <p:nvPr/>
         </p:nvSpPr>
@@ -6043,14 +6288,14 @@
       </p:sp>
       <p:sp>
         <p:nvSpPr>
-          <p:cNvPr id="9" name="Text 7"/>
+          <p:cNvPr id="10" name="Text 8"/>
           <p:cNvSpPr/>
           <p:nvPr/>
         </p:nvSpPr>
         <p:spPr>
           <a:xfrm>
             <a:off x="640080" y="621792"/>
-            <a:ext cx="10881360" cy="566928"/>
+            <a:ext cx="10881360" cy="713232"/>
           </a:xfrm>
           <a:prstGeom prst="rect">
             <a:avLst/>
@@ -6068,7 +6313,7 @@
               <a:buNone/>
             </a:pPr>
             <a:r>
-              <a:rPr lang="en-US" sz="2700" b="1" dirty="0">
+              <a:rPr lang="en-US" sz="3400" b="1" dirty="0">
                 <a:solidFill>
                   <a:srgbClr val="003A63"/>
                 </a:solidFill>
@@ -6078,20 +6323,20 @@
               </a:rPr>
               <a:t>Practical Exercise</a:t>
             </a:r>
-            <a:endParaRPr lang="en-US" sz="2700" dirty="0"/>
-          </a:p>
-        </p:txBody>
-      </p:sp>
-      <p:sp>
-        <p:nvSpPr>
-          <p:cNvPr id="10" name="Text 8"/>
-          <p:cNvSpPr/>
-          <p:nvPr/>
-        </p:nvSpPr>
-        <p:spPr>
-          <a:xfrm>
-            <a:off x="868680" y="1417320"/>
-            <a:ext cx="6675120" cy="4434840"/>
+            <a:endParaRPr lang="en-US" sz="3400" dirty="0"/>
+          </a:p>
+        </p:txBody>
+      </p:sp>
+      <p:sp>
+        <p:nvSpPr>
+          <p:cNvPr id="11" name="Text 9"/>
+          <p:cNvSpPr/>
+          <p:nvPr/>
+        </p:nvSpPr>
+        <p:spPr>
+          <a:xfrm>
+            <a:off x="868680" y="1508760"/>
+            <a:ext cx="6537960" cy="4160520"/>
           </a:xfrm>
           <a:prstGeom prst="rect">
             <a:avLst/>
@@ -6106,7 +6351,7 @@
           <a:lstStyle/>
           <a:p>
             <a:r>
-              <a:rPr lang="en-US" sz="1700" dirty="0">
+              <a:rPr lang="en-US" sz="2100" dirty="0">
                 <a:solidFill>
                   <a:srgbClr val="17364A"/>
                 </a:solidFill>
@@ -6116,11 +6361,11 @@
               </a:rPr>
               <a:t>Create a one-page model communication brief.</a:t>
             </a:r>
-            <a:endParaRPr lang="en-US" sz="1700" dirty="0"/>
-          </a:p>
-          <a:p>
-            <a:r>
-              <a:rPr lang="en-US" sz="1700" dirty="0">
+            <a:endParaRPr lang="en-US" sz="2100" dirty="0"/>
+          </a:p>
+          <a:p>
+            <a:r>
+              <a:rPr lang="en-US" sz="2100" dirty="0">
                 <a:solidFill>
                   <a:srgbClr val="17364A"/>
                 </a:solidFill>
@@ -6128,15 +6373,15 @@
                 <a:ea typeface="Aptos" pitchFamily="34" charset="-122"/>
                 <a:cs typeface="Aptos" pitchFamily="34" charset="-120"/>
               </a:rPr>
-              <a:t>Include the decision question, model result, uncertainty, validation status, limitations, subgroup considerations,.</a:t>
-            </a:r>
-            <a:endParaRPr lang="en-US" sz="1700" dirty="0"/>
-          </a:p>
-        </p:txBody>
-      </p:sp>
-      <p:sp>
-        <p:nvSpPr>
-          <p:cNvPr id="11" name="Shape 9"/>
+              <a:t>Include the decision question, model result, uncertainty, validation status, limitations, subgroup.</a:t>
+            </a:r>
+            <a:endParaRPr lang="en-US" sz="2100" dirty="0"/>
+          </a:p>
+        </p:txBody>
+      </p:sp>
+      <p:sp>
+        <p:nvSpPr>
+          <p:cNvPr id="12" name="Shape 10"/>
           <p:cNvSpPr/>
           <p:nvPr/>
         </p:nvSpPr>
@@ -6163,14 +6408,14 @@
       </p:sp>
       <p:sp>
         <p:nvSpPr>
-          <p:cNvPr id="12" name="Text 10"/>
+          <p:cNvPr id="13" name="Text 11"/>
           <p:cNvSpPr/>
           <p:nvPr/>
         </p:nvSpPr>
         <p:spPr>
           <a:xfrm>
             <a:off x="8074152" y="1563624"/>
-            <a:ext cx="2825496" cy="201168"/>
+            <a:ext cx="2825496" cy="256032"/>
           </a:xfrm>
           <a:prstGeom prst="rect">
             <a:avLst/>
@@ -6186,7 +6431,7 @@
               <a:buNone/>
             </a:pPr>
             <a:r>
-              <a:rPr lang="en-US" sz="950" b="1" dirty="0">
+              <a:rPr lang="en-US" sz="1300" b="1" dirty="0">
                 <a:solidFill>
                   <a:srgbClr val="0068B7"/>
                 </a:solidFill>
@@ -6196,20 +6441,20 @@
               </a:rPr>
               <a:t>Key idea</a:t>
             </a:r>
-            <a:endParaRPr lang="en-US" sz="950" dirty="0"/>
-          </a:p>
-        </p:txBody>
-      </p:sp>
-      <p:sp>
-        <p:nvSpPr>
-          <p:cNvPr id="13" name="Text 11"/>
-          <p:cNvSpPr/>
-          <p:nvPr/>
-        </p:nvSpPr>
-        <p:spPr>
-          <a:xfrm>
-            <a:off x="8074152" y="1856232"/>
-            <a:ext cx="2825496" cy="1261872"/>
+            <a:endParaRPr lang="en-US" sz="1300" dirty="0"/>
+          </a:p>
+        </p:txBody>
+      </p:sp>
+      <p:sp>
+        <p:nvSpPr>
+          <p:cNvPr id="14" name="Text 12"/>
+          <p:cNvSpPr/>
+          <p:nvPr/>
+        </p:nvSpPr>
+        <p:spPr>
+          <a:xfrm>
+            <a:off x="8074152" y="1920240"/>
+            <a:ext cx="2825496" cy="1188720"/>
           </a:xfrm>
           <a:prstGeom prst="rect">
             <a:avLst/>
@@ -6227,7 +6472,7 @@
               <a:buNone/>
             </a:pPr>
             <a:r>
-              <a:rPr lang="en-US" sz="1250" dirty="0">
+              <a:rPr lang="en-US" sz="1550" dirty="0">
                 <a:solidFill>
                   <a:srgbClr val="17364A"/>
                 </a:solidFill>
@@ -6237,13 +6482,13 @@
               </a:rPr>
               <a:t>Create a one-page model communication brief.</a:t>
             </a:r>
-            <a:endParaRPr lang="en-US" sz="1250" dirty="0"/>
-          </a:p>
-        </p:txBody>
-      </p:sp>
-      <p:sp>
-        <p:nvSpPr>
-          <p:cNvPr id="14" name="Shape 12"/>
+            <a:endParaRPr lang="en-US" sz="1550" dirty="0"/>
+          </a:p>
+        </p:txBody>
+      </p:sp>
+      <p:sp>
+        <p:nvSpPr>
+          <p:cNvPr id="15" name="Shape 13"/>
           <p:cNvSpPr/>
           <p:nvPr/>
         </p:nvSpPr>
@@ -6270,14 +6515,14 @@
       </p:sp>
       <p:sp>
         <p:nvSpPr>
-          <p:cNvPr id="15" name="Text 13"/>
+          <p:cNvPr id="16" name="Text 14"/>
           <p:cNvSpPr/>
           <p:nvPr/>
         </p:nvSpPr>
         <p:spPr>
           <a:xfrm>
             <a:off x="8074152" y="3666744"/>
-            <a:ext cx="2825496" cy="201168"/>
+            <a:ext cx="2825496" cy="256032"/>
           </a:xfrm>
           <a:prstGeom prst="rect">
             <a:avLst/>
@@ -6293,7 +6538,7 @@
               <a:buNone/>
             </a:pPr>
             <a:r>
-              <a:rPr lang="en-US" sz="950" b="1" dirty="0">
+              <a:rPr lang="en-US" sz="1300" b="1" dirty="0">
                 <a:solidFill>
                   <a:srgbClr val="0068B7"/>
                 </a:solidFill>
@@ -6303,20 +6548,20 @@
               </a:rPr>
               <a:t>Use this for</a:t>
             </a:r>
-            <a:endParaRPr lang="en-US" sz="950" dirty="0"/>
-          </a:p>
-        </p:txBody>
-      </p:sp>
-      <p:sp>
-        <p:nvSpPr>
-          <p:cNvPr id="16" name="Text 14"/>
-          <p:cNvSpPr/>
-          <p:nvPr/>
-        </p:nvSpPr>
-        <p:spPr>
-          <a:xfrm>
-            <a:off x="8074152" y="3959352"/>
-            <a:ext cx="2825496" cy="1170432"/>
+            <a:endParaRPr lang="en-US" sz="1300" dirty="0"/>
+          </a:p>
+        </p:txBody>
+      </p:sp>
+      <p:sp>
+        <p:nvSpPr>
+          <p:cNvPr id="17" name="Text 15"/>
+          <p:cNvSpPr/>
+          <p:nvPr/>
+        </p:nvSpPr>
+        <p:spPr>
+          <a:xfrm>
+            <a:off x="8074152" y="4023360"/>
+            <a:ext cx="2825496" cy="1097280"/>
           </a:xfrm>
           <a:prstGeom prst="rect">
             <a:avLst/>
@@ -6334,7 +6579,7 @@
               <a:buNone/>
             </a:pPr>
             <a:r>
-              <a:rPr lang="en-US" sz="1250" dirty="0">
+              <a:rPr lang="en-US" sz="1550" dirty="0">
                 <a:solidFill>
                   <a:srgbClr val="17364A"/>
                 </a:solidFill>
@@ -6344,7 +6589,7 @@
               </a:rPr>
               <a:t>Connect the concept to public health decisions, safeguards, documentation, or implementation work.</a:t>
             </a:r>
-            <a:endParaRPr lang="en-US" sz="1250" dirty="0"/>
+            <a:endParaRPr lang="en-US" sz="1550" dirty="0"/>
           </a:p>
         </p:txBody>
       </p:sp>
@@ -6541,7 +6786,7 @@
                 <a:ea typeface="Aptos" pitchFamily="34" charset="-122"/>
                 <a:cs typeface="Aptos" pitchFamily="34" charset="-120"/>
               </a:rPr>
-              <a:t>© Paula Soper</a:t>
+              <a:t>Â© Paula Soper</a:t>
             </a:r>
             <a:endParaRPr lang="en-US" sz="800" dirty="0"/>
           </a:p>
@@ -6549,7 +6794,46 @@
       </p:sp>
       <p:sp>
         <p:nvSpPr>
-          <p:cNvPr id="7" name="Shape 5"/>
+          <p:cNvPr id="7" name="Text 5"/>
+          <p:cNvSpPr/>
+          <p:nvPr/>
+        </p:nvSpPr>
+        <p:spPr>
+          <a:xfrm>
+            <a:off x="11137392" y="6510528"/>
+            <a:ext cx="411480" cy="201168"/>
+          </a:xfrm>
+          <a:prstGeom prst="rect">
+            <a:avLst/>
+          </a:prstGeom>
+          <a:noFill/>
+          <a:ln/>
+        </p:spPr>
+        <p:txBody>
+          <a:bodyPr wrap="square" lIns="0" tIns="0" rIns="0" bIns="0" rtlCol="0" anchor="ctr"/>
+          <a:lstStyle/>
+          <a:p>
+            <a:pPr algn="r" indent="0" marL="0">
+              <a:buNone/>
+            </a:pPr>
+            <a:r>
+              <a:rPr lang="en-US" sz="900" dirty="0">
+                <a:solidFill>
+                  <a:srgbClr val="5F7181"/>
+                </a:solidFill>
+                <a:latin typeface="Aptos" pitchFamily="34" charset="0"/>
+                <a:ea typeface="Aptos" pitchFamily="34" charset="-122"/>
+                <a:cs typeface="Aptos" pitchFamily="34" charset="-120"/>
+              </a:rPr>
+              <a:t>16</a:t>
+            </a:r>
+            <a:endParaRPr lang="en-US" sz="900" dirty="0"/>
+          </a:p>
+        </p:txBody>
+      </p:sp>
+      <p:sp>
+        <p:nvSpPr>
+          <p:cNvPr id="8" name="Shape 6"/>
           <p:cNvSpPr/>
           <p:nvPr/>
         </p:nvSpPr>
@@ -6574,7 +6858,7 @@
       </p:sp>
       <p:sp>
         <p:nvSpPr>
-          <p:cNvPr id="8" name="Text 6"/>
+          <p:cNvPr id="9" name="Text 7"/>
           <p:cNvSpPr/>
           <p:nvPr/>
         </p:nvSpPr>
@@ -6613,14 +6897,14 @@
       </p:sp>
       <p:sp>
         <p:nvSpPr>
-          <p:cNvPr id="9" name="Text 7"/>
+          <p:cNvPr id="10" name="Text 8"/>
           <p:cNvSpPr/>
           <p:nvPr/>
         </p:nvSpPr>
         <p:spPr>
           <a:xfrm>
             <a:off x="640080" y="621792"/>
-            <a:ext cx="10881360" cy="566928"/>
+            <a:ext cx="10881360" cy="713232"/>
           </a:xfrm>
           <a:prstGeom prst="rect">
             <a:avLst/>
@@ -6638,7 +6922,7 @@
               <a:buNone/>
             </a:pPr>
             <a:r>
-              <a:rPr lang="en-US" sz="2700" b="1" dirty="0">
+              <a:rPr lang="en-US" sz="3400" b="1" dirty="0">
                 <a:solidFill>
                   <a:srgbClr val="003A63"/>
                 </a:solidFill>
@@ -6648,20 +6932,20 @@
               </a:rPr>
               <a:t>Expected Artifact or Evidence</a:t>
             </a:r>
-            <a:endParaRPr lang="en-US" sz="2700" dirty="0"/>
-          </a:p>
-        </p:txBody>
-      </p:sp>
-      <p:sp>
-        <p:nvSpPr>
-          <p:cNvPr id="10" name="Text 8"/>
-          <p:cNvSpPr/>
-          <p:nvPr/>
-        </p:nvSpPr>
-        <p:spPr>
-          <a:xfrm>
-            <a:off x="868680" y="1417320"/>
-            <a:ext cx="6675120" cy="4434840"/>
+            <a:endParaRPr lang="en-US" sz="3400" dirty="0"/>
+          </a:p>
+        </p:txBody>
+      </p:sp>
+      <p:sp>
+        <p:nvSpPr>
+          <p:cNvPr id="11" name="Text 9"/>
+          <p:cNvSpPr/>
+          <p:nvPr/>
+        </p:nvSpPr>
+        <p:spPr>
+          <a:xfrm>
+            <a:off x="868680" y="1508760"/>
+            <a:ext cx="6537960" cy="4160520"/>
           </a:xfrm>
           <a:prstGeom prst="rect">
             <a:avLst/>
@@ -6676,7 +6960,7 @@
           <a:lstStyle/>
           <a:p>
             <a:r>
-              <a:rPr lang="en-US" sz="1700" dirty="0">
+              <a:rPr lang="en-US" sz="2100" dirty="0">
                 <a:solidFill>
                   <a:srgbClr val="17364A"/>
                 </a:solidFill>
@@ -6686,11 +6970,11 @@
               </a:rPr>
               <a:t>Model communication brief</a:t>
             </a:r>
-            <a:endParaRPr lang="en-US" sz="1700" dirty="0"/>
-          </a:p>
-          <a:p>
-            <a:r>
-              <a:rPr lang="en-US" sz="1700" dirty="0">
+            <a:endParaRPr lang="en-US" sz="2100" dirty="0"/>
+          </a:p>
+          <a:p>
+            <a:r>
+              <a:rPr lang="en-US" sz="2100" dirty="0">
                 <a:solidFill>
                   <a:srgbClr val="17364A"/>
                 </a:solidFill>
@@ -6700,11 +6984,11 @@
               </a:rPr>
               <a:t>Plain-language uncertainty statement</a:t>
             </a:r>
-            <a:endParaRPr lang="en-US" sz="1700" dirty="0"/>
-          </a:p>
-          <a:p>
-            <a:r>
-              <a:rPr lang="en-US" sz="1700" dirty="0">
+            <a:endParaRPr lang="en-US" sz="2100" dirty="0"/>
+          </a:p>
+          <a:p>
+            <a:r>
+              <a:rPr lang="en-US" sz="2100" dirty="0">
                 <a:solidFill>
                   <a:srgbClr val="17364A"/>
                 </a:solidFill>
@@ -6714,13 +6998,13 @@
               </a:rPr>
               <a:t>Subgroup caveat if relevant</a:t>
             </a:r>
-            <a:endParaRPr lang="en-US" sz="1700" dirty="0"/>
-          </a:p>
-        </p:txBody>
-      </p:sp>
-      <p:sp>
-        <p:nvSpPr>
-          <p:cNvPr id="11" name="Shape 9"/>
+            <a:endParaRPr lang="en-US" sz="2100" dirty="0"/>
+          </a:p>
+        </p:txBody>
+      </p:sp>
+      <p:sp>
+        <p:nvSpPr>
+          <p:cNvPr id="12" name="Shape 10"/>
           <p:cNvSpPr/>
           <p:nvPr/>
         </p:nvSpPr>
@@ -6747,14 +7031,14 @@
       </p:sp>
       <p:sp>
         <p:nvSpPr>
-          <p:cNvPr id="12" name="Text 10"/>
+          <p:cNvPr id="13" name="Text 11"/>
           <p:cNvSpPr/>
           <p:nvPr/>
         </p:nvSpPr>
         <p:spPr>
           <a:xfrm>
             <a:off x="8074152" y="1563624"/>
-            <a:ext cx="2825496" cy="201168"/>
+            <a:ext cx="2825496" cy="256032"/>
           </a:xfrm>
           <a:prstGeom prst="rect">
             <a:avLst/>
@@ -6770,7 +7054,7 @@
               <a:buNone/>
             </a:pPr>
             <a:r>
-              <a:rPr lang="en-US" sz="950" b="1" dirty="0">
+              <a:rPr lang="en-US" sz="1300" b="1" dirty="0">
                 <a:solidFill>
                   <a:srgbClr val="0068B7"/>
                 </a:solidFill>
@@ -6780,20 +7064,20 @@
               </a:rPr>
               <a:t>Key idea</a:t>
             </a:r>
-            <a:endParaRPr lang="en-US" sz="950" dirty="0"/>
-          </a:p>
-        </p:txBody>
-      </p:sp>
-      <p:sp>
-        <p:nvSpPr>
-          <p:cNvPr id="13" name="Text 11"/>
-          <p:cNvSpPr/>
-          <p:nvPr/>
-        </p:nvSpPr>
-        <p:spPr>
-          <a:xfrm>
-            <a:off x="8074152" y="1856232"/>
-            <a:ext cx="2825496" cy="1261872"/>
+            <a:endParaRPr lang="en-US" sz="1300" dirty="0"/>
+          </a:p>
+        </p:txBody>
+      </p:sp>
+      <p:sp>
+        <p:nvSpPr>
+          <p:cNvPr id="14" name="Text 12"/>
+          <p:cNvSpPr/>
+          <p:nvPr/>
+        </p:nvSpPr>
+        <p:spPr>
+          <a:xfrm>
+            <a:off x="8074152" y="1920240"/>
+            <a:ext cx="2825496" cy="1188720"/>
           </a:xfrm>
           <a:prstGeom prst="rect">
             <a:avLst/>
@@ -6811,7 +7095,7 @@
               <a:buNone/>
             </a:pPr>
             <a:r>
-              <a:rPr lang="en-US" sz="1250" dirty="0">
+              <a:rPr lang="en-US" sz="1550" dirty="0">
                 <a:solidFill>
                   <a:srgbClr val="17364A"/>
                 </a:solidFill>
@@ -6821,13 +7105,13 @@
               </a:rPr>
               <a:t>Model communication brief</a:t>
             </a:r>
-            <a:endParaRPr lang="en-US" sz="1250" dirty="0"/>
-          </a:p>
-        </p:txBody>
-      </p:sp>
-      <p:sp>
-        <p:nvSpPr>
-          <p:cNvPr id="14" name="Shape 12"/>
+            <a:endParaRPr lang="en-US" sz="1550" dirty="0"/>
+          </a:p>
+        </p:txBody>
+      </p:sp>
+      <p:sp>
+        <p:nvSpPr>
+          <p:cNvPr id="15" name="Shape 13"/>
           <p:cNvSpPr/>
           <p:nvPr/>
         </p:nvSpPr>
@@ -6854,14 +7138,14 @@
       </p:sp>
       <p:sp>
         <p:nvSpPr>
-          <p:cNvPr id="15" name="Text 13"/>
+          <p:cNvPr id="16" name="Text 14"/>
           <p:cNvSpPr/>
           <p:nvPr/>
         </p:nvSpPr>
         <p:spPr>
           <a:xfrm>
             <a:off x="8074152" y="3666744"/>
-            <a:ext cx="2825496" cy="201168"/>
+            <a:ext cx="2825496" cy="256032"/>
           </a:xfrm>
           <a:prstGeom prst="rect">
             <a:avLst/>
@@ -6877,7 +7161,7 @@
               <a:buNone/>
             </a:pPr>
             <a:r>
-              <a:rPr lang="en-US" sz="950" b="1" dirty="0">
+              <a:rPr lang="en-US" sz="1300" b="1" dirty="0">
                 <a:solidFill>
                   <a:srgbClr val="0068B7"/>
                 </a:solidFill>
@@ -6887,20 +7171,20 @@
               </a:rPr>
               <a:t>Use this for</a:t>
             </a:r>
-            <a:endParaRPr lang="en-US" sz="950" dirty="0"/>
-          </a:p>
-        </p:txBody>
-      </p:sp>
-      <p:sp>
-        <p:nvSpPr>
-          <p:cNvPr id="16" name="Text 14"/>
-          <p:cNvSpPr/>
-          <p:nvPr/>
-        </p:nvSpPr>
-        <p:spPr>
-          <a:xfrm>
-            <a:off x="8074152" y="3959352"/>
-            <a:ext cx="2825496" cy="1170432"/>
+            <a:endParaRPr lang="en-US" sz="1300" dirty="0"/>
+          </a:p>
+        </p:txBody>
+      </p:sp>
+      <p:sp>
+        <p:nvSpPr>
+          <p:cNvPr id="17" name="Text 15"/>
+          <p:cNvSpPr/>
+          <p:nvPr/>
+        </p:nvSpPr>
+        <p:spPr>
+          <a:xfrm>
+            <a:off x="8074152" y="4023360"/>
+            <a:ext cx="2825496" cy="1097280"/>
           </a:xfrm>
           <a:prstGeom prst="rect">
             <a:avLst/>
@@ -6918,7 +7202,7 @@
               <a:buNone/>
             </a:pPr>
             <a:r>
-              <a:rPr lang="en-US" sz="1250" dirty="0">
+              <a:rPr lang="en-US" sz="1550" dirty="0">
                 <a:solidFill>
                   <a:srgbClr val="17364A"/>
                 </a:solidFill>
@@ -6928,7 +7212,7 @@
               </a:rPr>
               <a:t>Connect the concept to public health decisions, safeguards, documentation, or implementation work.</a:t>
             </a:r>
-            <a:endParaRPr lang="en-US" sz="1250" dirty="0"/>
+            <a:endParaRPr lang="en-US" sz="1550" dirty="0"/>
           </a:p>
         </p:txBody>
       </p:sp>
@@ -7125,7 +7409,7 @@
                 <a:ea typeface="Aptos" pitchFamily="34" charset="-122"/>
                 <a:cs typeface="Aptos" pitchFamily="34" charset="-120"/>
               </a:rPr>
-              <a:t>© Paula Soper</a:t>
+              <a:t>Â© Paula Soper</a:t>
             </a:r>
             <a:endParaRPr lang="en-US" sz="800" dirty="0"/>
           </a:p>
@@ -7139,8 +7423,47 @@
         </p:nvSpPr>
         <p:spPr>
           <a:xfrm>
+            <a:off x="11137392" y="6510528"/>
+            <a:ext cx="411480" cy="201168"/>
+          </a:xfrm>
+          <a:prstGeom prst="rect">
+            <a:avLst/>
+          </a:prstGeom>
+          <a:noFill/>
+          <a:ln/>
+        </p:spPr>
+        <p:txBody>
+          <a:bodyPr wrap="square" lIns="0" tIns="0" rIns="0" bIns="0" rtlCol="0" anchor="ctr"/>
+          <a:lstStyle/>
+          <a:p>
+            <a:pPr algn="r" indent="0" marL="0">
+              <a:buNone/>
+            </a:pPr>
+            <a:r>
+              <a:rPr lang="en-US" sz="900" dirty="0">
+                <a:solidFill>
+                  <a:srgbClr val="5F7181"/>
+                </a:solidFill>
+                <a:latin typeface="Aptos" pitchFamily="34" charset="0"/>
+                <a:ea typeface="Aptos" pitchFamily="34" charset="-122"/>
+                <a:cs typeface="Aptos" pitchFamily="34" charset="-120"/>
+              </a:rPr>
+              <a:t>17</a:t>
+            </a:r>
+            <a:endParaRPr lang="en-US" sz="900" dirty="0"/>
+          </a:p>
+        </p:txBody>
+      </p:sp>
+      <p:sp>
+        <p:nvSpPr>
+          <p:cNvPr id="8" name="Text 6"/>
+          <p:cNvSpPr/>
+          <p:nvPr/>
+        </p:nvSpPr>
+        <p:spPr>
+          <a:xfrm>
             <a:off x="640080" y="658368"/>
-            <a:ext cx="10881360" cy="566928"/>
+            <a:ext cx="10881360" cy="713232"/>
           </a:xfrm>
           <a:prstGeom prst="rect">
             <a:avLst/>
@@ -7158,7 +7481,7 @@
               <a:buNone/>
             </a:pPr>
             <a:r>
-              <a:rPr lang="en-US" sz="2700" b="1" dirty="0">
+              <a:rPr lang="en-US" sz="3400" b="1" dirty="0">
                 <a:solidFill>
                   <a:srgbClr val="003A63"/>
                 </a:solidFill>
@@ -7168,20 +7491,20 @@
               </a:rPr>
               <a:t>Expected Artifact or Evidence Continued</a:t>
             </a:r>
-            <a:endParaRPr lang="en-US" sz="2700" dirty="0"/>
-          </a:p>
-        </p:txBody>
-      </p:sp>
-      <p:sp>
-        <p:nvSpPr>
-          <p:cNvPr id="8" name="Text 6"/>
-          <p:cNvSpPr/>
-          <p:nvPr/>
-        </p:nvSpPr>
-        <p:spPr>
-          <a:xfrm>
-            <a:off x="868680" y="1417320"/>
-            <a:ext cx="6675120" cy="4434840"/>
+            <a:endParaRPr lang="en-US" sz="3400" dirty="0"/>
+          </a:p>
+        </p:txBody>
+      </p:sp>
+      <p:sp>
+        <p:nvSpPr>
+          <p:cNvPr id="9" name="Text 7"/>
+          <p:cNvSpPr/>
+          <p:nvPr/>
+        </p:nvSpPr>
+        <p:spPr>
+          <a:xfrm>
+            <a:off x="868680" y="1508760"/>
+            <a:ext cx="6537960" cy="4160520"/>
           </a:xfrm>
           <a:prstGeom prst="rect">
             <a:avLst/>
@@ -7196,7 +7519,7 @@
           <a:lstStyle/>
           <a:p>
             <a:r>
-              <a:rPr lang="en-US" sz="1700" dirty="0">
+              <a:rPr lang="en-US" sz="2100" dirty="0">
                 <a:solidFill>
                   <a:srgbClr val="17364A"/>
                 </a:solidFill>
@@ -7206,13 +7529,13 @@
               </a:rPr>
               <a:t>Review sign-off note</a:t>
             </a:r>
-            <a:endParaRPr lang="en-US" sz="1700" dirty="0"/>
-          </a:p>
-        </p:txBody>
-      </p:sp>
-      <p:sp>
-        <p:nvSpPr>
-          <p:cNvPr id="9" name="Shape 7"/>
+            <a:endParaRPr lang="en-US" sz="2100" dirty="0"/>
+          </a:p>
+        </p:txBody>
+      </p:sp>
+      <p:sp>
+        <p:nvSpPr>
+          <p:cNvPr id="10" name="Shape 8"/>
           <p:cNvSpPr/>
           <p:nvPr/>
         </p:nvSpPr>
@@ -7239,14 +7562,14 @@
       </p:sp>
       <p:sp>
         <p:nvSpPr>
-          <p:cNvPr id="10" name="Text 8"/>
+          <p:cNvPr id="11" name="Text 9"/>
           <p:cNvSpPr/>
           <p:nvPr/>
         </p:nvSpPr>
         <p:spPr>
           <a:xfrm>
             <a:off x="8074152" y="1563624"/>
-            <a:ext cx="2825496" cy="201168"/>
+            <a:ext cx="2825496" cy="256032"/>
           </a:xfrm>
           <a:prstGeom prst="rect">
             <a:avLst/>
@@ -7262,7 +7585,7 @@
               <a:buNone/>
             </a:pPr>
             <a:r>
-              <a:rPr lang="en-US" sz="950" b="1" dirty="0">
+              <a:rPr lang="en-US" sz="1300" b="1" dirty="0">
                 <a:solidFill>
                   <a:srgbClr val="0068B7"/>
                 </a:solidFill>
@@ -7272,20 +7595,20 @@
               </a:rPr>
               <a:t>Key idea</a:t>
             </a:r>
-            <a:endParaRPr lang="en-US" sz="950" dirty="0"/>
-          </a:p>
-        </p:txBody>
-      </p:sp>
-      <p:sp>
-        <p:nvSpPr>
-          <p:cNvPr id="11" name="Text 9"/>
-          <p:cNvSpPr/>
-          <p:nvPr/>
-        </p:nvSpPr>
-        <p:spPr>
-          <a:xfrm>
-            <a:off x="8074152" y="1856232"/>
-            <a:ext cx="2825496" cy="1261872"/>
+            <a:endParaRPr lang="en-US" sz="1300" dirty="0"/>
+          </a:p>
+        </p:txBody>
+      </p:sp>
+      <p:sp>
+        <p:nvSpPr>
+          <p:cNvPr id="12" name="Text 10"/>
+          <p:cNvSpPr/>
+          <p:nvPr/>
+        </p:nvSpPr>
+        <p:spPr>
+          <a:xfrm>
+            <a:off x="8074152" y="1920240"/>
+            <a:ext cx="2825496" cy="1188720"/>
           </a:xfrm>
           <a:prstGeom prst="rect">
             <a:avLst/>
@@ -7303,7 +7626,7 @@
               <a:buNone/>
             </a:pPr>
             <a:r>
-              <a:rPr lang="en-US" sz="1250" dirty="0">
+              <a:rPr lang="en-US" sz="1550" dirty="0">
                 <a:solidFill>
                   <a:srgbClr val="17364A"/>
                 </a:solidFill>
@@ -7313,13 +7636,13 @@
               </a:rPr>
               <a:t>Review sign-off note</a:t>
             </a:r>
-            <a:endParaRPr lang="en-US" sz="1250" dirty="0"/>
-          </a:p>
-        </p:txBody>
-      </p:sp>
-      <p:sp>
-        <p:nvSpPr>
-          <p:cNvPr id="12" name="Shape 10"/>
+            <a:endParaRPr lang="en-US" sz="1550" dirty="0"/>
+          </a:p>
+        </p:txBody>
+      </p:sp>
+      <p:sp>
+        <p:nvSpPr>
+          <p:cNvPr id="13" name="Shape 11"/>
           <p:cNvSpPr/>
           <p:nvPr/>
         </p:nvSpPr>
@@ -7346,14 +7669,14 @@
       </p:sp>
       <p:sp>
         <p:nvSpPr>
-          <p:cNvPr id="13" name="Text 11"/>
+          <p:cNvPr id="14" name="Text 12"/>
           <p:cNvSpPr/>
           <p:nvPr/>
         </p:nvSpPr>
         <p:spPr>
           <a:xfrm>
             <a:off x="8074152" y="3666744"/>
-            <a:ext cx="2825496" cy="201168"/>
+            <a:ext cx="2825496" cy="256032"/>
           </a:xfrm>
           <a:prstGeom prst="rect">
             <a:avLst/>
@@ -7369,7 +7692,7 @@
               <a:buNone/>
             </a:pPr>
             <a:r>
-              <a:rPr lang="en-US" sz="950" b="1" dirty="0">
+              <a:rPr lang="en-US" sz="1300" b="1" dirty="0">
                 <a:solidFill>
                   <a:srgbClr val="0068B7"/>
                 </a:solidFill>
@@ -7379,20 +7702,20 @@
               </a:rPr>
               <a:t>Use this for</a:t>
             </a:r>
-            <a:endParaRPr lang="en-US" sz="950" dirty="0"/>
-          </a:p>
-        </p:txBody>
-      </p:sp>
-      <p:sp>
-        <p:nvSpPr>
-          <p:cNvPr id="14" name="Text 12"/>
-          <p:cNvSpPr/>
-          <p:nvPr/>
-        </p:nvSpPr>
-        <p:spPr>
-          <a:xfrm>
-            <a:off x="8074152" y="3959352"/>
-            <a:ext cx="2825496" cy="1170432"/>
+            <a:endParaRPr lang="en-US" sz="1300" dirty="0"/>
+          </a:p>
+        </p:txBody>
+      </p:sp>
+      <p:sp>
+        <p:nvSpPr>
+          <p:cNvPr id="15" name="Text 13"/>
+          <p:cNvSpPr/>
+          <p:nvPr/>
+        </p:nvSpPr>
+        <p:spPr>
+          <a:xfrm>
+            <a:off x="8074152" y="4023360"/>
+            <a:ext cx="2825496" cy="1097280"/>
           </a:xfrm>
           <a:prstGeom prst="rect">
             <a:avLst/>
@@ -7410,7 +7733,7 @@
               <a:buNone/>
             </a:pPr>
             <a:r>
-              <a:rPr lang="en-US" sz="1250" dirty="0">
+              <a:rPr lang="en-US" sz="1550" dirty="0">
                 <a:solidFill>
                   <a:srgbClr val="17364A"/>
                 </a:solidFill>
@@ -7420,7 +7743,7 @@
               </a:rPr>
               <a:t>Connect the concept to public health decisions, safeguards, documentation, or implementation work.</a:t>
             </a:r>
-            <a:endParaRPr lang="en-US" sz="1250" dirty="0"/>
+            <a:endParaRPr lang="en-US" sz="1550" dirty="0"/>
           </a:p>
         </p:txBody>
       </p:sp>
@@ -7617,7 +7940,7 @@
                 <a:ea typeface="Aptos" pitchFamily="34" charset="-122"/>
                 <a:cs typeface="Aptos" pitchFamily="34" charset="-120"/>
               </a:rPr>
-              <a:t>© Paula Soper</a:t>
+              <a:t>Â© Paula Soper</a:t>
             </a:r>
             <a:endParaRPr lang="en-US" sz="800" dirty="0"/>
           </a:p>
@@ -7625,7 +7948,46 @@
       </p:sp>
       <p:sp>
         <p:nvSpPr>
-          <p:cNvPr id="7" name="Shape 5"/>
+          <p:cNvPr id="7" name="Text 5"/>
+          <p:cNvSpPr/>
+          <p:nvPr/>
+        </p:nvSpPr>
+        <p:spPr>
+          <a:xfrm>
+            <a:off x="11137392" y="6510528"/>
+            <a:ext cx="411480" cy="201168"/>
+          </a:xfrm>
+          <a:prstGeom prst="rect">
+            <a:avLst/>
+          </a:prstGeom>
+          <a:noFill/>
+          <a:ln/>
+        </p:spPr>
+        <p:txBody>
+          <a:bodyPr wrap="square" lIns="0" tIns="0" rIns="0" bIns="0" rtlCol="0" anchor="ctr"/>
+          <a:lstStyle/>
+          <a:p>
+            <a:pPr algn="r" indent="0" marL="0">
+              <a:buNone/>
+            </a:pPr>
+            <a:r>
+              <a:rPr lang="en-US" sz="900" dirty="0">
+                <a:solidFill>
+                  <a:srgbClr val="5F7181"/>
+                </a:solidFill>
+                <a:latin typeface="Aptos" pitchFamily="34" charset="0"/>
+                <a:ea typeface="Aptos" pitchFamily="34" charset="-122"/>
+                <a:cs typeface="Aptos" pitchFamily="34" charset="-120"/>
+              </a:rPr>
+              <a:t>18</a:t>
+            </a:r>
+            <a:endParaRPr lang="en-US" sz="900" dirty="0"/>
+          </a:p>
+        </p:txBody>
+      </p:sp>
+      <p:sp>
+        <p:nvSpPr>
+          <p:cNvPr id="8" name="Shape 6"/>
           <p:cNvSpPr/>
           <p:nvPr/>
         </p:nvSpPr>
@@ -7650,7 +8012,7 @@
       </p:sp>
       <p:sp>
         <p:nvSpPr>
-          <p:cNvPr id="8" name="Text 6"/>
+          <p:cNvPr id="9" name="Text 7"/>
           <p:cNvSpPr/>
           <p:nvPr/>
         </p:nvSpPr>
@@ -7689,14 +8051,14 @@
       </p:sp>
       <p:sp>
         <p:nvSpPr>
-          <p:cNvPr id="9" name="Text 7"/>
+          <p:cNvPr id="10" name="Text 8"/>
           <p:cNvSpPr/>
           <p:nvPr/>
         </p:nvSpPr>
         <p:spPr>
           <a:xfrm>
             <a:off x="640080" y="621792"/>
-            <a:ext cx="10881360" cy="566928"/>
+            <a:ext cx="10881360" cy="713232"/>
           </a:xfrm>
           <a:prstGeom prst="rect">
             <a:avLst/>
@@ -7714,7 +8076,7 @@
               <a:buNone/>
             </a:pPr>
             <a:r>
-              <a:rPr lang="en-US" sz="2700" b="1" dirty="0">
+              <a:rPr lang="en-US" sz="3400" b="1" dirty="0">
                 <a:solidFill>
                   <a:srgbClr val="003A63"/>
                 </a:solidFill>
@@ -7724,20 +8086,20 @@
               </a:rPr>
               <a:t>Expected Assignment</a:t>
             </a:r>
-            <a:endParaRPr lang="en-US" sz="2700" dirty="0"/>
-          </a:p>
-        </p:txBody>
-      </p:sp>
-      <p:sp>
-        <p:nvSpPr>
-          <p:cNvPr id="10" name="Text 8"/>
-          <p:cNvSpPr/>
-          <p:nvPr/>
-        </p:nvSpPr>
-        <p:spPr>
-          <a:xfrm>
-            <a:off x="868680" y="1417320"/>
-            <a:ext cx="6675120" cy="4434840"/>
+            <a:endParaRPr lang="en-US" sz="3400" dirty="0"/>
+          </a:p>
+        </p:txBody>
+      </p:sp>
+      <p:sp>
+        <p:nvSpPr>
+          <p:cNvPr id="11" name="Text 9"/>
+          <p:cNvSpPr/>
+          <p:nvPr/>
+        </p:nvSpPr>
+        <p:spPr>
+          <a:xfrm>
+            <a:off x="868680" y="1508760"/>
+            <a:ext cx="6537960" cy="4160520"/>
           </a:xfrm>
           <a:prstGeom prst="rect">
             <a:avLst/>
@@ -7752,7 +8114,7 @@
           <a:lstStyle/>
           <a:p>
             <a:r>
-              <a:rPr lang="en-US" sz="1700" dirty="0">
+              <a:rPr lang="en-US" sz="2100" dirty="0">
                 <a:solidFill>
                   <a:srgbClr val="17364A"/>
                 </a:solidFill>
@@ -7762,11 +8124,11 @@
               </a:rPr>
               <a:t>Model communication brief</a:t>
             </a:r>
-            <a:endParaRPr lang="en-US" sz="1700" dirty="0"/>
-          </a:p>
-          <a:p>
-            <a:r>
-              <a:rPr lang="en-US" sz="1700" dirty="0">
+            <a:endParaRPr lang="en-US" sz="2100" dirty="0"/>
+          </a:p>
+          <a:p>
+            <a:r>
+              <a:rPr lang="en-US" sz="2100" dirty="0">
                 <a:solidFill>
                   <a:srgbClr val="17364A"/>
                 </a:solidFill>
@@ -7776,11 +8138,11 @@
               </a:rPr>
               <a:t>Plain-language uncertainty statement</a:t>
             </a:r>
-            <a:endParaRPr lang="en-US" sz="1700" dirty="0"/>
-          </a:p>
-          <a:p>
-            <a:r>
-              <a:rPr lang="en-US" sz="1700" dirty="0">
+            <a:endParaRPr lang="en-US" sz="2100" dirty="0"/>
+          </a:p>
+          <a:p>
+            <a:r>
+              <a:rPr lang="en-US" sz="2100" dirty="0">
                 <a:solidFill>
                   <a:srgbClr val="17364A"/>
                 </a:solidFill>
@@ -7790,27 +8152,13 @@
               </a:rPr>
               <a:t>Subgroup caveat if relevant</a:t>
             </a:r>
-            <a:endParaRPr lang="en-US" sz="1700" dirty="0"/>
-          </a:p>
-          <a:p>
-            <a:r>
-              <a:rPr lang="en-US" sz="1700" dirty="0">
-                <a:solidFill>
-                  <a:srgbClr val="17364A"/>
-                </a:solidFill>
-                <a:latin typeface="Aptos" pitchFamily="34" charset="0"/>
-                <a:ea typeface="Aptos" pitchFamily="34" charset="-122"/>
-                <a:cs typeface="Aptos" pitchFamily="34" charset="-120"/>
-              </a:rPr>
-              <a:t>Review sign-off note</a:t>
-            </a:r>
-            <a:endParaRPr lang="en-US" sz="1700" dirty="0"/>
-          </a:p>
-        </p:txBody>
-      </p:sp>
-      <p:sp>
-        <p:nvSpPr>
-          <p:cNvPr id="11" name="Shape 9"/>
+            <a:endParaRPr lang="en-US" sz="2100" dirty="0"/>
+          </a:p>
+        </p:txBody>
+      </p:sp>
+      <p:sp>
+        <p:nvSpPr>
+          <p:cNvPr id="12" name="Shape 10"/>
           <p:cNvSpPr/>
           <p:nvPr/>
         </p:nvSpPr>
@@ -7837,14 +8185,14 @@
       </p:sp>
       <p:sp>
         <p:nvSpPr>
-          <p:cNvPr id="12" name="Text 10"/>
+          <p:cNvPr id="13" name="Text 11"/>
           <p:cNvSpPr/>
           <p:nvPr/>
         </p:nvSpPr>
         <p:spPr>
           <a:xfrm>
             <a:off x="8074152" y="1563624"/>
-            <a:ext cx="2825496" cy="201168"/>
+            <a:ext cx="2825496" cy="256032"/>
           </a:xfrm>
           <a:prstGeom prst="rect">
             <a:avLst/>
@@ -7860,7 +8208,7 @@
               <a:buNone/>
             </a:pPr>
             <a:r>
-              <a:rPr lang="en-US" sz="950" b="1" dirty="0">
+              <a:rPr lang="en-US" sz="1300" b="1" dirty="0">
                 <a:solidFill>
                   <a:srgbClr val="0068B7"/>
                 </a:solidFill>
@@ -7870,20 +8218,20 @@
               </a:rPr>
               <a:t>Key idea</a:t>
             </a:r>
-            <a:endParaRPr lang="en-US" sz="950" dirty="0"/>
-          </a:p>
-        </p:txBody>
-      </p:sp>
-      <p:sp>
-        <p:nvSpPr>
-          <p:cNvPr id="13" name="Text 11"/>
-          <p:cNvSpPr/>
-          <p:nvPr/>
-        </p:nvSpPr>
-        <p:spPr>
-          <a:xfrm>
-            <a:off x="8074152" y="1856232"/>
-            <a:ext cx="2825496" cy="1261872"/>
+            <a:endParaRPr lang="en-US" sz="1300" dirty="0"/>
+          </a:p>
+        </p:txBody>
+      </p:sp>
+      <p:sp>
+        <p:nvSpPr>
+          <p:cNvPr id="14" name="Text 12"/>
+          <p:cNvSpPr/>
+          <p:nvPr/>
+        </p:nvSpPr>
+        <p:spPr>
+          <a:xfrm>
+            <a:off x="8074152" y="1920240"/>
+            <a:ext cx="2825496" cy="1188720"/>
           </a:xfrm>
           <a:prstGeom prst="rect">
             <a:avLst/>
@@ -7901,7 +8249,7 @@
               <a:buNone/>
             </a:pPr>
             <a:r>
-              <a:rPr lang="en-US" sz="1250" dirty="0">
+              <a:rPr lang="en-US" sz="1550" dirty="0">
                 <a:solidFill>
                   <a:srgbClr val="17364A"/>
                 </a:solidFill>
@@ -7911,13 +8259,13 @@
               </a:rPr>
               <a:t>Model communication brief</a:t>
             </a:r>
-            <a:endParaRPr lang="en-US" sz="1250" dirty="0"/>
-          </a:p>
-        </p:txBody>
-      </p:sp>
-      <p:sp>
-        <p:nvSpPr>
-          <p:cNvPr id="14" name="Shape 12"/>
+            <a:endParaRPr lang="en-US" sz="1550" dirty="0"/>
+          </a:p>
+        </p:txBody>
+      </p:sp>
+      <p:sp>
+        <p:nvSpPr>
+          <p:cNvPr id="15" name="Shape 13"/>
           <p:cNvSpPr/>
           <p:nvPr/>
         </p:nvSpPr>
@@ -7944,14 +8292,14 @@
       </p:sp>
       <p:sp>
         <p:nvSpPr>
-          <p:cNvPr id="15" name="Text 13"/>
+          <p:cNvPr id="16" name="Text 14"/>
           <p:cNvSpPr/>
           <p:nvPr/>
         </p:nvSpPr>
         <p:spPr>
           <a:xfrm>
             <a:off x="8074152" y="3666744"/>
-            <a:ext cx="2825496" cy="201168"/>
+            <a:ext cx="2825496" cy="256032"/>
           </a:xfrm>
           <a:prstGeom prst="rect">
             <a:avLst/>
@@ -7967,7 +8315,7 @@
               <a:buNone/>
             </a:pPr>
             <a:r>
-              <a:rPr lang="en-US" sz="950" b="1" dirty="0">
+              <a:rPr lang="en-US" sz="1300" b="1" dirty="0">
                 <a:solidFill>
                   <a:srgbClr val="0068B7"/>
                 </a:solidFill>
@@ -7977,20 +8325,20 @@
               </a:rPr>
               <a:t>Use this for</a:t>
             </a:r>
-            <a:endParaRPr lang="en-US" sz="950" dirty="0"/>
-          </a:p>
-        </p:txBody>
-      </p:sp>
-      <p:sp>
-        <p:nvSpPr>
-          <p:cNvPr id="16" name="Text 14"/>
-          <p:cNvSpPr/>
-          <p:nvPr/>
-        </p:nvSpPr>
-        <p:spPr>
-          <a:xfrm>
-            <a:off x="8074152" y="3959352"/>
-            <a:ext cx="2825496" cy="1170432"/>
+            <a:endParaRPr lang="en-US" sz="1300" dirty="0"/>
+          </a:p>
+        </p:txBody>
+      </p:sp>
+      <p:sp>
+        <p:nvSpPr>
+          <p:cNvPr id="17" name="Text 15"/>
+          <p:cNvSpPr/>
+          <p:nvPr/>
+        </p:nvSpPr>
+        <p:spPr>
+          <a:xfrm>
+            <a:off x="8074152" y="4023360"/>
+            <a:ext cx="2825496" cy="1097280"/>
           </a:xfrm>
           <a:prstGeom prst="rect">
             <a:avLst/>
@@ -8008,7 +8356,7 @@
               <a:buNone/>
             </a:pPr>
             <a:r>
-              <a:rPr lang="en-US" sz="1250" dirty="0">
+              <a:rPr lang="en-US" sz="1550" dirty="0">
                 <a:solidFill>
                   <a:srgbClr val="17364A"/>
                 </a:solidFill>
@@ -8018,7 +8366,7 @@
               </a:rPr>
               <a:t>Connect the concept to public health decisions, safeguards, documentation, or implementation work.</a:t>
             </a:r>
-            <a:endParaRPr lang="en-US" sz="1250" dirty="0"/>
+            <a:endParaRPr lang="en-US" sz="1550" dirty="0"/>
           </a:p>
         </p:txBody>
       </p:sp>
@@ -8215,7 +8563,7 @@
                 <a:ea typeface="Aptos" pitchFamily="34" charset="-122"/>
                 <a:cs typeface="Aptos" pitchFamily="34" charset="-120"/>
               </a:rPr>
-              <a:t>© Paula Soper</a:t>
+              <a:t>Â© Paula Soper</a:t>
             </a:r>
             <a:endParaRPr lang="en-US" sz="800" dirty="0"/>
           </a:p>
@@ -8223,7 +8571,46 @@
       </p:sp>
       <p:sp>
         <p:nvSpPr>
-          <p:cNvPr id="7" name="Shape 5"/>
+          <p:cNvPr id="7" name="Text 5"/>
+          <p:cNvSpPr/>
+          <p:nvPr/>
+        </p:nvSpPr>
+        <p:spPr>
+          <a:xfrm>
+            <a:off x="11137392" y="6510528"/>
+            <a:ext cx="411480" cy="201168"/>
+          </a:xfrm>
+          <a:prstGeom prst="rect">
+            <a:avLst/>
+          </a:prstGeom>
+          <a:noFill/>
+          <a:ln/>
+        </p:spPr>
+        <p:txBody>
+          <a:bodyPr wrap="square" lIns="0" tIns="0" rIns="0" bIns="0" rtlCol="0" anchor="ctr"/>
+          <a:lstStyle/>
+          <a:p>
+            <a:pPr algn="r" indent="0" marL="0">
+              <a:buNone/>
+            </a:pPr>
+            <a:r>
+              <a:rPr lang="en-US" sz="900" dirty="0">
+                <a:solidFill>
+                  <a:srgbClr val="5F7181"/>
+                </a:solidFill>
+                <a:latin typeface="Aptos" pitchFamily="34" charset="0"/>
+                <a:ea typeface="Aptos" pitchFamily="34" charset="-122"/>
+                <a:cs typeface="Aptos" pitchFamily="34" charset="-120"/>
+              </a:rPr>
+              <a:t>19</a:t>
+            </a:r>
+            <a:endParaRPr lang="en-US" sz="900" dirty="0"/>
+          </a:p>
+        </p:txBody>
+      </p:sp>
+      <p:sp>
+        <p:nvSpPr>
+          <p:cNvPr id="8" name="Shape 6"/>
           <p:cNvSpPr/>
           <p:nvPr/>
         </p:nvSpPr>
@@ -8248,7 +8635,7 @@
       </p:sp>
       <p:sp>
         <p:nvSpPr>
-          <p:cNvPr id="8" name="Text 6"/>
+          <p:cNvPr id="9" name="Text 7"/>
           <p:cNvSpPr/>
           <p:nvPr/>
         </p:nvSpPr>
@@ -8287,14 +8674,14 @@
       </p:sp>
       <p:sp>
         <p:nvSpPr>
-          <p:cNvPr id="9" name="Text 7"/>
+          <p:cNvPr id="10" name="Text 8"/>
           <p:cNvSpPr/>
           <p:nvPr/>
         </p:nvSpPr>
         <p:spPr>
           <a:xfrm>
             <a:off x="640080" y="621792"/>
-            <a:ext cx="10881360" cy="566928"/>
+            <a:ext cx="10881360" cy="713232"/>
           </a:xfrm>
           <a:prstGeom prst="rect">
             <a:avLst/>
@@ -8312,7 +8699,7 @@
               <a:buNone/>
             </a:pPr>
             <a:r>
-              <a:rPr lang="en-US" sz="2700" b="1" dirty="0">
+              <a:rPr lang="en-US" sz="3400" b="1" dirty="0">
                 <a:solidFill>
                   <a:srgbClr val="003A63"/>
                 </a:solidFill>
@@ -8322,20 +8709,20 @@
               </a:rPr>
               <a:t>Knowledge Check</a:t>
             </a:r>
-            <a:endParaRPr lang="en-US" sz="2700" dirty="0"/>
-          </a:p>
-        </p:txBody>
-      </p:sp>
-      <p:sp>
-        <p:nvSpPr>
-          <p:cNvPr id="10" name="Text 8"/>
-          <p:cNvSpPr/>
-          <p:nvPr/>
-        </p:nvSpPr>
-        <p:spPr>
-          <a:xfrm>
-            <a:off x="868680" y="1417320"/>
-            <a:ext cx="6675120" cy="4434840"/>
+            <a:endParaRPr lang="en-US" sz="3400" dirty="0"/>
+          </a:p>
+        </p:txBody>
+      </p:sp>
+      <p:sp>
+        <p:nvSpPr>
+          <p:cNvPr id="11" name="Text 9"/>
+          <p:cNvSpPr/>
+          <p:nvPr/>
+        </p:nvSpPr>
+        <p:spPr>
+          <a:xfrm>
+            <a:off x="868680" y="1508760"/>
+            <a:ext cx="6537960" cy="4160520"/>
           </a:xfrm>
           <a:prstGeom prst="rect">
             <a:avLst/>
@@ -8350,7 +8737,7 @@
           <a:lstStyle/>
           <a:p>
             <a:r>
-              <a:rPr lang="en-US" sz="1700" dirty="0">
+              <a:rPr lang="en-US" sz="2100" dirty="0">
                 <a:solidFill>
                   <a:srgbClr val="17364A"/>
                 </a:solidFill>
@@ -8360,11 +8747,11 @@
               </a:rPr>
               <a:t>1. What is the best reason to communicate uncertainty with model results?</a:t>
             </a:r>
-            <a:endParaRPr lang="en-US" sz="1700" dirty="0"/>
-          </a:p>
-          <a:p>
-            <a:r>
-              <a:rPr lang="en-US" sz="1700" dirty="0">
+            <a:endParaRPr lang="en-US" sz="2100" dirty="0"/>
+          </a:p>
+          <a:p>
+            <a:r>
+              <a:rPr lang="en-US" sz="2100" dirty="0">
                 <a:solidFill>
                   <a:srgbClr val="17364A"/>
                 </a:solidFill>
@@ -8374,11 +8761,11 @@
               </a:rPr>
               <a:t>2. What is the best reason to assign an accountability owner?</a:t>
             </a:r>
-            <a:endParaRPr lang="en-US" sz="1700" dirty="0"/>
-          </a:p>
-          <a:p>
-            <a:r>
-              <a:rPr lang="en-US" sz="1700" dirty="0">
+            <a:endParaRPr lang="en-US" sz="2100" dirty="0"/>
+          </a:p>
+          <a:p>
+            <a:r>
+              <a:rPr lang="en-US" sz="2100" dirty="0">
                 <a:solidFill>
                   <a:srgbClr val="17364A"/>
                 </a:solidFill>
@@ -8388,27 +8775,13 @@
               </a:rPr>
               <a:t>3. When should an AI-supported workflow be escalated for review?</a:t>
             </a:r>
-            <a:endParaRPr lang="en-US" sz="1700" dirty="0"/>
-          </a:p>
-          <a:p>
-            <a:r>
-              <a:rPr lang="en-US" sz="1700" dirty="0">
-                <a:solidFill>
-                  <a:srgbClr val="17364A"/>
-                </a:solidFill>
-                <a:latin typeface="Aptos" pitchFamily="34" charset="0"/>
-                <a:ea typeface="Aptos" pitchFamily="34" charset="-122"/>
-                <a:cs typeface="Aptos" pitchFamily="34" charset="-120"/>
-              </a:rPr>
-              <a:t>4. Which practice best supports public accountability?</a:t>
-            </a:r>
-            <a:endParaRPr lang="en-US" sz="1700" dirty="0"/>
-          </a:p>
-        </p:txBody>
-      </p:sp>
-      <p:sp>
-        <p:nvSpPr>
-          <p:cNvPr id="11" name="Shape 9"/>
+            <a:endParaRPr lang="en-US" sz="2100" dirty="0"/>
+          </a:p>
+        </p:txBody>
+      </p:sp>
+      <p:sp>
+        <p:nvSpPr>
+          <p:cNvPr id="12" name="Shape 10"/>
           <p:cNvSpPr/>
           <p:nvPr/>
         </p:nvSpPr>
@@ -8435,14 +8808,14 @@
       </p:sp>
       <p:sp>
         <p:nvSpPr>
-          <p:cNvPr id="12" name="Text 10"/>
+          <p:cNvPr id="13" name="Text 11"/>
           <p:cNvSpPr/>
           <p:nvPr/>
         </p:nvSpPr>
         <p:spPr>
           <a:xfrm>
             <a:off x="8074152" y="1563624"/>
-            <a:ext cx="2825496" cy="201168"/>
+            <a:ext cx="2825496" cy="256032"/>
           </a:xfrm>
           <a:prstGeom prst="rect">
             <a:avLst/>
@@ -8458,7 +8831,7 @@
               <a:buNone/>
             </a:pPr>
             <a:r>
-              <a:rPr lang="en-US" sz="950" b="1" dirty="0">
+              <a:rPr lang="en-US" sz="1300" b="1" dirty="0">
                 <a:solidFill>
                   <a:srgbClr val="0068B7"/>
                 </a:solidFill>
@@ -8468,20 +8841,20 @@
               </a:rPr>
               <a:t>Key idea</a:t>
             </a:r>
-            <a:endParaRPr lang="en-US" sz="950" dirty="0"/>
-          </a:p>
-        </p:txBody>
-      </p:sp>
-      <p:sp>
-        <p:nvSpPr>
-          <p:cNvPr id="13" name="Text 11"/>
-          <p:cNvSpPr/>
-          <p:nvPr/>
-        </p:nvSpPr>
-        <p:spPr>
-          <a:xfrm>
-            <a:off x="8074152" y="1856232"/>
-            <a:ext cx="2825496" cy="1261872"/>
+            <a:endParaRPr lang="en-US" sz="1300" dirty="0"/>
+          </a:p>
+        </p:txBody>
+      </p:sp>
+      <p:sp>
+        <p:nvSpPr>
+          <p:cNvPr id="14" name="Text 12"/>
+          <p:cNvSpPr/>
+          <p:nvPr/>
+        </p:nvSpPr>
+        <p:spPr>
+          <a:xfrm>
+            <a:off x="8074152" y="1920240"/>
+            <a:ext cx="2825496" cy="1188720"/>
           </a:xfrm>
           <a:prstGeom prst="rect">
             <a:avLst/>
@@ -8499,7 +8872,7 @@
               <a:buNone/>
             </a:pPr>
             <a:r>
-              <a:rPr lang="en-US" sz="1250" dirty="0">
+              <a:rPr lang="en-US" sz="1550" dirty="0">
                 <a:solidFill>
                   <a:srgbClr val="17364A"/>
                 </a:solidFill>
@@ -8509,13 +8882,13 @@
               </a:rPr>
               <a:t>1. What is the best reason to communicate uncertainty with model results?</a:t>
             </a:r>
-            <a:endParaRPr lang="en-US" sz="1250" dirty="0"/>
-          </a:p>
-        </p:txBody>
-      </p:sp>
-      <p:sp>
-        <p:nvSpPr>
-          <p:cNvPr id="14" name="Shape 12"/>
+            <a:endParaRPr lang="en-US" sz="1550" dirty="0"/>
+          </a:p>
+        </p:txBody>
+      </p:sp>
+      <p:sp>
+        <p:nvSpPr>
+          <p:cNvPr id="15" name="Shape 13"/>
           <p:cNvSpPr/>
           <p:nvPr/>
         </p:nvSpPr>
@@ -8542,14 +8915,14 @@
       </p:sp>
       <p:sp>
         <p:nvSpPr>
-          <p:cNvPr id="15" name="Text 13"/>
+          <p:cNvPr id="16" name="Text 14"/>
           <p:cNvSpPr/>
           <p:nvPr/>
         </p:nvSpPr>
         <p:spPr>
           <a:xfrm>
             <a:off x="8074152" y="3666744"/>
-            <a:ext cx="2825496" cy="201168"/>
+            <a:ext cx="2825496" cy="256032"/>
           </a:xfrm>
           <a:prstGeom prst="rect">
             <a:avLst/>
@@ -8565,7 +8938,7 @@
               <a:buNone/>
             </a:pPr>
             <a:r>
-              <a:rPr lang="en-US" sz="950" b="1" dirty="0">
+              <a:rPr lang="en-US" sz="1300" b="1" dirty="0">
                 <a:solidFill>
                   <a:srgbClr val="0068B7"/>
                 </a:solidFill>
@@ -8575,20 +8948,20 @@
               </a:rPr>
               <a:t>Use this for</a:t>
             </a:r>
-            <a:endParaRPr lang="en-US" sz="950" dirty="0"/>
-          </a:p>
-        </p:txBody>
-      </p:sp>
-      <p:sp>
-        <p:nvSpPr>
-          <p:cNvPr id="16" name="Text 14"/>
-          <p:cNvSpPr/>
-          <p:nvPr/>
-        </p:nvSpPr>
-        <p:spPr>
-          <a:xfrm>
-            <a:off x="8074152" y="3959352"/>
-            <a:ext cx="2825496" cy="1170432"/>
+            <a:endParaRPr lang="en-US" sz="1300" dirty="0"/>
+          </a:p>
+        </p:txBody>
+      </p:sp>
+      <p:sp>
+        <p:nvSpPr>
+          <p:cNvPr id="17" name="Text 15"/>
+          <p:cNvSpPr/>
+          <p:nvPr/>
+        </p:nvSpPr>
+        <p:spPr>
+          <a:xfrm>
+            <a:off x="8074152" y="4023360"/>
+            <a:ext cx="2825496" cy="1097280"/>
           </a:xfrm>
           <a:prstGeom prst="rect">
             <a:avLst/>
@@ -8606,7 +8979,7 @@
               <a:buNone/>
             </a:pPr>
             <a:r>
-              <a:rPr lang="en-US" sz="1250" dirty="0">
+              <a:rPr lang="en-US" sz="1550" dirty="0">
                 <a:solidFill>
                   <a:srgbClr val="17364A"/>
                 </a:solidFill>
@@ -8616,7 +8989,7 @@
               </a:rPr>
               <a:t>Connect the concept to public health decisions, safeguards, documentation, or implementation work.</a:t>
             </a:r>
-            <a:endParaRPr lang="en-US" sz="1250" dirty="0"/>
+            <a:endParaRPr lang="en-US" sz="1550" dirty="0"/>
           </a:p>
         </p:txBody>
       </p:sp>
@@ -8813,7 +9186,7 @@
                 <a:ea typeface="Aptos" pitchFamily="34" charset="-122"/>
                 <a:cs typeface="Aptos" pitchFamily="34" charset="-120"/>
               </a:rPr>
-              <a:t>© Paula Soper</a:t>
+              <a:t>Â© Paula Soper</a:t>
             </a:r>
             <a:endParaRPr lang="en-US" sz="800" dirty="0"/>
           </a:p>
@@ -8827,8 +9200,47 @@
         </p:nvSpPr>
         <p:spPr>
           <a:xfrm>
+            <a:off x="11137392" y="6510528"/>
+            <a:ext cx="411480" cy="201168"/>
+          </a:xfrm>
+          <a:prstGeom prst="rect">
+            <a:avLst/>
+          </a:prstGeom>
+          <a:noFill/>
+          <a:ln/>
+        </p:spPr>
+        <p:txBody>
+          <a:bodyPr wrap="square" lIns="0" tIns="0" rIns="0" bIns="0" rtlCol="0" anchor="ctr"/>
+          <a:lstStyle/>
+          <a:p>
+            <a:pPr algn="r" indent="0" marL="0">
+              <a:buNone/>
+            </a:pPr>
+            <a:r>
+              <a:rPr lang="en-US" sz="900" dirty="0">
+                <a:solidFill>
+                  <a:srgbClr val="5F7181"/>
+                </a:solidFill>
+                <a:latin typeface="Aptos" pitchFamily="34" charset="0"/>
+                <a:ea typeface="Aptos" pitchFamily="34" charset="-122"/>
+                <a:cs typeface="Aptos" pitchFamily="34" charset="-120"/>
+              </a:rPr>
+              <a:t>2</a:t>
+            </a:r>
+            <a:endParaRPr lang="en-US" sz="900" dirty="0"/>
+          </a:p>
+        </p:txBody>
+      </p:sp>
+      <p:sp>
+        <p:nvSpPr>
+          <p:cNvPr id="8" name="Text 6"/>
+          <p:cNvSpPr/>
+          <p:nvPr/>
+        </p:nvSpPr>
+        <p:spPr>
+          <a:xfrm>
             <a:off x="640080" y="658368"/>
-            <a:ext cx="10881360" cy="566928"/>
+            <a:ext cx="10881360" cy="713232"/>
           </a:xfrm>
           <a:prstGeom prst="rect">
             <a:avLst/>
@@ -8846,7 +9258,7 @@
               <a:buNone/>
             </a:pPr>
             <a:r>
-              <a:rPr lang="en-US" sz="2700" b="1" dirty="0">
+              <a:rPr lang="en-US" sz="3400" b="1" dirty="0">
                 <a:solidFill>
                   <a:srgbClr val="003A63"/>
                 </a:solidFill>
@@ -8856,20 +9268,20 @@
               </a:rPr>
               <a:t>What this module helps you do</a:t>
             </a:r>
-            <a:endParaRPr lang="en-US" sz="2700" dirty="0"/>
-          </a:p>
-        </p:txBody>
-      </p:sp>
-      <p:sp>
-        <p:nvSpPr>
-          <p:cNvPr id="8" name="Text 6"/>
-          <p:cNvSpPr/>
-          <p:nvPr/>
-        </p:nvSpPr>
-        <p:spPr>
-          <a:xfrm>
-            <a:off x="868680" y="1417320"/>
-            <a:ext cx="6675120" cy="3291840"/>
+            <a:endParaRPr lang="en-US" sz="3400" dirty="0"/>
+          </a:p>
+        </p:txBody>
+      </p:sp>
+      <p:sp>
+        <p:nvSpPr>
+          <p:cNvPr id="9" name="Text 7"/>
+          <p:cNvSpPr/>
+          <p:nvPr/>
+        </p:nvSpPr>
+        <p:spPr>
+          <a:xfrm>
+            <a:off x="868680" y="1508760"/>
+            <a:ext cx="6446520" cy="2926080"/>
           </a:xfrm>
           <a:prstGeom prst="rect">
             <a:avLst/>
@@ -8884,7 +9296,7 @@
           <a:lstStyle/>
           <a:p>
             <a:r>
-              <a:rPr lang="en-US" sz="1700" dirty="0">
+              <a:rPr lang="en-US" sz="2100" dirty="0">
                 <a:solidFill>
                   <a:srgbClr val="17364A"/>
                 </a:solidFill>
@@ -8892,13 +9304,13 @@
                 <a:ea typeface="Aptos" pitchFamily="34" charset="-122"/>
                 <a:cs typeface="Aptos" pitchFamily="34" charset="-120"/>
               </a:rPr>
-              <a:t>Public health staff often need to communicate AI or model results to leaders, partners, the public, or operational teams.</a:t>
-            </a:r>
-            <a:endParaRPr lang="en-US" sz="1700" dirty="0"/>
-          </a:p>
-          <a:p>
-            <a:r>
-              <a:rPr lang="en-US" sz="1700" dirty="0">
+              <a:t>Public health staff often need to communicate AI or model results to leaders, partners, the public, or.</a:t>
+            </a:r>
+            <a:endParaRPr lang="en-US" sz="2100" dirty="0"/>
+          </a:p>
+          <a:p>
+            <a:r>
+              <a:rPr lang="en-US" sz="2100" dirty="0">
                 <a:solidFill>
                   <a:srgbClr val="17364A"/>
                 </a:solidFill>
@@ -8906,13 +9318,13 @@
                 <a:ea typeface="Aptos" pitchFamily="34" charset="-122"/>
                 <a:cs typeface="Aptos" pitchFamily="34" charset="-120"/>
               </a:rPr>
-              <a:t>This module teaches learners how to explain model outputs, uncertainty, limitations, and appropriate use without overstating precision or creating.</a:t>
-            </a:r>
-            <a:endParaRPr lang="en-US" sz="1700" dirty="0"/>
-          </a:p>
-          <a:p>
-            <a:r>
-              <a:rPr lang="en-US" sz="1700" dirty="0">
+              <a:t>This module teaches learners how to explain model outputs, uncertainty, limitations, and appropriate use without.</a:t>
+            </a:r>
+            <a:endParaRPr lang="en-US" sz="2100" dirty="0"/>
+          </a:p>
+          <a:p>
+            <a:r>
+              <a:rPr lang="en-US" sz="2100" dirty="0">
                 <a:solidFill>
                   <a:srgbClr val="17364A"/>
                 </a:solidFill>
@@ -8922,27 +9334,13 @@
               </a:rPr>
               <a:t>The module focuses on practical communication.</a:t>
             </a:r>
-            <a:endParaRPr lang="en-US" sz="1700" dirty="0"/>
-          </a:p>
-          <a:p>
-            <a:r>
-              <a:rPr lang="en-US" sz="1700" dirty="0">
-                <a:solidFill>
-                  <a:srgbClr val="17364A"/>
-                </a:solidFill>
-                <a:latin typeface="Aptos" pitchFamily="34" charset="0"/>
-                <a:ea typeface="Aptos" pitchFamily="34" charset="-122"/>
-                <a:cs typeface="Aptos" pitchFamily="34" charset="-120"/>
-              </a:rPr>
-              <a:t>Learners translate metrics, confidence, caveats, and validation findings into language that supports responsible decisions.</a:t>
-            </a:r>
-            <a:endParaRPr lang="en-US" sz="1700" dirty="0"/>
-          </a:p>
-        </p:txBody>
-      </p:sp>
-      <p:sp>
-        <p:nvSpPr>
-          <p:cNvPr id="9" name="Shape 7"/>
+            <a:endParaRPr lang="en-US" sz="2100" dirty="0"/>
+          </a:p>
+        </p:txBody>
+      </p:sp>
+      <p:sp>
+        <p:nvSpPr>
+          <p:cNvPr id="10" name="Shape 8"/>
           <p:cNvSpPr/>
           <p:nvPr/>
         </p:nvSpPr>
@@ -8969,14 +9367,14 @@
       </p:sp>
       <p:sp>
         <p:nvSpPr>
-          <p:cNvPr id="10" name="Text 8"/>
+          <p:cNvPr id="11" name="Text 9"/>
           <p:cNvSpPr/>
           <p:nvPr/>
         </p:nvSpPr>
         <p:spPr>
           <a:xfrm>
             <a:off x="8074152" y="1563624"/>
-            <a:ext cx="2825496" cy="201168"/>
+            <a:ext cx="2825496" cy="256032"/>
           </a:xfrm>
           <a:prstGeom prst="rect">
             <a:avLst/>
@@ -8992,7 +9390,7 @@
               <a:buNone/>
             </a:pPr>
             <a:r>
-              <a:rPr lang="en-US" sz="950" b="1" dirty="0">
+              <a:rPr lang="en-US" sz="1300" b="1" dirty="0">
                 <a:solidFill>
                   <a:srgbClr val="0068B7"/>
                 </a:solidFill>
@@ -9002,20 +9400,20 @@
               </a:rPr>
               <a:t>Module details</a:t>
             </a:r>
-            <a:endParaRPr lang="en-US" sz="950" dirty="0"/>
-          </a:p>
-        </p:txBody>
-      </p:sp>
-      <p:sp>
-        <p:nvSpPr>
-          <p:cNvPr id="11" name="Text 9"/>
-          <p:cNvSpPr/>
-          <p:nvPr/>
-        </p:nvSpPr>
-        <p:spPr>
-          <a:xfrm>
-            <a:off x="8074152" y="1856232"/>
-            <a:ext cx="2825496" cy="1353312"/>
+            <a:endParaRPr lang="en-US" sz="1300" dirty="0"/>
+          </a:p>
+        </p:txBody>
+      </p:sp>
+      <p:sp>
+        <p:nvSpPr>
+          <p:cNvPr id="12" name="Text 10"/>
+          <p:cNvSpPr/>
+          <p:nvPr/>
+        </p:nvSpPr>
+        <p:spPr>
+          <a:xfrm>
+            <a:off x="8074152" y="1920240"/>
+            <a:ext cx="2825496" cy="1280160"/>
           </a:xfrm>
           <a:prstGeom prst="rect">
             <a:avLst/>
@@ -9033,7 +9431,7 @@
               <a:buNone/>
             </a:pPr>
             <a:r>
-              <a:rPr lang="en-US" sz="1250" dirty="0">
+              <a:rPr lang="en-US" sz="1550" dirty="0">
                 <a:solidFill>
                   <a:srgbClr val="17364A"/>
                 </a:solidFill>
@@ -9043,14 +9441,14 @@
               </a:rPr>
               <a:t>Level: intermediate/practitioner</a:t>
             </a:r>
-            <a:endParaRPr lang="en-US" sz="1250" dirty="0"/>
+            <a:endParaRPr lang="en-US" sz="1550" dirty="0"/>
           </a:p>
           <a:p>
             <a:pPr indent="0" marL="0">
               <a:buNone/>
             </a:pPr>
             <a:r>
-              <a:rPr lang="en-US" sz="1250" dirty="0">
+              <a:rPr lang="en-US" sz="1550" dirty="0">
                 <a:solidFill>
                   <a:srgbClr val="17364A"/>
                 </a:solidFill>
@@ -9060,14 +9458,14 @@
               </a:rPr>
               <a:t>Primary track: Analytics and Modeling Track</a:t>
             </a:r>
-            <a:endParaRPr lang="en-US" sz="1250" dirty="0"/>
+            <a:endParaRPr lang="en-US" sz="1550" dirty="0"/>
           </a:p>
           <a:p>
             <a:pPr indent="0" marL="0">
               <a:buNone/>
             </a:pPr>
             <a:r>
-              <a:rPr lang="en-US" sz="1250" dirty="0">
+              <a:rPr lang="en-US" sz="1550" dirty="0">
                 <a:solidFill>
                   <a:srgbClr val="17364A"/>
                 </a:solidFill>
@@ -9077,32 +9475,32 @@
               </a:rPr>
               <a:t>Appears in tracks: analytics-modeling, communications, public-health-executive-leadership, epidemiology, governance-security</a:t>
             </a:r>
-            <a:endParaRPr lang="en-US" sz="1250" dirty="0"/>
-          </a:p>
-        </p:txBody>
-      </p:sp>
-      <p:sp>
-        <p:nvSpPr>
-          <p:cNvPr id="12" name="Shape 10"/>
-          <p:cNvSpPr/>
-          <p:nvPr/>
-        </p:nvSpPr>
-        <p:spPr>
-          <a:xfrm>
-            <a:off x="7909560" y="3611880"/>
-            <a:ext cx="3154680" cy="1783080"/>
+            <a:endParaRPr lang="en-US" sz="1550" dirty="0"/>
+          </a:p>
+        </p:txBody>
+      </p:sp>
+      <p:sp>
+        <p:nvSpPr>
+          <p:cNvPr id="13" name="Shape 11"/>
+          <p:cNvSpPr/>
+          <p:nvPr/>
+        </p:nvSpPr>
+        <p:spPr>
+          <a:xfrm>
+            <a:off x="7635240" y="3730752"/>
+            <a:ext cx="1033272" cy="749808"/>
           </a:xfrm>
           <a:prstGeom prst="roundRect">
             <a:avLst>
-              <a:gd name="adj" fmla="val 6154"/>
+              <a:gd name="adj" fmla="val 14634"/>
             </a:avLst>
           </a:prstGeom>
           <a:solidFill>
-            <a:srgbClr val="EEF8ED"/>
+            <a:srgbClr val="0068B7"/>
           </a:solidFill>
           <a:ln w="12700">
             <a:solidFill>
-              <a:srgbClr val="B9D7E6"/>
+              <a:srgbClr val="0068B7"/>
             </a:solidFill>
             <a:prstDash val="solid"/>
           </a:ln>
@@ -9110,81 +9508,256 @@
       </p:sp>
       <p:sp>
         <p:nvSpPr>
-          <p:cNvPr id="13" name="Text 11"/>
-          <p:cNvSpPr/>
-          <p:nvPr/>
-        </p:nvSpPr>
-        <p:spPr>
-          <a:xfrm>
-            <a:off x="8074152" y="3758184"/>
-            <a:ext cx="2825496" cy="201168"/>
-          </a:xfrm>
-          <a:prstGeom prst="rect">
-            <a:avLst/>
-          </a:prstGeom>
-          <a:noFill/>
-          <a:ln/>
-        </p:spPr>
-        <p:txBody>
-          <a:bodyPr wrap="square" lIns="0" tIns="0" rIns="0" bIns="0" rtlCol="0" anchor="ctr"/>
-          <a:lstStyle/>
-          <a:p>
-            <a:pPr indent="0" marL="0">
-              <a:buNone/>
-            </a:pPr>
-            <a:r>
-              <a:rPr lang="en-US" sz="950" b="1" dirty="0">
-                <a:solidFill>
-                  <a:srgbClr val="0068B7"/>
-                </a:solidFill>
-                <a:latin typeface="Aptos" pitchFamily="34" charset="0"/>
-                <a:ea typeface="Aptos" pitchFamily="34" charset="-122"/>
-                <a:cs typeface="Aptos" pitchFamily="34" charset="-120"/>
-              </a:rPr>
-              <a:t>Learning approach</a:t>
-            </a:r>
-            <a:endParaRPr lang="en-US" sz="950" dirty="0"/>
-          </a:p>
-        </p:txBody>
-      </p:sp>
-      <p:sp>
-        <p:nvSpPr>
           <p:cNvPr id="14" name="Text 12"/>
           <p:cNvSpPr/>
           <p:nvPr/>
         </p:nvSpPr>
         <p:spPr>
           <a:xfrm>
-            <a:off x="8074152" y="4050792"/>
-            <a:ext cx="2825496" cy="1216152"/>
-          </a:xfrm>
-          <a:prstGeom prst="rect">
-            <a:avLst/>
-          </a:prstGeom>
-          <a:noFill/>
-          <a:ln/>
-        </p:spPr>
-        <p:txBody>
-          <a:bodyPr wrap="square" lIns="0" tIns="0" rIns="0" bIns="0" rtlCol="0" anchor="t">
+            <a:off x="7708392" y="3922776"/>
+            <a:ext cx="886968" cy="310896"/>
+          </a:xfrm>
+          <a:prstGeom prst="rect">
+            <a:avLst/>
+          </a:prstGeom>
+          <a:noFill/>
+          <a:ln/>
+        </p:spPr>
+        <p:txBody>
+          <a:bodyPr wrap="square" lIns="0" tIns="0" rIns="0" bIns="0" rtlCol="0" anchor="ctr">
             <a:normAutofit/>
           </a:bodyPr>
           <a:lstStyle/>
           <a:p>
-            <a:pPr indent="0" marL="0">
-              <a:buNone/>
-            </a:pPr>
-            <a:r>
-              <a:rPr lang="en-US" sz="1250" dirty="0">
-                <a:solidFill>
-                  <a:srgbClr val="17364A"/>
-                </a:solidFill>
-                <a:latin typeface="Aptos" pitchFamily="34" charset="0"/>
-                <a:ea typeface="Aptos" pitchFamily="34" charset="-122"/>
-                <a:cs typeface="Aptos" pitchFamily="34" charset="-120"/>
-              </a:rPr>
-              <a:t>Review the core ideas, complete the practical exercise, check your understanding, and use the related plays and tools to apply the lesson.</a:t>
-            </a:r>
-            <a:endParaRPr lang="en-US" sz="1250" dirty="0"/>
+            <a:pPr algn="ctr" indent="0" marL="0">
+              <a:buNone/>
+            </a:pPr>
+            <a:r>
+              <a:rPr lang="en-US" sz="1500" b="1" dirty="0">
+                <a:solidFill>
+                  <a:srgbClr val="FFFFFF"/>
+                </a:solidFill>
+                <a:latin typeface="Aptos" pitchFamily="34" charset="0"/>
+                <a:ea typeface="Aptos" pitchFamily="34" charset="-122"/>
+                <a:cs typeface="Aptos" pitchFamily="34" charset="-120"/>
+              </a:rPr>
+              <a:t>Learn</a:t>
+            </a:r>
+            <a:endParaRPr lang="en-US" sz="1500" dirty="0"/>
+          </a:p>
+        </p:txBody>
+      </p:sp>
+      <p:sp>
+        <p:nvSpPr>
+          <p:cNvPr id="15" name="Text 13"/>
+          <p:cNvSpPr/>
+          <p:nvPr/>
+        </p:nvSpPr>
+        <p:spPr>
+          <a:xfrm>
+            <a:off x="8695944" y="3941064"/>
+            <a:ext cx="201168" cy="256032"/>
+          </a:xfrm>
+          <a:prstGeom prst="rect">
+            <a:avLst/>
+          </a:prstGeom>
+          <a:noFill/>
+          <a:ln/>
+        </p:spPr>
+        <p:txBody>
+          <a:bodyPr wrap="square" lIns="0" tIns="0" rIns="0" bIns="0" rtlCol="0" anchor="ctr"/>
+          <a:lstStyle/>
+          <a:p>
+            <a:pPr algn="ctr" indent="0" marL="0">
+              <a:buNone/>
+            </a:pPr>
+            <a:r>
+              <a:rPr lang="en-US" sz="1800" b="1" dirty="0">
+                <a:solidFill>
+                  <a:srgbClr val="0068B7"/>
+                </a:solidFill>
+                <a:latin typeface="Aptos" pitchFamily="34" charset="0"/>
+                <a:ea typeface="Aptos" pitchFamily="34" charset="-122"/>
+                <a:cs typeface="Aptos" pitchFamily="34" charset="-120"/>
+              </a:rPr>
+              <a:t>â†’</a:t>
+            </a:r>
+            <a:endParaRPr lang="en-US" sz="1800" dirty="0"/>
+          </a:p>
+        </p:txBody>
+      </p:sp>
+      <p:sp>
+        <p:nvSpPr>
+          <p:cNvPr id="16" name="Shape 14"/>
+          <p:cNvSpPr/>
+          <p:nvPr/>
+        </p:nvSpPr>
+        <p:spPr>
+          <a:xfrm>
+            <a:off x="8924544" y="3730752"/>
+            <a:ext cx="1033272" cy="749808"/>
+          </a:xfrm>
+          <a:prstGeom prst="roundRect">
+            <a:avLst>
+              <a:gd name="adj" fmla="val 14634"/>
+            </a:avLst>
+          </a:prstGeom>
+          <a:solidFill>
+            <a:srgbClr val="2F8A28"/>
+          </a:solidFill>
+          <a:ln w="12700">
+            <a:solidFill>
+              <a:srgbClr val="2F8A28"/>
+            </a:solidFill>
+            <a:prstDash val="solid"/>
+          </a:ln>
+        </p:spPr>
+      </p:sp>
+      <p:sp>
+        <p:nvSpPr>
+          <p:cNvPr id="17" name="Text 15"/>
+          <p:cNvSpPr/>
+          <p:nvPr/>
+        </p:nvSpPr>
+        <p:spPr>
+          <a:xfrm>
+            <a:off x="8997696" y="3922776"/>
+            <a:ext cx="886968" cy="310896"/>
+          </a:xfrm>
+          <a:prstGeom prst="rect">
+            <a:avLst/>
+          </a:prstGeom>
+          <a:noFill/>
+          <a:ln/>
+        </p:spPr>
+        <p:txBody>
+          <a:bodyPr wrap="square" lIns="0" tIns="0" rIns="0" bIns="0" rtlCol="0" anchor="ctr">
+            <a:normAutofit/>
+          </a:bodyPr>
+          <a:lstStyle/>
+          <a:p>
+            <a:pPr algn="ctr" indent="0" marL="0">
+              <a:buNone/>
+            </a:pPr>
+            <a:r>
+              <a:rPr lang="en-US" sz="1500" b="1" dirty="0">
+                <a:solidFill>
+                  <a:srgbClr val="FFFFFF"/>
+                </a:solidFill>
+                <a:latin typeface="Aptos" pitchFamily="34" charset="0"/>
+                <a:ea typeface="Aptos" pitchFamily="34" charset="-122"/>
+                <a:cs typeface="Aptos" pitchFamily="34" charset="-120"/>
+              </a:rPr>
+              <a:t>Apply</a:t>
+            </a:r>
+            <a:endParaRPr lang="en-US" sz="1500" dirty="0"/>
+          </a:p>
+        </p:txBody>
+      </p:sp>
+      <p:sp>
+        <p:nvSpPr>
+          <p:cNvPr id="18" name="Text 16"/>
+          <p:cNvSpPr/>
+          <p:nvPr/>
+        </p:nvSpPr>
+        <p:spPr>
+          <a:xfrm>
+            <a:off x="9985248" y="3941064"/>
+            <a:ext cx="201168" cy="256032"/>
+          </a:xfrm>
+          <a:prstGeom prst="rect">
+            <a:avLst/>
+          </a:prstGeom>
+          <a:noFill/>
+          <a:ln/>
+        </p:spPr>
+        <p:txBody>
+          <a:bodyPr wrap="square" lIns="0" tIns="0" rIns="0" bIns="0" rtlCol="0" anchor="ctr"/>
+          <a:lstStyle/>
+          <a:p>
+            <a:pPr algn="ctr" indent="0" marL="0">
+              <a:buNone/>
+            </a:pPr>
+            <a:r>
+              <a:rPr lang="en-US" sz="1800" b="1" dirty="0">
+                <a:solidFill>
+                  <a:srgbClr val="0068B7"/>
+                </a:solidFill>
+                <a:latin typeface="Aptos" pitchFamily="34" charset="0"/>
+                <a:ea typeface="Aptos" pitchFamily="34" charset="-122"/>
+                <a:cs typeface="Aptos" pitchFamily="34" charset="-120"/>
+              </a:rPr>
+              <a:t>â†’</a:t>
+            </a:r>
+            <a:endParaRPr lang="en-US" sz="1800" dirty="0"/>
+          </a:p>
+        </p:txBody>
+      </p:sp>
+      <p:sp>
+        <p:nvSpPr>
+          <p:cNvPr id="19" name="Shape 17"/>
+          <p:cNvSpPr/>
+          <p:nvPr/>
+        </p:nvSpPr>
+        <p:spPr>
+          <a:xfrm>
+            <a:off x="10213848" y="3730752"/>
+            <a:ext cx="1033272" cy="749808"/>
+          </a:xfrm>
+          <a:prstGeom prst="roundRect">
+            <a:avLst>
+              <a:gd name="adj" fmla="val 14634"/>
+            </a:avLst>
+          </a:prstGeom>
+          <a:solidFill>
+            <a:srgbClr val="6A4CA3"/>
+          </a:solidFill>
+          <a:ln w="12700">
+            <a:solidFill>
+              <a:srgbClr val="6A4CA3"/>
+            </a:solidFill>
+            <a:prstDash val="solid"/>
+          </a:ln>
+        </p:spPr>
+      </p:sp>
+      <p:sp>
+        <p:nvSpPr>
+          <p:cNvPr id="20" name="Text 18"/>
+          <p:cNvSpPr/>
+          <p:nvPr/>
+        </p:nvSpPr>
+        <p:spPr>
+          <a:xfrm>
+            <a:off x="10287000" y="3922776"/>
+            <a:ext cx="886968" cy="310896"/>
+          </a:xfrm>
+          <a:prstGeom prst="rect">
+            <a:avLst/>
+          </a:prstGeom>
+          <a:noFill/>
+          <a:ln/>
+        </p:spPr>
+        <p:txBody>
+          <a:bodyPr wrap="square" lIns="0" tIns="0" rIns="0" bIns="0" rtlCol="0" anchor="ctr">
+            <a:normAutofit/>
+          </a:bodyPr>
+          <a:lstStyle/>
+          <a:p>
+            <a:pPr algn="ctr" indent="0" marL="0">
+              <a:buNone/>
+            </a:pPr>
+            <a:r>
+              <a:rPr lang="en-US" sz="1500" b="1" dirty="0">
+                <a:solidFill>
+                  <a:srgbClr val="FFFFFF"/>
+                </a:solidFill>
+                <a:latin typeface="Aptos" pitchFamily="34" charset="0"/>
+                <a:ea typeface="Aptos" pitchFamily="34" charset="-122"/>
+                <a:cs typeface="Aptos" pitchFamily="34" charset="-120"/>
+              </a:rPr>
+              <a:t>Document</a:t>
+            </a:r>
+            <a:endParaRPr lang="en-US" sz="1500" dirty="0"/>
           </a:p>
         </p:txBody>
       </p:sp>
@@ -9381,7 +9954,7 @@
                 <a:ea typeface="Aptos" pitchFamily="34" charset="-122"/>
                 <a:cs typeface="Aptos" pitchFamily="34" charset="-120"/>
               </a:rPr>
-              <a:t>© Paula Soper</a:t>
+              <a:t>Â© Paula Soper</a:t>
             </a:r>
             <a:endParaRPr lang="en-US" sz="800" dirty="0"/>
           </a:p>
@@ -9389,7 +9962,46 @@
       </p:sp>
       <p:sp>
         <p:nvSpPr>
-          <p:cNvPr id="7" name="Shape 5"/>
+          <p:cNvPr id="7" name="Text 5"/>
+          <p:cNvSpPr/>
+          <p:nvPr/>
+        </p:nvSpPr>
+        <p:spPr>
+          <a:xfrm>
+            <a:off x="11137392" y="6510528"/>
+            <a:ext cx="411480" cy="201168"/>
+          </a:xfrm>
+          <a:prstGeom prst="rect">
+            <a:avLst/>
+          </a:prstGeom>
+          <a:noFill/>
+          <a:ln/>
+        </p:spPr>
+        <p:txBody>
+          <a:bodyPr wrap="square" lIns="0" tIns="0" rIns="0" bIns="0" rtlCol="0" anchor="ctr"/>
+          <a:lstStyle/>
+          <a:p>
+            <a:pPr algn="r" indent="0" marL="0">
+              <a:buNone/>
+            </a:pPr>
+            <a:r>
+              <a:rPr lang="en-US" sz="900" dirty="0">
+                <a:solidFill>
+                  <a:srgbClr val="5F7181"/>
+                </a:solidFill>
+                <a:latin typeface="Aptos" pitchFamily="34" charset="0"/>
+                <a:ea typeface="Aptos" pitchFamily="34" charset="-122"/>
+                <a:cs typeface="Aptos" pitchFamily="34" charset="-120"/>
+              </a:rPr>
+              <a:t>20</a:t>
+            </a:r>
+            <a:endParaRPr lang="en-US" sz="900" dirty="0"/>
+          </a:p>
+        </p:txBody>
+      </p:sp>
+      <p:sp>
+        <p:nvSpPr>
+          <p:cNvPr id="8" name="Shape 6"/>
           <p:cNvSpPr/>
           <p:nvPr/>
         </p:nvSpPr>
@@ -9414,7 +10026,7 @@
       </p:sp>
       <p:sp>
         <p:nvSpPr>
-          <p:cNvPr id="8" name="Text 6"/>
+          <p:cNvPr id="9" name="Text 7"/>
           <p:cNvSpPr/>
           <p:nvPr/>
         </p:nvSpPr>
@@ -9453,14 +10065,14 @@
       </p:sp>
       <p:sp>
         <p:nvSpPr>
-          <p:cNvPr id="9" name="Text 7"/>
+          <p:cNvPr id="10" name="Text 8"/>
           <p:cNvSpPr/>
           <p:nvPr/>
         </p:nvSpPr>
         <p:spPr>
           <a:xfrm>
             <a:off x="640080" y="621792"/>
-            <a:ext cx="10881360" cy="566928"/>
+            <a:ext cx="10881360" cy="713232"/>
           </a:xfrm>
           <a:prstGeom prst="rect">
             <a:avLst/>
@@ -9478,7 +10090,7 @@
               <a:buNone/>
             </a:pPr>
             <a:r>
-              <a:rPr lang="en-US" sz="2700" b="1" dirty="0">
+              <a:rPr lang="en-US" sz="3400" b="1" dirty="0">
                 <a:solidFill>
                   <a:srgbClr val="003A63"/>
                 </a:solidFill>
@@ -9488,20 +10100,20 @@
               </a:rPr>
               <a:t>References and Resources</a:t>
             </a:r>
-            <a:endParaRPr lang="en-US" sz="2700" dirty="0"/>
-          </a:p>
-        </p:txBody>
-      </p:sp>
-      <p:sp>
-        <p:nvSpPr>
-          <p:cNvPr id="10" name="Text 8"/>
-          <p:cNvSpPr/>
-          <p:nvPr/>
-        </p:nvSpPr>
-        <p:spPr>
-          <a:xfrm>
-            <a:off x="868680" y="1417320"/>
-            <a:ext cx="6675120" cy="4434840"/>
+            <a:endParaRPr lang="en-US" sz="3400" dirty="0"/>
+          </a:p>
+        </p:txBody>
+      </p:sp>
+      <p:sp>
+        <p:nvSpPr>
+          <p:cNvPr id="11" name="Text 9"/>
+          <p:cNvSpPr/>
+          <p:nvPr/>
+        </p:nvSpPr>
+        <p:spPr>
+          <a:xfrm>
+            <a:off x="868680" y="1508760"/>
+            <a:ext cx="6537960" cy="4160520"/>
           </a:xfrm>
           <a:prstGeom prst="rect">
             <a:avLst/>
@@ -9516,7 +10128,7 @@
           <a:lstStyle/>
           <a:p>
             <a:r>
-              <a:rPr lang="en-US" sz="1700" dirty="0">
+              <a:rPr lang="en-US" sz="2100" dirty="0">
                 <a:solidFill>
                   <a:srgbClr val="17364A"/>
                 </a:solidFill>
@@ -9526,11 +10138,11 @@
               </a:rPr>
               <a:t>CDC Public Health Data Strategy and Data Modernization resources:.</a:t>
             </a:r>
-            <a:endParaRPr lang="en-US" sz="1700" dirty="0"/>
-          </a:p>
-          <a:p>
-            <a:r>
-              <a:rPr lang="en-US" sz="1700" dirty="0">
+            <a:endParaRPr lang="en-US" sz="2100" dirty="0"/>
+          </a:p>
+          <a:p>
+            <a:r>
+              <a:rPr lang="en-US" sz="2100" dirty="0">
                 <a:solidFill>
                   <a:srgbClr val="17364A"/>
                 </a:solidFill>
@@ -9540,11 +10152,11 @@
               </a:rPr>
               <a:t>NIST Artificial Intelligence Risk Management Framework and NIST Generative AI Profile:.</a:t>
             </a:r>
-            <a:endParaRPr lang="en-US" sz="1700" dirty="0"/>
-          </a:p>
-          <a:p>
-            <a:r>
-              <a:rPr lang="en-US" sz="1700" dirty="0">
+            <a:endParaRPr lang="en-US" sz="2100" dirty="0"/>
+          </a:p>
+          <a:p>
+            <a:r>
+              <a:rPr lang="en-US" sz="2100" dirty="0">
                 <a:solidFill>
                   <a:srgbClr val="17364A"/>
                 </a:solidFill>
@@ -9552,29 +10164,15 @@
                 <a:ea typeface="Aptos" pitchFamily="34" charset="-122"/>
                 <a:cs typeface="Aptos" pitchFamily="34" charset="-120"/>
               </a:rPr>
-              <a:t>WHO Ethics and Governance of Artificial Intelligence for Health guidance: https://www.who.int/publications/i/item/9789240029200</a:t>
-            </a:r>
-            <a:endParaRPr lang="en-US" sz="1700" dirty="0"/>
-          </a:p>
-          <a:p>
-            <a:r>
-              <a:rPr lang="en-US" sz="1700" dirty="0">
-                <a:solidFill>
-                  <a:srgbClr val="17364A"/>
-                </a:solidFill>
-                <a:latin typeface="Aptos" pitchFamily="34" charset="0"/>
-                <a:ea typeface="Aptos" pitchFamily="34" charset="-122"/>
-                <a:cs typeface="Aptos" pitchFamily="34" charset="-120"/>
-              </a:rPr>
-              <a:t>OWASP Top 10 for Large Language Model Applications: https://owasp.org/www-project-top-10-for-large-language-model-applications/</a:t>
-            </a:r>
-            <a:endParaRPr lang="en-US" sz="1700" dirty="0"/>
-          </a:p>
-        </p:txBody>
-      </p:sp>
-      <p:sp>
-        <p:nvSpPr>
-          <p:cNvPr id="11" name="Shape 9"/>
+              <a:t>WHO Ethics and Governance of Artificial Intelligence for Health guidance:.</a:t>
+            </a:r>
+            <a:endParaRPr lang="en-US" sz="2100" dirty="0"/>
+          </a:p>
+        </p:txBody>
+      </p:sp>
+      <p:sp>
+        <p:nvSpPr>
+          <p:cNvPr id="12" name="Shape 10"/>
           <p:cNvSpPr/>
           <p:nvPr/>
         </p:nvSpPr>
@@ -9601,14 +10199,14 @@
       </p:sp>
       <p:sp>
         <p:nvSpPr>
-          <p:cNvPr id="12" name="Text 10"/>
+          <p:cNvPr id="13" name="Text 11"/>
           <p:cNvSpPr/>
           <p:nvPr/>
         </p:nvSpPr>
         <p:spPr>
           <a:xfrm>
             <a:off x="8074152" y="1563624"/>
-            <a:ext cx="2825496" cy="201168"/>
+            <a:ext cx="2825496" cy="256032"/>
           </a:xfrm>
           <a:prstGeom prst="rect">
             <a:avLst/>
@@ -9624,7 +10222,7 @@
               <a:buNone/>
             </a:pPr>
             <a:r>
-              <a:rPr lang="en-US" sz="950" b="1" dirty="0">
+              <a:rPr lang="en-US" sz="1300" b="1" dirty="0">
                 <a:solidFill>
                   <a:srgbClr val="0068B7"/>
                 </a:solidFill>
@@ -9634,20 +10232,20 @@
               </a:rPr>
               <a:t>Key idea</a:t>
             </a:r>
-            <a:endParaRPr lang="en-US" sz="950" dirty="0"/>
-          </a:p>
-        </p:txBody>
-      </p:sp>
-      <p:sp>
-        <p:nvSpPr>
-          <p:cNvPr id="13" name="Text 11"/>
-          <p:cNvSpPr/>
-          <p:nvPr/>
-        </p:nvSpPr>
-        <p:spPr>
-          <a:xfrm>
-            <a:off x="8074152" y="1856232"/>
-            <a:ext cx="2825496" cy="1261872"/>
+            <a:endParaRPr lang="en-US" sz="1300" dirty="0"/>
+          </a:p>
+        </p:txBody>
+      </p:sp>
+      <p:sp>
+        <p:nvSpPr>
+          <p:cNvPr id="14" name="Text 12"/>
+          <p:cNvSpPr/>
+          <p:nvPr/>
+        </p:nvSpPr>
+        <p:spPr>
+          <a:xfrm>
+            <a:off x="8074152" y="1920240"/>
+            <a:ext cx="2825496" cy="1188720"/>
           </a:xfrm>
           <a:prstGeom prst="rect">
             <a:avLst/>
@@ -9665,7 +10263,7 @@
               <a:buNone/>
             </a:pPr>
             <a:r>
-              <a:rPr lang="en-US" sz="1250" dirty="0">
+              <a:rPr lang="en-US" sz="1550" dirty="0">
                 <a:solidFill>
                   <a:srgbClr val="17364A"/>
                 </a:solidFill>
@@ -9675,13 +10273,13 @@
               </a:rPr>
               <a:t>CDC Public Health Data Strategy and Data Modernization resources:.</a:t>
             </a:r>
-            <a:endParaRPr lang="en-US" sz="1250" dirty="0"/>
-          </a:p>
-        </p:txBody>
-      </p:sp>
-      <p:sp>
-        <p:nvSpPr>
-          <p:cNvPr id="14" name="Shape 12"/>
+            <a:endParaRPr lang="en-US" sz="1550" dirty="0"/>
+          </a:p>
+        </p:txBody>
+      </p:sp>
+      <p:sp>
+        <p:nvSpPr>
+          <p:cNvPr id="15" name="Shape 13"/>
           <p:cNvSpPr/>
           <p:nvPr/>
         </p:nvSpPr>
@@ -9708,14 +10306,14 @@
       </p:sp>
       <p:sp>
         <p:nvSpPr>
-          <p:cNvPr id="15" name="Text 13"/>
+          <p:cNvPr id="16" name="Text 14"/>
           <p:cNvSpPr/>
           <p:nvPr/>
         </p:nvSpPr>
         <p:spPr>
           <a:xfrm>
             <a:off x="8074152" y="3666744"/>
-            <a:ext cx="2825496" cy="201168"/>
+            <a:ext cx="2825496" cy="256032"/>
           </a:xfrm>
           <a:prstGeom prst="rect">
             <a:avLst/>
@@ -9731,7 +10329,7 @@
               <a:buNone/>
             </a:pPr>
             <a:r>
-              <a:rPr lang="en-US" sz="950" b="1" dirty="0">
+              <a:rPr lang="en-US" sz="1300" b="1" dirty="0">
                 <a:solidFill>
                   <a:srgbClr val="0068B7"/>
                 </a:solidFill>
@@ -9741,20 +10339,20 @@
               </a:rPr>
               <a:t>Use this for</a:t>
             </a:r>
-            <a:endParaRPr lang="en-US" sz="950" dirty="0"/>
-          </a:p>
-        </p:txBody>
-      </p:sp>
-      <p:sp>
-        <p:nvSpPr>
-          <p:cNvPr id="16" name="Text 14"/>
-          <p:cNvSpPr/>
-          <p:nvPr/>
-        </p:nvSpPr>
-        <p:spPr>
-          <a:xfrm>
-            <a:off x="8074152" y="3959352"/>
-            <a:ext cx="2825496" cy="1170432"/>
+            <a:endParaRPr lang="en-US" sz="1300" dirty="0"/>
+          </a:p>
+        </p:txBody>
+      </p:sp>
+      <p:sp>
+        <p:nvSpPr>
+          <p:cNvPr id="17" name="Text 15"/>
+          <p:cNvSpPr/>
+          <p:nvPr/>
+        </p:nvSpPr>
+        <p:spPr>
+          <a:xfrm>
+            <a:off x="8074152" y="4023360"/>
+            <a:ext cx="2825496" cy="1097280"/>
           </a:xfrm>
           <a:prstGeom prst="rect">
             <a:avLst/>
@@ -9772,7 +10370,7 @@
               <a:buNone/>
             </a:pPr>
             <a:r>
-              <a:rPr lang="en-US" sz="1250" dirty="0">
+              <a:rPr lang="en-US" sz="1550" dirty="0">
                 <a:solidFill>
                   <a:srgbClr val="17364A"/>
                 </a:solidFill>
@@ -9782,7 +10380,7 @@
               </a:rPr>
               <a:t>Connect the concept to public health decisions, safeguards, documentation, or implementation work.</a:t>
             </a:r>
-            <a:endParaRPr lang="en-US" sz="1250" dirty="0"/>
+            <a:endParaRPr lang="en-US" sz="1550" dirty="0"/>
           </a:p>
         </p:txBody>
       </p:sp>
@@ -9979,7 +10577,7 @@
                 <a:ea typeface="Aptos" pitchFamily="34" charset="-122"/>
                 <a:cs typeface="Aptos" pitchFamily="34" charset="-120"/>
               </a:rPr>
-              <a:t>© Paula Soper</a:t>
+              <a:t>Â© Paula Soper</a:t>
             </a:r>
             <a:endParaRPr lang="en-US" sz="800" dirty="0"/>
           </a:p>
@@ -9993,8 +10591,47 @@
         </p:nvSpPr>
         <p:spPr>
           <a:xfrm>
+            <a:off x="11137392" y="6510528"/>
+            <a:ext cx="411480" cy="201168"/>
+          </a:xfrm>
+          <a:prstGeom prst="rect">
+            <a:avLst/>
+          </a:prstGeom>
+          <a:noFill/>
+          <a:ln/>
+        </p:spPr>
+        <p:txBody>
+          <a:bodyPr wrap="square" lIns="0" tIns="0" rIns="0" bIns="0" rtlCol="0" anchor="ctr"/>
+          <a:lstStyle/>
+          <a:p>
+            <a:pPr algn="r" indent="0" marL="0">
+              <a:buNone/>
+            </a:pPr>
+            <a:r>
+              <a:rPr lang="en-US" sz="900" dirty="0">
+                <a:solidFill>
+                  <a:srgbClr val="5F7181"/>
+                </a:solidFill>
+                <a:latin typeface="Aptos" pitchFamily="34" charset="0"/>
+                <a:ea typeface="Aptos" pitchFamily="34" charset="-122"/>
+                <a:cs typeface="Aptos" pitchFamily="34" charset="-120"/>
+              </a:rPr>
+              <a:t>21</a:t>
+            </a:r>
+            <a:endParaRPr lang="en-US" sz="900" dirty="0"/>
+          </a:p>
+        </p:txBody>
+      </p:sp>
+      <p:sp>
+        <p:nvSpPr>
+          <p:cNvPr id="8" name="Text 6"/>
+          <p:cNvSpPr/>
+          <p:nvPr/>
+        </p:nvSpPr>
+        <p:spPr>
+          <a:xfrm>
             <a:off x="640080" y="658368"/>
-            <a:ext cx="10881360" cy="566928"/>
+            <a:ext cx="10881360" cy="713232"/>
           </a:xfrm>
           <a:prstGeom prst="rect">
             <a:avLst/>
@@ -10012,7 +10649,7 @@
               <a:buNone/>
             </a:pPr>
             <a:r>
-              <a:rPr lang="en-US" sz="2700" b="1" dirty="0">
+              <a:rPr lang="en-US" sz="3400" b="1" dirty="0">
                 <a:solidFill>
                   <a:srgbClr val="003A63"/>
                 </a:solidFill>
@@ -10022,20 +10659,20 @@
               </a:rPr>
               <a:t>References and Resources Continued</a:t>
             </a:r>
-            <a:endParaRPr lang="en-US" sz="2700" dirty="0"/>
-          </a:p>
-        </p:txBody>
-      </p:sp>
-      <p:sp>
-        <p:nvSpPr>
-          <p:cNvPr id="8" name="Text 6"/>
-          <p:cNvSpPr/>
-          <p:nvPr/>
-        </p:nvSpPr>
-        <p:spPr>
-          <a:xfrm>
-            <a:off x="868680" y="1417320"/>
-            <a:ext cx="6675120" cy="4434840"/>
+            <a:endParaRPr lang="en-US" sz="3400" dirty="0"/>
+          </a:p>
+        </p:txBody>
+      </p:sp>
+      <p:sp>
+        <p:nvSpPr>
+          <p:cNvPr id="9" name="Text 7"/>
+          <p:cNvSpPr/>
+          <p:nvPr/>
+        </p:nvSpPr>
+        <p:spPr>
+          <a:xfrm>
+            <a:off x="868680" y="1508760"/>
+            <a:ext cx="6537960" cy="4160520"/>
           </a:xfrm>
           <a:prstGeom prst="rect">
             <a:avLst/>
@@ -10050,7 +10687,7 @@
           <a:lstStyle/>
           <a:p>
             <a:r>
-              <a:rPr lang="en-US" sz="1700" dirty="0">
+              <a:rPr lang="en-US" sz="2100" dirty="0">
                 <a:solidFill>
                   <a:srgbClr val="17364A"/>
                 </a:solidFill>
@@ -10058,15 +10695,15 @@
                 <a:ea typeface="Aptos" pitchFamily="34" charset="-122"/>
                 <a:cs typeface="Aptos" pitchFamily="34" charset="-120"/>
               </a:rPr>
-              <a:t>Agency policies for privacy, public records, cybersecurity, procurement, civil rights, accessibility, language access, and.</a:t>
-            </a:r>
-            <a:endParaRPr lang="en-US" sz="1700" dirty="0"/>
-          </a:p>
-        </p:txBody>
-      </p:sp>
-      <p:sp>
-        <p:nvSpPr>
-          <p:cNvPr id="9" name="Shape 7"/>
+              <a:t>Agency policies for privacy, public records, cybersecurity, procurement, civil rights, accessibility,.</a:t>
+            </a:r>
+            <a:endParaRPr lang="en-US" sz="2100" dirty="0"/>
+          </a:p>
+        </p:txBody>
+      </p:sp>
+      <p:sp>
+        <p:nvSpPr>
+          <p:cNvPr id="10" name="Shape 8"/>
           <p:cNvSpPr/>
           <p:nvPr/>
         </p:nvSpPr>
@@ -10093,14 +10730,14 @@
       </p:sp>
       <p:sp>
         <p:nvSpPr>
-          <p:cNvPr id="10" name="Text 8"/>
+          <p:cNvPr id="11" name="Text 9"/>
           <p:cNvSpPr/>
           <p:nvPr/>
         </p:nvSpPr>
         <p:spPr>
           <a:xfrm>
             <a:off x="8074152" y="1563624"/>
-            <a:ext cx="2825496" cy="201168"/>
+            <a:ext cx="2825496" cy="256032"/>
           </a:xfrm>
           <a:prstGeom prst="rect">
             <a:avLst/>
@@ -10116,7 +10753,7 @@
               <a:buNone/>
             </a:pPr>
             <a:r>
-              <a:rPr lang="en-US" sz="950" b="1" dirty="0">
+              <a:rPr lang="en-US" sz="1300" b="1" dirty="0">
                 <a:solidFill>
                   <a:srgbClr val="0068B7"/>
                 </a:solidFill>
@@ -10126,20 +10763,20 @@
               </a:rPr>
               <a:t>Key idea</a:t>
             </a:r>
-            <a:endParaRPr lang="en-US" sz="950" dirty="0"/>
-          </a:p>
-        </p:txBody>
-      </p:sp>
-      <p:sp>
-        <p:nvSpPr>
-          <p:cNvPr id="11" name="Text 9"/>
-          <p:cNvSpPr/>
-          <p:nvPr/>
-        </p:nvSpPr>
-        <p:spPr>
-          <a:xfrm>
-            <a:off x="8074152" y="1856232"/>
-            <a:ext cx="2825496" cy="1261872"/>
+            <a:endParaRPr lang="en-US" sz="1300" dirty="0"/>
+          </a:p>
+        </p:txBody>
+      </p:sp>
+      <p:sp>
+        <p:nvSpPr>
+          <p:cNvPr id="12" name="Text 10"/>
+          <p:cNvSpPr/>
+          <p:nvPr/>
+        </p:nvSpPr>
+        <p:spPr>
+          <a:xfrm>
+            <a:off x="8074152" y="1920240"/>
+            <a:ext cx="2825496" cy="1188720"/>
           </a:xfrm>
           <a:prstGeom prst="rect">
             <a:avLst/>
@@ -10157,7 +10794,7 @@
               <a:buNone/>
             </a:pPr>
             <a:r>
-              <a:rPr lang="en-US" sz="1250" dirty="0">
+              <a:rPr lang="en-US" sz="1550" dirty="0">
                 <a:solidFill>
                   <a:srgbClr val="17364A"/>
                 </a:solidFill>
@@ -10165,15 +10802,15 @@
                 <a:ea typeface="Aptos" pitchFamily="34" charset="-122"/>
                 <a:cs typeface="Aptos" pitchFamily="34" charset="-120"/>
               </a:rPr>
-              <a:t>Agency policies for privacy, public records, cybersecurity, procurement, civil rights, accessibility, language access, and.</a:t>
-            </a:r>
-            <a:endParaRPr lang="en-US" sz="1250" dirty="0"/>
-          </a:p>
-        </p:txBody>
-      </p:sp>
-      <p:sp>
-        <p:nvSpPr>
-          <p:cNvPr id="12" name="Shape 10"/>
+              <a:t>Agency policies for privacy, public records, cybersecurity, procurement, civil rights, accessibility,.</a:t>
+            </a:r>
+            <a:endParaRPr lang="en-US" sz="1550" dirty="0"/>
+          </a:p>
+        </p:txBody>
+      </p:sp>
+      <p:sp>
+        <p:nvSpPr>
+          <p:cNvPr id="13" name="Shape 11"/>
           <p:cNvSpPr/>
           <p:nvPr/>
         </p:nvSpPr>
@@ -10200,14 +10837,14 @@
       </p:sp>
       <p:sp>
         <p:nvSpPr>
-          <p:cNvPr id="13" name="Text 11"/>
+          <p:cNvPr id="14" name="Text 12"/>
           <p:cNvSpPr/>
           <p:nvPr/>
         </p:nvSpPr>
         <p:spPr>
           <a:xfrm>
             <a:off x="8074152" y="3666744"/>
-            <a:ext cx="2825496" cy="201168"/>
+            <a:ext cx="2825496" cy="256032"/>
           </a:xfrm>
           <a:prstGeom prst="rect">
             <a:avLst/>
@@ -10223,7 +10860,7 @@
               <a:buNone/>
             </a:pPr>
             <a:r>
-              <a:rPr lang="en-US" sz="950" b="1" dirty="0">
+              <a:rPr lang="en-US" sz="1300" b="1" dirty="0">
                 <a:solidFill>
                   <a:srgbClr val="0068B7"/>
                 </a:solidFill>
@@ -10233,20 +10870,20 @@
               </a:rPr>
               <a:t>Use this for</a:t>
             </a:r>
-            <a:endParaRPr lang="en-US" sz="950" dirty="0"/>
-          </a:p>
-        </p:txBody>
-      </p:sp>
-      <p:sp>
-        <p:nvSpPr>
-          <p:cNvPr id="14" name="Text 12"/>
-          <p:cNvSpPr/>
-          <p:nvPr/>
-        </p:nvSpPr>
-        <p:spPr>
-          <a:xfrm>
-            <a:off x="8074152" y="3959352"/>
-            <a:ext cx="2825496" cy="1170432"/>
+            <a:endParaRPr lang="en-US" sz="1300" dirty="0"/>
+          </a:p>
+        </p:txBody>
+      </p:sp>
+      <p:sp>
+        <p:nvSpPr>
+          <p:cNvPr id="15" name="Text 13"/>
+          <p:cNvSpPr/>
+          <p:nvPr/>
+        </p:nvSpPr>
+        <p:spPr>
+          <a:xfrm>
+            <a:off x="8074152" y="4023360"/>
+            <a:ext cx="2825496" cy="1097280"/>
           </a:xfrm>
           <a:prstGeom prst="rect">
             <a:avLst/>
@@ -10264,7 +10901,7 @@
               <a:buNone/>
             </a:pPr>
             <a:r>
-              <a:rPr lang="en-US" sz="1250" dirty="0">
+              <a:rPr lang="en-US" sz="1550" dirty="0">
                 <a:solidFill>
                   <a:srgbClr val="17364A"/>
                 </a:solidFill>
@@ -10274,7 +10911,7 @@
               </a:rPr>
               <a:t>Connect the concept to public health decisions, safeguards, documentation, or implementation work.</a:t>
             </a:r>
-            <a:endParaRPr lang="en-US" sz="1250" dirty="0"/>
+            <a:endParaRPr lang="en-US" sz="1550" dirty="0"/>
           </a:p>
         </p:txBody>
       </p:sp>
@@ -10471,7 +11108,7 @@
                 <a:ea typeface="Aptos" pitchFamily="34" charset="-122"/>
                 <a:cs typeface="Aptos" pitchFamily="34" charset="-120"/>
               </a:rPr>
-              <a:t>© Paula Soper</a:t>
+              <a:t>Â© Paula Soper</a:t>
             </a:r>
             <a:endParaRPr lang="en-US" sz="800" dirty="0"/>
           </a:p>
@@ -10485,8 +11122,47 @@
         </p:nvSpPr>
         <p:spPr>
           <a:xfrm>
+            <a:off x="11137392" y="6510528"/>
+            <a:ext cx="411480" cy="201168"/>
+          </a:xfrm>
+          <a:prstGeom prst="rect">
+            <a:avLst/>
+          </a:prstGeom>
+          <a:noFill/>
+          <a:ln/>
+        </p:spPr>
+        <p:txBody>
+          <a:bodyPr wrap="square" lIns="0" tIns="0" rIns="0" bIns="0" rtlCol="0" anchor="ctr"/>
+          <a:lstStyle/>
+          <a:p>
+            <a:pPr algn="r" indent="0" marL="0">
+              <a:buNone/>
+            </a:pPr>
+            <a:r>
+              <a:rPr lang="en-US" sz="900" dirty="0">
+                <a:solidFill>
+                  <a:srgbClr val="5F7181"/>
+                </a:solidFill>
+                <a:latin typeface="Aptos" pitchFamily="34" charset="0"/>
+                <a:ea typeface="Aptos" pitchFamily="34" charset="-122"/>
+                <a:cs typeface="Aptos" pitchFamily="34" charset="-120"/>
+              </a:rPr>
+              <a:t>3</a:t>
+            </a:r>
+            <a:endParaRPr lang="en-US" sz="900" dirty="0"/>
+          </a:p>
+        </p:txBody>
+      </p:sp>
+      <p:sp>
+        <p:nvSpPr>
+          <p:cNvPr id="8" name="Text 6"/>
+          <p:cNvSpPr/>
+          <p:nvPr/>
+        </p:nvSpPr>
+        <p:spPr>
+          <a:xfrm>
             <a:off x="640080" y="658368"/>
-            <a:ext cx="10881360" cy="566928"/>
+            <a:ext cx="10881360" cy="713232"/>
           </a:xfrm>
           <a:prstGeom prst="rect">
             <a:avLst/>
@@ -10504,7 +11180,7 @@
               <a:buNone/>
             </a:pPr>
             <a:r>
-              <a:rPr lang="en-US" sz="2700" b="1" dirty="0">
+              <a:rPr lang="en-US" sz="3400" b="1" dirty="0">
                 <a:solidFill>
                   <a:srgbClr val="003A63"/>
                 </a:solidFill>
@@ -10514,20 +11190,20 @@
               </a:rPr>
               <a:t>How this module connects to the playbook</a:t>
             </a:r>
-            <a:endParaRPr lang="en-US" sz="2700" dirty="0"/>
-          </a:p>
-        </p:txBody>
-      </p:sp>
-      <p:sp>
-        <p:nvSpPr>
-          <p:cNvPr id="8" name="Text 6"/>
-          <p:cNvSpPr/>
-          <p:nvPr/>
-        </p:nvSpPr>
-        <p:spPr>
-          <a:xfrm>
-            <a:off x="868680" y="1417320"/>
-            <a:ext cx="6903720" cy="4480560"/>
+            <a:endParaRPr lang="en-US" sz="3400" dirty="0"/>
+          </a:p>
+        </p:txBody>
+      </p:sp>
+      <p:sp>
+        <p:nvSpPr>
+          <p:cNvPr id="9" name="Text 7"/>
+          <p:cNvSpPr/>
+          <p:nvPr/>
+        </p:nvSpPr>
+        <p:spPr>
+          <a:xfrm>
+            <a:off x="868680" y="1508760"/>
+            <a:ext cx="6812280" cy="3977640"/>
           </a:xfrm>
           <a:prstGeom prst="rect">
             <a:avLst/>
@@ -10542,7 +11218,7 @@
           <a:lstStyle/>
           <a:p>
             <a:r>
-              <a:rPr lang="en-US" sz="1540" dirty="0">
+              <a:rPr lang="en-US" sz="1900" dirty="0">
                 <a:solidFill>
                   <a:srgbClr val="17364A"/>
                 </a:solidFill>
@@ -10550,13 +11226,13 @@
                 <a:ea typeface="Aptos" pitchFamily="34" charset="-122"/>
                 <a:cs typeface="Aptos" pitchFamily="34" charset="-120"/>
               </a:rPr>
-              <a:t>Play 11: Build and Deploy AI Solutions - This lesson informs Play 11 by helping learners connect the lesson topic to build and deploy.</a:t>
-            </a:r>
-            <a:endParaRPr lang="en-US" sz="1540" dirty="0"/>
-          </a:p>
-          <a:p>
-            <a:r>
-              <a:rPr lang="en-US" sz="1540" dirty="0">
+              <a:t>Play 11: Build and Deploy AI Solutions - This lesson informs Play 11 by helping learners connect the lesson.</a:t>
+            </a:r>
+            <a:endParaRPr lang="en-US" sz="1900" dirty="0"/>
+          </a:p>
+          <a:p>
+            <a:r>
+              <a:rPr lang="en-US" sz="1900" dirty="0">
                 <a:solidFill>
                   <a:srgbClr val="17364A"/>
                 </a:solidFill>
@@ -10564,13 +11240,13 @@
                 <a:ea typeface="Aptos" pitchFamily="34" charset="-122"/>
                 <a:cs typeface="Aptos" pitchFamily="34" charset="-120"/>
               </a:rPr>
-              <a:t>Play 1: Vision &amp; Guardrails - This lesson informs Play 1 by helping learners connect the lesson topic to vision &amp; guardrails work in.</a:t>
-            </a:r>
-            <a:endParaRPr lang="en-US" sz="1540" dirty="0"/>
-          </a:p>
-          <a:p>
-            <a:r>
-              <a:rPr lang="en-US" sz="1540" dirty="0">
+              <a:t>Play 1: Vision &amp; Guardrails - This lesson informs Play 1 by helping learners connect the lesson topic to.</a:t>
+            </a:r>
+            <a:endParaRPr lang="en-US" sz="1900" dirty="0"/>
+          </a:p>
+          <a:p>
+            <a:r>
+              <a:rPr lang="en-US" sz="1900" dirty="0">
                 <a:solidFill>
                   <a:srgbClr val="17364A"/>
                 </a:solidFill>
@@ -10578,13 +11254,13 @@
                 <a:ea typeface="Aptos" pitchFamily="34" charset="-122"/>
                 <a:cs typeface="Aptos" pitchFamily="34" charset="-120"/>
               </a:rPr>
-              <a:t>Play 7: Prioritize Use Cases - This lesson informs Play 7 by helping learners connect the lesson topic to prioritize use cases work.</a:t>
-            </a:r>
-            <a:endParaRPr lang="en-US" sz="1540" dirty="0"/>
-          </a:p>
-          <a:p>
-            <a:r>
-              <a:rPr lang="en-US" sz="1540" dirty="0">
+              <a:t>Play 7: Prioritize Use Cases - This lesson informs Play 7 by helping learners connect the lesson topic to.</a:t>
+            </a:r>
+            <a:endParaRPr lang="en-US" sz="1900" dirty="0"/>
+          </a:p>
+          <a:p>
+            <a:r>
+              <a:rPr lang="en-US" sz="1900" dirty="0">
                 <a:solidFill>
                   <a:srgbClr val="17364A"/>
                 </a:solidFill>
@@ -10592,15 +11268,15 @@
                 <a:ea typeface="Aptos" pitchFamily="34" charset="-122"/>
                 <a:cs typeface="Aptos" pitchFamily="34" charset="-120"/>
               </a:rPr>
-              <a:t>Play 2: Readiness Assessment - This lesson informs Play 2 by helping learners connect the lesson topic to readiness assessment work.</a:t>
-            </a:r>
-            <a:endParaRPr lang="en-US" sz="1540" dirty="0"/>
-          </a:p>
-        </p:txBody>
-      </p:sp>
-      <p:sp>
-        <p:nvSpPr>
-          <p:cNvPr id="9" name="Shape 7"/>
+              <a:t>Play 2: Readiness Assessment - This lesson informs Play 2 by helping learners connect the lesson topic to.</a:t>
+            </a:r>
+            <a:endParaRPr lang="en-US" sz="1900" dirty="0"/>
+          </a:p>
+        </p:txBody>
+      </p:sp>
+      <p:sp>
+        <p:nvSpPr>
+          <p:cNvPr id="10" name="Shape 8"/>
           <p:cNvSpPr/>
           <p:nvPr/>
         </p:nvSpPr>
@@ -10627,14 +11303,14 @@
       </p:sp>
       <p:sp>
         <p:nvSpPr>
-          <p:cNvPr id="10" name="Text 8"/>
+          <p:cNvPr id="11" name="Text 9"/>
           <p:cNvSpPr/>
           <p:nvPr/>
         </p:nvSpPr>
         <p:spPr>
           <a:xfrm>
             <a:off x="8211312" y="1563624"/>
-            <a:ext cx="2734056" cy="201168"/>
+            <a:ext cx="2734056" cy="256032"/>
           </a:xfrm>
           <a:prstGeom prst="rect">
             <a:avLst/>
@@ -10650,7 +11326,7 @@
               <a:buNone/>
             </a:pPr>
             <a:r>
-              <a:rPr lang="en-US" sz="950" b="1" dirty="0">
+              <a:rPr lang="en-US" sz="1300" b="1" dirty="0">
                 <a:solidFill>
                   <a:srgbClr val="0068B7"/>
                 </a:solidFill>
@@ -10660,20 +11336,20 @@
               </a:rPr>
               <a:t>Apply the lesson</a:t>
             </a:r>
-            <a:endParaRPr lang="en-US" sz="950" dirty="0"/>
-          </a:p>
-        </p:txBody>
-      </p:sp>
-      <p:sp>
-        <p:nvSpPr>
-          <p:cNvPr id="11" name="Text 9"/>
-          <p:cNvSpPr/>
-          <p:nvPr/>
-        </p:nvSpPr>
-        <p:spPr>
-          <a:xfrm>
-            <a:off x="8211312" y="1856232"/>
-            <a:ext cx="2734056" cy="1536192"/>
+            <a:endParaRPr lang="en-US" sz="1300" dirty="0"/>
+          </a:p>
+        </p:txBody>
+      </p:sp>
+      <p:sp>
+        <p:nvSpPr>
+          <p:cNvPr id="12" name="Text 10"/>
+          <p:cNvSpPr/>
+          <p:nvPr/>
+        </p:nvSpPr>
+        <p:spPr>
+          <a:xfrm>
+            <a:off x="8211312" y="1920240"/>
+            <a:ext cx="2734056" cy="1463040"/>
           </a:xfrm>
           <a:prstGeom prst="rect">
             <a:avLst/>
@@ -10691,7 +11367,7 @@
               <a:buNone/>
             </a:pPr>
             <a:r>
-              <a:rPr lang="en-US" sz="1250" dirty="0">
+              <a:rPr lang="en-US" sz="1550" dirty="0">
                 <a:solidFill>
                   <a:srgbClr val="17364A"/>
                 </a:solidFill>
@@ -10701,32 +11377,32 @@
               </a:rPr>
               <a:t>Use the related plays to identify decisions, participants, timing, approvals, and documentation needed for responsible implementation.</a:t>
             </a:r>
-            <a:endParaRPr lang="en-US" sz="1250" dirty="0"/>
-          </a:p>
-        </p:txBody>
-      </p:sp>
-      <p:sp>
-        <p:nvSpPr>
-          <p:cNvPr id="12" name="Shape 10"/>
-          <p:cNvSpPr/>
-          <p:nvPr/>
-        </p:nvSpPr>
-        <p:spPr>
-          <a:xfrm>
-            <a:off x="8046720" y="3794760"/>
-            <a:ext cx="3063240" cy="1508760"/>
+            <a:endParaRPr lang="en-US" sz="1550" dirty="0"/>
+          </a:p>
+        </p:txBody>
+      </p:sp>
+      <p:sp>
+        <p:nvSpPr>
+          <p:cNvPr id="13" name="Shape 11"/>
+          <p:cNvSpPr/>
+          <p:nvPr/>
+        </p:nvSpPr>
+        <p:spPr>
+          <a:xfrm>
+            <a:off x="7818120" y="3977640"/>
+            <a:ext cx="972312" cy="749808"/>
           </a:xfrm>
           <a:prstGeom prst="roundRect">
             <a:avLst>
-              <a:gd name="adj" fmla="val 7273"/>
+              <a:gd name="adj" fmla="val 14634"/>
             </a:avLst>
           </a:prstGeom>
           <a:solidFill>
-            <a:srgbClr val="FFF4D9"/>
+            <a:srgbClr val="0068B7"/>
           </a:solidFill>
           <a:ln w="12700">
             <a:solidFill>
-              <a:srgbClr val="B9D7E6"/>
+              <a:srgbClr val="0068B7"/>
             </a:solidFill>
             <a:prstDash val="solid"/>
           </a:ln>
@@ -10734,81 +11410,256 @@
       </p:sp>
       <p:sp>
         <p:nvSpPr>
-          <p:cNvPr id="13" name="Text 11"/>
-          <p:cNvSpPr/>
-          <p:nvPr/>
-        </p:nvSpPr>
-        <p:spPr>
-          <a:xfrm>
-            <a:off x="8211312" y="3941064"/>
-            <a:ext cx="2734056" cy="201168"/>
-          </a:xfrm>
-          <a:prstGeom prst="rect">
-            <a:avLst/>
-          </a:prstGeom>
-          <a:noFill/>
-          <a:ln/>
-        </p:spPr>
-        <p:txBody>
-          <a:bodyPr wrap="square" lIns="0" tIns="0" rIns="0" bIns="0" rtlCol="0" anchor="ctr"/>
-          <a:lstStyle/>
-          <a:p>
-            <a:pPr indent="0" marL="0">
-              <a:buNone/>
-            </a:pPr>
-            <a:r>
-              <a:rPr lang="en-US" sz="950" b="1" dirty="0">
-                <a:solidFill>
-                  <a:srgbClr val="0068B7"/>
-                </a:solidFill>
-                <a:latin typeface="Aptos" pitchFamily="34" charset="0"/>
-                <a:ea typeface="Aptos" pitchFamily="34" charset="-122"/>
-                <a:cs typeface="Aptos" pitchFamily="34" charset="-120"/>
-              </a:rPr>
-              <a:t>Keep in mind</a:t>
-            </a:r>
-            <a:endParaRPr lang="en-US" sz="950" dirty="0"/>
-          </a:p>
-        </p:txBody>
-      </p:sp>
-      <p:sp>
-        <p:nvSpPr>
           <p:cNvPr id="14" name="Text 12"/>
           <p:cNvSpPr/>
           <p:nvPr/>
         </p:nvSpPr>
         <p:spPr>
           <a:xfrm>
-            <a:off x="8211312" y="4233672"/>
-            <a:ext cx="2734056" cy="941832"/>
-          </a:xfrm>
-          <a:prstGeom prst="rect">
-            <a:avLst/>
-          </a:prstGeom>
-          <a:noFill/>
-          <a:ln/>
-        </p:spPr>
-        <p:txBody>
-          <a:bodyPr wrap="square" lIns="0" tIns="0" rIns="0" bIns="0" rtlCol="0" anchor="t">
+            <a:off x="7891272" y="4169664"/>
+            <a:ext cx="826008" cy="310896"/>
+          </a:xfrm>
+          <a:prstGeom prst="rect">
+            <a:avLst/>
+          </a:prstGeom>
+          <a:noFill/>
+          <a:ln/>
+        </p:spPr>
+        <p:txBody>
+          <a:bodyPr wrap="square" lIns="0" tIns="0" rIns="0" bIns="0" rtlCol="0" anchor="ctr">
             <a:normAutofit/>
           </a:bodyPr>
           <a:lstStyle/>
           <a:p>
-            <a:pPr indent="0" marL="0">
-              <a:buNone/>
-            </a:pPr>
-            <a:r>
-              <a:rPr lang="en-US" sz="1250" dirty="0">
-                <a:solidFill>
-                  <a:srgbClr val="17364A"/>
-                </a:solidFill>
-                <a:latin typeface="Aptos" pitchFamily="34" charset="0"/>
-                <a:ea typeface="Aptos" pitchFamily="34" charset="-122"/>
-                <a:cs typeface="Aptos" pitchFamily="34" charset="-120"/>
-              </a:rPr>
-              <a:t>The playbook connection helps turn training into agency work, not just individual knowledge.</a:t>
-            </a:r>
-            <a:endParaRPr lang="en-US" sz="1250" dirty="0"/>
+            <a:pPr algn="ctr" indent="0" marL="0">
+              <a:buNone/>
+            </a:pPr>
+            <a:r>
+              <a:rPr lang="en-US" sz="1500" b="1" dirty="0">
+                <a:solidFill>
+                  <a:srgbClr val="FFFFFF"/>
+                </a:solidFill>
+                <a:latin typeface="Aptos" pitchFamily="34" charset="0"/>
+                <a:ea typeface="Aptos" pitchFamily="34" charset="-122"/>
+                <a:cs typeface="Aptos" pitchFamily="34" charset="-120"/>
+              </a:rPr>
+              <a:t>Lesson</a:t>
+            </a:r>
+            <a:endParaRPr lang="en-US" sz="1500" dirty="0"/>
+          </a:p>
+        </p:txBody>
+      </p:sp>
+      <p:sp>
+        <p:nvSpPr>
+          <p:cNvPr id="15" name="Text 13"/>
+          <p:cNvSpPr/>
+          <p:nvPr/>
+        </p:nvSpPr>
+        <p:spPr>
+          <a:xfrm>
+            <a:off x="8817864" y="4187952"/>
+            <a:ext cx="201168" cy="256032"/>
+          </a:xfrm>
+          <a:prstGeom prst="rect">
+            <a:avLst/>
+          </a:prstGeom>
+          <a:noFill/>
+          <a:ln/>
+        </p:spPr>
+        <p:txBody>
+          <a:bodyPr wrap="square" lIns="0" tIns="0" rIns="0" bIns="0" rtlCol="0" anchor="ctr"/>
+          <a:lstStyle/>
+          <a:p>
+            <a:pPr algn="ctr" indent="0" marL="0">
+              <a:buNone/>
+            </a:pPr>
+            <a:r>
+              <a:rPr lang="en-US" sz="1800" b="1" dirty="0">
+                <a:solidFill>
+                  <a:srgbClr val="0068B7"/>
+                </a:solidFill>
+                <a:latin typeface="Aptos" pitchFamily="34" charset="0"/>
+                <a:ea typeface="Aptos" pitchFamily="34" charset="-122"/>
+                <a:cs typeface="Aptos" pitchFamily="34" charset="-120"/>
+              </a:rPr>
+              <a:t>â†’</a:t>
+            </a:r>
+            <a:endParaRPr lang="en-US" sz="1800" dirty="0"/>
+          </a:p>
+        </p:txBody>
+      </p:sp>
+      <p:sp>
+        <p:nvSpPr>
+          <p:cNvPr id="16" name="Shape 14"/>
+          <p:cNvSpPr/>
+          <p:nvPr/>
+        </p:nvSpPr>
+        <p:spPr>
+          <a:xfrm>
+            <a:off x="9046464" y="3977640"/>
+            <a:ext cx="972312" cy="749808"/>
+          </a:xfrm>
+          <a:prstGeom prst="roundRect">
+            <a:avLst>
+              <a:gd name="adj" fmla="val 14634"/>
+            </a:avLst>
+          </a:prstGeom>
+          <a:solidFill>
+            <a:srgbClr val="2F8A28"/>
+          </a:solidFill>
+          <a:ln w="12700">
+            <a:solidFill>
+              <a:srgbClr val="2F8A28"/>
+            </a:solidFill>
+            <a:prstDash val="solid"/>
+          </a:ln>
+        </p:spPr>
+      </p:sp>
+      <p:sp>
+        <p:nvSpPr>
+          <p:cNvPr id="17" name="Text 15"/>
+          <p:cNvSpPr/>
+          <p:nvPr/>
+        </p:nvSpPr>
+        <p:spPr>
+          <a:xfrm>
+            <a:off x="9119616" y="4169664"/>
+            <a:ext cx="826008" cy="310896"/>
+          </a:xfrm>
+          <a:prstGeom prst="rect">
+            <a:avLst/>
+          </a:prstGeom>
+          <a:noFill/>
+          <a:ln/>
+        </p:spPr>
+        <p:txBody>
+          <a:bodyPr wrap="square" lIns="0" tIns="0" rIns="0" bIns="0" rtlCol="0" anchor="ctr">
+            <a:normAutofit/>
+          </a:bodyPr>
+          <a:lstStyle/>
+          <a:p>
+            <a:pPr algn="ctr" indent="0" marL="0">
+              <a:buNone/>
+            </a:pPr>
+            <a:r>
+              <a:rPr lang="en-US" sz="1500" b="1" dirty="0">
+                <a:solidFill>
+                  <a:srgbClr val="FFFFFF"/>
+                </a:solidFill>
+                <a:latin typeface="Aptos" pitchFamily="34" charset="0"/>
+                <a:ea typeface="Aptos" pitchFamily="34" charset="-122"/>
+                <a:cs typeface="Aptos" pitchFamily="34" charset="-120"/>
+              </a:rPr>
+              <a:t>Plays</a:t>
+            </a:r>
+            <a:endParaRPr lang="en-US" sz="1500" dirty="0"/>
+          </a:p>
+        </p:txBody>
+      </p:sp>
+      <p:sp>
+        <p:nvSpPr>
+          <p:cNvPr id="18" name="Text 16"/>
+          <p:cNvSpPr/>
+          <p:nvPr/>
+        </p:nvSpPr>
+        <p:spPr>
+          <a:xfrm>
+            <a:off x="10046208" y="4187952"/>
+            <a:ext cx="201168" cy="256032"/>
+          </a:xfrm>
+          <a:prstGeom prst="rect">
+            <a:avLst/>
+          </a:prstGeom>
+          <a:noFill/>
+          <a:ln/>
+        </p:spPr>
+        <p:txBody>
+          <a:bodyPr wrap="square" lIns="0" tIns="0" rIns="0" bIns="0" rtlCol="0" anchor="ctr"/>
+          <a:lstStyle/>
+          <a:p>
+            <a:pPr algn="ctr" indent="0" marL="0">
+              <a:buNone/>
+            </a:pPr>
+            <a:r>
+              <a:rPr lang="en-US" sz="1800" b="1" dirty="0">
+                <a:solidFill>
+                  <a:srgbClr val="0068B7"/>
+                </a:solidFill>
+                <a:latin typeface="Aptos" pitchFamily="34" charset="0"/>
+                <a:ea typeface="Aptos" pitchFamily="34" charset="-122"/>
+                <a:cs typeface="Aptos" pitchFamily="34" charset="-120"/>
+              </a:rPr>
+              <a:t>â†’</a:t>
+            </a:r>
+            <a:endParaRPr lang="en-US" sz="1800" dirty="0"/>
+          </a:p>
+        </p:txBody>
+      </p:sp>
+      <p:sp>
+        <p:nvSpPr>
+          <p:cNvPr id="19" name="Shape 17"/>
+          <p:cNvSpPr/>
+          <p:nvPr/>
+        </p:nvSpPr>
+        <p:spPr>
+          <a:xfrm>
+            <a:off x="10274808" y="3977640"/>
+            <a:ext cx="972312" cy="749808"/>
+          </a:xfrm>
+          <a:prstGeom prst="roundRect">
+            <a:avLst>
+              <a:gd name="adj" fmla="val 14634"/>
+            </a:avLst>
+          </a:prstGeom>
+          <a:solidFill>
+            <a:srgbClr val="6A4CA3"/>
+          </a:solidFill>
+          <a:ln w="12700">
+            <a:solidFill>
+              <a:srgbClr val="6A4CA3"/>
+            </a:solidFill>
+            <a:prstDash val="solid"/>
+          </a:ln>
+        </p:spPr>
+      </p:sp>
+      <p:sp>
+        <p:nvSpPr>
+          <p:cNvPr id="20" name="Text 18"/>
+          <p:cNvSpPr/>
+          <p:nvPr/>
+        </p:nvSpPr>
+        <p:spPr>
+          <a:xfrm>
+            <a:off x="10347960" y="4169664"/>
+            <a:ext cx="826008" cy="310896"/>
+          </a:xfrm>
+          <a:prstGeom prst="rect">
+            <a:avLst/>
+          </a:prstGeom>
+          <a:noFill/>
+          <a:ln/>
+        </p:spPr>
+        <p:txBody>
+          <a:bodyPr wrap="square" lIns="0" tIns="0" rIns="0" bIns="0" rtlCol="0" anchor="ctr">
+            <a:normAutofit/>
+          </a:bodyPr>
+          <a:lstStyle/>
+          <a:p>
+            <a:pPr algn="ctr" indent="0" marL="0">
+              <a:buNone/>
+            </a:pPr>
+            <a:r>
+              <a:rPr lang="en-US" sz="1500" b="1" dirty="0">
+                <a:solidFill>
+                  <a:srgbClr val="FFFFFF"/>
+                </a:solidFill>
+                <a:latin typeface="Aptos" pitchFamily="34" charset="0"/>
+                <a:ea typeface="Aptos" pitchFamily="34" charset="-122"/>
+                <a:cs typeface="Aptos" pitchFamily="34" charset="-120"/>
+              </a:rPr>
+              <a:t>Action</a:t>
+            </a:r>
+            <a:endParaRPr lang="en-US" sz="1500" dirty="0"/>
           </a:p>
         </p:txBody>
       </p:sp>
@@ -11005,7 +11856,7 @@
                 <a:ea typeface="Aptos" pitchFamily="34" charset="-122"/>
                 <a:cs typeface="Aptos" pitchFamily="34" charset="-120"/>
               </a:rPr>
-              <a:t>© Paula Soper</a:t>
+              <a:t>Â© Paula Soper</a:t>
             </a:r>
             <a:endParaRPr lang="en-US" sz="800" dirty="0"/>
           </a:p>
@@ -11019,8 +11870,47 @@
         </p:nvSpPr>
         <p:spPr>
           <a:xfrm>
+            <a:off x="11137392" y="6510528"/>
+            <a:ext cx="411480" cy="201168"/>
+          </a:xfrm>
+          <a:prstGeom prst="rect">
+            <a:avLst/>
+          </a:prstGeom>
+          <a:noFill/>
+          <a:ln/>
+        </p:spPr>
+        <p:txBody>
+          <a:bodyPr wrap="square" lIns="0" tIns="0" rIns="0" bIns="0" rtlCol="0" anchor="ctr"/>
+          <a:lstStyle/>
+          <a:p>
+            <a:pPr algn="r" indent="0" marL="0">
+              <a:buNone/>
+            </a:pPr>
+            <a:r>
+              <a:rPr lang="en-US" sz="900" dirty="0">
+                <a:solidFill>
+                  <a:srgbClr val="5F7181"/>
+                </a:solidFill>
+                <a:latin typeface="Aptos" pitchFamily="34" charset="0"/>
+                <a:ea typeface="Aptos" pitchFamily="34" charset="-122"/>
+                <a:cs typeface="Aptos" pitchFamily="34" charset="-120"/>
+              </a:rPr>
+              <a:t>4</a:t>
+            </a:r>
+            <a:endParaRPr lang="en-US" sz="900" dirty="0"/>
+          </a:p>
+        </p:txBody>
+      </p:sp>
+      <p:sp>
+        <p:nvSpPr>
+          <p:cNvPr id="8" name="Text 6"/>
+          <p:cNvSpPr/>
+          <p:nvPr/>
+        </p:nvSpPr>
+        <p:spPr>
+          <a:xfrm>
             <a:off x="640080" y="658368"/>
-            <a:ext cx="10881360" cy="566928"/>
+            <a:ext cx="10881360" cy="713232"/>
           </a:xfrm>
           <a:prstGeom prst="rect">
             <a:avLst/>
@@ -11038,7 +11928,7 @@
               <a:buNone/>
             </a:pPr>
             <a:r>
-              <a:rPr lang="en-US" sz="2700" b="1" dirty="0">
+              <a:rPr lang="en-US" sz="3400" b="1" dirty="0">
                 <a:solidFill>
                   <a:srgbClr val="003A63"/>
                 </a:solidFill>
@@ -11048,20 +11938,20 @@
               </a:rPr>
               <a:t>Related toolkit resources</a:t>
             </a:r>
-            <a:endParaRPr lang="en-US" sz="2700" dirty="0"/>
-          </a:p>
-        </p:txBody>
-      </p:sp>
-      <p:sp>
-        <p:nvSpPr>
-          <p:cNvPr id="8" name="Text 6"/>
-          <p:cNvSpPr/>
-          <p:nvPr/>
-        </p:nvSpPr>
-        <p:spPr>
-          <a:xfrm>
-            <a:off x="868680" y="1417320"/>
-            <a:ext cx="6903720" cy="4480560"/>
+            <a:endParaRPr lang="en-US" sz="3400" dirty="0"/>
+          </a:p>
+        </p:txBody>
+      </p:sp>
+      <p:sp>
+        <p:nvSpPr>
+          <p:cNvPr id="9" name="Text 7"/>
+          <p:cNvSpPr/>
+          <p:nvPr/>
+        </p:nvSpPr>
+        <p:spPr>
+          <a:xfrm>
+            <a:off x="868680" y="1508760"/>
+            <a:ext cx="6812280" cy="3977640"/>
           </a:xfrm>
           <a:prstGeom prst="rect">
             <a:avLst/>
@@ -11076,7 +11966,7 @@
           <a:lstStyle/>
           <a:p>
             <a:r>
-              <a:rPr lang="en-US" sz="1460" dirty="0">
+              <a:rPr lang="en-US" sz="1850" dirty="0">
                 <a:solidFill>
                   <a:srgbClr val="17364A"/>
                 </a:solidFill>
@@ -11084,13 +11974,13 @@
                 <a:ea typeface="Aptos" pitchFamily="34" charset="-122"/>
                 <a:cs typeface="Aptos" pitchFamily="34" charset="-120"/>
               </a:rPr>
-              <a:t>Tool 3: Equity Impact Assessment Checklist (Checklist) - Use this tool to complete or strengthen the practical exercise for the.</a:t>
-            </a:r>
-            <a:endParaRPr lang="en-US" sz="1460" dirty="0"/>
-          </a:p>
-          <a:p>
-            <a:r>
-              <a:rPr lang="en-US" sz="1460" dirty="0">
+              <a:t>Tool 3: Equity Impact Assessment Checklist (Checklist) - Use this tool to complete or strengthen the.</a:t>
+            </a:r>
+            <a:endParaRPr lang="en-US" sz="1850" dirty="0"/>
+          </a:p>
+          <a:p>
+            <a:r>
+              <a:rPr lang="en-US" sz="1850" dirty="0">
                 <a:solidFill>
                   <a:srgbClr val="17364A"/>
                 </a:solidFill>
@@ -11098,13 +11988,13 @@
                 <a:ea typeface="Aptos" pitchFamily="34" charset="-122"/>
                 <a:cs typeface="Aptos" pitchFamily="34" charset="-120"/>
               </a:rPr>
-              <a:t>Tool 4: AI Policy Landscape Scan (Worksheet) - Use AI Policy Landscape Scan to translate this lesson into a documented public health.</a:t>
-            </a:r>
-            <a:endParaRPr lang="en-US" sz="1460" dirty="0"/>
-          </a:p>
-          <a:p>
-            <a:r>
-              <a:rPr lang="en-US" sz="1460" dirty="0">
+              <a:t>Tool 4: AI Policy Landscape Scan (Worksheet) - Use AI Policy Landscape Scan to translate this lesson into a.</a:t>
+            </a:r>
+            <a:endParaRPr lang="en-US" sz="1850" dirty="0"/>
+          </a:p>
+          <a:p>
+            <a:r>
+              <a:rPr lang="en-US" sz="1850" dirty="0">
                 <a:solidFill>
                   <a:srgbClr val="17364A"/>
                 </a:solidFill>
@@ -11112,13 +12002,13 @@
                 <a:ea typeface="Aptos" pitchFamily="34" charset="-122"/>
                 <a:cs typeface="Aptos" pitchFamily="34" charset="-120"/>
               </a:rPr>
-              <a:t>Tool 5: AI Environmental and Resource Impact Review (Checklist) - Use AI Environmental and Resource Impact Review to translate this.</a:t>
-            </a:r>
-            <a:endParaRPr lang="en-US" sz="1460" dirty="0"/>
-          </a:p>
-          <a:p>
-            <a:r>
-              <a:rPr lang="en-US" sz="1460" dirty="0">
+              <a:t>Tool 5: AI Environmental and Resource Impact Review (Checklist) - Use AI Environmental and Resource Impact.</a:t>
+            </a:r>
+            <a:endParaRPr lang="en-US" sz="1850" dirty="0"/>
+          </a:p>
+          <a:p>
+            <a:r>
+              <a:rPr lang="en-US" sz="1850" dirty="0">
                 <a:solidFill>
                   <a:srgbClr val="17364A"/>
                 </a:solidFill>
@@ -11126,29 +12016,15 @@
                 <a:ea typeface="Aptos" pitchFamily="34" charset="-122"/>
                 <a:cs typeface="Aptos" pitchFamily="34" charset="-120"/>
               </a:rPr>
-              <a:t>Tool 6: Human-Centered AI Decision Rule Checklist (Checklist) - Use Human-Centered AI Decision Rule Checklist to translate this.</a:t>
-            </a:r>
-            <a:endParaRPr lang="en-US" sz="1460" dirty="0"/>
-          </a:p>
-          <a:p>
-            <a:r>
-              <a:rPr lang="en-US" sz="1460" dirty="0">
-                <a:solidFill>
-                  <a:srgbClr val="17364A"/>
-                </a:solidFill>
-                <a:latin typeface="Aptos" pitchFamily="34" charset="0"/>
-                <a:ea typeface="Aptos" pitchFamily="34" charset="-122"/>
-                <a:cs typeface="Aptos" pitchFamily="34" charset="-120"/>
-              </a:rPr>
-              <a:t>Tool 8: AI Project Charter (Planning) - Use AI Project Charter to translate this lesson into a documented public health AI planning,.</a:t>
-            </a:r>
-            <a:endParaRPr lang="en-US" sz="1460" dirty="0"/>
-          </a:p>
-        </p:txBody>
-      </p:sp>
-      <p:sp>
-        <p:nvSpPr>
-          <p:cNvPr id="9" name="Shape 7"/>
+              <a:t>Tool 6: Human-Centered AI Decision Rule Checklist (Checklist) - Use Human-Centered AI Decision Rule.</a:t>
+            </a:r>
+            <a:endParaRPr lang="en-US" sz="1850" dirty="0"/>
+          </a:p>
+        </p:txBody>
+      </p:sp>
+      <p:sp>
+        <p:nvSpPr>
+          <p:cNvPr id="10" name="Shape 8"/>
           <p:cNvSpPr/>
           <p:nvPr/>
         </p:nvSpPr>
@@ -11175,14 +12051,14 @@
       </p:sp>
       <p:sp>
         <p:nvSpPr>
-          <p:cNvPr id="10" name="Text 8"/>
+          <p:cNvPr id="11" name="Text 9"/>
           <p:cNvSpPr/>
           <p:nvPr/>
         </p:nvSpPr>
         <p:spPr>
           <a:xfrm>
             <a:off x="8211312" y="1563624"/>
-            <a:ext cx="2734056" cy="201168"/>
+            <a:ext cx="2734056" cy="256032"/>
           </a:xfrm>
           <a:prstGeom prst="rect">
             <a:avLst/>
@@ -11198,7 +12074,7 @@
               <a:buNone/>
             </a:pPr>
             <a:r>
-              <a:rPr lang="en-US" sz="950" b="1" dirty="0">
+              <a:rPr lang="en-US" sz="1300" b="1" dirty="0">
                 <a:solidFill>
                   <a:srgbClr val="0068B7"/>
                 </a:solidFill>
@@ -11208,20 +12084,20 @@
               </a:rPr>
               <a:t>Use the tools</a:t>
             </a:r>
-            <a:endParaRPr lang="en-US" sz="950" dirty="0"/>
-          </a:p>
-        </p:txBody>
-      </p:sp>
-      <p:sp>
-        <p:nvSpPr>
-          <p:cNvPr id="11" name="Text 9"/>
-          <p:cNvSpPr/>
-          <p:nvPr/>
-        </p:nvSpPr>
-        <p:spPr>
-          <a:xfrm>
-            <a:off x="8211312" y="1856232"/>
-            <a:ext cx="2734056" cy="1536192"/>
+            <a:endParaRPr lang="en-US" sz="1300" dirty="0"/>
+          </a:p>
+        </p:txBody>
+      </p:sp>
+      <p:sp>
+        <p:nvSpPr>
+          <p:cNvPr id="12" name="Text 10"/>
+          <p:cNvSpPr/>
+          <p:nvPr/>
+        </p:nvSpPr>
+        <p:spPr>
+          <a:xfrm>
+            <a:off x="8211312" y="1920240"/>
+            <a:ext cx="2734056" cy="1463040"/>
           </a:xfrm>
           <a:prstGeom prst="rect">
             <a:avLst/>
@@ -11239,7 +12115,7 @@
               <a:buNone/>
             </a:pPr>
             <a:r>
-              <a:rPr lang="en-US" sz="1250" dirty="0">
+              <a:rPr lang="en-US" sz="1550" dirty="0">
                 <a:solidFill>
                   <a:srgbClr val="17364A"/>
                 </a:solidFill>
@@ -11249,32 +12125,32 @@
               </a:rPr>
               <a:t>Use linked tools when your department needs a structured worksheet, template, checklist, review process, or documentation artifact.</a:t>
             </a:r>
-            <a:endParaRPr lang="en-US" sz="1250" dirty="0"/>
-          </a:p>
-        </p:txBody>
-      </p:sp>
-      <p:sp>
-        <p:nvSpPr>
-          <p:cNvPr id="12" name="Shape 10"/>
-          <p:cNvSpPr/>
-          <p:nvPr/>
-        </p:nvSpPr>
-        <p:spPr>
-          <a:xfrm>
-            <a:off x="8046720" y="3794760"/>
-            <a:ext cx="3063240" cy="1508760"/>
+            <a:endParaRPr lang="en-US" sz="1550" dirty="0"/>
+          </a:p>
+        </p:txBody>
+      </p:sp>
+      <p:sp>
+        <p:nvSpPr>
+          <p:cNvPr id="13" name="Shape 11"/>
+          <p:cNvSpPr/>
+          <p:nvPr/>
+        </p:nvSpPr>
+        <p:spPr>
+          <a:xfrm>
+            <a:off x="7818120" y="3977640"/>
+            <a:ext cx="972312" cy="749808"/>
           </a:xfrm>
           <a:prstGeom prst="roundRect">
             <a:avLst>
-              <a:gd name="adj" fmla="val 7273"/>
+              <a:gd name="adj" fmla="val 14634"/>
             </a:avLst>
           </a:prstGeom>
           <a:solidFill>
-            <a:srgbClr val="EEF8ED"/>
+            <a:srgbClr val="0068B7"/>
           </a:solidFill>
           <a:ln w="12700">
             <a:solidFill>
-              <a:srgbClr val="B9D7E6"/>
+              <a:srgbClr val="0068B7"/>
             </a:solidFill>
             <a:prstDash val="solid"/>
           </a:ln>
@@ -11282,81 +12158,256 @@
       </p:sp>
       <p:sp>
         <p:nvSpPr>
-          <p:cNvPr id="13" name="Text 11"/>
-          <p:cNvSpPr/>
-          <p:nvPr/>
-        </p:nvSpPr>
-        <p:spPr>
-          <a:xfrm>
-            <a:off x="8211312" y="3941064"/>
-            <a:ext cx="2734056" cy="201168"/>
-          </a:xfrm>
-          <a:prstGeom prst="rect">
-            <a:avLst/>
-          </a:prstGeom>
-          <a:noFill/>
-          <a:ln/>
-        </p:spPr>
-        <p:txBody>
-          <a:bodyPr wrap="square" lIns="0" tIns="0" rIns="0" bIns="0" rtlCol="0" anchor="ctr"/>
-          <a:lstStyle/>
-          <a:p>
-            <a:pPr indent="0" marL="0">
-              <a:buNone/>
-            </a:pPr>
-            <a:r>
-              <a:rPr lang="en-US" sz="950" b="1" dirty="0">
-                <a:solidFill>
-                  <a:srgbClr val="0068B7"/>
-                </a:solidFill>
-                <a:latin typeface="Aptos" pitchFamily="34" charset="0"/>
-                <a:ea typeface="Aptos" pitchFamily="34" charset="-122"/>
-                <a:cs typeface="Aptos" pitchFamily="34" charset="-120"/>
-              </a:rPr>
-              <a:t>Avoid duplication</a:t>
-            </a:r>
-            <a:endParaRPr lang="en-US" sz="950" dirty="0"/>
-          </a:p>
-        </p:txBody>
-      </p:sp>
-      <p:sp>
-        <p:nvSpPr>
           <p:cNvPr id="14" name="Text 12"/>
           <p:cNvSpPr/>
           <p:nvPr/>
         </p:nvSpPr>
         <p:spPr>
           <a:xfrm>
-            <a:off x="8211312" y="4233672"/>
-            <a:ext cx="2734056" cy="941832"/>
-          </a:xfrm>
-          <a:prstGeom prst="rect">
-            <a:avLst/>
-          </a:prstGeom>
-          <a:noFill/>
-          <a:ln/>
-        </p:spPr>
-        <p:txBody>
-          <a:bodyPr wrap="square" lIns="0" tIns="0" rIns="0" bIns="0" rtlCol="0" anchor="t">
+            <a:off x="7891272" y="4169664"/>
+            <a:ext cx="826008" cy="310896"/>
+          </a:xfrm>
+          <a:prstGeom prst="rect">
+            <a:avLst/>
+          </a:prstGeom>
+          <a:noFill/>
+          <a:ln/>
+        </p:spPr>
+        <p:txBody>
+          <a:bodyPr wrap="square" lIns="0" tIns="0" rIns="0" bIns="0" rtlCol="0" anchor="ctr">
             <a:normAutofit/>
           </a:bodyPr>
           <a:lstStyle/>
           <a:p>
-            <a:pPr indent="0" marL="0">
-              <a:buNone/>
-            </a:pPr>
-            <a:r>
-              <a:rPr lang="en-US" sz="1250" dirty="0">
-                <a:solidFill>
-                  <a:srgbClr val="17364A"/>
-                </a:solidFill>
-                <a:latin typeface="Aptos" pitchFamily="34" charset="0"/>
-                <a:ea typeface="Aptos" pitchFamily="34" charset="-122"/>
-                <a:cs typeface="Aptos" pitchFamily="34" charset="-120"/>
-              </a:rPr>
-              <a:t>If your department already has a strong equivalent tool, adapt or use the existing process instead of recreating it.</a:t>
-            </a:r>
-            <a:endParaRPr lang="en-US" sz="1250" dirty="0"/>
+            <a:pPr algn="ctr" indent="0" marL="0">
+              <a:buNone/>
+            </a:pPr>
+            <a:r>
+              <a:rPr lang="en-US" sz="1500" b="1" dirty="0">
+                <a:solidFill>
+                  <a:srgbClr val="FFFFFF"/>
+                </a:solidFill>
+                <a:latin typeface="Aptos" pitchFamily="34" charset="0"/>
+                <a:ea typeface="Aptos" pitchFamily="34" charset="-122"/>
+                <a:cs typeface="Aptos" pitchFamily="34" charset="-120"/>
+              </a:rPr>
+              <a:t>Concept</a:t>
+            </a:r>
+            <a:endParaRPr lang="en-US" sz="1500" dirty="0"/>
+          </a:p>
+        </p:txBody>
+      </p:sp>
+      <p:sp>
+        <p:nvSpPr>
+          <p:cNvPr id="15" name="Text 13"/>
+          <p:cNvSpPr/>
+          <p:nvPr/>
+        </p:nvSpPr>
+        <p:spPr>
+          <a:xfrm>
+            <a:off x="8817864" y="4187952"/>
+            <a:ext cx="201168" cy="256032"/>
+          </a:xfrm>
+          <a:prstGeom prst="rect">
+            <a:avLst/>
+          </a:prstGeom>
+          <a:noFill/>
+          <a:ln/>
+        </p:spPr>
+        <p:txBody>
+          <a:bodyPr wrap="square" lIns="0" tIns="0" rIns="0" bIns="0" rtlCol="0" anchor="ctr"/>
+          <a:lstStyle/>
+          <a:p>
+            <a:pPr algn="ctr" indent="0" marL="0">
+              <a:buNone/>
+            </a:pPr>
+            <a:r>
+              <a:rPr lang="en-US" sz="1800" b="1" dirty="0">
+                <a:solidFill>
+                  <a:srgbClr val="0068B7"/>
+                </a:solidFill>
+                <a:latin typeface="Aptos" pitchFamily="34" charset="0"/>
+                <a:ea typeface="Aptos" pitchFamily="34" charset="-122"/>
+                <a:cs typeface="Aptos" pitchFamily="34" charset="-120"/>
+              </a:rPr>
+              <a:t>â†’</a:t>
+            </a:r>
+            <a:endParaRPr lang="en-US" sz="1800" dirty="0"/>
+          </a:p>
+        </p:txBody>
+      </p:sp>
+      <p:sp>
+        <p:nvSpPr>
+          <p:cNvPr id="16" name="Shape 14"/>
+          <p:cNvSpPr/>
+          <p:nvPr/>
+        </p:nvSpPr>
+        <p:spPr>
+          <a:xfrm>
+            <a:off x="9046464" y="3977640"/>
+            <a:ext cx="972312" cy="749808"/>
+          </a:xfrm>
+          <a:prstGeom prst="roundRect">
+            <a:avLst>
+              <a:gd name="adj" fmla="val 14634"/>
+            </a:avLst>
+          </a:prstGeom>
+          <a:solidFill>
+            <a:srgbClr val="2F8A28"/>
+          </a:solidFill>
+          <a:ln w="12700">
+            <a:solidFill>
+              <a:srgbClr val="2F8A28"/>
+            </a:solidFill>
+            <a:prstDash val="solid"/>
+          </a:ln>
+        </p:spPr>
+      </p:sp>
+      <p:sp>
+        <p:nvSpPr>
+          <p:cNvPr id="17" name="Text 15"/>
+          <p:cNvSpPr/>
+          <p:nvPr/>
+        </p:nvSpPr>
+        <p:spPr>
+          <a:xfrm>
+            <a:off x="9119616" y="4169664"/>
+            <a:ext cx="826008" cy="310896"/>
+          </a:xfrm>
+          <a:prstGeom prst="rect">
+            <a:avLst/>
+          </a:prstGeom>
+          <a:noFill/>
+          <a:ln/>
+        </p:spPr>
+        <p:txBody>
+          <a:bodyPr wrap="square" lIns="0" tIns="0" rIns="0" bIns="0" rtlCol="0" anchor="ctr">
+            <a:normAutofit/>
+          </a:bodyPr>
+          <a:lstStyle/>
+          <a:p>
+            <a:pPr algn="ctr" indent="0" marL="0">
+              <a:buNone/>
+            </a:pPr>
+            <a:r>
+              <a:rPr lang="en-US" sz="1500" b="1" dirty="0">
+                <a:solidFill>
+                  <a:srgbClr val="FFFFFF"/>
+                </a:solidFill>
+                <a:latin typeface="Aptos" pitchFamily="34" charset="0"/>
+                <a:ea typeface="Aptos" pitchFamily="34" charset="-122"/>
+                <a:cs typeface="Aptos" pitchFamily="34" charset="-120"/>
+              </a:rPr>
+              <a:t>Tool</a:t>
+            </a:r>
+            <a:endParaRPr lang="en-US" sz="1500" dirty="0"/>
+          </a:p>
+        </p:txBody>
+      </p:sp>
+      <p:sp>
+        <p:nvSpPr>
+          <p:cNvPr id="18" name="Text 16"/>
+          <p:cNvSpPr/>
+          <p:nvPr/>
+        </p:nvSpPr>
+        <p:spPr>
+          <a:xfrm>
+            <a:off x="10046208" y="4187952"/>
+            <a:ext cx="201168" cy="256032"/>
+          </a:xfrm>
+          <a:prstGeom prst="rect">
+            <a:avLst/>
+          </a:prstGeom>
+          <a:noFill/>
+          <a:ln/>
+        </p:spPr>
+        <p:txBody>
+          <a:bodyPr wrap="square" lIns="0" tIns="0" rIns="0" bIns="0" rtlCol="0" anchor="ctr"/>
+          <a:lstStyle/>
+          <a:p>
+            <a:pPr algn="ctr" indent="0" marL="0">
+              <a:buNone/>
+            </a:pPr>
+            <a:r>
+              <a:rPr lang="en-US" sz="1800" b="1" dirty="0">
+                <a:solidFill>
+                  <a:srgbClr val="0068B7"/>
+                </a:solidFill>
+                <a:latin typeface="Aptos" pitchFamily="34" charset="0"/>
+                <a:ea typeface="Aptos" pitchFamily="34" charset="-122"/>
+                <a:cs typeface="Aptos" pitchFamily="34" charset="-120"/>
+              </a:rPr>
+              <a:t>â†’</a:t>
+            </a:r>
+            <a:endParaRPr lang="en-US" sz="1800" dirty="0"/>
+          </a:p>
+        </p:txBody>
+      </p:sp>
+      <p:sp>
+        <p:nvSpPr>
+          <p:cNvPr id="19" name="Shape 17"/>
+          <p:cNvSpPr/>
+          <p:nvPr/>
+        </p:nvSpPr>
+        <p:spPr>
+          <a:xfrm>
+            <a:off x="10274808" y="3977640"/>
+            <a:ext cx="972312" cy="749808"/>
+          </a:xfrm>
+          <a:prstGeom prst="roundRect">
+            <a:avLst>
+              <a:gd name="adj" fmla="val 14634"/>
+            </a:avLst>
+          </a:prstGeom>
+          <a:solidFill>
+            <a:srgbClr val="D69A2D"/>
+          </a:solidFill>
+          <a:ln w="12700">
+            <a:solidFill>
+              <a:srgbClr val="D69A2D"/>
+            </a:solidFill>
+            <a:prstDash val="solid"/>
+          </a:ln>
+        </p:spPr>
+      </p:sp>
+      <p:sp>
+        <p:nvSpPr>
+          <p:cNvPr id="20" name="Text 18"/>
+          <p:cNvSpPr/>
+          <p:nvPr/>
+        </p:nvSpPr>
+        <p:spPr>
+          <a:xfrm>
+            <a:off x="10347960" y="4169664"/>
+            <a:ext cx="826008" cy="310896"/>
+          </a:xfrm>
+          <a:prstGeom prst="rect">
+            <a:avLst/>
+          </a:prstGeom>
+          <a:noFill/>
+          <a:ln/>
+        </p:spPr>
+        <p:txBody>
+          <a:bodyPr wrap="square" lIns="0" tIns="0" rIns="0" bIns="0" rtlCol="0" anchor="ctr">
+            <a:normAutofit/>
+          </a:bodyPr>
+          <a:lstStyle/>
+          <a:p>
+            <a:pPr algn="ctr" indent="0" marL="0">
+              <a:buNone/>
+            </a:pPr>
+            <a:r>
+              <a:rPr lang="en-US" sz="1500" b="1" dirty="0">
+                <a:solidFill>
+                  <a:srgbClr val="FFFFFF"/>
+                </a:solidFill>
+                <a:latin typeface="Aptos" pitchFamily="34" charset="0"/>
+                <a:ea typeface="Aptos" pitchFamily="34" charset="-122"/>
+                <a:cs typeface="Aptos" pitchFamily="34" charset="-120"/>
+              </a:rPr>
+              <a:t>Artifact</a:t>
+            </a:r>
+            <a:endParaRPr lang="en-US" sz="1500" dirty="0"/>
           </a:p>
         </p:txBody>
       </p:sp>
@@ -11553,7 +12604,7 @@
                 <a:ea typeface="Aptos" pitchFamily="34" charset="-122"/>
                 <a:cs typeface="Aptos" pitchFamily="34" charset="-120"/>
               </a:rPr>
-              <a:t>© Paula Soper</a:t>
+              <a:t>Â© Paula Soper</a:t>
             </a:r>
             <a:endParaRPr lang="en-US" sz="800" dirty="0"/>
           </a:p>
@@ -11561,7 +12612,46 @@
       </p:sp>
       <p:sp>
         <p:nvSpPr>
-          <p:cNvPr id="7" name="Shape 5"/>
+          <p:cNvPr id="7" name="Text 5"/>
+          <p:cNvSpPr/>
+          <p:nvPr/>
+        </p:nvSpPr>
+        <p:spPr>
+          <a:xfrm>
+            <a:off x="11137392" y="6510528"/>
+            <a:ext cx="411480" cy="201168"/>
+          </a:xfrm>
+          <a:prstGeom prst="rect">
+            <a:avLst/>
+          </a:prstGeom>
+          <a:noFill/>
+          <a:ln/>
+        </p:spPr>
+        <p:txBody>
+          <a:bodyPr wrap="square" lIns="0" tIns="0" rIns="0" bIns="0" rtlCol="0" anchor="ctr"/>
+          <a:lstStyle/>
+          <a:p>
+            <a:pPr algn="r" indent="0" marL="0">
+              <a:buNone/>
+            </a:pPr>
+            <a:r>
+              <a:rPr lang="en-US" sz="900" dirty="0">
+                <a:solidFill>
+                  <a:srgbClr val="5F7181"/>
+                </a:solidFill>
+                <a:latin typeface="Aptos" pitchFamily="34" charset="0"/>
+                <a:ea typeface="Aptos" pitchFamily="34" charset="-122"/>
+                <a:cs typeface="Aptos" pitchFamily="34" charset="-120"/>
+              </a:rPr>
+              <a:t>5</a:t>
+            </a:r>
+            <a:endParaRPr lang="en-US" sz="900" dirty="0"/>
+          </a:p>
+        </p:txBody>
+      </p:sp>
+      <p:sp>
+        <p:nvSpPr>
+          <p:cNvPr id="8" name="Shape 6"/>
           <p:cNvSpPr/>
           <p:nvPr/>
         </p:nvSpPr>
@@ -11586,7 +12676,7 @@
       </p:sp>
       <p:sp>
         <p:nvSpPr>
-          <p:cNvPr id="8" name="Text 6"/>
+          <p:cNvPr id="9" name="Text 7"/>
           <p:cNvSpPr/>
           <p:nvPr/>
         </p:nvSpPr>
@@ -11625,14 +12715,14 @@
       </p:sp>
       <p:sp>
         <p:nvSpPr>
-          <p:cNvPr id="9" name="Text 7"/>
+          <p:cNvPr id="10" name="Text 8"/>
           <p:cNvSpPr/>
           <p:nvPr/>
         </p:nvSpPr>
         <p:spPr>
           <a:xfrm>
             <a:off x="640080" y="621792"/>
-            <a:ext cx="10881360" cy="566928"/>
+            <a:ext cx="10881360" cy="713232"/>
           </a:xfrm>
           <a:prstGeom prst="rect">
             <a:avLst/>
@@ -11650,7 +12740,7 @@
               <a:buNone/>
             </a:pPr>
             <a:r>
-              <a:rPr lang="en-US" sz="2700" b="1" dirty="0">
+              <a:rPr lang="en-US" sz="3400" b="1" dirty="0">
                 <a:solidFill>
                   <a:srgbClr val="003A63"/>
                 </a:solidFill>
@@ -11660,20 +12750,20 @@
               </a:rPr>
               <a:t>Learning Objectives</a:t>
             </a:r>
-            <a:endParaRPr lang="en-US" sz="2700" dirty="0"/>
-          </a:p>
-        </p:txBody>
-      </p:sp>
-      <p:sp>
-        <p:nvSpPr>
-          <p:cNvPr id="10" name="Text 8"/>
-          <p:cNvSpPr/>
-          <p:nvPr/>
-        </p:nvSpPr>
-        <p:spPr>
-          <a:xfrm>
-            <a:off x="868680" y="1417320"/>
-            <a:ext cx="6675120" cy="4434840"/>
+            <a:endParaRPr lang="en-US" sz="3400" dirty="0"/>
+          </a:p>
+        </p:txBody>
+      </p:sp>
+      <p:sp>
+        <p:nvSpPr>
+          <p:cNvPr id="11" name="Text 9"/>
+          <p:cNvSpPr/>
+          <p:nvPr/>
+        </p:nvSpPr>
+        <p:spPr>
+          <a:xfrm>
+            <a:off x="868680" y="1508760"/>
+            <a:ext cx="6537960" cy="4160520"/>
           </a:xfrm>
           <a:prstGeom prst="rect">
             <a:avLst/>
@@ -11688,7 +12778,7 @@
           <a:lstStyle/>
           <a:p>
             <a:r>
-              <a:rPr lang="en-US" sz="1700" dirty="0">
+              <a:rPr lang="en-US" sz="2100" dirty="0">
                 <a:solidFill>
                   <a:srgbClr val="17364A"/>
                 </a:solidFill>
@@ -11698,11 +12788,11 @@
               </a:rPr>
               <a:t>Explain model results in plain language for nontechnical audiences.</a:t>
             </a:r>
-            <a:endParaRPr lang="en-US" sz="1700" dirty="0"/>
-          </a:p>
-          <a:p>
-            <a:r>
-              <a:rPr lang="en-US" sz="1700" dirty="0">
+            <a:endParaRPr lang="en-US" sz="2100" dirty="0"/>
+          </a:p>
+          <a:p>
+            <a:r>
+              <a:rPr lang="en-US" sz="2100" dirty="0">
                 <a:solidFill>
                   <a:srgbClr val="17364A"/>
                 </a:solidFill>
@@ -11712,11 +12802,11 @@
               </a:rPr>
               <a:t>Distinguish uncertainty, variability, error, bias, and data limitations.</a:t>
             </a:r>
-            <a:endParaRPr lang="en-US" sz="1700" dirty="0"/>
-          </a:p>
-          <a:p>
-            <a:r>
-              <a:rPr lang="en-US" sz="1700" dirty="0">
+            <a:endParaRPr lang="en-US" sz="2100" dirty="0"/>
+          </a:p>
+          <a:p>
+            <a:r>
+              <a:rPr lang="en-US" sz="2100" dirty="0">
                 <a:solidFill>
                   <a:srgbClr val="17364A"/>
                 </a:solidFill>
@@ -11724,29 +12814,15 @@
                 <a:ea typeface="Aptos" pitchFamily="34" charset="-122"/>
                 <a:cs typeface="Aptos" pitchFamily="34" charset="-120"/>
               </a:rPr>
-              <a:t>Identify when model results should include confidence intervals, prediction intervals, caveats, or subgroup findings.</a:t>
-            </a:r>
-            <a:endParaRPr lang="en-US" sz="1700" dirty="0"/>
-          </a:p>
-          <a:p>
-            <a:r>
-              <a:rPr lang="en-US" sz="1700" dirty="0">
-                <a:solidFill>
-                  <a:srgbClr val="17364A"/>
-                </a:solidFill>
-                <a:latin typeface="Aptos" pitchFamily="34" charset="0"/>
-                <a:ea typeface="Aptos" pitchFamily="34" charset="-122"/>
-                <a:cs typeface="Aptos" pitchFamily="34" charset="-120"/>
-              </a:rPr>
-              <a:t>Avoid overclaiming, causal overreach, and false precision in AI communications.</a:t>
-            </a:r>
-            <a:endParaRPr lang="en-US" sz="1700" dirty="0"/>
-          </a:p>
-        </p:txBody>
-      </p:sp>
-      <p:sp>
-        <p:nvSpPr>
-          <p:cNvPr id="11" name="Shape 9"/>
+              <a:t>Identify when model results should include confidence intervals, prediction intervals, caveats, or.</a:t>
+            </a:r>
+            <a:endParaRPr lang="en-US" sz="2100" dirty="0"/>
+          </a:p>
+        </p:txBody>
+      </p:sp>
+      <p:sp>
+        <p:nvSpPr>
+          <p:cNvPr id="12" name="Shape 10"/>
           <p:cNvSpPr/>
           <p:nvPr/>
         </p:nvSpPr>
@@ -11773,14 +12849,14 @@
       </p:sp>
       <p:sp>
         <p:nvSpPr>
-          <p:cNvPr id="12" name="Text 10"/>
+          <p:cNvPr id="13" name="Text 11"/>
           <p:cNvSpPr/>
           <p:nvPr/>
         </p:nvSpPr>
         <p:spPr>
           <a:xfrm>
             <a:off x="8074152" y="1563624"/>
-            <a:ext cx="2825496" cy="201168"/>
+            <a:ext cx="2825496" cy="256032"/>
           </a:xfrm>
           <a:prstGeom prst="rect">
             <a:avLst/>
@@ -11796,7 +12872,7 @@
               <a:buNone/>
             </a:pPr>
             <a:r>
-              <a:rPr lang="en-US" sz="950" b="1" dirty="0">
+              <a:rPr lang="en-US" sz="1300" b="1" dirty="0">
                 <a:solidFill>
                   <a:srgbClr val="0068B7"/>
                 </a:solidFill>
@@ -11806,20 +12882,20 @@
               </a:rPr>
               <a:t>Key idea</a:t>
             </a:r>
-            <a:endParaRPr lang="en-US" sz="950" dirty="0"/>
-          </a:p>
-        </p:txBody>
-      </p:sp>
-      <p:sp>
-        <p:nvSpPr>
-          <p:cNvPr id="13" name="Text 11"/>
-          <p:cNvSpPr/>
-          <p:nvPr/>
-        </p:nvSpPr>
-        <p:spPr>
-          <a:xfrm>
-            <a:off x="8074152" y="1856232"/>
-            <a:ext cx="2825496" cy="1261872"/>
+            <a:endParaRPr lang="en-US" sz="1300" dirty="0"/>
+          </a:p>
+        </p:txBody>
+      </p:sp>
+      <p:sp>
+        <p:nvSpPr>
+          <p:cNvPr id="14" name="Text 12"/>
+          <p:cNvSpPr/>
+          <p:nvPr/>
+        </p:nvSpPr>
+        <p:spPr>
+          <a:xfrm>
+            <a:off x="8074152" y="1920240"/>
+            <a:ext cx="2825496" cy="1188720"/>
           </a:xfrm>
           <a:prstGeom prst="rect">
             <a:avLst/>
@@ -11837,7 +12913,7 @@
               <a:buNone/>
             </a:pPr>
             <a:r>
-              <a:rPr lang="en-US" sz="1250" dirty="0">
+              <a:rPr lang="en-US" sz="1550" dirty="0">
                 <a:solidFill>
                   <a:srgbClr val="17364A"/>
                 </a:solidFill>
@@ -11847,13 +12923,13 @@
               </a:rPr>
               <a:t>Explain model results in plain language for nontechnical audiences.</a:t>
             </a:r>
-            <a:endParaRPr lang="en-US" sz="1250" dirty="0"/>
-          </a:p>
-        </p:txBody>
-      </p:sp>
-      <p:sp>
-        <p:nvSpPr>
-          <p:cNvPr id="14" name="Shape 12"/>
+            <a:endParaRPr lang="en-US" sz="1550" dirty="0"/>
+          </a:p>
+        </p:txBody>
+      </p:sp>
+      <p:sp>
+        <p:nvSpPr>
+          <p:cNvPr id="15" name="Shape 13"/>
           <p:cNvSpPr/>
           <p:nvPr/>
         </p:nvSpPr>
@@ -11880,14 +12956,14 @@
       </p:sp>
       <p:sp>
         <p:nvSpPr>
-          <p:cNvPr id="15" name="Text 13"/>
+          <p:cNvPr id="16" name="Text 14"/>
           <p:cNvSpPr/>
           <p:nvPr/>
         </p:nvSpPr>
         <p:spPr>
           <a:xfrm>
             <a:off x="8074152" y="3666744"/>
-            <a:ext cx="2825496" cy="201168"/>
+            <a:ext cx="2825496" cy="256032"/>
           </a:xfrm>
           <a:prstGeom prst="rect">
             <a:avLst/>
@@ -11903,7 +12979,7 @@
               <a:buNone/>
             </a:pPr>
             <a:r>
-              <a:rPr lang="en-US" sz="950" b="1" dirty="0">
+              <a:rPr lang="en-US" sz="1300" b="1" dirty="0">
                 <a:solidFill>
                   <a:srgbClr val="0068B7"/>
                 </a:solidFill>
@@ -11913,20 +12989,20 @@
               </a:rPr>
               <a:t>Use this for</a:t>
             </a:r>
-            <a:endParaRPr lang="en-US" sz="950" dirty="0"/>
-          </a:p>
-        </p:txBody>
-      </p:sp>
-      <p:sp>
-        <p:nvSpPr>
-          <p:cNvPr id="16" name="Text 14"/>
-          <p:cNvSpPr/>
-          <p:nvPr/>
-        </p:nvSpPr>
-        <p:spPr>
-          <a:xfrm>
-            <a:off x="8074152" y="3959352"/>
-            <a:ext cx="2825496" cy="1170432"/>
+            <a:endParaRPr lang="en-US" sz="1300" dirty="0"/>
+          </a:p>
+        </p:txBody>
+      </p:sp>
+      <p:sp>
+        <p:nvSpPr>
+          <p:cNvPr id="17" name="Text 15"/>
+          <p:cNvSpPr/>
+          <p:nvPr/>
+        </p:nvSpPr>
+        <p:spPr>
+          <a:xfrm>
+            <a:off x="8074152" y="4023360"/>
+            <a:ext cx="2825496" cy="1097280"/>
           </a:xfrm>
           <a:prstGeom prst="rect">
             <a:avLst/>
@@ -11944,7 +13020,7 @@
               <a:buNone/>
             </a:pPr>
             <a:r>
-              <a:rPr lang="en-US" sz="1250" dirty="0">
+              <a:rPr lang="en-US" sz="1550" dirty="0">
                 <a:solidFill>
                   <a:srgbClr val="17364A"/>
                 </a:solidFill>
@@ -11954,7 +13030,7 @@
               </a:rPr>
               <a:t>Connect the concept to public health decisions, safeguards, documentation, or implementation work.</a:t>
             </a:r>
-            <a:endParaRPr lang="en-US" sz="1250" dirty="0"/>
+            <a:endParaRPr lang="en-US" sz="1550" dirty="0"/>
           </a:p>
         </p:txBody>
       </p:sp>
@@ -12151,7 +13227,7 @@
                 <a:ea typeface="Aptos" pitchFamily="34" charset="-122"/>
                 <a:cs typeface="Aptos" pitchFamily="34" charset="-120"/>
               </a:rPr>
-              <a:t>© Paula Soper</a:t>
+              <a:t>Â© Paula Soper</a:t>
             </a:r>
             <a:endParaRPr lang="en-US" sz="800" dirty="0"/>
           </a:p>
@@ -12159,7 +13235,46 @@
       </p:sp>
       <p:sp>
         <p:nvSpPr>
-          <p:cNvPr id="7" name="Shape 5"/>
+          <p:cNvPr id="7" name="Text 5"/>
+          <p:cNvSpPr/>
+          <p:nvPr/>
+        </p:nvSpPr>
+        <p:spPr>
+          <a:xfrm>
+            <a:off x="11137392" y="6510528"/>
+            <a:ext cx="411480" cy="201168"/>
+          </a:xfrm>
+          <a:prstGeom prst="rect">
+            <a:avLst/>
+          </a:prstGeom>
+          <a:noFill/>
+          <a:ln/>
+        </p:spPr>
+        <p:txBody>
+          <a:bodyPr wrap="square" lIns="0" tIns="0" rIns="0" bIns="0" rtlCol="0" anchor="ctr"/>
+          <a:lstStyle/>
+          <a:p>
+            <a:pPr algn="r" indent="0" marL="0">
+              <a:buNone/>
+            </a:pPr>
+            <a:r>
+              <a:rPr lang="en-US" sz="900" dirty="0">
+                <a:solidFill>
+                  <a:srgbClr val="5F7181"/>
+                </a:solidFill>
+                <a:latin typeface="Aptos" pitchFamily="34" charset="0"/>
+                <a:ea typeface="Aptos" pitchFamily="34" charset="-122"/>
+                <a:cs typeface="Aptos" pitchFamily="34" charset="-120"/>
+              </a:rPr>
+              <a:t>6</a:t>
+            </a:r>
+            <a:endParaRPr lang="en-US" sz="900" dirty="0"/>
+          </a:p>
+        </p:txBody>
+      </p:sp>
+      <p:sp>
+        <p:nvSpPr>
+          <p:cNvPr id="8" name="Shape 6"/>
           <p:cNvSpPr/>
           <p:nvPr/>
         </p:nvSpPr>
@@ -12184,7 +13299,7 @@
       </p:sp>
       <p:sp>
         <p:nvSpPr>
-          <p:cNvPr id="8" name="Text 6"/>
+          <p:cNvPr id="9" name="Text 7"/>
           <p:cNvSpPr/>
           <p:nvPr/>
         </p:nvSpPr>
@@ -12223,14 +13338,14 @@
       </p:sp>
       <p:sp>
         <p:nvSpPr>
-          <p:cNvPr id="9" name="Text 7"/>
+          <p:cNvPr id="10" name="Text 8"/>
           <p:cNvSpPr/>
           <p:nvPr/>
         </p:nvSpPr>
         <p:spPr>
           <a:xfrm>
             <a:off x="640080" y="621792"/>
-            <a:ext cx="10881360" cy="566928"/>
+            <a:ext cx="10881360" cy="713232"/>
           </a:xfrm>
           <a:prstGeom prst="rect">
             <a:avLst/>
@@ -12248,7 +13363,7 @@
               <a:buNone/>
             </a:pPr>
             <a:r>
-              <a:rPr lang="en-US" sz="2700" b="1" dirty="0">
+              <a:rPr lang="en-US" sz="3400" b="1" dirty="0">
                 <a:solidFill>
                   <a:srgbClr val="003A63"/>
                 </a:solidFill>
@@ -12258,20 +13373,20 @@
               </a:rPr>
               <a:t>Module Overview</a:t>
             </a:r>
-            <a:endParaRPr lang="en-US" sz="2700" dirty="0"/>
-          </a:p>
-        </p:txBody>
-      </p:sp>
-      <p:sp>
-        <p:nvSpPr>
-          <p:cNvPr id="10" name="Text 8"/>
-          <p:cNvSpPr/>
-          <p:nvPr/>
-        </p:nvSpPr>
-        <p:spPr>
-          <a:xfrm>
-            <a:off x="868680" y="1417320"/>
-            <a:ext cx="6675120" cy="4434840"/>
+            <a:endParaRPr lang="en-US" sz="3400" dirty="0"/>
+          </a:p>
+        </p:txBody>
+      </p:sp>
+      <p:sp>
+        <p:nvSpPr>
+          <p:cNvPr id="11" name="Text 9"/>
+          <p:cNvSpPr/>
+          <p:nvPr/>
+        </p:nvSpPr>
+        <p:spPr>
+          <a:xfrm>
+            <a:off x="868680" y="1508760"/>
+            <a:ext cx="6537960" cy="4160520"/>
           </a:xfrm>
           <a:prstGeom prst="rect">
             <a:avLst/>
@@ -12286,7 +13401,7 @@
           <a:lstStyle/>
           <a:p>
             <a:r>
-              <a:rPr lang="en-US" sz="1700" dirty="0">
+              <a:rPr lang="en-US" sz="2100" dirty="0">
                 <a:solidFill>
                   <a:srgbClr val="17364A"/>
                 </a:solidFill>
@@ -12294,13 +13409,13 @@
                 <a:ea typeface="Aptos" pitchFamily="34" charset="-122"/>
                 <a:cs typeface="Aptos" pitchFamily="34" charset="-120"/>
               </a:rPr>
-              <a:t>Public health staff often need to communicate AI or model results to leaders, partners, the public, or operational teams.</a:t>
-            </a:r>
-            <a:endParaRPr lang="en-US" sz="1700" dirty="0"/>
-          </a:p>
-          <a:p>
-            <a:r>
-              <a:rPr lang="en-US" sz="1700" dirty="0">
+              <a:t>Public health staff often need to communicate AI or model results to leaders, partners, the public, or.</a:t>
+            </a:r>
+            <a:endParaRPr lang="en-US" sz="2100" dirty="0"/>
+          </a:p>
+          <a:p>
+            <a:r>
+              <a:rPr lang="en-US" sz="2100" dirty="0">
                 <a:solidFill>
                   <a:srgbClr val="17364A"/>
                 </a:solidFill>
@@ -12308,13 +13423,13 @@
                 <a:ea typeface="Aptos" pitchFamily="34" charset="-122"/>
                 <a:cs typeface="Aptos" pitchFamily="34" charset="-120"/>
               </a:rPr>
-              <a:t>This module teaches learners how to explain model outputs, uncertainty, limitations, and appropriate use without.</a:t>
-            </a:r>
-            <a:endParaRPr lang="en-US" sz="1700" dirty="0"/>
-          </a:p>
-          <a:p>
-            <a:r>
-              <a:rPr lang="en-US" sz="1700" dirty="0">
+              <a:t>This module teaches learners how to explain model outputs, uncertainty, limitations, and appropriate.</a:t>
+            </a:r>
+            <a:endParaRPr lang="en-US" sz="2100" dirty="0"/>
+          </a:p>
+          <a:p>
+            <a:r>
+              <a:rPr lang="en-US" sz="2100" dirty="0">
                 <a:solidFill>
                   <a:srgbClr val="17364A"/>
                 </a:solidFill>
@@ -12324,27 +13439,13 @@
               </a:rPr>
               <a:t>The module focuses on practical communication.</a:t>
             </a:r>
-            <a:endParaRPr lang="en-US" sz="1700" dirty="0"/>
-          </a:p>
-          <a:p>
-            <a:r>
-              <a:rPr lang="en-US" sz="1700" dirty="0">
-                <a:solidFill>
-                  <a:srgbClr val="17364A"/>
-                </a:solidFill>
-                <a:latin typeface="Aptos" pitchFamily="34" charset="0"/>
-                <a:ea typeface="Aptos" pitchFamily="34" charset="-122"/>
-                <a:cs typeface="Aptos" pitchFamily="34" charset="-120"/>
-              </a:rPr>
-              <a:t>Learners translate metrics, confidence, caveats, and validation findings into language that supports responsible decisions.</a:t>
-            </a:r>
-            <a:endParaRPr lang="en-US" sz="1700" dirty="0"/>
-          </a:p>
-        </p:txBody>
-      </p:sp>
-      <p:sp>
-        <p:nvSpPr>
-          <p:cNvPr id="11" name="Shape 9"/>
+            <a:endParaRPr lang="en-US" sz="2100" dirty="0"/>
+          </a:p>
+        </p:txBody>
+      </p:sp>
+      <p:sp>
+        <p:nvSpPr>
+          <p:cNvPr id="12" name="Shape 10"/>
           <p:cNvSpPr/>
           <p:nvPr/>
         </p:nvSpPr>
@@ -12371,14 +13472,14 @@
       </p:sp>
       <p:sp>
         <p:nvSpPr>
-          <p:cNvPr id="12" name="Text 10"/>
+          <p:cNvPr id="13" name="Text 11"/>
           <p:cNvSpPr/>
           <p:nvPr/>
         </p:nvSpPr>
         <p:spPr>
           <a:xfrm>
             <a:off x="8074152" y="1563624"/>
-            <a:ext cx="2825496" cy="201168"/>
+            <a:ext cx="2825496" cy="256032"/>
           </a:xfrm>
           <a:prstGeom prst="rect">
             <a:avLst/>
@@ -12394,7 +13495,7 @@
               <a:buNone/>
             </a:pPr>
             <a:r>
-              <a:rPr lang="en-US" sz="950" b="1" dirty="0">
+              <a:rPr lang="en-US" sz="1300" b="1" dirty="0">
                 <a:solidFill>
                   <a:srgbClr val="0068B7"/>
                 </a:solidFill>
@@ -12404,20 +13505,20 @@
               </a:rPr>
               <a:t>Key idea</a:t>
             </a:r>
-            <a:endParaRPr lang="en-US" sz="950" dirty="0"/>
-          </a:p>
-        </p:txBody>
-      </p:sp>
-      <p:sp>
-        <p:nvSpPr>
-          <p:cNvPr id="13" name="Text 11"/>
-          <p:cNvSpPr/>
-          <p:nvPr/>
-        </p:nvSpPr>
-        <p:spPr>
-          <a:xfrm>
-            <a:off x="8074152" y="1856232"/>
-            <a:ext cx="2825496" cy="1261872"/>
+            <a:endParaRPr lang="en-US" sz="1300" dirty="0"/>
+          </a:p>
+        </p:txBody>
+      </p:sp>
+      <p:sp>
+        <p:nvSpPr>
+          <p:cNvPr id="14" name="Text 12"/>
+          <p:cNvSpPr/>
+          <p:nvPr/>
+        </p:nvSpPr>
+        <p:spPr>
+          <a:xfrm>
+            <a:off x="8074152" y="1920240"/>
+            <a:ext cx="2825496" cy="1188720"/>
           </a:xfrm>
           <a:prstGeom prst="rect">
             <a:avLst/>
@@ -12435,7 +13536,7 @@
               <a:buNone/>
             </a:pPr>
             <a:r>
-              <a:rPr lang="en-US" sz="1250" dirty="0">
+              <a:rPr lang="en-US" sz="1550" dirty="0">
                 <a:solidFill>
                   <a:srgbClr val="17364A"/>
                 </a:solidFill>
@@ -12443,15 +13544,15 @@
                 <a:ea typeface="Aptos" pitchFamily="34" charset="-122"/>
                 <a:cs typeface="Aptos" pitchFamily="34" charset="-120"/>
               </a:rPr>
-              <a:t>Public health staff often need to communicate AI or model results to leaders, partners, the public, or operational teams.</a:t>
-            </a:r>
-            <a:endParaRPr lang="en-US" sz="1250" dirty="0"/>
-          </a:p>
-        </p:txBody>
-      </p:sp>
-      <p:sp>
-        <p:nvSpPr>
-          <p:cNvPr id="14" name="Shape 12"/>
+              <a:t>Public health staff often need to communicate AI or model results to leaders, partners, the public, or.</a:t>
+            </a:r>
+            <a:endParaRPr lang="en-US" sz="1550" dirty="0"/>
+          </a:p>
+        </p:txBody>
+      </p:sp>
+      <p:sp>
+        <p:nvSpPr>
+          <p:cNvPr id="15" name="Shape 13"/>
           <p:cNvSpPr/>
           <p:nvPr/>
         </p:nvSpPr>
@@ -12478,14 +13579,14 @@
       </p:sp>
       <p:sp>
         <p:nvSpPr>
-          <p:cNvPr id="15" name="Text 13"/>
+          <p:cNvPr id="16" name="Text 14"/>
           <p:cNvSpPr/>
           <p:nvPr/>
         </p:nvSpPr>
         <p:spPr>
           <a:xfrm>
             <a:off x="8074152" y="3666744"/>
-            <a:ext cx="2825496" cy="201168"/>
+            <a:ext cx="2825496" cy="256032"/>
           </a:xfrm>
           <a:prstGeom prst="rect">
             <a:avLst/>
@@ -12501,7 +13602,7 @@
               <a:buNone/>
             </a:pPr>
             <a:r>
-              <a:rPr lang="en-US" sz="950" b="1" dirty="0">
+              <a:rPr lang="en-US" sz="1300" b="1" dirty="0">
                 <a:solidFill>
                   <a:srgbClr val="0068B7"/>
                 </a:solidFill>
@@ -12511,20 +13612,20 @@
               </a:rPr>
               <a:t>Use this for</a:t>
             </a:r>
-            <a:endParaRPr lang="en-US" sz="950" dirty="0"/>
-          </a:p>
-        </p:txBody>
-      </p:sp>
-      <p:sp>
-        <p:nvSpPr>
-          <p:cNvPr id="16" name="Text 14"/>
-          <p:cNvSpPr/>
-          <p:nvPr/>
-        </p:nvSpPr>
-        <p:spPr>
-          <a:xfrm>
-            <a:off x="8074152" y="3959352"/>
-            <a:ext cx="2825496" cy="1170432"/>
+            <a:endParaRPr lang="en-US" sz="1300" dirty="0"/>
+          </a:p>
+        </p:txBody>
+      </p:sp>
+      <p:sp>
+        <p:nvSpPr>
+          <p:cNvPr id="17" name="Text 15"/>
+          <p:cNvSpPr/>
+          <p:nvPr/>
+        </p:nvSpPr>
+        <p:spPr>
+          <a:xfrm>
+            <a:off x="8074152" y="4023360"/>
+            <a:ext cx="2825496" cy="1097280"/>
           </a:xfrm>
           <a:prstGeom prst="rect">
             <a:avLst/>
@@ -12542,7 +13643,7 @@
               <a:buNone/>
             </a:pPr>
             <a:r>
-              <a:rPr lang="en-US" sz="1250" dirty="0">
+              <a:rPr lang="en-US" sz="1550" dirty="0">
                 <a:solidFill>
                   <a:srgbClr val="17364A"/>
                 </a:solidFill>
@@ -12552,7 +13653,7 @@
               </a:rPr>
               <a:t>Connect the concept to public health decisions, safeguards, documentation, or implementation work.</a:t>
             </a:r>
-            <a:endParaRPr lang="en-US" sz="1250" dirty="0"/>
+            <a:endParaRPr lang="en-US" sz="1550" dirty="0"/>
           </a:p>
         </p:txBody>
       </p:sp>
@@ -12749,7 +13850,7 @@
                 <a:ea typeface="Aptos" pitchFamily="34" charset="-122"/>
                 <a:cs typeface="Aptos" pitchFamily="34" charset="-120"/>
               </a:rPr>
-              <a:t>© Paula Soper</a:t>
+              <a:t>Â© Paula Soper</a:t>
             </a:r>
             <a:endParaRPr lang="en-US" sz="800" dirty="0"/>
           </a:p>
@@ -12757,7 +13858,46 @@
       </p:sp>
       <p:sp>
         <p:nvSpPr>
-          <p:cNvPr id="7" name="Shape 5"/>
+          <p:cNvPr id="7" name="Text 5"/>
+          <p:cNvSpPr/>
+          <p:nvPr/>
+        </p:nvSpPr>
+        <p:spPr>
+          <a:xfrm>
+            <a:off x="11137392" y="6510528"/>
+            <a:ext cx="411480" cy="201168"/>
+          </a:xfrm>
+          <a:prstGeom prst="rect">
+            <a:avLst/>
+          </a:prstGeom>
+          <a:noFill/>
+          <a:ln/>
+        </p:spPr>
+        <p:txBody>
+          <a:bodyPr wrap="square" lIns="0" tIns="0" rIns="0" bIns="0" rtlCol="0" anchor="ctr"/>
+          <a:lstStyle/>
+          <a:p>
+            <a:pPr algn="r" indent="0" marL="0">
+              <a:buNone/>
+            </a:pPr>
+            <a:r>
+              <a:rPr lang="en-US" sz="900" dirty="0">
+                <a:solidFill>
+                  <a:srgbClr val="5F7181"/>
+                </a:solidFill>
+                <a:latin typeface="Aptos" pitchFamily="34" charset="0"/>
+                <a:ea typeface="Aptos" pitchFamily="34" charset="-122"/>
+                <a:cs typeface="Aptos" pitchFamily="34" charset="-120"/>
+              </a:rPr>
+              <a:t>7</a:t>
+            </a:r>
+            <a:endParaRPr lang="en-US" sz="900" dirty="0"/>
+          </a:p>
+        </p:txBody>
+      </p:sp>
+      <p:sp>
+        <p:nvSpPr>
+          <p:cNvPr id="8" name="Shape 6"/>
           <p:cNvSpPr/>
           <p:nvPr/>
         </p:nvSpPr>
@@ -12782,7 +13922,7 @@
       </p:sp>
       <p:sp>
         <p:nvSpPr>
-          <p:cNvPr id="8" name="Text 6"/>
+          <p:cNvPr id="9" name="Text 7"/>
           <p:cNvSpPr/>
           <p:nvPr/>
         </p:nvSpPr>
@@ -12821,14 +13961,14 @@
       </p:sp>
       <p:sp>
         <p:nvSpPr>
-          <p:cNvPr id="9" name="Text 7"/>
+          <p:cNvPr id="10" name="Text 8"/>
           <p:cNvSpPr/>
           <p:nvPr/>
         </p:nvSpPr>
         <p:spPr>
           <a:xfrm>
             <a:off x="640080" y="621792"/>
-            <a:ext cx="10881360" cy="566928"/>
+            <a:ext cx="10881360" cy="713232"/>
           </a:xfrm>
           <a:prstGeom prst="rect">
             <a:avLst/>
@@ -12846,7 +13986,7 @@
               <a:buNone/>
             </a:pPr>
             <a:r>
-              <a:rPr lang="en-US" sz="2700" b="1" dirty="0">
+              <a:rPr lang="en-US" sz="3400" b="1" dirty="0">
                 <a:solidFill>
                   <a:srgbClr val="003A63"/>
                 </a:solidFill>
@@ -12856,20 +13996,20 @@
               </a:rPr>
               <a:t>Definitions</a:t>
             </a:r>
-            <a:endParaRPr lang="en-US" sz="2700" dirty="0"/>
-          </a:p>
-        </p:txBody>
-      </p:sp>
-      <p:sp>
-        <p:nvSpPr>
-          <p:cNvPr id="10" name="Text 8"/>
-          <p:cNvSpPr/>
-          <p:nvPr/>
-        </p:nvSpPr>
-        <p:spPr>
-          <a:xfrm>
-            <a:off x="868680" y="1417320"/>
-            <a:ext cx="6675120" cy="4434840"/>
+            <a:endParaRPr lang="en-US" sz="3400" dirty="0"/>
+          </a:p>
+        </p:txBody>
+      </p:sp>
+      <p:sp>
+        <p:nvSpPr>
+          <p:cNvPr id="11" name="Text 9"/>
+          <p:cNvSpPr/>
+          <p:nvPr/>
+        </p:nvSpPr>
+        <p:spPr>
+          <a:xfrm>
+            <a:off x="868680" y="1508760"/>
+            <a:ext cx="6537960" cy="4160520"/>
           </a:xfrm>
           <a:prstGeom prst="rect">
             <a:avLst/>
@@ -12884,7 +14024,7 @@
           <a:lstStyle/>
           <a:p>
             <a:r>
-              <a:rPr lang="en-US" sz="1700" dirty="0">
+              <a:rPr lang="en-US" sz="2100" dirty="0">
                 <a:solidFill>
                   <a:srgbClr val="17364A"/>
                 </a:solidFill>
@@ -12894,11 +14034,11 @@
               </a:rPr>
               <a:t>Uncertainty: The degree to which an estimate, prediction, or conclusion may be imprecise or incomplete.</a:t>
             </a:r>
-            <a:endParaRPr lang="en-US" sz="1700" dirty="0"/>
-          </a:p>
-          <a:p>
-            <a:r>
-              <a:rPr lang="en-US" sz="1700" dirty="0">
+            <a:endParaRPr lang="en-US" sz="2100" dirty="0"/>
+          </a:p>
+          <a:p>
+            <a:r>
+              <a:rPr lang="en-US" sz="2100" dirty="0">
                 <a:solidFill>
                   <a:srgbClr val="17364A"/>
                 </a:solidFill>
@@ -12908,11 +14048,11 @@
               </a:rPr>
               <a:t>Prediction interval: A range that estimates where a future observation may fall.</a:t>
             </a:r>
-            <a:endParaRPr lang="en-US" sz="1700" dirty="0"/>
-          </a:p>
-          <a:p>
-            <a:r>
-              <a:rPr lang="en-US" sz="1700" dirty="0">
+            <a:endParaRPr lang="en-US" sz="2100" dirty="0"/>
+          </a:p>
+          <a:p>
+            <a:r>
+              <a:rPr lang="en-US" sz="2100" dirty="0">
                 <a:solidFill>
                   <a:srgbClr val="17364A"/>
                 </a:solidFill>
@@ -12922,27 +14062,13 @@
               </a:rPr>
               <a:t>Confidence interval: A range that expresses uncertainty around an estimated parameter.</a:t>
             </a:r>
-            <a:endParaRPr lang="en-US" sz="1700" dirty="0"/>
-          </a:p>
-          <a:p>
-            <a:r>
-              <a:rPr lang="en-US" sz="1700" dirty="0">
-                <a:solidFill>
-                  <a:srgbClr val="17364A"/>
-                </a:solidFill>
-                <a:latin typeface="Aptos" pitchFamily="34" charset="0"/>
-                <a:ea typeface="Aptos" pitchFamily="34" charset="-122"/>
-                <a:cs typeface="Aptos" pitchFamily="34" charset="-120"/>
-              </a:rPr>
-              <a:t>Calibration: How closely predicted probabilities match observed outcomes.</a:t>
-            </a:r>
-            <a:endParaRPr lang="en-US" sz="1700" dirty="0"/>
-          </a:p>
-        </p:txBody>
-      </p:sp>
-      <p:sp>
-        <p:nvSpPr>
-          <p:cNvPr id="11" name="Shape 9"/>
+            <a:endParaRPr lang="en-US" sz="2100" dirty="0"/>
+          </a:p>
+        </p:txBody>
+      </p:sp>
+      <p:sp>
+        <p:nvSpPr>
+          <p:cNvPr id="12" name="Shape 10"/>
           <p:cNvSpPr/>
           <p:nvPr/>
         </p:nvSpPr>
@@ -12969,14 +14095,14 @@
       </p:sp>
       <p:sp>
         <p:nvSpPr>
-          <p:cNvPr id="12" name="Text 10"/>
+          <p:cNvPr id="13" name="Text 11"/>
           <p:cNvSpPr/>
           <p:nvPr/>
         </p:nvSpPr>
         <p:spPr>
           <a:xfrm>
             <a:off x="8074152" y="1563624"/>
-            <a:ext cx="2825496" cy="201168"/>
+            <a:ext cx="2825496" cy="256032"/>
           </a:xfrm>
           <a:prstGeom prst="rect">
             <a:avLst/>
@@ -12992,7 +14118,7 @@
               <a:buNone/>
             </a:pPr>
             <a:r>
-              <a:rPr lang="en-US" sz="950" b="1" dirty="0">
+              <a:rPr lang="en-US" sz="1300" b="1" dirty="0">
                 <a:solidFill>
                   <a:srgbClr val="0068B7"/>
                 </a:solidFill>
@@ -13002,20 +14128,20 @@
               </a:rPr>
               <a:t>Key idea</a:t>
             </a:r>
-            <a:endParaRPr lang="en-US" sz="950" dirty="0"/>
-          </a:p>
-        </p:txBody>
-      </p:sp>
-      <p:sp>
-        <p:nvSpPr>
-          <p:cNvPr id="13" name="Text 11"/>
-          <p:cNvSpPr/>
-          <p:nvPr/>
-        </p:nvSpPr>
-        <p:spPr>
-          <a:xfrm>
-            <a:off x="8074152" y="1856232"/>
-            <a:ext cx="2825496" cy="1261872"/>
+            <a:endParaRPr lang="en-US" sz="1300" dirty="0"/>
+          </a:p>
+        </p:txBody>
+      </p:sp>
+      <p:sp>
+        <p:nvSpPr>
+          <p:cNvPr id="14" name="Text 12"/>
+          <p:cNvSpPr/>
+          <p:nvPr/>
+        </p:nvSpPr>
+        <p:spPr>
+          <a:xfrm>
+            <a:off x="8074152" y="1920240"/>
+            <a:ext cx="2825496" cy="1188720"/>
           </a:xfrm>
           <a:prstGeom prst="rect">
             <a:avLst/>
@@ -13033,7 +14159,7 @@
               <a:buNone/>
             </a:pPr>
             <a:r>
-              <a:rPr lang="en-US" sz="1250" dirty="0">
+              <a:rPr lang="en-US" sz="1550" dirty="0">
                 <a:solidFill>
                   <a:srgbClr val="17364A"/>
                 </a:solidFill>
@@ -13043,13 +14169,13 @@
               </a:rPr>
               <a:t>Uncertainty: The degree to which an estimate, prediction, or conclusion may be imprecise or incomplete.</a:t>
             </a:r>
-            <a:endParaRPr lang="en-US" sz="1250" dirty="0"/>
-          </a:p>
-        </p:txBody>
-      </p:sp>
-      <p:sp>
-        <p:nvSpPr>
-          <p:cNvPr id="14" name="Shape 12"/>
+            <a:endParaRPr lang="en-US" sz="1550" dirty="0"/>
+          </a:p>
+        </p:txBody>
+      </p:sp>
+      <p:sp>
+        <p:nvSpPr>
+          <p:cNvPr id="15" name="Shape 13"/>
           <p:cNvSpPr/>
           <p:nvPr/>
         </p:nvSpPr>
@@ -13076,14 +14202,14 @@
       </p:sp>
       <p:sp>
         <p:nvSpPr>
-          <p:cNvPr id="15" name="Text 13"/>
+          <p:cNvPr id="16" name="Text 14"/>
           <p:cNvSpPr/>
           <p:nvPr/>
         </p:nvSpPr>
         <p:spPr>
           <a:xfrm>
             <a:off x="8074152" y="3666744"/>
-            <a:ext cx="2825496" cy="201168"/>
+            <a:ext cx="2825496" cy="256032"/>
           </a:xfrm>
           <a:prstGeom prst="rect">
             <a:avLst/>
@@ -13099,7 +14225,7 @@
               <a:buNone/>
             </a:pPr>
             <a:r>
-              <a:rPr lang="en-US" sz="950" b="1" dirty="0">
+              <a:rPr lang="en-US" sz="1300" b="1" dirty="0">
                 <a:solidFill>
                   <a:srgbClr val="0068B7"/>
                 </a:solidFill>
@@ -13109,20 +14235,20 @@
               </a:rPr>
               <a:t>Use this for</a:t>
             </a:r>
-            <a:endParaRPr lang="en-US" sz="950" dirty="0"/>
-          </a:p>
-        </p:txBody>
-      </p:sp>
-      <p:sp>
-        <p:nvSpPr>
-          <p:cNvPr id="16" name="Text 14"/>
-          <p:cNvSpPr/>
-          <p:nvPr/>
-        </p:nvSpPr>
-        <p:spPr>
-          <a:xfrm>
-            <a:off x="8074152" y="3959352"/>
-            <a:ext cx="2825496" cy="1170432"/>
+            <a:endParaRPr lang="en-US" sz="1300" dirty="0"/>
+          </a:p>
+        </p:txBody>
+      </p:sp>
+      <p:sp>
+        <p:nvSpPr>
+          <p:cNvPr id="17" name="Text 15"/>
+          <p:cNvSpPr/>
+          <p:nvPr/>
+        </p:nvSpPr>
+        <p:spPr>
+          <a:xfrm>
+            <a:off x="8074152" y="4023360"/>
+            <a:ext cx="2825496" cy="1097280"/>
           </a:xfrm>
           <a:prstGeom prst="rect">
             <a:avLst/>
@@ -13140,7 +14266,7 @@
               <a:buNone/>
             </a:pPr>
             <a:r>
-              <a:rPr lang="en-US" sz="1250" dirty="0">
+              <a:rPr lang="en-US" sz="1550" dirty="0">
                 <a:solidFill>
                   <a:srgbClr val="17364A"/>
                 </a:solidFill>
@@ -13150,7 +14276,7 @@
               </a:rPr>
               <a:t>Connect the concept to public health decisions, safeguards, documentation, or implementation work.</a:t>
             </a:r>
-            <a:endParaRPr lang="en-US" sz="1250" dirty="0"/>
+            <a:endParaRPr lang="en-US" sz="1550" dirty="0"/>
           </a:p>
         </p:txBody>
       </p:sp>
@@ -13347,7 +14473,7 @@
                 <a:ea typeface="Aptos" pitchFamily="34" charset="-122"/>
                 <a:cs typeface="Aptos" pitchFamily="34" charset="-120"/>
               </a:rPr>
-              <a:t>© Paula Soper</a:t>
+              <a:t>Â© Paula Soper</a:t>
             </a:r>
             <a:endParaRPr lang="en-US" sz="800" dirty="0"/>
           </a:p>
@@ -13355,7 +14481,46 @@
       </p:sp>
       <p:sp>
         <p:nvSpPr>
-          <p:cNvPr id="7" name="Shape 5"/>
+          <p:cNvPr id="7" name="Text 5"/>
+          <p:cNvSpPr/>
+          <p:nvPr/>
+        </p:nvSpPr>
+        <p:spPr>
+          <a:xfrm>
+            <a:off x="11137392" y="6510528"/>
+            <a:ext cx="411480" cy="201168"/>
+          </a:xfrm>
+          <a:prstGeom prst="rect">
+            <a:avLst/>
+          </a:prstGeom>
+          <a:noFill/>
+          <a:ln/>
+        </p:spPr>
+        <p:txBody>
+          <a:bodyPr wrap="square" lIns="0" tIns="0" rIns="0" bIns="0" rtlCol="0" anchor="ctr"/>
+          <a:lstStyle/>
+          <a:p>
+            <a:pPr algn="r" indent="0" marL="0">
+              <a:buNone/>
+            </a:pPr>
+            <a:r>
+              <a:rPr lang="en-US" sz="900" dirty="0">
+                <a:solidFill>
+                  <a:srgbClr val="5F7181"/>
+                </a:solidFill>
+                <a:latin typeface="Aptos" pitchFamily="34" charset="0"/>
+                <a:ea typeface="Aptos" pitchFamily="34" charset="-122"/>
+                <a:cs typeface="Aptos" pitchFamily="34" charset="-120"/>
+              </a:rPr>
+              <a:t>8</a:t>
+            </a:r>
+            <a:endParaRPr lang="en-US" sz="900" dirty="0"/>
+          </a:p>
+        </p:txBody>
+      </p:sp>
+      <p:sp>
+        <p:nvSpPr>
+          <p:cNvPr id="8" name="Shape 6"/>
           <p:cNvSpPr/>
           <p:nvPr/>
         </p:nvSpPr>
@@ -13380,7 +14545,7 @@
       </p:sp>
       <p:sp>
         <p:nvSpPr>
-          <p:cNvPr id="8" name="Text 6"/>
+          <p:cNvPr id="9" name="Text 7"/>
           <p:cNvSpPr/>
           <p:nvPr/>
         </p:nvSpPr>
@@ -13419,14 +14584,14 @@
       </p:sp>
       <p:sp>
         <p:nvSpPr>
-          <p:cNvPr id="9" name="Text 7"/>
+          <p:cNvPr id="10" name="Text 8"/>
           <p:cNvSpPr/>
           <p:nvPr/>
         </p:nvSpPr>
         <p:spPr>
           <a:xfrm>
             <a:off x="640080" y="621792"/>
-            <a:ext cx="10881360" cy="566928"/>
+            <a:ext cx="10881360" cy="713232"/>
           </a:xfrm>
           <a:prstGeom prst="rect">
             <a:avLst/>
@@ -13444,7 +14609,7 @@
               <a:buNone/>
             </a:pPr>
             <a:r>
-              <a:rPr lang="en-US" sz="2700" b="1" dirty="0">
+              <a:rPr lang="en-US" sz="3400" b="1" dirty="0">
                 <a:solidFill>
                   <a:srgbClr val="003A63"/>
                 </a:solidFill>
@@ -13454,20 +14619,20 @@
               </a:rPr>
               <a:t>Why This Topic Matters for Public Health AI</a:t>
             </a:r>
-            <a:endParaRPr lang="en-US" sz="2700" dirty="0"/>
-          </a:p>
-        </p:txBody>
-      </p:sp>
-      <p:sp>
-        <p:nvSpPr>
-          <p:cNvPr id="10" name="Text 8"/>
-          <p:cNvSpPr/>
-          <p:nvPr/>
-        </p:nvSpPr>
-        <p:spPr>
-          <a:xfrm>
-            <a:off x="868680" y="1417320"/>
-            <a:ext cx="6675120" cy="4434840"/>
+            <a:endParaRPr lang="en-US" sz="3400" dirty="0"/>
+          </a:p>
+        </p:txBody>
+      </p:sp>
+      <p:sp>
+        <p:nvSpPr>
+          <p:cNvPr id="11" name="Text 9"/>
+          <p:cNvSpPr/>
+          <p:nvPr/>
+        </p:nvSpPr>
+        <p:spPr>
+          <a:xfrm>
+            <a:off x="868680" y="1508760"/>
+            <a:ext cx="6537960" cy="4160520"/>
           </a:xfrm>
           <a:prstGeom prst="rect">
             <a:avLst/>
@@ -13482,7 +14647,7 @@
           <a:lstStyle/>
           <a:p>
             <a:r>
-              <a:rPr lang="en-US" sz="1700" dirty="0">
+              <a:rPr lang="en-US" sz="2100" dirty="0">
                 <a:solidFill>
                   <a:srgbClr val="17364A"/>
                 </a:solidFill>
@@ -13492,11 +14657,11 @@
               </a:rPr>
               <a:t>Model outputs can influence urgent decisions.</a:t>
             </a:r>
-            <a:endParaRPr lang="en-US" sz="1700" dirty="0"/>
-          </a:p>
-          <a:p>
-            <a:r>
-              <a:rPr lang="en-US" sz="1700" dirty="0">
+            <a:endParaRPr lang="en-US" sz="2100" dirty="0"/>
+          </a:p>
+          <a:p>
+            <a:r>
+              <a:rPr lang="en-US" sz="2100" dirty="0">
                 <a:solidFill>
                   <a:srgbClr val="17364A"/>
                 </a:solidFill>
@@ -13504,13 +14669,13 @@
                 <a:ea typeface="Aptos" pitchFamily="34" charset="-122"/>
                 <a:cs typeface="Aptos" pitchFamily="34" charset="-120"/>
               </a:rPr>
-              <a:t>A forecast may affect staffing, a risk score may affect outreach, and a hotspot map may affect deployment of field teams.</a:t>
-            </a:r>
-            <a:endParaRPr lang="en-US" sz="1700" dirty="0"/>
-          </a:p>
-          <a:p>
-            <a:r>
-              <a:rPr lang="en-US" sz="1700" dirty="0">
+              <a:t>A forecast may affect staffing, a risk score may affect outreach, and a hotspot map may affect.</a:t>
+            </a:r>
+            <a:endParaRPr lang="en-US" sz="2100" dirty="0"/>
+          </a:p>
+          <a:p>
+            <a:r>
+              <a:rPr lang="en-US" sz="2100" dirty="0">
                 <a:solidFill>
                   <a:srgbClr val="17364A"/>
                 </a:solidFill>
@@ -13518,29 +14683,15 @@
                 <a:ea typeface="Aptos" pitchFamily="34" charset="-122"/>
                 <a:cs typeface="Aptos" pitchFamily="34" charset="-120"/>
               </a:rPr>
-              <a:t>If uncertainty is not explained clearly, decision-makers may treat estimates as facts or ignore important limitations.</a:t>
-            </a:r>
-            <a:endParaRPr lang="en-US" sz="1700" dirty="0"/>
-          </a:p>
-          <a:p>
-            <a:r>
-              <a:rPr lang="en-US" sz="1700" dirty="0">
-                <a:solidFill>
-                  <a:srgbClr val="17364A"/>
-                </a:solidFill>
-                <a:latin typeface="Aptos" pitchFamily="34" charset="0"/>
-                <a:ea typeface="Aptos" pitchFamily="34" charset="-122"/>
-                <a:cs typeface="Aptos" pitchFamily="34" charset="-120"/>
-              </a:rPr>
-              <a:t>Public health communication must balance clarity and caution.</a:t>
-            </a:r>
-            <a:endParaRPr lang="en-US" sz="1700" dirty="0"/>
-          </a:p>
-        </p:txBody>
-      </p:sp>
-      <p:sp>
-        <p:nvSpPr>
-          <p:cNvPr id="11" name="Shape 9"/>
+              <a:t>If uncertainty is not explained clearly, decision-makers may treat estimates as facts or ignore.</a:t>
+            </a:r>
+            <a:endParaRPr lang="en-US" sz="2100" dirty="0"/>
+          </a:p>
+        </p:txBody>
+      </p:sp>
+      <p:sp>
+        <p:nvSpPr>
+          <p:cNvPr id="12" name="Shape 10"/>
           <p:cNvSpPr/>
           <p:nvPr/>
         </p:nvSpPr>
@@ -13567,14 +14718,14 @@
       </p:sp>
       <p:sp>
         <p:nvSpPr>
-          <p:cNvPr id="12" name="Text 10"/>
+          <p:cNvPr id="13" name="Text 11"/>
           <p:cNvSpPr/>
           <p:nvPr/>
         </p:nvSpPr>
         <p:spPr>
           <a:xfrm>
             <a:off x="8074152" y="1563624"/>
-            <a:ext cx="2825496" cy="201168"/>
+            <a:ext cx="2825496" cy="256032"/>
           </a:xfrm>
           <a:prstGeom prst="rect">
             <a:avLst/>
@@ -13590,7 +14741,7 @@
               <a:buNone/>
             </a:pPr>
             <a:r>
-              <a:rPr lang="en-US" sz="950" b="1" dirty="0">
+              <a:rPr lang="en-US" sz="1300" b="1" dirty="0">
                 <a:solidFill>
                   <a:srgbClr val="0068B7"/>
                 </a:solidFill>
@@ -13600,20 +14751,20 @@
               </a:rPr>
               <a:t>Key idea</a:t>
             </a:r>
-            <a:endParaRPr lang="en-US" sz="950" dirty="0"/>
-          </a:p>
-        </p:txBody>
-      </p:sp>
-      <p:sp>
-        <p:nvSpPr>
-          <p:cNvPr id="13" name="Text 11"/>
-          <p:cNvSpPr/>
-          <p:nvPr/>
-        </p:nvSpPr>
-        <p:spPr>
-          <a:xfrm>
-            <a:off x="8074152" y="1856232"/>
-            <a:ext cx="2825496" cy="1261872"/>
+            <a:endParaRPr lang="en-US" sz="1300" dirty="0"/>
+          </a:p>
+        </p:txBody>
+      </p:sp>
+      <p:sp>
+        <p:nvSpPr>
+          <p:cNvPr id="14" name="Text 12"/>
+          <p:cNvSpPr/>
+          <p:nvPr/>
+        </p:nvSpPr>
+        <p:spPr>
+          <a:xfrm>
+            <a:off x="8074152" y="1920240"/>
+            <a:ext cx="2825496" cy="1188720"/>
           </a:xfrm>
           <a:prstGeom prst="rect">
             <a:avLst/>
@@ -13631,7 +14782,7 @@
               <a:buNone/>
             </a:pPr>
             <a:r>
-              <a:rPr lang="en-US" sz="1250" dirty="0">
+              <a:rPr lang="en-US" sz="1550" dirty="0">
                 <a:solidFill>
                   <a:srgbClr val="17364A"/>
                 </a:solidFill>
@@ -13641,13 +14792,13 @@
               </a:rPr>
               <a:t>Model outputs can influence urgent decisions.</a:t>
             </a:r>
-            <a:endParaRPr lang="en-US" sz="1250" dirty="0"/>
-          </a:p>
-        </p:txBody>
-      </p:sp>
-      <p:sp>
-        <p:nvSpPr>
-          <p:cNvPr id="14" name="Shape 12"/>
+            <a:endParaRPr lang="en-US" sz="1550" dirty="0"/>
+          </a:p>
+        </p:txBody>
+      </p:sp>
+      <p:sp>
+        <p:nvSpPr>
+          <p:cNvPr id="15" name="Shape 13"/>
           <p:cNvSpPr/>
           <p:nvPr/>
         </p:nvSpPr>
@@ -13674,14 +14825,14 @@
       </p:sp>
       <p:sp>
         <p:nvSpPr>
-          <p:cNvPr id="15" name="Text 13"/>
+          <p:cNvPr id="16" name="Text 14"/>
           <p:cNvSpPr/>
           <p:nvPr/>
         </p:nvSpPr>
         <p:spPr>
           <a:xfrm>
             <a:off x="8074152" y="3666744"/>
-            <a:ext cx="2825496" cy="201168"/>
+            <a:ext cx="2825496" cy="256032"/>
           </a:xfrm>
           <a:prstGeom prst="rect">
             <a:avLst/>
@@ -13697,7 +14848,7 @@
               <a:buNone/>
             </a:pPr>
             <a:r>
-              <a:rPr lang="en-US" sz="950" b="1" dirty="0">
+              <a:rPr lang="en-US" sz="1300" b="1" dirty="0">
                 <a:solidFill>
                   <a:srgbClr val="0068B7"/>
                 </a:solidFill>
@@ -13707,20 +14858,20 @@
               </a:rPr>
               <a:t>Use this for</a:t>
             </a:r>
-            <a:endParaRPr lang="en-US" sz="950" dirty="0"/>
-          </a:p>
-        </p:txBody>
-      </p:sp>
-      <p:sp>
-        <p:nvSpPr>
-          <p:cNvPr id="16" name="Text 14"/>
-          <p:cNvSpPr/>
-          <p:nvPr/>
-        </p:nvSpPr>
-        <p:spPr>
-          <a:xfrm>
-            <a:off x="8074152" y="3959352"/>
-            <a:ext cx="2825496" cy="1170432"/>
+            <a:endParaRPr lang="en-US" sz="1300" dirty="0"/>
+          </a:p>
+        </p:txBody>
+      </p:sp>
+      <p:sp>
+        <p:nvSpPr>
+          <p:cNvPr id="17" name="Text 15"/>
+          <p:cNvSpPr/>
+          <p:nvPr/>
+        </p:nvSpPr>
+        <p:spPr>
+          <a:xfrm>
+            <a:off x="8074152" y="4023360"/>
+            <a:ext cx="2825496" cy="1097280"/>
           </a:xfrm>
           <a:prstGeom prst="rect">
             <a:avLst/>
@@ -13738,7 +14889,7 @@
               <a:buNone/>
             </a:pPr>
             <a:r>
-              <a:rPr lang="en-US" sz="1250" dirty="0">
+              <a:rPr lang="en-US" sz="1550" dirty="0">
                 <a:solidFill>
                   <a:srgbClr val="17364A"/>
                 </a:solidFill>
@@ -13748,7 +14899,7 @@
               </a:rPr>
               <a:t>Connect the concept to public health decisions, safeguards, documentation, or implementation work.</a:t>
             </a:r>
-            <a:endParaRPr lang="en-US" sz="1250" dirty="0"/>
+            <a:endParaRPr lang="en-US" sz="1550" dirty="0"/>
           </a:p>
         </p:txBody>
       </p:sp>
@@ -13945,7 +15096,7 @@
                 <a:ea typeface="Aptos" pitchFamily="34" charset="-122"/>
                 <a:cs typeface="Aptos" pitchFamily="34" charset="-120"/>
               </a:rPr>
-              <a:t>© Paula Soper</a:t>
+              <a:t>Â© Paula Soper</a:t>
             </a:r>
             <a:endParaRPr lang="en-US" sz="800" dirty="0"/>
           </a:p>
@@ -13953,7 +15104,46 @@
       </p:sp>
       <p:sp>
         <p:nvSpPr>
-          <p:cNvPr id="7" name="Shape 5"/>
+          <p:cNvPr id="7" name="Text 5"/>
+          <p:cNvSpPr/>
+          <p:nvPr/>
+        </p:nvSpPr>
+        <p:spPr>
+          <a:xfrm>
+            <a:off x="11137392" y="6510528"/>
+            <a:ext cx="411480" cy="201168"/>
+          </a:xfrm>
+          <a:prstGeom prst="rect">
+            <a:avLst/>
+          </a:prstGeom>
+          <a:noFill/>
+          <a:ln/>
+        </p:spPr>
+        <p:txBody>
+          <a:bodyPr wrap="square" lIns="0" tIns="0" rIns="0" bIns="0" rtlCol="0" anchor="ctr"/>
+          <a:lstStyle/>
+          <a:p>
+            <a:pPr algn="r" indent="0" marL="0">
+              <a:buNone/>
+            </a:pPr>
+            <a:r>
+              <a:rPr lang="en-US" sz="900" dirty="0">
+                <a:solidFill>
+                  <a:srgbClr val="5F7181"/>
+                </a:solidFill>
+                <a:latin typeface="Aptos" pitchFamily="34" charset="0"/>
+                <a:ea typeface="Aptos" pitchFamily="34" charset="-122"/>
+                <a:cs typeface="Aptos" pitchFamily="34" charset="-120"/>
+              </a:rPr>
+              <a:t>9</a:t>
+            </a:r>
+            <a:endParaRPr lang="en-US" sz="900" dirty="0"/>
+          </a:p>
+        </p:txBody>
+      </p:sp>
+      <p:sp>
+        <p:nvSpPr>
+          <p:cNvPr id="8" name="Shape 6"/>
           <p:cNvSpPr/>
           <p:nvPr/>
         </p:nvSpPr>
@@ -13978,7 +15168,7 @@
       </p:sp>
       <p:sp>
         <p:nvSpPr>
-          <p:cNvPr id="8" name="Text 6"/>
+          <p:cNvPr id="9" name="Text 7"/>
           <p:cNvSpPr/>
           <p:nvPr/>
         </p:nvSpPr>
@@ -14017,14 +15207,14 @@
       </p:sp>
       <p:sp>
         <p:nvSpPr>
-          <p:cNvPr id="9" name="Text 7"/>
+          <p:cNvPr id="10" name="Text 8"/>
           <p:cNvSpPr/>
           <p:nvPr/>
         </p:nvSpPr>
         <p:spPr>
           <a:xfrm>
             <a:off x="640080" y="621792"/>
-            <a:ext cx="10881360" cy="566928"/>
+            <a:ext cx="10881360" cy="713232"/>
           </a:xfrm>
           <a:prstGeom prst="rect">
             <a:avLst/>
@@ -14042,7 +15232,7 @@
               <a:buNone/>
             </a:pPr>
             <a:r>
-              <a:rPr lang="en-US" sz="2700" b="1" dirty="0">
+              <a:rPr lang="en-US" sz="3400" b="1" dirty="0">
                 <a:solidFill>
                   <a:srgbClr val="003A63"/>
                 </a:solidFill>
@@ -14052,20 +15242,20 @@
               </a:rPr>
               <a:t>Public Health Example</a:t>
             </a:r>
-            <a:endParaRPr lang="en-US" sz="2700" dirty="0"/>
-          </a:p>
-        </p:txBody>
-      </p:sp>
-      <p:sp>
-        <p:nvSpPr>
-          <p:cNvPr id="10" name="Text 8"/>
-          <p:cNvSpPr/>
-          <p:nvPr/>
-        </p:nvSpPr>
-        <p:spPr>
-          <a:xfrm>
-            <a:off x="868680" y="1417320"/>
-            <a:ext cx="6675120" cy="4434840"/>
+            <a:endParaRPr lang="en-US" sz="3400" dirty="0"/>
+          </a:p>
+        </p:txBody>
+      </p:sp>
+      <p:sp>
+        <p:nvSpPr>
+          <p:cNvPr id="11" name="Text 9"/>
+          <p:cNvSpPr/>
+          <p:nvPr/>
+        </p:nvSpPr>
+        <p:spPr>
+          <a:xfrm>
+            <a:off x="868680" y="1508760"/>
+            <a:ext cx="6537960" cy="4160520"/>
           </a:xfrm>
           <a:prstGeom prst="rect">
             <a:avLst/>
@@ -14080,7 +15270,7 @@
           <a:lstStyle/>
           <a:p>
             <a:r>
-              <a:rPr lang="en-US" sz="1700" dirty="0">
+              <a:rPr lang="en-US" sz="2100" dirty="0">
                 <a:solidFill>
                   <a:srgbClr val="17364A"/>
                 </a:solidFill>
@@ -14088,13 +15278,13 @@
                 <a:ea typeface="Aptos" pitchFamily="34" charset="-122"/>
                 <a:cs typeface="Aptos" pitchFamily="34" charset="-120"/>
               </a:rPr>
-              <a:t>An epidemiology team uses a time-series model to forecast emergency department visits for respiratory illness.</a:t>
-            </a:r>
-            <a:endParaRPr lang="en-US" sz="1700" dirty="0"/>
-          </a:p>
-          <a:p>
-            <a:r>
-              <a:rPr lang="en-US" sz="1700" dirty="0">
+              <a:t>An epidemiology team uses a time-series model to forecast emergency department visits for respiratory.</a:t>
+            </a:r>
+            <a:endParaRPr lang="en-US" sz="2100" dirty="0"/>
+          </a:p>
+          <a:p>
+            <a:r>
+              <a:rPr lang="en-US" sz="2100" dirty="0">
                 <a:solidFill>
                   <a:srgbClr val="17364A"/>
                 </a:solidFill>
@@ -14102,13 +15292,13 @@
                 <a:ea typeface="Aptos" pitchFamily="34" charset="-122"/>
                 <a:cs typeface="Aptos" pitchFamily="34" charset="-120"/>
               </a:rPr>
-              <a:t>The forecast shows a possible increase over the next two weeks, but the prediction interval is wide because reporting.</a:t>
-            </a:r>
-            <a:endParaRPr lang="en-US" sz="1700" dirty="0"/>
-          </a:p>
-          <a:p>
-            <a:r>
-              <a:rPr lang="en-US" sz="1700" dirty="0">
+              <a:t>The forecast shows a possible increase over the next two weeks, but the prediction interval is wide.</a:t>
+            </a:r>
+            <a:endParaRPr lang="en-US" sz="2100" dirty="0"/>
+          </a:p>
+          <a:p>
+            <a:r>
+              <a:rPr lang="en-US" sz="2100" dirty="0">
                 <a:solidFill>
                   <a:srgbClr val="17364A"/>
                 </a:solidFill>
@@ -14116,29 +15306,15 @@
                 <a:ea typeface="Aptos" pitchFamily="34" charset="-122"/>
                 <a:cs typeface="Aptos" pitchFamily="34" charset="-120"/>
               </a:rPr>
-              <a:t>A strong communication brief would state that visits may rise, explain the uncertainty, identify possible reasons for.</a:t>
-            </a:r>
-            <a:endParaRPr lang="en-US" sz="1700" dirty="0"/>
-          </a:p>
-          <a:p>
-            <a:r>
-              <a:rPr lang="en-US" sz="1700" dirty="0">
-                <a:solidFill>
-                  <a:srgbClr val="17364A"/>
-                </a:solidFill>
-                <a:latin typeface="Aptos" pitchFamily="34" charset="0"/>
-                <a:ea typeface="Aptos" pitchFamily="34" charset="-122"/>
-                <a:cs typeface="Aptos" pitchFamily="34" charset="-120"/>
-              </a:rPr>
-              <a:t>The brief should not say that the model proves an outbreak is occurring.</a:t>
-            </a:r>
-            <a:endParaRPr lang="en-US" sz="1700" dirty="0"/>
-          </a:p>
-        </p:txBody>
-      </p:sp>
-      <p:sp>
-        <p:nvSpPr>
-          <p:cNvPr id="11" name="Shape 9"/>
+              <a:t>A strong communication brief would state that visits may rise, explain the uncertainty, identify.</a:t>
+            </a:r>
+            <a:endParaRPr lang="en-US" sz="2100" dirty="0"/>
+          </a:p>
+        </p:txBody>
+      </p:sp>
+      <p:sp>
+        <p:nvSpPr>
+          <p:cNvPr id="12" name="Shape 10"/>
           <p:cNvSpPr/>
           <p:nvPr/>
         </p:nvSpPr>
@@ -14165,14 +15341,14 @@
       </p:sp>
       <p:sp>
         <p:nvSpPr>
-          <p:cNvPr id="12" name="Text 10"/>
+          <p:cNvPr id="13" name="Text 11"/>
           <p:cNvSpPr/>
           <p:nvPr/>
         </p:nvSpPr>
         <p:spPr>
           <a:xfrm>
             <a:off x="8074152" y="1563624"/>
-            <a:ext cx="2825496" cy="201168"/>
+            <a:ext cx="2825496" cy="256032"/>
           </a:xfrm>
           <a:prstGeom prst="rect">
             <a:avLst/>
@@ -14188,7 +15364,7 @@
               <a:buNone/>
             </a:pPr>
             <a:r>
-              <a:rPr lang="en-US" sz="950" b="1" dirty="0">
+              <a:rPr lang="en-US" sz="1300" b="1" dirty="0">
                 <a:solidFill>
                   <a:srgbClr val="0068B7"/>
                 </a:solidFill>
@@ -14198,20 +15374,20 @@
               </a:rPr>
               <a:t>Key idea</a:t>
             </a:r>
-            <a:endParaRPr lang="en-US" sz="950" dirty="0"/>
-          </a:p>
-        </p:txBody>
-      </p:sp>
-      <p:sp>
-        <p:nvSpPr>
-          <p:cNvPr id="13" name="Text 11"/>
-          <p:cNvSpPr/>
-          <p:nvPr/>
-        </p:nvSpPr>
-        <p:spPr>
-          <a:xfrm>
-            <a:off x="8074152" y="1856232"/>
-            <a:ext cx="2825496" cy="1261872"/>
+            <a:endParaRPr lang="en-US" sz="1300" dirty="0"/>
+          </a:p>
+        </p:txBody>
+      </p:sp>
+      <p:sp>
+        <p:nvSpPr>
+          <p:cNvPr id="14" name="Text 12"/>
+          <p:cNvSpPr/>
+          <p:nvPr/>
+        </p:nvSpPr>
+        <p:spPr>
+          <a:xfrm>
+            <a:off x="8074152" y="1920240"/>
+            <a:ext cx="2825496" cy="1188720"/>
           </a:xfrm>
           <a:prstGeom prst="rect">
             <a:avLst/>
@@ -14229,7 +15405,7 @@
               <a:buNone/>
             </a:pPr>
             <a:r>
-              <a:rPr lang="en-US" sz="1250" dirty="0">
+              <a:rPr lang="en-US" sz="1550" dirty="0">
                 <a:solidFill>
                   <a:srgbClr val="17364A"/>
                 </a:solidFill>
@@ -14237,15 +15413,15 @@
                 <a:ea typeface="Aptos" pitchFamily="34" charset="-122"/>
                 <a:cs typeface="Aptos" pitchFamily="34" charset="-120"/>
               </a:rPr>
-              <a:t>An epidemiology team uses a time-series model to forecast emergency department visits for respiratory illness.</a:t>
-            </a:r>
-            <a:endParaRPr lang="en-US" sz="1250" dirty="0"/>
-          </a:p>
-        </p:txBody>
-      </p:sp>
-      <p:sp>
-        <p:nvSpPr>
-          <p:cNvPr id="14" name="Shape 12"/>
+              <a:t>An epidemiology team uses a time-series model to forecast emergency department visits for respiratory.</a:t>
+            </a:r>
+            <a:endParaRPr lang="en-US" sz="1550" dirty="0"/>
+          </a:p>
+        </p:txBody>
+      </p:sp>
+      <p:sp>
+        <p:nvSpPr>
+          <p:cNvPr id="15" name="Shape 13"/>
           <p:cNvSpPr/>
           <p:nvPr/>
         </p:nvSpPr>
@@ -14272,14 +15448,14 @@
       </p:sp>
       <p:sp>
         <p:nvSpPr>
-          <p:cNvPr id="15" name="Text 13"/>
+          <p:cNvPr id="16" name="Text 14"/>
           <p:cNvSpPr/>
           <p:nvPr/>
         </p:nvSpPr>
         <p:spPr>
           <a:xfrm>
             <a:off x="8074152" y="3666744"/>
-            <a:ext cx="2825496" cy="201168"/>
+            <a:ext cx="2825496" cy="256032"/>
           </a:xfrm>
           <a:prstGeom prst="rect">
             <a:avLst/>
@@ -14295,7 +15471,7 @@
               <a:buNone/>
             </a:pPr>
             <a:r>
-              <a:rPr lang="en-US" sz="950" b="1" dirty="0">
+              <a:rPr lang="en-US" sz="1300" b="1" dirty="0">
                 <a:solidFill>
                   <a:srgbClr val="0068B7"/>
                 </a:solidFill>
@@ -14305,20 +15481,20 @@
               </a:rPr>
               <a:t>Use this for</a:t>
             </a:r>
-            <a:endParaRPr lang="en-US" sz="950" dirty="0"/>
-          </a:p>
-        </p:txBody>
-      </p:sp>
-      <p:sp>
-        <p:nvSpPr>
-          <p:cNvPr id="16" name="Text 14"/>
-          <p:cNvSpPr/>
-          <p:nvPr/>
-        </p:nvSpPr>
-        <p:spPr>
-          <a:xfrm>
-            <a:off x="8074152" y="3959352"/>
-            <a:ext cx="2825496" cy="1170432"/>
+            <a:endParaRPr lang="en-US" sz="1300" dirty="0"/>
+          </a:p>
+        </p:txBody>
+      </p:sp>
+      <p:sp>
+        <p:nvSpPr>
+          <p:cNvPr id="17" name="Text 15"/>
+          <p:cNvSpPr/>
+          <p:nvPr/>
+        </p:nvSpPr>
+        <p:spPr>
+          <a:xfrm>
+            <a:off x="8074152" y="4023360"/>
+            <a:ext cx="2825496" cy="1097280"/>
           </a:xfrm>
           <a:prstGeom prst="rect">
             <a:avLst/>
@@ -14336,7 +15512,7 @@
               <a:buNone/>
             </a:pPr>
             <a:r>
-              <a:rPr lang="en-US" sz="1250" dirty="0">
+              <a:rPr lang="en-US" sz="1550" dirty="0">
                 <a:solidFill>
                   <a:srgbClr val="17364A"/>
                 </a:solidFill>
@@ -14346,7 +15522,7 @@
               </a:rPr>
               <a:t>Connect the concept to public health decisions, safeguards, documentation, or implementation work.</a:t>
             </a:r>
-            <a:endParaRPr lang="en-US" sz="1250" dirty="0"/>
+            <a:endParaRPr lang="en-US" sz="1550" dirty="0"/>
           </a:p>
         </p:txBody>
       </p:sp>
